--- a/Конвентатор валют.pptx
+++ b/Конвентатор валют.pptx
@@ -114,6 +114,11 @@
       </a:defRPr>
     </a:lvl9pPr>
   </p:defaultTextStyle>
+  <p:extLst>
+    <p:ext uri="{EFAFB233-063F-42B5-8137-9DF3F51BA10A}">
+      <p15:sldGuideLst xmlns:p15="http://schemas.microsoft.com/office/powerpoint/2012/main"/>
+    </p:ext>
+  </p:extLst>
 </p:presentation>
 </file>
 
@@ -167,7 +172,7 @@
           <a:noFill/>
           <a:extLst>
             <a:ext uri="{909E8E84-426E-40dd-AFC4-6F175D3DCCD1}">
-              <a14:hiddenFill xmlns:a14="http://schemas.microsoft.com/office/drawing/2010/main" xmlns="">
+              <a14:hiddenFill xmlns="" xmlns:a14="http://schemas.microsoft.com/office/drawing/2010/main">
                 <a:solidFill>
                   <a:srgbClr val="FFFFFF"/>
                 </a:solidFill>
@@ -227,7 +232,7 @@
             </a:ln>
             <a:extLst>
               <a:ext uri="{91240B29-F687-4f45-9708-019B960494DF}">
-                <a14:hiddenLine xmlns:a14="http://schemas.microsoft.com/office/drawing/2010/main" xmlns="" w="9525">
+                <a14:hiddenLine xmlns="" xmlns:a14="http://schemas.microsoft.com/office/drawing/2010/main" w="9525">
                   <a:solidFill>
                     <a:srgbClr val="000000"/>
                   </a:solidFill>
@@ -317,7 +322,7 @@
             </a:ln>
             <a:extLst>
               <a:ext uri="{91240B29-F687-4f45-9708-019B960494DF}">
-                <a14:hiddenLine xmlns:a14="http://schemas.microsoft.com/office/drawing/2010/main" xmlns="" w="9525">
+                <a14:hiddenLine xmlns="" xmlns:a14="http://schemas.microsoft.com/office/drawing/2010/main" w="9525">
                   <a:solidFill>
                     <a:srgbClr val="000000"/>
                   </a:solidFill>
@@ -407,7 +412,7 @@
             </a:ln>
             <a:extLst>
               <a:ext uri="{91240B29-F687-4f45-9708-019B960494DF}">
-                <a14:hiddenLine xmlns:a14="http://schemas.microsoft.com/office/drawing/2010/main" xmlns="" w="9525">
+                <a14:hiddenLine xmlns="" xmlns:a14="http://schemas.microsoft.com/office/drawing/2010/main" w="9525">
                   <a:solidFill>
                     <a:srgbClr val="000000"/>
                   </a:solidFill>
@@ -441,7 +446,7 @@
             </a:ln>
             <a:extLst>
               <a:ext uri="{91240B29-F687-4f45-9708-019B960494DF}">
-                <a14:hiddenLine xmlns:a14="http://schemas.microsoft.com/office/drawing/2010/main" xmlns="" w="9525">
+                <a14:hiddenLine xmlns="" xmlns:a14="http://schemas.microsoft.com/office/drawing/2010/main" w="9525">
                   <a:solidFill>
                     <a:srgbClr val="000000"/>
                   </a:solidFill>
@@ -531,7 +536,7 @@
             </a:ln>
             <a:extLst>
               <a:ext uri="{91240B29-F687-4f45-9708-019B960494DF}">
-                <a14:hiddenLine xmlns:a14="http://schemas.microsoft.com/office/drawing/2010/main" xmlns="" w="9525">
+                <a14:hiddenLine xmlns="" xmlns:a14="http://schemas.microsoft.com/office/drawing/2010/main" w="9525">
                   <a:solidFill>
                     <a:srgbClr val="000000"/>
                   </a:solidFill>
@@ -593,7 +598,7 @@
             </a:ln>
             <a:extLst>
               <a:ext uri="{91240B29-F687-4f45-9708-019B960494DF}">
-                <a14:hiddenLine xmlns:a14="http://schemas.microsoft.com/office/drawing/2010/main" xmlns="" w="9525">
+                <a14:hiddenLine xmlns="" xmlns:a14="http://schemas.microsoft.com/office/drawing/2010/main" w="9525">
                   <a:solidFill>
                     <a:srgbClr val="000000"/>
                   </a:solidFill>
@@ -655,7 +660,7 @@
             </a:ln>
             <a:extLst>
               <a:ext uri="{91240B29-F687-4f45-9708-019B960494DF}">
-                <a14:hiddenLine xmlns:a14="http://schemas.microsoft.com/office/drawing/2010/main" xmlns="" w="9525">
+                <a14:hiddenLine xmlns="" xmlns:a14="http://schemas.microsoft.com/office/drawing/2010/main" w="9525">
                   <a:solidFill>
                     <a:srgbClr val="000000"/>
                   </a:solidFill>
@@ -745,7 +750,7 @@
             </a:ln>
             <a:extLst>
               <a:ext uri="{91240B29-F687-4f45-9708-019B960494DF}">
-                <a14:hiddenLine xmlns:a14="http://schemas.microsoft.com/office/drawing/2010/main" xmlns="" w="9525">
+                <a14:hiddenLine xmlns="" xmlns:a14="http://schemas.microsoft.com/office/drawing/2010/main" w="9525">
                   <a:solidFill>
                     <a:srgbClr val="000000"/>
                   </a:solidFill>
@@ -807,7 +812,7 @@
             </a:ln>
             <a:extLst>
               <a:ext uri="{91240B29-F687-4f45-9708-019B960494DF}">
-                <a14:hiddenLine xmlns:a14="http://schemas.microsoft.com/office/drawing/2010/main" xmlns="" w="9525">
+                <a14:hiddenLine xmlns="" xmlns:a14="http://schemas.microsoft.com/office/drawing/2010/main" w="9525">
                   <a:solidFill>
                     <a:srgbClr val="000000"/>
                   </a:solidFill>
@@ -869,7 +874,7 @@
             </a:ln>
             <a:extLst>
               <a:ext uri="{91240B29-F687-4f45-9708-019B960494DF}">
-                <a14:hiddenLine xmlns:a14="http://schemas.microsoft.com/office/drawing/2010/main" xmlns="" w="9525">
+                <a14:hiddenLine xmlns="" xmlns:a14="http://schemas.microsoft.com/office/drawing/2010/main" w="9525">
                   <a:solidFill>
                     <a:srgbClr val="000000"/>
                   </a:solidFill>
@@ -959,7 +964,7 @@
             </a:ln>
             <a:extLst>
               <a:ext uri="{91240B29-F687-4f45-9708-019B960494DF}">
-                <a14:hiddenLine xmlns:a14="http://schemas.microsoft.com/office/drawing/2010/main" xmlns="" w="9525">
+                <a14:hiddenLine xmlns="" xmlns:a14="http://schemas.microsoft.com/office/drawing/2010/main" w="9525">
                   <a:solidFill>
                     <a:srgbClr val="000000"/>
                   </a:solidFill>
@@ -1049,7 +1054,7 @@
             </a:ln>
             <a:extLst>
               <a:ext uri="{91240B29-F687-4f45-9708-019B960494DF}">
-                <a14:hiddenLine xmlns:a14="http://schemas.microsoft.com/office/drawing/2010/main" xmlns="" w="9525">
+                <a14:hiddenLine xmlns="" xmlns:a14="http://schemas.microsoft.com/office/drawing/2010/main" w="9525">
                   <a:solidFill>
                     <a:srgbClr val="000000"/>
                   </a:solidFill>
@@ -1111,7 +1116,7 @@
             </a:ln>
             <a:extLst>
               <a:ext uri="{91240B29-F687-4f45-9708-019B960494DF}">
-                <a14:hiddenLine xmlns:a14="http://schemas.microsoft.com/office/drawing/2010/main" xmlns="" w="9525">
+                <a14:hiddenLine xmlns="" xmlns:a14="http://schemas.microsoft.com/office/drawing/2010/main" w="9525">
                   <a:solidFill>
                     <a:srgbClr val="000000"/>
                   </a:solidFill>
@@ -1221,7 +1226,7 @@
             </a:ln>
             <a:extLst>
               <a:ext uri="{91240B29-F687-4f45-9708-019B960494DF}">
-                <a14:hiddenLine xmlns:a14="http://schemas.microsoft.com/office/drawing/2010/main" xmlns="" w="9525">
+                <a14:hiddenLine xmlns="" xmlns:a14="http://schemas.microsoft.com/office/drawing/2010/main" w="9525">
                   <a:solidFill>
                     <a:srgbClr val="000000"/>
                   </a:solidFill>
@@ -1283,7 +1288,7 @@
             </a:ln>
             <a:extLst>
               <a:ext uri="{91240B29-F687-4f45-9708-019B960494DF}">
-                <a14:hiddenLine xmlns:a14="http://schemas.microsoft.com/office/drawing/2010/main" xmlns="" w="9525">
+                <a14:hiddenLine xmlns="" xmlns:a14="http://schemas.microsoft.com/office/drawing/2010/main" w="9525">
                   <a:solidFill>
                     <a:srgbClr val="000000"/>
                   </a:solidFill>
@@ -1373,7 +1378,7 @@
             </a:ln>
             <a:extLst>
               <a:ext uri="{91240B29-F687-4f45-9708-019B960494DF}">
-                <a14:hiddenLine xmlns:a14="http://schemas.microsoft.com/office/drawing/2010/main" xmlns="" w="9525">
+                <a14:hiddenLine xmlns="" xmlns:a14="http://schemas.microsoft.com/office/drawing/2010/main" w="9525">
                   <a:solidFill>
                     <a:srgbClr val="000000"/>
                   </a:solidFill>
@@ -1463,7 +1468,7 @@
             </a:ln>
             <a:extLst>
               <a:ext uri="{91240B29-F687-4f45-9708-019B960494DF}">
-                <a14:hiddenLine xmlns:a14="http://schemas.microsoft.com/office/drawing/2010/main" xmlns="" w="9525">
+                <a14:hiddenLine xmlns="" xmlns:a14="http://schemas.microsoft.com/office/drawing/2010/main" w="9525">
                   <a:solidFill>
                     <a:srgbClr val="000000"/>
                   </a:solidFill>
@@ -1525,7 +1530,7 @@
             </a:ln>
             <a:extLst>
               <a:ext uri="{91240B29-F687-4f45-9708-019B960494DF}">
-                <a14:hiddenLine xmlns:a14="http://schemas.microsoft.com/office/drawing/2010/main" xmlns="" w="9525">
+                <a14:hiddenLine xmlns="" xmlns:a14="http://schemas.microsoft.com/office/drawing/2010/main" w="9525">
                   <a:solidFill>
                     <a:srgbClr val="000000"/>
                   </a:solidFill>
@@ -1615,7 +1620,7 @@
             </a:ln>
             <a:extLst>
               <a:ext uri="{91240B29-F687-4f45-9708-019B960494DF}">
-                <a14:hiddenLine xmlns:a14="http://schemas.microsoft.com/office/drawing/2010/main" xmlns="" w="9525">
+                <a14:hiddenLine xmlns="" xmlns:a14="http://schemas.microsoft.com/office/drawing/2010/main" w="9525">
                   <a:solidFill>
                     <a:srgbClr val="000000"/>
                   </a:solidFill>
@@ -1705,7 +1710,7 @@
             </a:ln>
             <a:extLst>
               <a:ext uri="{91240B29-F687-4f45-9708-019B960494DF}">
-                <a14:hiddenLine xmlns:a14="http://schemas.microsoft.com/office/drawing/2010/main" xmlns="" w="9525">
+                <a14:hiddenLine xmlns="" xmlns:a14="http://schemas.microsoft.com/office/drawing/2010/main" w="9525">
                   <a:solidFill>
                     <a:srgbClr val="000000"/>
                   </a:solidFill>
@@ -1761,7 +1766,7 @@
             </a:ln>
             <a:extLst>
               <a:ext uri="{91240B29-F687-4f45-9708-019B960494DF}">
-                <a14:hiddenLine xmlns:a14="http://schemas.microsoft.com/office/drawing/2010/main" xmlns="" w="9525">
+                <a14:hiddenLine xmlns="" xmlns:a14="http://schemas.microsoft.com/office/drawing/2010/main" w="9525">
                   <a:solidFill>
                     <a:srgbClr val="000000"/>
                   </a:solidFill>
@@ -1851,7 +1856,7 @@
             </a:ln>
             <a:extLst>
               <a:ext uri="{91240B29-F687-4f45-9708-019B960494DF}">
-                <a14:hiddenLine xmlns:a14="http://schemas.microsoft.com/office/drawing/2010/main" xmlns="" w="9525">
+                <a14:hiddenLine xmlns="" xmlns:a14="http://schemas.microsoft.com/office/drawing/2010/main" w="9525">
                   <a:solidFill>
                     <a:srgbClr val="000000"/>
                   </a:solidFill>
@@ -1907,7 +1912,7 @@
             </a:ln>
             <a:extLst>
               <a:ext uri="{91240B29-F687-4f45-9708-019B960494DF}">
-                <a14:hiddenLine xmlns:a14="http://schemas.microsoft.com/office/drawing/2010/main" xmlns="" w="9525">
+                <a14:hiddenLine xmlns="" xmlns:a14="http://schemas.microsoft.com/office/drawing/2010/main" w="9525">
                   <a:solidFill>
                     <a:srgbClr val="000000"/>
                   </a:solidFill>
@@ -1997,7 +2002,7 @@
             </a:ln>
             <a:extLst>
               <a:ext uri="{91240B29-F687-4f45-9708-019B960494DF}">
-                <a14:hiddenLine xmlns:a14="http://schemas.microsoft.com/office/drawing/2010/main" xmlns="" w="9525">
+                <a14:hiddenLine xmlns="" xmlns:a14="http://schemas.microsoft.com/office/drawing/2010/main" w="9525">
                   <a:solidFill>
                     <a:srgbClr val="000000"/>
                   </a:solidFill>
@@ -2065,7 +2070,7 @@
             </a:ln>
             <a:extLst>
               <a:ext uri="{91240B29-F687-4f45-9708-019B960494DF}">
-                <a14:hiddenLine xmlns:a14="http://schemas.microsoft.com/office/drawing/2010/main" xmlns="" w="9525">
+                <a14:hiddenLine xmlns="" xmlns:a14="http://schemas.microsoft.com/office/drawing/2010/main" w="9525">
                   <a:solidFill>
                     <a:srgbClr val="000000"/>
                   </a:solidFill>
@@ -2155,7 +2160,7 @@
             </a:ln>
             <a:extLst>
               <a:ext uri="{91240B29-F687-4f45-9708-019B960494DF}">
-                <a14:hiddenLine xmlns:a14="http://schemas.microsoft.com/office/drawing/2010/main" xmlns="" w="9525">
+                <a14:hiddenLine xmlns="" xmlns:a14="http://schemas.microsoft.com/office/drawing/2010/main" w="9525">
                   <a:solidFill>
                     <a:srgbClr val="000000"/>
                   </a:solidFill>
@@ -2223,7 +2228,7 @@
             </a:ln>
             <a:extLst>
               <a:ext uri="{91240B29-F687-4f45-9708-019B960494DF}">
-                <a14:hiddenLine xmlns:a14="http://schemas.microsoft.com/office/drawing/2010/main" xmlns="" w="9525">
+                <a14:hiddenLine xmlns="" xmlns:a14="http://schemas.microsoft.com/office/drawing/2010/main" w="9525">
                   <a:solidFill>
                     <a:srgbClr val="000000"/>
                   </a:solidFill>
@@ -2313,7 +2318,7 @@
             </a:ln>
             <a:extLst>
               <a:ext uri="{91240B29-F687-4f45-9708-019B960494DF}">
-                <a14:hiddenLine xmlns:a14="http://schemas.microsoft.com/office/drawing/2010/main" xmlns="" w="9525">
+                <a14:hiddenLine xmlns="" xmlns:a14="http://schemas.microsoft.com/office/drawing/2010/main" w="9525">
                   <a:solidFill>
                     <a:srgbClr val="000000"/>
                   </a:solidFill>
@@ -2347,7 +2352,7 @@
             </a:ln>
             <a:extLst>
               <a:ext uri="{91240B29-F687-4f45-9708-019B960494DF}">
-                <a14:hiddenLine xmlns:a14="http://schemas.microsoft.com/office/drawing/2010/main" xmlns="" w="9525">
+                <a14:hiddenLine xmlns="" xmlns:a14="http://schemas.microsoft.com/office/drawing/2010/main" w="9525">
                   <a:solidFill>
                     <a:srgbClr val="000000"/>
                   </a:solidFill>
@@ -2437,7 +2442,7 @@
             </a:ln>
             <a:extLst>
               <a:ext uri="{91240B29-F687-4f45-9708-019B960494DF}">
-                <a14:hiddenLine xmlns:a14="http://schemas.microsoft.com/office/drawing/2010/main" xmlns="" w="9525">
+                <a14:hiddenLine xmlns="" xmlns:a14="http://schemas.microsoft.com/office/drawing/2010/main" w="9525">
                   <a:solidFill>
                     <a:srgbClr val="000000"/>
                   </a:solidFill>
@@ -2499,7 +2504,7 @@
             </a:ln>
             <a:extLst>
               <a:ext uri="{91240B29-F687-4f45-9708-019B960494DF}">
-                <a14:hiddenLine xmlns:a14="http://schemas.microsoft.com/office/drawing/2010/main" xmlns="" w="9525">
+                <a14:hiddenLine xmlns="" xmlns:a14="http://schemas.microsoft.com/office/drawing/2010/main" w="9525">
                   <a:solidFill>
                     <a:srgbClr val="000000"/>
                   </a:solidFill>
@@ -2561,7 +2566,7 @@
             </a:ln>
             <a:extLst>
               <a:ext uri="{91240B29-F687-4f45-9708-019B960494DF}">
-                <a14:hiddenLine xmlns:a14="http://schemas.microsoft.com/office/drawing/2010/main" xmlns="" w="9525">
+                <a14:hiddenLine xmlns="" xmlns:a14="http://schemas.microsoft.com/office/drawing/2010/main" w="9525">
                   <a:solidFill>
                     <a:srgbClr val="000000"/>
                   </a:solidFill>
@@ -2651,7 +2656,7 @@
             </a:ln>
             <a:extLst>
               <a:ext uri="{91240B29-F687-4f45-9708-019B960494DF}">
-                <a14:hiddenLine xmlns:a14="http://schemas.microsoft.com/office/drawing/2010/main" xmlns="" w="9525">
+                <a14:hiddenLine xmlns="" xmlns:a14="http://schemas.microsoft.com/office/drawing/2010/main" w="9525">
                   <a:solidFill>
                     <a:srgbClr val="000000"/>
                   </a:solidFill>
@@ -2719,7 +2724,7 @@
             </a:ln>
             <a:extLst>
               <a:ext uri="{91240B29-F687-4f45-9708-019B960494DF}">
-                <a14:hiddenLine xmlns:a14="http://schemas.microsoft.com/office/drawing/2010/main" xmlns="" w="9525">
+                <a14:hiddenLine xmlns="" xmlns:a14="http://schemas.microsoft.com/office/drawing/2010/main" w="9525">
                   <a:solidFill>
                     <a:srgbClr val="000000"/>
                   </a:solidFill>
@@ -2781,7 +2786,7 @@
             </a:ln>
             <a:extLst>
               <a:ext uri="{91240B29-F687-4f45-9708-019B960494DF}">
-                <a14:hiddenLine xmlns:a14="http://schemas.microsoft.com/office/drawing/2010/main" xmlns="" w="9525">
+                <a14:hiddenLine xmlns="" xmlns:a14="http://schemas.microsoft.com/office/drawing/2010/main" w="9525">
                   <a:solidFill>
                     <a:srgbClr val="000000"/>
                   </a:solidFill>
@@ -2871,7 +2876,7 @@
             </a:ln>
             <a:extLst>
               <a:ext uri="{91240B29-F687-4f45-9708-019B960494DF}">
-                <a14:hiddenLine xmlns:a14="http://schemas.microsoft.com/office/drawing/2010/main" xmlns="" w="9525">
+                <a14:hiddenLine xmlns="" xmlns:a14="http://schemas.microsoft.com/office/drawing/2010/main" w="9525">
                   <a:solidFill>
                     <a:srgbClr val="000000"/>
                   </a:solidFill>
@@ -2933,7 +2938,7 @@
             </a:ln>
             <a:extLst>
               <a:ext uri="{91240B29-F687-4f45-9708-019B960494DF}">
-                <a14:hiddenLine xmlns:a14="http://schemas.microsoft.com/office/drawing/2010/main" xmlns="" w="9525">
+                <a14:hiddenLine xmlns="" xmlns:a14="http://schemas.microsoft.com/office/drawing/2010/main" w="9525">
                   <a:solidFill>
                     <a:srgbClr val="000000"/>
                   </a:solidFill>
@@ -3023,7 +3028,7 @@
             </a:ln>
             <a:extLst>
               <a:ext uri="{91240B29-F687-4f45-9708-019B960494DF}">
-                <a14:hiddenLine xmlns:a14="http://schemas.microsoft.com/office/drawing/2010/main" xmlns="" w="9525">
+                <a14:hiddenLine xmlns="" xmlns:a14="http://schemas.microsoft.com/office/drawing/2010/main" w="9525">
                   <a:solidFill>
                     <a:srgbClr val="000000"/>
                   </a:solidFill>
@@ -3085,7 +3090,7 @@
             </a:ln>
             <a:extLst>
               <a:ext uri="{91240B29-F687-4f45-9708-019B960494DF}">
-                <a14:hiddenLine xmlns:a14="http://schemas.microsoft.com/office/drawing/2010/main" xmlns="" w="9525">
+                <a14:hiddenLine xmlns="" xmlns:a14="http://schemas.microsoft.com/office/drawing/2010/main" w="9525">
                   <a:solidFill>
                     <a:srgbClr val="000000"/>
                   </a:solidFill>
@@ -3175,7 +3180,7 @@
             </a:ln>
             <a:extLst>
               <a:ext uri="{91240B29-F687-4f45-9708-019B960494DF}">
-                <a14:hiddenLine xmlns:a14="http://schemas.microsoft.com/office/drawing/2010/main" xmlns="" w="9525">
+                <a14:hiddenLine xmlns="" xmlns:a14="http://schemas.microsoft.com/office/drawing/2010/main" w="9525">
                   <a:solidFill>
                     <a:srgbClr val="000000"/>
                   </a:solidFill>
@@ -3209,7 +3214,7 @@
             </a:ln>
             <a:extLst>
               <a:ext uri="{91240B29-F687-4f45-9708-019B960494DF}">
-                <a14:hiddenLine xmlns:a14="http://schemas.microsoft.com/office/drawing/2010/main" xmlns="" w="9525">
+                <a14:hiddenLine xmlns="" xmlns:a14="http://schemas.microsoft.com/office/drawing/2010/main" w="9525">
                   <a:solidFill>
                     <a:srgbClr val="000000"/>
                   </a:solidFill>
@@ -3274,7 +3279,7 @@
             </a:ln>
             <a:extLst>
               <a:ext uri="{91240B29-F687-4f45-9708-019B960494DF}">
-                <a14:hiddenLine xmlns:a14="http://schemas.microsoft.com/office/drawing/2010/main" xmlns="" w="9525">
+                <a14:hiddenLine xmlns="" xmlns:a14="http://schemas.microsoft.com/office/drawing/2010/main" w="9525">
                   <a:solidFill>
                     <a:srgbClr val="000000"/>
                   </a:solidFill>
@@ -3364,7 +3369,7 @@
             </a:ln>
             <a:extLst>
               <a:ext uri="{91240B29-F687-4f45-9708-019B960494DF}">
-                <a14:hiddenLine xmlns:a14="http://schemas.microsoft.com/office/drawing/2010/main" xmlns="" w="9525">
+                <a14:hiddenLine xmlns="" xmlns:a14="http://schemas.microsoft.com/office/drawing/2010/main" w="9525">
                   <a:solidFill>
                     <a:srgbClr val="000000"/>
                   </a:solidFill>
@@ -3426,7 +3431,7 @@
             </a:ln>
             <a:extLst>
               <a:ext uri="{91240B29-F687-4f45-9708-019B960494DF}">
-                <a14:hiddenLine xmlns:a14="http://schemas.microsoft.com/office/drawing/2010/main" xmlns="" w="9525">
+                <a14:hiddenLine xmlns="" xmlns:a14="http://schemas.microsoft.com/office/drawing/2010/main" w="9525">
                   <a:solidFill>
                     <a:srgbClr val="000000"/>
                   </a:solidFill>
@@ -3516,7 +3521,7 @@
             </a:ln>
             <a:extLst>
               <a:ext uri="{91240B29-F687-4f45-9708-019B960494DF}">
-                <a14:hiddenLine xmlns:a14="http://schemas.microsoft.com/office/drawing/2010/main" xmlns="" w="9525">
+                <a14:hiddenLine xmlns="" xmlns:a14="http://schemas.microsoft.com/office/drawing/2010/main" w="9525">
                   <a:solidFill>
                     <a:srgbClr val="000000"/>
                   </a:solidFill>
@@ -3606,7 +3611,7 @@
             </a:ln>
             <a:extLst>
               <a:ext uri="{91240B29-F687-4f45-9708-019B960494DF}">
-                <a14:hiddenLine xmlns:a14="http://schemas.microsoft.com/office/drawing/2010/main" xmlns="" w="9525">
+                <a14:hiddenLine xmlns="" xmlns:a14="http://schemas.microsoft.com/office/drawing/2010/main" w="9525">
                   <a:solidFill>
                     <a:srgbClr val="000000"/>
                   </a:solidFill>
@@ -3671,7 +3676,7 @@
             </a:ln>
             <a:extLst>
               <a:ext uri="{91240B29-F687-4f45-9708-019B960494DF}">
-                <a14:hiddenLine xmlns:a14="http://schemas.microsoft.com/office/drawing/2010/main" xmlns="" w="9525">
+                <a14:hiddenLine xmlns="" xmlns:a14="http://schemas.microsoft.com/office/drawing/2010/main" w="9525">
                   <a:solidFill>
                     <a:srgbClr val="000000"/>
                   </a:solidFill>
@@ -3733,7 +3738,7 @@
             </a:ln>
             <a:extLst>
               <a:ext uri="{91240B29-F687-4f45-9708-019B960494DF}">
-                <a14:hiddenLine xmlns:a14="http://schemas.microsoft.com/office/drawing/2010/main" xmlns="" w="9525">
+                <a14:hiddenLine xmlns="" xmlns:a14="http://schemas.microsoft.com/office/drawing/2010/main" w="9525">
                   <a:solidFill>
                     <a:srgbClr val="000000"/>
                   </a:solidFill>
@@ -3823,7 +3828,7 @@
             </a:ln>
             <a:extLst>
               <a:ext uri="{91240B29-F687-4f45-9708-019B960494DF}">
-                <a14:hiddenLine xmlns:a14="http://schemas.microsoft.com/office/drawing/2010/main" xmlns="" w="9525">
+                <a14:hiddenLine xmlns="" xmlns:a14="http://schemas.microsoft.com/office/drawing/2010/main" w="9525">
                   <a:solidFill>
                     <a:srgbClr val="000000"/>
                   </a:solidFill>
@@ -3913,7 +3918,7 @@
             </a:ln>
             <a:extLst>
               <a:ext uri="{91240B29-F687-4f45-9708-019B960494DF}">
-                <a14:hiddenLine xmlns:a14="http://schemas.microsoft.com/office/drawing/2010/main" xmlns="" w="9525">
+                <a14:hiddenLine xmlns="" xmlns:a14="http://schemas.microsoft.com/office/drawing/2010/main" w="9525">
                   <a:solidFill>
                     <a:srgbClr val="000000"/>
                   </a:solidFill>
@@ -3975,7 +3980,7 @@
             </a:ln>
             <a:extLst>
               <a:ext uri="{91240B29-F687-4f45-9708-019B960494DF}">
-                <a14:hiddenLine xmlns:a14="http://schemas.microsoft.com/office/drawing/2010/main" xmlns="" w="9525">
+                <a14:hiddenLine xmlns="" xmlns:a14="http://schemas.microsoft.com/office/drawing/2010/main" w="9525">
                   <a:solidFill>
                     <a:srgbClr val="000000"/>
                   </a:solidFill>
@@ -4095,7 +4100,7 @@
             </a:ln>
             <a:extLst>
               <a:ext uri="{91240B29-F687-4f45-9708-019B960494DF}">
-                <a14:hiddenLine xmlns:a14="http://schemas.microsoft.com/office/drawing/2010/main" xmlns="" w="9525">
+                <a14:hiddenLine xmlns="" xmlns:a14="http://schemas.microsoft.com/office/drawing/2010/main" w="9525">
                   <a:solidFill>
                     <a:srgbClr val="000000"/>
                   </a:solidFill>
@@ -4163,7 +4168,7 @@
             </a:ln>
             <a:extLst>
               <a:ext uri="{91240B29-F687-4f45-9708-019B960494DF}">
-                <a14:hiddenLine xmlns:a14="http://schemas.microsoft.com/office/drawing/2010/main" xmlns="" w="9525">
+                <a14:hiddenLine xmlns="" xmlns:a14="http://schemas.microsoft.com/office/drawing/2010/main" w="9525">
                   <a:solidFill>
                     <a:srgbClr val="000000"/>
                   </a:solidFill>
@@ -4253,7 +4258,7 @@
             </a:ln>
             <a:extLst>
               <a:ext uri="{91240B29-F687-4f45-9708-019B960494DF}">
-                <a14:hiddenLine xmlns:a14="http://schemas.microsoft.com/office/drawing/2010/main" xmlns="" w="9525">
+                <a14:hiddenLine xmlns="" xmlns:a14="http://schemas.microsoft.com/office/drawing/2010/main" w="9525">
                   <a:solidFill>
                     <a:srgbClr val="000000"/>
                   </a:solidFill>
@@ -4393,7 +4398,7 @@
           <a:p>
             <a:fld id="{77D79FE6-5460-4BB7-8806-BC3D23582E7F}" type="datetimeFigureOut">
               <a:rPr lang="ru-RU" smtClean="0"/>
-              <a:t>06.04.2026</a:t>
+              <a:t>14.04.2026</a:t>
             </a:fld>
             <a:endParaRPr lang="ru-RU"/>
           </a:p>
@@ -4660,7 +4665,7 @@
           <a:p>
             <a:fld id="{77D79FE6-5460-4BB7-8806-BC3D23582E7F}" type="datetimeFigureOut">
               <a:rPr lang="ru-RU" smtClean="0"/>
-              <a:t>06.04.2026</a:t>
+              <a:t>14.04.2026</a:t>
             </a:fld>
             <a:endParaRPr lang="ru-RU"/>
           </a:p>
@@ -4856,7 +4861,7 @@
           <a:p>
             <a:fld id="{77D79FE6-5460-4BB7-8806-BC3D23582E7F}" type="datetimeFigureOut">
               <a:rPr lang="ru-RU" smtClean="0"/>
-              <a:t>06.04.2026</a:t>
+              <a:t>14.04.2026</a:t>
             </a:fld>
             <a:endParaRPr lang="ru-RU"/>
           </a:p>
@@ -5119,7 +5124,7 @@
           <a:p>
             <a:fld id="{77D79FE6-5460-4BB7-8806-BC3D23582E7F}" type="datetimeFigureOut">
               <a:rPr lang="ru-RU" smtClean="0"/>
-              <a:t>06.04.2026</a:t>
+              <a:t>14.04.2026</a:t>
             </a:fld>
             <a:endParaRPr lang="ru-RU"/>
           </a:p>
@@ -5553,7 +5558,7 @@
           <a:p>
             <a:fld id="{77D79FE6-5460-4BB7-8806-BC3D23582E7F}" type="datetimeFigureOut">
               <a:rPr lang="ru-RU" smtClean="0"/>
-              <a:t>06.04.2026</a:t>
+              <a:t>14.04.2026</a:t>
             </a:fld>
             <a:endParaRPr lang="ru-RU"/>
           </a:p>
@@ -6099,7 +6104,7 @@
           <a:p>
             <a:fld id="{77D79FE6-5460-4BB7-8806-BC3D23582E7F}" type="datetimeFigureOut">
               <a:rPr lang="ru-RU" smtClean="0"/>
-              <a:t>06.04.2026</a:t>
+              <a:t>14.04.2026</a:t>
             </a:fld>
             <a:endParaRPr lang="ru-RU"/>
           </a:p>
@@ -6819,7 +6824,7 @@
           <a:p>
             <a:fld id="{77D79FE6-5460-4BB7-8806-BC3D23582E7F}" type="datetimeFigureOut">
               <a:rPr lang="ru-RU" smtClean="0"/>
-              <a:t>06.04.2026</a:t>
+              <a:t>14.04.2026</a:t>
             </a:fld>
             <a:endParaRPr lang="ru-RU"/>
           </a:p>
@@ -6989,7 +6994,7 @@
           <a:p>
             <a:fld id="{77D79FE6-5460-4BB7-8806-BC3D23582E7F}" type="datetimeFigureOut">
               <a:rPr lang="ru-RU" smtClean="0"/>
-              <a:t>06.04.2026</a:t>
+              <a:t>14.04.2026</a:t>
             </a:fld>
             <a:endParaRPr lang="ru-RU"/>
           </a:p>
@@ -7169,7 +7174,7 @@
           <a:p>
             <a:fld id="{77D79FE6-5460-4BB7-8806-BC3D23582E7F}" type="datetimeFigureOut">
               <a:rPr lang="ru-RU" smtClean="0"/>
-              <a:t>06.04.2026</a:t>
+              <a:t>14.04.2026</a:t>
             </a:fld>
             <a:endParaRPr lang="ru-RU"/>
           </a:p>
@@ -7339,7 +7344,7 @@
           <a:p>
             <a:fld id="{77D79FE6-5460-4BB7-8806-BC3D23582E7F}" type="datetimeFigureOut">
               <a:rPr lang="ru-RU" smtClean="0"/>
-              <a:t>06.04.2026</a:t>
+              <a:t>14.04.2026</a:t>
             </a:fld>
             <a:endParaRPr lang="ru-RU"/>
           </a:p>
@@ -7589,7 +7594,7 @@
           <a:p>
             <a:fld id="{77D79FE6-5460-4BB7-8806-BC3D23582E7F}" type="datetimeFigureOut">
               <a:rPr lang="ru-RU" smtClean="0"/>
-              <a:t>06.04.2026</a:t>
+              <a:t>14.04.2026</a:t>
             </a:fld>
             <a:endParaRPr lang="ru-RU"/>
           </a:p>
@@ -7821,7 +7826,7 @@
           <a:p>
             <a:fld id="{77D79FE6-5460-4BB7-8806-BC3D23582E7F}" type="datetimeFigureOut">
               <a:rPr lang="ru-RU" smtClean="0"/>
-              <a:t>06.04.2026</a:t>
+              <a:t>14.04.2026</a:t>
             </a:fld>
             <a:endParaRPr lang="ru-RU"/>
           </a:p>
@@ -8202,7 +8207,7 @@
           <a:p>
             <a:fld id="{77D79FE6-5460-4BB7-8806-BC3D23582E7F}" type="datetimeFigureOut">
               <a:rPr lang="ru-RU" smtClean="0"/>
-              <a:t>06.04.2026</a:t>
+              <a:t>14.04.2026</a:t>
             </a:fld>
             <a:endParaRPr lang="ru-RU"/>
           </a:p>
@@ -8320,7 +8325,7 @@
           <a:p>
             <a:fld id="{77D79FE6-5460-4BB7-8806-BC3D23582E7F}" type="datetimeFigureOut">
               <a:rPr lang="ru-RU" smtClean="0"/>
-              <a:t>06.04.2026</a:t>
+              <a:t>14.04.2026</a:t>
             </a:fld>
             <a:endParaRPr lang="ru-RU"/>
           </a:p>
@@ -8415,7 +8420,7 @@
           <a:p>
             <a:fld id="{77D79FE6-5460-4BB7-8806-BC3D23582E7F}" type="datetimeFigureOut">
               <a:rPr lang="ru-RU" smtClean="0"/>
-              <a:t>06.04.2026</a:t>
+              <a:t>14.04.2026</a:t>
             </a:fld>
             <a:endParaRPr lang="ru-RU"/>
           </a:p>
@@ -8664,7 +8669,7 @@
           <a:p>
             <a:fld id="{77D79FE6-5460-4BB7-8806-BC3D23582E7F}" type="datetimeFigureOut">
               <a:rPr lang="ru-RU" smtClean="0"/>
-              <a:t>06.04.2026</a:t>
+              <a:t>14.04.2026</a:t>
             </a:fld>
             <a:endParaRPr lang="ru-RU"/>
           </a:p>
@@ -8944,7 +8949,7 @@
           <a:p>
             <a:fld id="{77D79FE6-5460-4BB7-8806-BC3D23582E7F}" type="datetimeFigureOut">
               <a:rPr lang="ru-RU" smtClean="0"/>
-              <a:t>06.04.2026</a:t>
+              <a:t>14.04.2026</a:t>
             </a:fld>
             <a:endParaRPr lang="ru-RU"/>
           </a:p>
@@ -9060,7 +9065,7 @@
           <a:noFill/>
           <a:extLst>
             <a:ext uri="{909E8E84-426E-40dd-AFC4-6F175D3DCCD1}">
-              <a14:hiddenFill xmlns:a14="http://schemas.microsoft.com/office/drawing/2010/main" xmlns="">
+              <a14:hiddenFill xmlns="" xmlns:a14="http://schemas.microsoft.com/office/drawing/2010/main">
                 <a:solidFill>
                   <a:srgbClr val="FFFFFF"/>
                 </a:solidFill>
@@ -9134,7 +9139,7 @@
               </a:ln>
               <a:extLst>
                 <a:ext uri="{91240B29-F687-4f45-9708-019B960494DF}">
-                  <a14:hiddenLine xmlns:a14="http://schemas.microsoft.com/office/drawing/2010/main" xmlns="" w="9525">
+                  <a14:hiddenLine xmlns="" xmlns:a14="http://schemas.microsoft.com/office/drawing/2010/main" w="9525">
                     <a:solidFill>
                       <a:srgbClr val="000000"/>
                     </a:solidFill>
@@ -9224,7 +9229,7 @@
               </a:ln>
               <a:extLst>
                 <a:ext uri="{91240B29-F687-4f45-9708-019B960494DF}">
-                  <a14:hiddenLine xmlns:a14="http://schemas.microsoft.com/office/drawing/2010/main" xmlns="" w="9525">
+                  <a14:hiddenLine xmlns="" xmlns:a14="http://schemas.microsoft.com/office/drawing/2010/main" w="9525">
                     <a:solidFill>
                       <a:srgbClr val="000000"/>
                     </a:solidFill>
@@ -9314,7 +9319,7 @@
               </a:ln>
               <a:extLst>
                 <a:ext uri="{91240B29-F687-4f45-9708-019B960494DF}">
-                  <a14:hiddenLine xmlns:a14="http://schemas.microsoft.com/office/drawing/2010/main" xmlns="" w="9525">
+                  <a14:hiddenLine xmlns="" xmlns:a14="http://schemas.microsoft.com/office/drawing/2010/main" w="9525">
                     <a:solidFill>
                       <a:srgbClr val="000000"/>
                     </a:solidFill>
@@ -9376,7 +9381,7 @@
               </a:ln>
               <a:extLst>
                 <a:ext uri="{91240B29-F687-4f45-9708-019B960494DF}">
-                  <a14:hiddenLine xmlns:a14="http://schemas.microsoft.com/office/drawing/2010/main" xmlns="" w="9525">
+                  <a14:hiddenLine xmlns="" xmlns:a14="http://schemas.microsoft.com/office/drawing/2010/main" w="9525">
                     <a:solidFill>
                       <a:srgbClr val="000000"/>
                     </a:solidFill>
@@ -9466,7 +9471,7 @@
               </a:ln>
               <a:extLst>
                 <a:ext uri="{91240B29-F687-4f45-9708-019B960494DF}">
-                  <a14:hiddenLine xmlns:a14="http://schemas.microsoft.com/office/drawing/2010/main" xmlns="" w="9525">
+                  <a14:hiddenLine xmlns="" xmlns:a14="http://schemas.microsoft.com/office/drawing/2010/main" w="9525">
                     <a:solidFill>
                       <a:srgbClr val="000000"/>
                     </a:solidFill>
@@ -9528,7 +9533,7 @@
               </a:ln>
               <a:extLst>
                 <a:ext uri="{91240B29-F687-4f45-9708-019B960494DF}">
-                  <a14:hiddenLine xmlns:a14="http://schemas.microsoft.com/office/drawing/2010/main" xmlns="" w="9525">
+                  <a14:hiddenLine xmlns="" xmlns:a14="http://schemas.microsoft.com/office/drawing/2010/main" w="9525">
                     <a:solidFill>
                       <a:srgbClr val="000000"/>
                     </a:solidFill>
@@ -9590,7 +9595,7 @@
               </a:ln>
               <a:extLst>
                 <a:ext uri="{91240B29-F687-4f45-9708-019B960494DF}">
-                  <a14:hiddenLine xmlns:a14="http://schemas.microsoft.com/office/drawing/2010/main" xmlns="" w="9525">
+                  <a14:hiddenLine xmlns="" xmlns:a14="http://schemas.microsoft.com/office/drawing/2010/main" w="9525">
                     <a:solidFill>
                       <a:srgbClr val="000000"/>
                     </a:solidFill>
@@ -9680,7 +9685,7 @@
               </a:ln>
               <a:extLst>
                 <a:ext uri="{91240B29-F687-4f45-9708-019B960494DF}">
-                  <a14:hiddenLine xmlns:a14="http://schemas.microsoft.com/office/drawing/2010/main" xmlns="" w="9525">
+                  <a14:hiddenLine xmlns="" xmlns:a14="http://schemas.microsoft.com/office/drawing/2010/main" w="9525">
                     <a:solidFill>
                       <a:srgbClr val="000000"/>
                     </a:solidFill>
@@ -9770,7 +9775,7 @@
               </a:ln>
               <a:extLst>
                 <a:ext uri="{91240B29-F687-4f45-9708-019B960494DF}">
-                  <a14:hiddenLine xmlns:a14="http://schemas.microsoft.com/office/drawing/2010/main" xmlns="" w="9525">
+                  <a14:hiddenLine xmlns="" xmlns:a14="http://schemas.microsoft.com/office/drawing/2010/main" w="9525">
                     <a:solidFill>
                       <a:srgbClr val="000000"/>
                     </a:solidFill>
@@ -9832,7 +9837,7 @@
               </a:ln>
               <a:extLst>
                 <a:ext uri="{91240B29-F687-4f45-9708-019B960494DF}">
-                  <a14:hiddenLine xmlns:a14="http://schemas.microsoft.com/office/drawing/2010/main" xmlns="" w="9525">
+                  <a14:hiddenLine xmlns="" xmlns:a14="http://schemas.microsoft.com/office/drawing/2010/main" w="9525">
                     <a:solidFill>
                       <a:srgbClr val="000000"/>
                     </a:solidFill>
@@ -9942,7 +9947,7 @@
               </a:ln>
               <a:extLst>
                 <a:ext uri="{91240B29-F687-4f45-9708-019B960494DF}">
-                  <a14:hiddenLine xmlns:a14="http://schemas.microsoft.com/office/drawing/2010/main" xmlns="" w="9525">
+                  <a14:hiddenLine xmlns="" xmlns:a14="http://schemas.microsoft.com/office/drawing/2010/main" w="9525">
                     <a:solidFill>
                       <a:srgbClr val="000000"/>
                     </a:solidFill>
@@ -10026,7 +10031,7 @@
               </a:ln>
               <a:extLst>
                 <a:ext uri="{91240B29-F687-4f45-9708-019B960494DF}">
-                  <a14:hiddenLine xmlns:a14="http://schemas.microsoft.com/office/drawing/2010/main" xmlns="" w="9525">
+                  <a14:hiddenLine xmlns="" xmlns:a14="http://schemas.microsoft.com/office/drawing/2010/main" w="9525">
                     <a:solidFill>
                       <a:srgbClr val="000000"/>
                     </a:solidFill>
@@ -10088,7 +10093,7 @@
               </a:ln>
               <a:extLst>
                 <a:ext uri="{91240B29-F687-4f45-9708-019B960494DF}">
-                  <a14:hiddenLine xmlns:a14="http://schemas.microsoft.com/office/drawing/2010/main" xmlns="" w="9525">
+                  <a14:hiddenLine xmlns="" xmlns:a14="http://schemas.microsoft.com/office/drawing/2010/main" w="9525">
                     <a:solidFill>
                       <a:srgbClr val="000000"/>
                     </a:solidFill>
@@ -10150,7 +10155,7 @@
               </a:ln>
               <a:extLst>
                 <a:ext uri="{91240B29-F687-4f45-9708-019B960494DF}">
-                  <a14:hiddenLine xmlns:a14="http://schemas.microsoft.com/office/drawing/2010/main" xmlns="" w="9525">
+                  <a14:hiddenLine xmlns="" xmlns:a14="http://schemas.microsoft.com/office/drawing/2010/main" w="9525">
                     <a:solidFill>
                       <a:srgbClr val="000000"/>
                     </a:solidFill>
@@ -10240,7 +10245,7 @@
               </a:ln>
               <a:extLst>
                 <a:ext uri="{91240B29-F687-4f45-9708-019B960494DF}">
-                  <a14:hiddenLine xmlns:a14="http://schemas.microsoft.com/office/drawing/2010/main" xmlns="" w="9525">
+                  <a14:hiddenLine xmlns="" xmlns:a14="http://schemas.microsoft.com/office/drawing/2010/main" w="9525">
                     <a:solidFill>
                       <a:srgbClr val="000000"/>
                     </a:solidFill>
@@ -10274,7 +10279,7 @@
               </a:ln>
               <a:extLst>
                 <a:ext uri="{91240B29-F687-4f45-9708-019B960494DF}">
-                  <a14:hiddenLine xmlns:a14="http://schemas.microsoft.com/office/drawing/2010/main" xmlns="" w="9525">
+                  <a14:hiddenLine xmlns="" xmlns:a14="http://schemas.microsoft.com/office/drawing/2010/main" w="9525">
                     <a:solidFill>
                       <a:srgbClr val="000000"/>
                     </a:solidFill>
@@ -10339,7 +10344,7 @@
               </a:ln>
               <a:extLst>
                 <a:ext uri="{91240B29-F687-4f45-9708-019B960494DF}">
-                  <a14:hiddenLine xmlns:a14="http://schemas.microsoft.com/office/drawing/2010/main" xmlns="" w="9525">
+                  <a14:hiddenLine xmlns="" xmlns:a14="http://schemas.microsoft.com/office/drawing/2010/main" w="9525">
                     <a:solidFill>
                       <a:srgbClr val="000000"/>
                     </a:solidFill>
@@ -10429,7 +10434,7 @@
               </a:ln>
               <a:extLst>
                 <a:ext uri="{91240B29-F687-4f45-9708-019B960494DF}">
-                  <a14:hiddenLine xmlns:a14="http://schemas.microsoft.com/office/drawing/2010/main" xmlns="" w="9525">
+                  <a14:hiddenLine xmlns="" xmlns:a14="http://schemas.microsoft.com/office/drawing/2010/main" w="9525">
                     <a:solidFill>
                       <a:srgbClr val="000000"/>
                     </a:solidFill>
@@ -10491,7 +10496,7 @@
               </a:ln>
               <a:extLst>
                 <a:ext uri="{91240B29-F687-4f45-9708-019B960494DF}">
-                  <a14:hiddenLine xmlns:a14="http://schemas.microsoft.com/office/drawing/2010/main" xmlns="" w="9525">
+                  <a14:hiddenLine xmlns="" xmlns:a14="http://schemas.microsoft.com/office/drawing/2010/main" w="9525">
                     <a:solidFill>
                       <a:srgbClr val="000000"/>
                     </a:solidFill>
@@ -10581,7 +10586,7 @@
               </a:ln>
               <a:extLst>
                 <a:ext uri="{91240B29-F687-4f45-9708-019B960494DF}">
-                  <a14:hiddenLine xmlns:a14="http://schemas.microsoft.com/office/drawing/2010/main" xmlns="" w="9525">
+                  <a14:hiddenLine xmlns="" xmlns:a14="http://schemas.microsoft.com/office/drawing/2010/main" w="9525">
                     <a:solidFill>
                       <a:srgbClr val="000000"/>
                     </a:solidFill>
@@ -10646,7 +10651,7 @@
               </a:ln>
               <a:extLst>
                 <a:ext uri="{91240B29-F687-4f45-9708-019B960494DF}">
-                  <a14:hiddenLine xmlns:a14="http://schemas.microsoft.com/office/drawing/2010/main" xmlns="" w="9525">
+                  <a14:hiddenLine xmlns="" xmlns:a14="http://schemas.microsoft.com/office/drawing/2010/main" w="9525">
                     <a:solidFill>
                       <a:srgbClr val="000000"/>
                     </a:solidFill>
@@ -10708,7 +10713,7 @@
               </a:ln>
               <a:extLst>
                 <a:ext uri="{91240B29-F687-4f45-9708-019B960494DF}">
-                  <a14:hiddenLine xmlns:a14="http://schemas.microsoft.com/office/drawing/2010/main" xmlns="" w="9525">
+                  <a14:hiddenLine xmlns="" xmlns:a14="http://schemas.microsoft.com/office/drawing/2010/main" w="9525">
                     <a:solidFill>
                       <a:srgbClr val="000000"/>
                     </a:solidFill>
@@ -10798,7 +10803,7 @@
               </a:ln>
               <a:extLst>
                 <a:ext uri="{91240B29-F687-4f45-9708-019B960494DF}">
-                  <a14:hiddenLine xmlns:a14="http://schemas.microsoft.com/office/drawing/2010/main" xmlns="" w="9525">
+                  <a14:hiddenLine xmlns="" xmlns:a14="http://schemas.microsoft.com/office/drawing/2010/main" w="9525">
                     <a:solidFill>
                       <a:srgbClr val="000000"/>
                     </a:solidFill>
@@ -10888,7 +10893,7 @@
               </a:ln>
               <a:extLst>
                 <a:ext uri="{91240B29-F687-4f45-9708-019B960494DF}">
-                  <a14:hiddenLine xmlns:a14="http://schemas.microsoft.com/office/drawing/2010/main" xmlns="" w="9525">
+                  <a14:hiddenLine xmlns="" xmlns:a14="http://schemas.microsoft.com/office/drawing/2010/main" w="9525">
                     <a:solidFill>
                       <a:srgbClr val="000000"/>
                     </a:solidFill>
@@ -10953,7 +10958,7 @@
               </a:ln>
               <a:extLst>
                 <a:ext uri="{91240B29-F687-4f45-9708-019B960494DF}">
-                  <a14:hiddenLine xmlns:a14="http://schemas.microsoft.com/office/drawing/2010/main" xmlns="" w="9525">
+                  <a14:hiddenLine xmlns="" xmlns:a14="http://schemas.microsoft.com/office/drawing/2010/main" w="9525">
                     <a:solidFill>
                       <a:srgbClr val="000000"/>
                     </a:solidFill>
@@ -11073,7 +11078,7 @@
               </a:ln>
               <a:extLst>
                 <a:ext uri="{91240B29-F687-4f45-9708-019B960494DF}">
-                  <a14:hiddenLine xmlns:a14="http://schemas.microsoft.com/office/drawing/2010/main" xmlns="" w="9525">
+                  <a14:hiddenLine xmlns="" xmlns:a14="http://schemas.microsoft.com/office/drawing/2010/main" w="9525">
                     <a:solidFill>
                       <a:srgbClr val="000000"/>
                     </a:solidFill>
@@ -11171,7 +11176,7 @@
               </a:ln>
               <a:extLst>
                 <a:ext uri="{91240B29-F687-4f45-9708-019B960494DF}">
-                  <a14:hiddenLine xmlns:a14="http://schemas.microsoft.com/office/drawing/2010/main" xmlns="" w="9525">
+                  <a14:hiddenLine xmlns="" xmlns:a14="http://schemas.microsoft.com/office/drawing/2010/main" w="9525">
                     <a:solidFill>
                       <a:srgbClr val="000000"/>
                     </a:solidFill>
@@ -11286,7 +11291,7 @@
               </a:ln>
               <a:extLst>
                 <a:ext uri="{91240B29-F687-4f45-9708-019B960494DF}">
-                  <a14:hiddenLine xmlns:a14="http://schemas.microsoft.com/office/drawing/2010/main" xmlns="" w="9525">
+                  <a14:hiddenLine xmlns="" xmlns:a14="http://schemas.microsoft.com/office/drawing/2010/main" w="9525">
                     <a:solidFill>
                       <a:srgbClr val="000000"/>
                     </a:solidFill>
@@ -11376,7 +11381,7 @@
               </a:ln>
               <a:extLst>
                 <a:ext uri="{91240B29-F687-4f45-9708-019B960494DF}">
-                  <a14:hiddenLine xmlns:a14="http://schemas.microsoft.com/office/drawing/2010/main" xmlns="" w="9525">
+                  <a14:hiddenLine xmlns="" xmlns:a14="http://schemas.microsoft.com/office/drawing/2010/main" w="9525">
                     <a:solidFill>
                       <a:srgbClr val="000000"/>
                     </a:solidFill>
@@ -11441,7 +11446,7 @@
               </a:ln>
               <a:extLst>
                 <a:ext uri="{91240B29-F687-4f45-9708-019B960494DF}">
-                  <a14:hiddenLine xmlns:a14="http://schemas.microsoft.com/office/drawing/2010/main" xmlns="" w="9525">
+                  <a14:hiddenLine xmlns="" xmlns:a14="http://schemas.microsoft.com/office/drawing/2010/main" w="9525">
                     <a:solidFill>
                       <a:srgbClr val="000000"/>
                     </a:solidFill>
@@ -11531,7 +11536,7 @@
               </a:ln>
               <a:extLst>
                 <a:ext uri="{91240B29-F687-4f45-9708-019B960494DF}">
-                  <a14:hiddenLine xmlns:a14="http://schemas.microsoft.com/office/drawing/2010/main" xmlns="" w="9525">
+                  <a14:hiddenLine xmlns="" xmlns:a14="http://schemas.microsoft.com/office/drawing/2010/main" w="9525">
                     <a:solidFill>
                       <a:srgbClr val="000000"/>
                     </a:solidFill>
@@ -11599,7 +11604,7 @@
               </a:ln>
               <a:extLst>
                 <a:ext uri="{91240B29-F687-4f45-9708-019B960494DF}">
-                  <a14:hiddenLine xmlns:a14="http://schemas.microsoft.com/office/drawing/2010/main" xmlns="" w="9525">
+                  <a14:hiddenLine xmlns="" xmlns:a14="http://schemas.microsoft.com/office/drawing/2010/main" w="9525">
                     <a:solidFill>
                       <a:srgbClr val="000000"/>
                     </a:solidFill>
@@ -11689,7 +11694,7 @@
               </a:ln>
               <a:extLst>
                 <a:ext uri="{91240B29-F687-4f45-9708-019B960494DF}">
-                  <a14:hiddenLine xmlns:a14="http://schemas.microsoft.com/office/drawing/2010/main" xmlns="" w="9525">
+                  <a14:hiddenLine xmlns="" xmlns:a14="http://schemas.microsoft.com/office/drawing/2010/main" w="9525">
                     <a:solidFill>
                       <a:srgbClr val="000000"/>
                     </a:solidFill>
@@ -11757,7 +11762,7 @@
               </a:ln>
               <a:extLst>
                 <a:ext uri="{91240B29-F687-4f45-9708-019B960494DF}">
-                  <a14:hiddenLine xmlns:a14="http://schemas.microsoft.com/office/drawing/2010/main" xmlns="" w="9525">
+                  <a14:hiddenLine xmlns="" xmlns:a14="http://schemas.microsoft.com/office/drawing/2010/main" w="9525">
                     <a:solidFill>
                       <a:srgbClr val="000000"/>
                     </a:solidFill>
@@ -11847,7 +11852,7 @@
               </a:ln>
               <a:extLst>
                 <a:ext uri="{91240B29-F687-4f45-9708-019B960494DF}">
-                  <a14:hiddenLine xmlns:a14="http://schemas.microsoft.com/office/drawing/2010/main" xmlns="" w="9525">
+                  <a14:hiddenLine xmlns="" xmlns:a14="http://schemas.microsoft.com/office/drawing/2010/main" w="9525">
                     <a:solidFill>
                       <a:srgbClr val="000000"/>
                     </a:solidFill>
@@ -11881,7 +11886,7 @@
               </a:ln>
               <a:extLst>
                 <a:ext uri="{91240B29-F687-4f45-9708-019B960494DF}">
-                  <a14:hiddenLine xmlns:a14="http://schemas.microsoft.com/office/drawing/2010/main" xmlns="" w="9525">
+                  <a14:hiddenLine xmlns="" xmlns:a14="http://schemas.microsoft.com/office/drawing/2010/main" w="9525">
                     <a:solidFill>
                       <a:srgbClr val="000000"/>
                     </a:solidFill>
@@ -12021,7 +12026,7 @@
           <a:p>
             <a:fld id="{77D79FE6-5460-4BB7-8806-BC3D23582E7F}" type="datetimeFigureOut">
               <a:rPr lang="ru-RU" smtClean="0"/>
-              <a:t>06.04.2026</a:t>
+              <a:t>14.04.2026</a:t>
             </a:fld>
             <a:endParaRPr lang="ru-RU"/>
           </a:p>
@@ -12621,7 +12626,11 @@
             <a:pPr algn="ctr"/>
             <a:r>
               <a:rPr lang="ru-RU" sz="9600" dirty="0" smtClean="0"/>
-              <a:t>ВОПРОСЫ Есть?</a:t>
+              <a:t>?ВОПРОСЫ </a:t>
+            </a:r>
+            <a:r>
+              <a:rPr lang="ru-RU" sz="9600" dirty="0" smtClean="0"/>
+              <a:t>Есть?</a:t>
             </a:r>
             <a:br>
               <a:rPr lang="ru-RU" sz="9600" dirty="0" smtClean="0"/>
@@ -12708,7 +12717,7 @@
         <p:spPr/>
         <p:txBody>
           <a:bodyPr>
-            <a:normAutofit/>
+            <a:normAutofit fontScale="90000"/>
           </a:bodyPr>
           <a:lstStyle/>
           <a:p>
@@ -13074,6 +13083,126 @@
           </a:p>
         </p:txBody>
       </p:sp>
+      <p:pic>
+        <p:nvPicPr>
+          <p:cNvPr id="4" name="Рисунок 3"/>
+          <p:cNvPicPr>
+            <a:picLocks noChangeAspect="1"/>
+          </p:cNvPicPr>
+          <p:nvPr/>
+        </p:nvPicPr>
+        <p:blipFill>
+          <a:blip r:embed="rId2" cstate="print">
+            <a:extLst>
+              <a:ext uri="{28A0092B-C50C-407E-A947-70E740481C1C}">
+                <a14:useLocalDpi xmlns:a14="http://schemas.microsoft.com/office/drawing/2010/main" val="0"/>
+              </a:ext>
+            </a:extLst>
+          </a:blip>
+          <a:stretch>
+            <a:fillRect/>
+          </a:stretch>
+        </p:blipFill>
+        <p:spPr>
+          <a:xfrm>
+            <a:off x="772771" y="3489619"/>
+            <a:ext cx="368641" cy="368641"/>
+          </a:xfrm>
+          <a:prstGeom prst="rect">
+            <a:avLst/>
+          </a:prstGeom>
+        </p:spPr>
+      </p:pic>
+      <p:pic>
+        <p:nvPicPr>
+          <p:cNvPr id="5" name="Рисунок 4"/>
+          <p:cNvPicPr>
+            <a:picLocks noChangeAspect="1"/>
+          </p:cNvPicPr>
+          <p:nvPr/>
+        </p:nvPicPr>
+        <p:blipFill>
+          <a:blip r:embed="rId3" cstate="print">
+            <a:extLst>
+              <a:ext uri="{28A0092B-C50C-407E-A947-70E740481C1C}">
+                <a14:useLocalDpi xmlns:a14="http://schemas.microsoft.com/office/drawing/2010/main" val="0"/>
+              </a:ext>
+            </a:extLst>
+          </a:blip>
+          <a:stretch>
+            <a:fillRect/>
+          </a:stretch>
+        </p:blipFill>
+        <p:spPr>
+          <a:xfrm>
+            <a:off x="772770" y="4010659"/>
+            <a:ext cx="368641" cy="368641"/>
+          </a:xfrm>
+          <a:prstGeom prst="rect">
+            <a:avLst/>
+          </a:prstGeom>
+        </p:spPr>
+      </p:pic>
+      <p:pic>
+        <p:nvPicPr>
+          <p:cNvPr id="6" name="Рисунок 5"/>
+          <p:cNvPicPr>
+            <a:picLocks noChangeAspect="1"/>
+          </p:cNvPicPr>
+          <p:nvPr/>
+        </p:nvPicPr>
+        <p:blipFill>
+          <a:blip r:embed="rId4" cstate="print">
+            <a:extLst>
+              <a:ext uri="{28A0092B-C50C-407E-A947-70E740481C1C}">
+                <a14:useLocalDpi xmlns:a14="http://schemas.microsoft.com/office/drawing/2010/main" val="0"/>
+              </a:ext>
+            </a:extLst>
+          </a:blip>
+          <a:stretch>
+            <a:fillRect/>
+          </a:stretch>
+        </p:blipFill>
+        <p:spPr>
+          <a:xfrm>
+            <a:off x="772770" y="4531699"/>
+            <a:ext cx="368641" cy="368641"/>
+          </a:xfrm>
+          <a:prstGeom prst="rect">
+            <a:avLst/>
+          </a:prstGeom>
+        </p:spPr>
+      </p:pic>
+      <p:pic>
+        <p:nvPicPr>
+          <p:cNvPr id="7" name="Рисунок 6"/>
+          <p:cNvPicPr>
+            <a:picLocks noChangeAspect="1"/>
+          </p:cNvPicPr>
+          <p:nvPr/>
+        </p:nvPicPr>
+        <p:blipFill>
+          <a:blip r:embed="rId5" cstate="print">
+            <a:extLst>
+              <a:ext uri="{28A0092B-C50C-407E-A947-70E740481C1C}">
+                <a14:useLocalDpi xmlns:a14="http://schemas.microsoft.com/office/drawing/2010/main" val="0"/>
+              </a:ext>
+            </a:extLst>
+          </a:blip>
+          <a:stretch>
+            <a:fillRect/>
+          </a:stretch>
+        </p:blipFill>
+        <p:spPr>
+          <a:xfrm>
+            <a:off x="771229" y="2934061"/>
+            <a:ext cx="370182" cy="370182"/>
+          </a:xfrm>
+          <a:prstGeom prst="rect">
+            <a:avLst/>
+          </a:prstGeom>
+        </p:spPr>
+      </p:pic>
     </p:spTree>
     <p:extLst>
       <p:ext uri="{BB962C8B-B14F-4D97-AF65-F5344CB8AC3E}">
@@ -13427,7 +13556,31 @@
             </a:pPr>
             <a:r>
               <a:rPr lang="ru-RU" dirty="0" smtClean="0"/>
-              <a:t>сумма_в_валюте = курс/сумма_в_рублях​</a:t>
+              <a:t>сумма_в_валюте = </a:t>
+            </a:r>
+            <a:r>
+              <a:rPr lang="ru-RU" dirty="0" smtClean="0"/>
+              <a:t>курс</a:t>
+            </a:r>
+            <a:r>
+              <a:rPr lang="en-US" dirty="0" smtClean="0"/>
+              <a:t> </a:t>
+            </a:r>
+            <a:r>
+              <a:rPr lang="ru-RU" dirty="0" smtClean="0"/>
+              <a:t>/</a:t>
+            </a:r>
+            <a:r>
+              <a:rPr lang="en-US" dirty="0" smtClean="0"/>
+              <a:t> </a:t>
+            </a:r>
+            <a:r>
+              <a:rPr lang="ru-RU" dirty="0" err="1" smtClean="0"/>
+              <a:t>сумма_в_рублях</a:t>
+            </a:r>
+            <a:r>
+              <a:rPr lang="ru-RU" dirty="0" smtClean="0"/>
+              <a:t>​</a:t>
             </a:r>
             <a:endParaRPr lang="ru-RU" dirty="0"/>
           </a:p>
@@ -13688,7 +13841,7 @@
           <p:nvPr>
             <p:extLst>
               <p:ext uri="{D42A27DB-BD31-4B8C-83A1-F6EECF244321}">
-                <p14:modId xmlns:p14="http://schemas.microsoft.com/office/powerpoint/2010/main" val="1696245636"/>
+                <p14:modId xmlns:p14="http://schemas.microsoft.com/office/powerpoint/2010/main" val="126032939"/>
               </p:ext>
             </p:extLst>
           </p:nvPr>
@@ -13834,6 +13987,7 @@
                     <a:bodyPr/>
                     <a:lstStyle/>
                     <a:p>
+                      <a:pPr algn="just"/>
                       <a:r>
                         <a:rPr lang="en-US" dirty="0" smtClean="0"/>
                         <a:t>try‑except </a:t>
@@ -14058,7 +14212,6 @@
               <a:rPr lang="ru-RU" dirty="0"/>
               <a:t>Как запустить и использовать?</a:t>
             </a:r>
-            <a:endParaRPr lang="ru-RU" dirty="0"/>
           </a:p>
         </p:txBody>
       </p:sp>

--- a/Конвентатор валют.pptx
+++ b/Конвентатор валют.pptx
@@ -9,13 +9,17 @@
     <p:sldId id="257" r:id="rId3"/>
     <p:sldId id="258" r:id="rId4"/>
     <p:sldId id="259" r:id="rId5"/>
-    <p:sldId id="260" r:id="rId6"/>
-    <p:sldId id="261" r:id="rId7"/>
-    <p:sldId id="262" r:id="rId8"/>
-    <p:sldId id="263" r:id="rId9"/>
-    <p:sldId id="264" r:id="rId10"/>
-    <p:sldId id="266" r:id="rId11"/>
-    <p:sldId id="265" r:id="rId12"/>
+    <p:sldId id="268" r:id="rId6"/>
+    <p:sldId id="260" r:id="rId7"/>
+    <p:sldId id="261" r:id="rId8"/>
+    <p:sldId id="262" r:id="rId9"/>
+    <p:sldId id="263" r:id="rId10"/>
+    <p:sldId id="267" r:id="rId11"/>
+    <p:sldId id="269" r:id="rId12"/>
+    <p:sldId id="270" r:id="rId13"/>
+    <p:sldId id="264" r:id="rId14"/>
+    <p:sldId id="266" r:id="rId15"/>
+    <p:sldId id="265" r:id="rId16"/>
   </p:sldIdLst>
   <p:sldSz cx="12192000" cy="6858000"/>
   <p:notesSz cx="6858000" cy="9144000"/>
@@ -172,7 +176,7 @@
           <a:noFill/>
           <a:extLst>
             <a:ext uri="{909E8E84-426E-40dd-AFC4-6F175D3DCCD1}">
-              <a14:hiddenFill xmlns="" xmlns:a14="http://schemas.microsoft.com/office/drawing/2010/main">
+              <a14:hiddenFill xmlns:a14="http://schemas.microsoft.com/office/drawing/2010/main" xmlns="">
                 <a:solidFill>
                   <a:srgbClr val="FFFFFF"/>
                 </a:solidFill>
@@ -232,7 +236,7 @@
             </a:ln>
             <a:extLst>
               <a:ext uri="{91240B29-F687-4f45-9708-019B960494DF}">
-                <a14:hiddenLine xmlns="" xmlns:a14="http://schemas.microsoft.com/office/drawing/2010/main" w="9525">
+                <a14:hiddenLine xmlns:a14="http://schemas.microsoft.com/office/drawing/2010/main" xmlns="" w="9525">
                   <a:solidFill>
                     <a:srgbClr val="000000"/>
                   </a:solidFill>
@@ -322,7 +326,7 @@
             </a:ln>
             <a:extLst>
               <a:ext uri="{91240B29-F687-4f45-9708-019B960494DF}">
-                <a14:hiddenLine xmlns="" xmlns:a14="http://schemas.microsoft.com/office/drawing/2010/main" w="9525">
+                <a14:hiddenLine xmlns:a14="http://schemas.microsoft.com/office/drawing/2010/main" xmlns="" w="9525">
                   <a:solidFill>
                     <a:srgbClr val="000000"/>
                   </a:solidFill>
@@ -412,7 +416,7 @@
             </a:ln>
             <a:extLst>
               <a:ext uri="{91240B29-F687-4f45-9708-019B960494DF}">
-                <a14:hiddenLine xmlns="" xmlns:a14="http://schemas.microsoft.com/office/drawing/2010/main" w="9525">
+                <a14:hiddenLine xmlns:a14="http://schemas.microsoft.com/office/drawing/2010/main" xmlns="" w="9525">
                   <a:solidFill>
                     <a:srgbClr val="000000"/>
                   </a:solidFill>
@@ -446,7 +450,7 @@
             </a:ln>
             <a:extLst>
               <a:ext uri="{91240B29-F687-4f45-9708-019B960494DF}">
-                <a14:hiddenLine xmlns="" xmlns:a14="http://schemas.microsoft.com/office/drawing/2010/main" w="9525">
+                <a14:hiddenLine xmlns:a14="http://schemas.microsoft.com/office/drawing/2010/main" xmlns="" w="9525">
                   <a:solidFill>
                     <a:srgbClr val="000000"/>
                   </a:solidFill>
@@ -536,7 +540,7 @@
             </a:ln>
             <a:extLst>
               <a:ext uri="{91240B29-F687-4f45-9708-019B960494DF}">
-                <a14:hiddenLine xmlns="" xmlns:a14="http://schemas.microsoft.com/office/drawing/2010/main" w="9525">
+                <a14:hiddenLine xmlns:a14="http://schemas.microsoft.com/office/drawing/2010/main" xmlns="" w="9525">
                   <a:solidFill>
                     <a:srgbClr val="000000"/>
                   </a:solidFill>
@@ -598,7 +602,7 @@
             </a:ln>
             <a:extLst>
               <a:ext uri="{91240B29-F687-4f45-9708-019B960494DF}">
-                <a14:hiddenLine xmlns="" xmlns:a14="http://schemas.microsoft.com/office/drawing/2010/main" w="9525">
+                <a14:hiddenLine xmlns:a14="http://schemas.microsoft.com/office/drawing/2010/main" xmlns="" w="9525">
                   <a:solidFill>
                     <a:srgbClr val="000000"/>
                   </a:solidFill>
@@ -660,7 +664,7 @@
             </a:ln>
             <a:extLst>
               <a:ext uri="{91240B29-F687-4f45-9708-019B960494DF}">
-                <a14:hiddenLine xmlns="" xmlns:a14="http://schemas.microsoft.com/office/drawing/2010/main" w="9525">
+                <a14:hiddenLine xmlns:a14="http://schemas.microsoft.com/office/drawing/2010/main" xmlns="" w="9525">
                   <a:solidFill>
                     <a:srgbClr val="000000"/>
                   </a:solidFill>
@@ -750,7 +754,7 @@
             </a:ln>
             <a:extLst>
               <a:ext uri="{91240B29-F687-4f45-9708-019B960494DF}">
-                <a14:hiddenLine xmlns="" xmlns:a14="http://schemas.microsoft.com/office/drawing/2010/main" w="9525">
+                <a14:hiddenLine xmlns:a14="http://schemas.microsoft.com/office/drawing/2010/main" xmlns="" w="9525">
                   <a:solidFill>
                     <a:srgbClr val="000000"/>
                   </a:solidFill>
@@ -812,7 +816,7 @@
             </a:ln>
             <a:extLst>
               <a:ext uri="{91240B29-F687-4f45-9708-019B960494DF}">
-                <a14:hiddenLine xmlns="" xmlns:a14="http://schemas.microsoft.com/office/drawing/2010/main" w="9525">
+                <a14:hiddenLine xmlns:a14="http://schemas.microsoft.com/office/drawing/2010/main" xmlns="" w="9525">
                   <a:solidFill>
                     <a:srgbClr val="000000"/>
                   </a:solidFill>
@@ -874,7 +878,7 @@
             </a:ln>
             <a:extLst>
               <a:ext uri="{91240B29-F687-4f45-9708-019B960494DF}">
-                <a14:hiddenLine xmlns="" xmlns:a14="http://schemas.microsoft.com/office/drawing/2010/main" w="9525">
+                <a14:hiddenLine xmlns:a14="http://schemas.microsoft.com/office/drawing/2010/main" xmlns="" w="9525">
                   <a:solidFill>
                     <a:srgbClr val="000000"/>
                   </a:solidFill>
@@ -964,7 +968,7 @@
             </a:ln>
             <a:extLst>
               <a:ext uri="{91240B29-F687-4f45-9708-019B960494DF}">
-                <a14:hiddenLine xmlns="" xmlns:a14="http://schemas.microsoft.com/office/drawing/2010/main" w="9525">
+                <a14:hiddenLine xmlns:a14="http://schemas.microsoft.com/office/drawing/2010/main" xmlns="" w="9525">
                   <a:solidFill>
                     <a:srgbClr val="000000"/>
                   </a:solidFill>
@@ -1054,7 +1058,7 @@
             </a:ln>
             <a:extLst>
               <a:ext uri="{91240B29-F687-4f45-9708-019B960494DF}">
-                <a14:hiddenLine xmlns="" xmlns:a14="http://schemas.microsoft.com/office/drawing/2010/main" w="9525">
+                <a14:hiddenLine xmlns:a14="http://schemas.microsoft.com/office/drawing/2010/main" xmlns="" w="9525">
                   <a:solidFill>
                     <a:srgbClr val="000000"/>
                   </a:solidFill>
@@ -1116,7 +1120,7 @@
             </a:ln>
             <a:extLst>
               <a:ext uri="{91240B29-F687-4f45-9708-019B960494DF}">
-                <a14:hiddenLine xmlns="" xmlns:a14="http://schemas.microsoft.com/office/drawing/2010/main" w="9525">
+                <a14:hiddenLine xmlns:a14="http://schemas.microsoft.com/office/drawing/2010/main" xmlns="" w="9525">
                   <a:solidFill>
                     <a:srgbClr val="000000"/>
                   </a:solidFill>
@@ -1226,7 +1230,7 @@
             </a:ln>
             <a:extLst>
               <a:ext uri="{91240B29-F687-4f45-9708-019B960494DF}">
-                <a14:hiddenLine xmlns="" xmlns:a14="http://schemas.microsoft.com/office/drawing/2010/main" w="9525">
+                <a14:hiddenLine xmlns:a14="http://schemas.microsoft.com/office/drawing/2010/main" xmlns="" w="9525">
                   <a:solidFill>
                     <a:srgbClr val="000000"/>
                   </a:solidFill>
@@ -1288,7 +1292,7 @@
             </a:ln>
             <a:extLst>
               <a:ext uri="{91240B29-F687-4f45-9708-019B960494DF}">
-                <a14:hiddenLine xmlns="" xmlns:a14="http://schemas.microsoft.com/office/drawing/2010/main" w="9525">
+                <a14:hiddenLine xmlns:a14="http://schemas.microsoft.com/office/drawing/2010/main" xmlns="" w="9525">
                   <a:solidFill>
                     <a:srgbClr val="000000"/>
                   </a:solidFill>
@@ -1378,7 +1382,7 @@
             </a:ln>
             <a:extLst>
               <a:ext uri="{91240B29-F687-4f45-9708-019B960494DF}">
-                <a14:hiddenLine xmlns="" xmlns:a14="http://schemas.microsoft.com/office/drawing/2010/main" w="9525">
+                <a14:hiddenLine xmlns:a14="http://schemas.microsoft.com/office/drawing/2010/main" xmlns="" w="9525">
                   <a:solidFill>
                     <a:srgbClr val="000000"/>
                   </a:solidFill>
@@ -1468,7 +1472,7 @@
             </a:ln>
             <a:extLst>
               <a:ext uri="{91240B29-F687-4f45-9708-019B960494DF}">
-                <a14:hiddenLine xmlns="" xmlns:a14="http://schemas.microsoft.com/office/drawing/2010/main" w="9525">
+                <a14:hiddenLine xmlns:a14="http://schemas.microsoft.com/office/drawing/2010/main" xmlns="" w="9525">
                   <a:solidFill>
                     <a:srgbClr val="000000"/>
                   </a:solidFill>
@@ -1530,7 +1534,7 @@
             </a:ln>
             <a:extLst>
               <a:ext uri="{91240B29-F687-4f45-9708-019B960494DF}">
-                <a14:hiddenLine xmlns="" xmlns:a14="http://schemas.microsoft.com/office/drawing/2010/main" w="9525">
+                <a14:hiddenLine xmlns:a14="http://schemas.microsoft.com/office/drawing/2010/main" xmlns="" w="9525">
                   <a:solidFill>
                     <a:srgbClr val="000000"/>
                   </a:solidFill>
@@ -1620,7 +1624,7 @@
             </a:ln>
             <a:extLst>
               <a:ext uri="{91240B29-F687-4f45-9708-019B960494DF}">
-                <a14:hiddenLine xmlns="" xmlns:a14="http://schemas.microsoft.com/office/drawing/2010/main" w="9525">
+                <a14:hiddenLine xmlns:a14="http://schemas.microsoft.com/office/drawing/2010/main" xmlns="" w="9525">
                   <a:solidFill>
                     <a:srgbClr val="000000"/>
                   </a:solidFill>
@@ -1710,7 +1714,7 @@
             </a:ln>
             <a:extLst>
               <a:ext uri="{91240B29-F687-4f45-9708-019B960494DF}">
-                <a14:hiddenLine xmlns="" xmlns:a14="http://schemas.microsoft.com/office/drawing/2010/main" w="9525">
+                <a14:hiddenLine xmlns:a14="http://schemas.microsoft.com/office/drawing/2010/main" xmlns="" w="9525">
                   <a:solidFill>
                     <a:srgbClr val="000000"/>
                   </a:solidFill>
@@ -1766,7 +1770,7 @@
             </a:ln>
             <a:extLst>
               <a:ext uri="{91240B29-F687-4f45-9708-019B960494DF}">
-                <a14:hiddenLine xmlns="" xmlns:a14="http://schemas.microsoft.com/office/drawing/2010/main" w="9525">
+                <a14:hiddenLine xmlns:a14="http://schemas.microsoft.com/office/drawing/2010/main" xmlns="" w="9525">
                   <a:solidFill>
                     <a:srgbClr val="000000"/>
                   </a:solidFill>
@@ -1856,7 +1860,7 @@
             </a:ln>
             <a:extLst>
               <a:ext uri="{91240B29-F687-4f45-9708-019B960494DF}">
-                <a14:hiddenLine xmlns="" xmlns:a14="http://schemas.microsoft.com/office/drawing/2010/main" w="9525">
+                <a14:hiddenLine xmlns:a14="http://schemas.microsoft.com/office/drawing/2010/main" xmlns="" w="9525">
                   <a:solidFill>
                     <a:srgbClr val="000000"/>
                   </a:solidFill>
@@ -1912,7 +1916,7 @@
             </a:ln>
             <a:extLst>
               <a:ext uri="{91240B29-F687-4f45-9708-019B960494DF}">
-                <a14:hiddenLine xmlns="" xmlns:a14="http://schemas.microsoft.com/office/drawing/2010/main" w="9525">
+                <a14:hiddenLine xmlns:a14="http://schemas.microsoft.com/office/drawing/2010/main" xmlns="" w="9525">
                   <a:solidFill>
                     <a:srgbClr val="000000"/>
                   </a:solidFill>
@@ -2002,7 +2006,7 @@
             </a:ln>
             <a:extLst>
               <a:ext uri="{91240B29-F687-4f45-9708-019B960494DF}">
-                <a14:hiddenLine xmlns="" xmlns:a14="http://schemas.microsoft.com/office/drawing/2010/main" w="9525">
+                <a14:hiddenLine xmlns:a14="http://schemas.microsoft.com/office/drawing/2010/main" xmlns="" w="9525">
                   <a:solidFill>
                     <a:srgbClr val="000000"/>
                   </a:solidFill>
@@ -2070,7 +2074,7 @@
             </a:ln>
             <a:extLst>
               <a:ext uri="{91240B29-F687-4f45-9708-019B960494DF}">
-                <a14:hiddenLine xmlns="" xmlns:a14="http://schemas.microsoft.com/office/drawing/2010/main" w="9525">
+                <a14:hiddenLine xmlns:a14="http://schemas.microsoft.com/office/drawing/2010/main" xmlns="" w="9525">
                   <a:solidFill>
                     <a:srgbClr val="000000"/>
                   </a:solidFill>
@@ -2160,7 +2164,7 @@
             </a:ln>
             <a:extLst>
               <a:ext uri="{91240B29-F687-4f45-9708-019B960494DF}">
-                <a14:hiddenLine xmlns="" xmlns:a14="http://schemas.microsoft.com/office/drawing/2010/main" w="9525">
+                <a14:hiddenLine xmlns:a14="http://schemas.microsoft.com/office/drawing/2010/main" xmlns="" w="9525">
                   <a:solidFill>
                     <a:srgbClr val="000000"/>
                   </a:solidFill>
@@ -2228,7 +2232,7 @@
             </a:ln>
             <a:extLst>
               <a:ext uri="{91240B29-F687-4f45-9708-019B960494DF}">
-                <a14:hiddenLine xmlns="" xmlns:a14="http://schemas.microsoft.com/office/drawing/2010/main" w="9525">
+                <a14:hiddenLine xmlns:a14="http://schemas.microsoft.com/office/drawing/2010/main" xmlns="" w="9525">
                   <a:solidFill>
                     <a:srgbClr val="000000"/>
                   </a:solidFill>
@@ -2318,7 +2322,7 @@
             </a:ln>
             <a:extLst>
               <a:ext uri="{91240B29-F687-4f45-9708-019B960494DF}">
-                <a14:hiddenLine xmlns="" xmlns:a14="http://schemas.microsoft.com/office/drawing/2010/main" w="9525">
+                <a14:hiddenLine xmlns:a14="http://schemas.microsoft.com/office/drawing/2010/main" xmlns="" w="9525">
                   <a:solidFill>
                     <a:srgbClr val="000000"/>
                   </a:solidFill>
@@ -2352,7 +2356,7 @@
             </a:ln>
             <a:extLst>
               <a:ext uri="{91240B29-F687-4f45-9708-019B960494DF}">
-                <a14:hiddenLine xmlns="" xmlns:a14="http://schemas.microsoft.com/office/drawing/2010/main" w="9525">
+                <a14:hiddenLine xmlns:a14="http://schemas.microsoft.com/office/drawing/2010/main" xmlns="" w="9525">
                   <a:solidFill>
                     <a:srgbClr val="000000"/>
                   </a:solidFill>
@@ -2442,7 +2446,7 @@
             </a:ln>
             <a:extLst>
               <a:ext uri="{91240B29-F687-4f45-9708-019B960494DF}">
-                <a14:hiddenLine xmlns="" xmlns:a14="http://schemas.microsoft.com/office/drawing/2010/main" w="9525">
+                <a14:hiddenLine xmlns:a14="http://schemas.microsoft.com/office/drawing/2010/main" xmlns="" w="9525">
                   <a:solidFill>
                     <a:srgbClr val="000000"/>
                   </a:solidFill>
@@ -2504,7 +2508,7 @@
             </a:ln>
             <a:extLst>
               <a:ext uri="{91240B29-F687-4f45-9708-019B960494DF}">
-                <a14:hiddenLine xmlns="" xmlns:a14="http://schemas.microsoft.com/office/drawing/2010/main" w="9525">
+                <a14:hiddenLine xmlns:a14="http://schemas.microsoft.com/office/drawing/2010/main" xmlns="" w="9525">
                   <a:solidFill>
                     <a:srgbClr val="000000"/>
                   </a:solidFill>
@@ -2566,7 +2570,7 @@
             </a:ln>
             <a:extLst>
               <a:ext uri="{91240B29-F687-4f45-9708-019B960494DF}">
-                <a14:hiddenLine xmlns="" xmlns:a14="http://schemas.microsoft.com/office/drawing/2010/main" w="9525">
+                <a14:hiddenLine xmlns:a14="http://schemas.microsoft.com/office/drawing/2010/main" xmlns="" w="9525">
                   <a:solidFill>
                     <a:srgbClr val="000000"/>
                   </a:solidFill>
@@ -2656,7 +2660,7 @@
             </a:ln>
             <a:extLst>
               <a:ext uri="{91240B29-F687-4f45-9708-019B960494DF}">
-                <a14:hiddenLine xmlns="" xmlns:a14="http://schemas.microsoft.com/office/drawing/2010/main" w="9525">
+                <a14:hiddenLine xmlns:a14="http://schemas.microsoft.com/office/drawing/2010/main" xmlns="" w="9525">
                   <a:solidFill>
                     <a:srgbClr val="000000"/>
                   </a:solidFill>
@@ -2724,7 +2728,7 @@
             </a:ln>
             <a:extLst>
               <a:ext uri="{91240B29-F687-4f45-9708-019B960494DF}">
-                <a14:hiddenLine xmlns="" xmlns:a14="http://schemas.microsoft.com/office/drawing/2010/main" w="9525">
+                <a14:hiddenLine xmlns:a14="http://schemas.microsoft.com/office/drawing/2010/main" xmlns="" w="9525">
                   <a:solidFill>
                     <a:srgbClr val="000000"/>
                   </a:solidFill>
@@ -2786,7 +2790,7 @@
             </a:ln>
             <a:extLst>
               <a:ext uri="{91240B29-F687-4f45-9708-019B960494DF}">
-                <a14:hiddenLine xmlns="" xmlns:a14="http://schemas.microsoft.com/office/drawing/2010/main" w="9525">
+                <a14:hiddenLine xmlns:a14="http://schemas.microsoft.com/office/drawing/2010/main" xmlns="" w="9525">
                   <a:solidFill>
                     <a:srgbClr val="000000"/>
                   </a:solidFill>
@@ -2876,7 +2880,7 @@
             </a:ln>
             <a:extLst>
               <a:ext uri="{91240B29-F687-4f45-9708-019B960494DF}">
-                <a14:hiddenLine xmlns="" xmlns:a14="http://schemas.microsoft.com/office/drawing/2010/main" w="9525">
+                <a14:hiddenLine xmlns:a14="http://schemas.microsoft.com/office/drawing/2010/main" xmlns="" w="9525">
                   <a:solidFill>
                     <a:srgbClr val="000000"/>
                   </a:solidFill>
@@ -2938,7 +2942,7 @@
             </a:ln>
             <a:extLst>
               <a:ext uri="{91240B29-F687-4f45-9708-019B960494DF}">
-                <a14:hiddenLine xmlns="" xmlns:a14="http://schemas.microsoft.com/office/drawing/2010/main" w="9525">
+                <a14:hiddenLine xmlns:a14="http://schemas.microsoft.com/office/drawing/2010/main" xmlns="" w="9525">
                   <a:solidFill>
                     <a:srgbClr val="000000"/>
                   </a:solidFill>
@@ -3028,7 +3032,7 @@
             </a:ln>
             <a:extLst>
               <a:ext uri="{91240B29-F687-4f45-9708-019B960494DF}">
-                <a14:hiddenLine xmlns="" xmlns:a14="http://schemas.microsoft.com/office/drawing/2010/main" w="9525">
+                <a14:hiddenLine xmlns:a14="http://schemas.microsoft.com/office/drawing/2010/main" xmlns="" w="9525">
                   <a:solidFill>
                     <a:srgbClr val="000000"/>
                   </a:solidFill>
@@ -3090,7 +3094,7 @@
             </a:ln>
             <a:extLst>
               <a:ext uri="{91240B29-F687-4f45-9708-019B960494DF}">
-                <a14:hiddenLine xmlns="" xmlns:a14="http://schemas.microsoft.com/office/drawing/2010/main" w="9525">
+                <a14:hiddenLine xmlns:a14="http://schemas.microsoft.com/office/drawing/2010/main" xmlns="" w="9525">
                   <a:solidFill>
                     <a:srgbClr val="000000"/>
                   </a:solidFill>
@@ -3180,7 +3184,7 @@
             </a:ln>
             <a:extLst>
               <a:ext uri="{91240B29-F687-4f45-9708-019B960494DF}">
-                <a14:hiddenLine xmlns="" xmlns:a14="http://schemas.microsoft.com/office/drawing/2010/main" w="9525">
+                <a14:hiddenLine xmlns:a14="http://schemas.microsoft.com/office/drawing/2010/main" xmlns="" w="9525">
                   <a:solidFill>
                     <a:srgbClr val="000000"/>
                   </a:solidFill>
@@ -3214,7 +3218,7 @@
             </a:ln>
             <a:extLst>
               <a:ext uri="{91240B29-F687-4f45-9708-019B960494DF}">
-                <a14:hiddenLine xmlns="" xmlns:a14="http://schemas.microsoft.com/office/drawing/2010/main" w="9525">
+                <a14:hiddenLine xmlns:a14="http://schemas.microsoft.com/office/drawing/2010/main" xmlns="" w="9525">
                   <a:solidFill>
                     <a:srgbClr val="000000"/>
                   </a:solidFill>
@@ -3279,7 +3283,7 @@
             </a:ln>
             <a:extLst>
               <a:ext uri="{91240B29-F687-4f45-9708-019B960494DF}">
-                <a14:hiddenLine xmlns="" xmlns:a14="http://schemas.microsoft.com/office/drawing/2010/main" w="9525">
+                <a14:hiddenLine xmlns:a14="http://schemas.microsoft.com/office/drawing/2010/main" xmlns="" w="9525">
                   <a:solidFill>
                     <a:srgbClr val="000000"/>
                   </a:solidFill>
@@ -3369,7 +3373,7 @@
             </a:ln>
             <a:extLst>
               <a:ext uri="{91240B29-F687-4f45-9708-019B960494DF}">
-                <a14:hiddenLine xmlns="" xmlns:a14="http://schemas.microsoft.com/office/drawing/2010/main" w="9525">
+                <a14:hiddenLine xmlns:a14="http://schemas.microsoft.com/office/drawing/2010/main" xmlns="" w="9525">
                   <a:solidFill>
                     <a:srgbClr val="000000"/>
                   </a:solidFill>
@@ -3431,7 +3435,7 @@
             </a:ln>
             <a:extLst>
               <a:ext uri="{91240B29-F687-4f45-9708-019B960494DF}">
-                <a14:hiddenLine xmlns="" xmlns:a14="http://schemas.microsoft.com/office/drawing/2010/main" w="9525">
+                <a14:hiddenLine xmlns:a14="http://schemas.microsoft.com/office/drawing/2010/main" xmlns="" w="9525">
                   <a:solidFill>
                     <a:srgbClr val="000000"/>
                   </a:solidFill>
@@ -3521,7 +3525,7 @@
             </a:ln>
             <a:extLst>
               <a:ext uri="{91240B29-F687-4f45-9708-019B960494DF}">
-                <a14:hiddenLine xmlns="" xmlns:a14="http://schemas.microsoft.com/office/drawing/2010/main" w="9525">
+                <a14:hiddenLine xmlns:a14="http://schemas.microsoft.com/office/drawing/2010/main" xmlns="" w="9525">
                   <a:solidFill>
                     <a:srgbClr val="000000"/>
                   </a:solidFill>
@@ -3611,7 +3615,7 @@
             </a:ln>
             <a:extLst>
               <a:ext uri="{91240B29-F687-4f45-9708-019B960494DF}">
-                <a14:hiddenLine xmlns="" xmlns:a14="http://schemas.microsoft.com/office/drawing/2010/main" w="9525">
+                <a14:hiddenLine xmlns:a14="http://schemas.microsoft.com/office/drawing/2010/main" xmlns="" w="9525">
                   <a:solidFill>
                     <a:srgbClr val="000000"/>
                   </a:solidFill>
@@ -3676,7 +3680,7 @@
             </a:ln>
             <a:extLst>
               <a:ext uri="{91240B29-F687-4f45-9708-019B960494DF}">
-                <a14:hiddenLine xmlns="" xmlns:a14="http://schemas.microsoft.com/office/drawing/2010/main" w="9525">
+                <a14:hiddenLine xmlns:a14="http://schemas.microsoft.com/office/drawing/2010/main" xmlns="" w="9525">
                   <a:solidFill>
                     <a:srgbClr val="000000"/>
                   </a:solidFill>
@@ -3738,7 +3742,7 @@
             </a:ln>
             <a:extLst>
               <a:ext uri="{91240B29-F687-4f45-9708-019B960494DF}">
-                <a14:hiddenLine xmlns="" xmlns:a14="http://schemas.microsoft.com/office/drawing/2010/main" w="9525">
+                <a14:hiddenLine xmlns:a14="http://schemas.microsoft.com/office/drawing/2010/main" xmlns="" w="9525">
                   <a:solidFill>
                     <a:srgbClr val="000000"/>
                   </a:solidFill>
@@ -3828,7 +3832,7 @@
             </a:ln>
             <a:extLst>
               <a:ext uri="{91240B29-F687-4f45-9708-019B960494DF}">
-                <a14:hiddenLine xmlns="" xmlns:a14="http://schemas.microsoft.com/office/drawing/2010/main" w="9525">
+                <a14:hiddenLine xmlns:a14="http://schemas.microsoft.com/office/drawing/2010/main" xmlns="" w="9525">
                   <a:solidFill>
                     <a:srgbClr val="000000"/>
                   </a:solidFill>
@@ -3918,7 +3922,7 @@
             </a:ln>
             <a:extLst>
               <a:ext uri="{91240B29-F687-4f45-9708-019B960494DF}">
-                <a14:hiddenLine xmlns="" xmlns:a14="http://schemas.microsoft.com/office/drawing/2010/main" w="9525">
+                <a14:hiddenLine xmlns:a14="http://schemas.microsoft.com/office/drawing/2010/main" xmlns="" w="9525">
                   <a:solidFill>
                     <a:srgbClr val="000000"/>
                   </a:solidFill>
@@ -3980,7 +3984,7 @@
             </a:ln>
             <a:extLst>
               <a:ext uri="{91240B29-F687-4f45-9708-019B960494DF}">
-                <a14:hiddenLine xmlns="" xmlns:a14="http://schemas.microsoft.com/office/drawing/2010/main" w="9525">
+                <a14:hiddenLine xmlns:a14="http://schemas.microsoft.com/office/drawing/2010/main" xmlns="" w="9525">
                   <a:solidFill>
                     <a:srgbClr val="000000"/>
                   </a:solidFill>
@@ -4100,7 +4104,7 @@
             </a:ln>
             <a:extLst>
               <a:ext uri="{91240B29-F687-4f45-9708-019B960494DF}">
-                <a14:hiddenLine xmlns="" xmlns:a14="http://schemas.microsoft.com/office/drawing/2010/main" w="9525">
+                <a14:hiddenLine xmlns:a14="http://schemas.microsoft.com/office/drawing/2010/main" xmlns="" w="9525">
                   <a:solidFill>
                     <a:srgbClr val="000000"/>
                   </a:solidFill>
@@ -4168,7 +4172,7 @@
             </a:ln>
             <a:extLst>
               <a:ext uri="{91240B29-F687-4f45-9708-019B960494DF}">
-                <a14:hiddenLine xmlns="" xmlns:a14="http://schemas.microsoft.com/office/drawing/2010/main" w="9525">
+                <a14:hiddenLine xmlns:a14="http://schemas.microsoft.com/office/drawing/2010/main" xmlns="" w="9525">
                   <a:solidFill>
                     <a:srgbClr val="000000"/>
                   </a:solidFill>
@@ -4258,7 +4262,7 @@
             </a:ln>
             <a:extLst>
               <a:ext uri="{91240B29-F687-4f45-9708-019B960494DF}">
-                <a14:hiddenLine xmlns="" xmlns:a14="http://schemas.microsoft.com/office/drawing/2010/main" w="9525">
+                <a14:hiddenLine xmlns:a14="http://schemas.microsoft.com/office/drawing/2010/main" xmlns="" w="9525">
                   <a:solidFill>
                     <a:srgbClr val="000000"/>
                   </a:solidFill>
@@ -4398,7 +4402,7 @@
           <a:p>
             <a:fld id="{77D79FE6-5460-4BB7-8806-BC3D23582E7F}" type="datetimeFigureOut">
               <a:rPr lang="ru-RU" smtClean="0"/>
-              <a:t>14.04.2026</a:t>
+              <a:t>21.04.2026</a:t>
             </a:fld>
             <a:endParaRPr lang="ru-RU"/>
           </a:p>
@@ -4665,7 +4669,7 @@
           <a:p>
             <a:fld id="{77D79FE6-5460-4BB7-8806-BC3D23582E7F}" type="datetimeFigureOut">
               <a:rPr lang="ru-RU" smtClean="0"/>
-              <a:t>14.04.2026</a:t>
+              <a:t>21.04.2026</a:t>
             </a:fld>
             <a:endParaRPr lang="ru-RU"/>
           </a:p>
@@ -4861,7 +4865,7 @@
           <a:p>
             <a:fld id="{77D79FE6-5460-4BB7-8806-BC3D23582E7F}" type="datetimeFigureOut">
               <a:rPr lang="ru-RU" smtClean="0"/>
-              <a:t>14.04.2026</a:t>
+              <a:t>21.04.2026</a:t>
             </a:fld>
             <a:endParaRPr lang="ru-RU"/>
           </a:p>
@@ -5124,7 +5128,7 @@
           <a:p>
             <a:fld id="{77D79FE6-5460-4BB7-8806-BC3D23582E7F}" type="datetimeFigureOut">
               <a:rPr lang="ru-RU" smtClean="0"/>
-              <a:t>14.04.2026</a:t>
+              <a:t>21.04.2026</a:t>
             </a:fld>
             <a:endParaRPr lang="ru-RU"/>
           </a:p>
@@ -5558,7 +5562,7 @@
           <a:p>
             <a:fld id="{77D79FE6-5460-4BB7-8806-BC3D23582E7F}" type="datetimeFigureOut">
               <a:rPr lang="ru-RU" smtClean="0"/>
-              <a:t>14.04.2026</a:t>
+              <a:t>21.04.2026</a:t>
             </a:fld>
             <a:endParaRPr lang="ru-RU"/>
           </a:p>
@@ -6104,7 +6108,7 @@
           <a:p>
             <a:fld id="{77D79FE6-5460-4BB7-8806-BC3D23582E7F}" type="datetimeFigureOut">
               <a:rPr lang="ru-RU" smtClean="0"/>
-              <a:t>14.04.2026</a:t>
+              <a:t>21.04.2026</a:t>
             </a:fld>
             <a:endParaRPr lang="ru-RU"/>
           </a:p>
@@ -6824,7 +6828,7 @@
           <a:p>
             <a:fld id="{77D79FE6-5460-4BB7-8806-BC3D23582E7F}" type="datetimeFigureOut">
               <a:rPr lang="ru-RU" smtClean="0"/>
-              <a:t>14.04.2026</a:t>
+              <a:t>21.04.2026</a:t>
             </a:fld>
             <a:endParaRPr lang="ru-RU"/>
           </a:p>
@@ -6994,7 +6998,7 @@
           <a:p>
             <a:fld id="{77D79FE6-5460-4BB7-8806-BC3D23582E7F}" type="datetimeFigureOut">
               <a:rPr lang="ru-RU" smtClean="0"/>
-              <a:t>14.04.2026</a:t>
+              <a:t>21.04.2026</a:t>
             </a:fld>
             <a:endParaRPr lang="ru-RU"/>
           </a:p>
@@ -7174,7 +7178,7 @@
           <a:p>
             <a:fld id="{77D79FE6-5460-4BB7-8806-BC3D23582E7F}" type="datetimeFigureOut">
               <a:rPr lang="ru-RU" smtClean="0"/>
-              <a:t>14.04.2026</a:t>
+              <a:t>21.04.2026</a:t>
             </a:fld>
             <a:endParaRPr lang="ru-RU"/>
           </a:p>
@@ -7344,7 +7348,7 @@
           <a:p>
             <a:fld id="{77D79FE6-5460-4BB7-8806-BC3D23582E7F}" type="datetimeFigureOut">
               <a:rPr lang="ru-RU" smtClean="0"/>
-              <a:t>14.04.2026</a:t>
+              <a:t>21.04.2026</a:t>
             </a:fld>
             <a:endParaRPr lang="ru-RU"/>
           </a:p>
@@ -7594,7 +7598,7 @@
           <a:p>
             <a:fld id="{77D79FE6-5460-4BB7-8806-BC3D23582E7F}" type="datetimeFigureOut">
               <a:rPr lang="ru-RU" smtClean="0"/>
-              <a:t>14.04.2026</a:t>
+              <a:t>21.04.2026</a:t>
             </a:fld>
             <a:endParaRPr lang="ru-RU"/>
           </a:p>
@@ -7826,7 +7830,7 @@
           <a:p>
             <a:fld id="{77D79FE6-5460-4BB7-8806-BC3D23582E7F}" type="datetimeFigureOut">
               <a:rPr lang="ru-RU" smtClean="0"/>
-              <a:t>14.04.2026</a:t>
+              <a:t>21.04.2026</a:t>
             </a:fld>
             <a:endParaRPr lang="ru-RU"/>
           </a:p>
@@ -8207,7 +8211,7 @@
           <a:p>
             <a:fld id="{77D79FE6-5460-4BB7-8806-BC3D23582E7F}" type="datetimeFigureOut">
               <a:rPr lang="ru-RU" smtClean="0"/>
-              <a:t>14.04.2026</a:t>
+              <a:t>21.04.2026</a:t>
             </a:fld>
             <a:endParaRPr lang="ru-RU"/>
           </a:p>
@@ -8325,7 +8329,7 @@
           <a:p>
             <a:fld id="{77D79FE6-5460-4BB7-8806-BC3D23582E7F}" type="datetimeFigureOut">
               <a:rPr lang="ru-RU" smtClean="0"/>
-              <a:t>14.04.2026</a:t>
+              <a:t>21.04.2026</a:t>
             </a:fld>
             <a:endParaRPr lang="ru-RU"/>
           </a:p>
@@ -8420,7 +8424,7 @@
           <a:p>
             <a:fld id="{77D79FE6-5460-4BB7-8806-BC3D23582E7F}" type="datetimeFigureOut">
               <a:rPr lang="ru-RU" smtClean="0"/>
-              <a:t>14.04.2026</a:t>
+              <a:t>21.04.2026</a:t>
             </a:fld>
             <a:endParaRPr lang="ru-RU"/>
           </a:p>
@@ -8669,7 +8673,7 @@
           <a:p>
             <a:fld id="{77D79FE6-5460-4BB7-8806-BC3D23582E7F}" type="datetimeFigureOut">
               <a:rPr lang="ru-RU" smtClean="0"/>
-              <a:t>14.04.2026</a:t>
+              <a:t>21.04.2026</a:t>
             </a:fld>
             <a:endParaRPr lang="ru-RU"/>
           </a:p>
@@ -8949,7 +8953,7 @@
           <a:p>
             <a:fld id="{77D79FE6-5460-4BB7-8806-BC3D23582E7F}" type="datetimeFigureOut">
               <a:rPr lang="ru-RU" smtClean="0"/>
-              <a:t>14.04.2026</a:t>
+              <a:t>21.04.2026</a:t>
             </a:fld>
             <a:endParaRPr lang="ru-RU"/>
           </a:p>
@@ -9065,7 +9069,7 @@
           <a:noFill/>
           <a:extLst>
             <a:ext uri="{909E8E84-426E-40dd-AFC4-6F175D3DCCD1}">
-              <a14:hiddenFill xmlns="" xmlns:a14="http://schemas.microsoft.com/office/drawing/2010/main">
+              <a14:hiddenFill xmlns:a14="http://schemas.microsoft.com/office/drawing/2010/main" xmlns="">
                 <a:solidFill>
                   <a:srgbClr val="FFFFFF"/>
                 </a:solidFill>
@@ -9139,7 +9143,7 @@
               </a:ln>
               <a:extLst>
                 <a:ext uri="{91240B29-F687-4f45-9708-019B960494DF}">
-                  <a14:hiddenLine xmlns="" xmlns:a14="http://schemas.microsoft.com/office/drawing/2010/main" w="9525">
+                  <a14:hiddenLine xmlns:a14="http://schemas.microsoft.com/office/drawing/2010/main" xmlns="" w="9525">
                     <a:solidFill>
                       <a:srgbClr val="000000"/>
                     </a:solidFill>
@@ -9229,7 +9233,7 @@
               </a:ln>
               <a:extLst>
                 <a:ext uri="{91240B29-F687-4f45-9708-019B960494DF}">
-                  <a14:hiddenLine xmlns="" xmlns:a14="http://schemas.microsoft.com/office/drawing/2010/main" w="9525">
+                  <a14:hiddenLine xmlns:a14="http://schemas.microsoft.com/office/drawing/2010/main" xmlns="" w="9525">
                     <a:solidFill>
                       <a:srgbClr val="000000"/>
                     </a:solidFill>
@@ -9319,7 +9323,7 @@
               </a:ln>
               <a:extLst>
                 <a:ext uri="{91240B29-F687-4f45-9708-019B960494DF}">
-                  <a14:hiddenLine xmlns="" xmlns:a14="http://schemas.microsoft.com/office/drawing/2010/main" w="9525">
+                  <a14:hiddenLine xmlns:a14="http://schemas.microsoft.com/office/drawing/2010/main" xmlns="" w="9525">
                     <a:solidFill>
                       <a:srgbClr val="000000"/>
                     </a:solidFill>
@@ -9381,7 +9385,7 @@
               </a:ln>
               <a:extLst>
                 <a:ext uri="{91240B29-F687-4f45-9708-019B960494DF}">
-                  <a14:hiddenLine xmlns="" xmlns:a14="http://schemas.microsoft.com/office/drawing/2010/main" w="9525">
+                  <a14:hiddenLine xmlns:a14="http://schemas.microsoft.com/office/drawing/2010/main" xmlns="" w="9525">
                     <a:solidFill>
                       <a:srgbClr val="000000"/>
                     </a:solidFill>
@@ -9471,7 +9475,7 @@
               </a:ln>
               <a:extLst>
                 <a:ext uri="{91240B29-F687-4f45-9708-019B960494DF}">
-                  <a14:hiddenLine xmlns="" xmlns:a14="http://schemas.microsoft.com/office/drawing/2010/main" w="9525">
+                  <a14:hiddenLine xmlns:a14="http://schemas.microsoft.com/office/drawing/2010/main" xmlns="" w="9525">
                     <a:solidFill>
                       <a:srgbClr val="000000"/>
                     </a:solidFill>
@@ -9533,7 +9537,7 @@
               </a:ln>
               <a:extLst>
                 <a:ext uri="{91240B29-F687-4f45-9708-019B960494DF}">
-                  <a14:hiddenLine xmlns="" xmlns:a14="http://schemas.microsoft.com/office/drawing/2010/main" w="9525">
+                  <a14:hiddenLine xmlns:a14="http://schemas.microsoft.com/office/drawing/2010/main" xmlns="" w="9525">
                     <a:solidFill>
                       <a:srgbClr val="000000"/>
                     </a:solidFill>
@@ -9595,7 +9599,7 @@
               </a:ln>
               <a:extLst>
                 <a:ext uri="{91240B29-F687-4f45-9708-019B960494DF}">
-                  <a14:hiddenLine xmlns="" xmlns:a14="http://schemas.microsoft.com/office/drawing/2010/main" w="9525">
+                  <a14:hiddenLine xmlns:a14="http://schemas.microsoft.com/office/drawing/2010/main" xmlns="" w="9525">
                     <a:solidFill>
                       <a:srgbClr val="000000"/>
                     </a:solidFill>
@@ -9685,7 +9689,7 @@
               </a:ln>
               <a:extLst>
                 <a:ext uri="{91240B29-F687-4f45-9708-019B960494DF}">
-                  <a14:hiddenLine xmlns="" xmlns:a14="http://schemas.microsoft.com/office/drawing/2010/main" w="9525">
+                  <a14:hiddenLine xmlns:a14="http://schemas.microsoft.com/office/drawing/2010/main" xmlns="" w="9525">
                     <a:solidFill>
                       <a:srgbClr val="000000"/>
                     </a:solidFill>
@@ -9775,7 +9779,7 @@
               </a:ln>
               <a:extLst>
                 <a:ext uri="{91240B29-F687-4f45-9708-019B960494DF}">
-                  <a14:hiddenLine xmlns="" xmlns:a14="http://schemas.microsoft.com/office/drawing/2010/main" w="9525">
+                  <a14:hiddenLine xmlns:a14="http://schemas.microsoft.com/office/drawing/2010/main" xmlns="" w="9525">
                     <a:solidFill>
                       <a:srgbClr val="000000"/>
                     </a:solidFill>
@@ -9837,7 +9841,7 @@
               </a:ln>
               <a:extLst>
                 <a:ext uri="{91240B29-F687-4f45-9708-019B960494DF}">
-                  <a14:hiddenLine xmlns="" xmlns:a14="http://schemas.microsoft.com/office/drawing/2010/main" w="9525">
+                  <a14:hiddenLine xmlns:a14="http://schemas.microsoft.com/office/drawing/2010/main" xmlns="" w="9525">
                     <a:solidFill>
                       <a:srgbClr val="000000"/>
                     </a:solidFill>
@@ -9947,7 +9951,7 @@
               </a:ln>
               <a:extLst>
                 <a:ext uri="{91240B29-F687-4f45-9708-019B960494DF}">
-                  <a14:hiddenLine xmlns="" xmlns:a14="http://schemas.microsoft.com/office/drawing/2010/main" w="9525">
+                  <a14:hiddenLine xmlns:a14="http://schemas.microsoft.com/office/drawing/2010/main" xmlns="" w="9525">
                     <a:solidFill>
                       <a:srgbClr val="000000"/>
                     </a:solidFill>
@@ -10031,7 +10035,7 @@
               </a:ln>
               <a:extLst>
                 <a:ext uri="{91240B29-F687-4f45-9708-019B960494DF}">
-                  <a14:hiddenLine xmlns="" xmlns:a14="http://schemas.microsoft.com/office/drawing/2010/main" w="9525">
+                  <a14:hiddenLine xmlns:a14="http://schemas.microsoft.com/office/drawing/2010/main" xmlns="" w="9525">
                     <a:solidFill>
                       <a:srgbClr val="000000"/>
                     </a:solidFill>
@@ -10093,7 +10097,7 @@
               </a:ln>
               <a:extLst>
                 <a:ext uri="{91240B29-F687-4f45-9708-019B960494DF}">
-                  <a14:hiddenLine xmlns="" xmlns:a14="http://schemas.microsoft.com/office/drawing/2010/main" w="9525">
+                  <a14:hiddenLine xmlns:a14="http://schemas.microsoft.com/office/drawing/2010/main" xmlns="" w="9525">
                     <a:solidFill>
                       <a:srgbClr val="000000"/>
                     </a:solidFill>
@@ -10155,7 +10159,7 @@
               </a:ln>
               <a:extLst>
                 <a:ext uri="{91240B29-F687-4f45-9708-019B960494DF}">
-                  <a14:hiddenLine xmlns="" xmlns:a14="http://schemas.microsoft.com/office/drawing/2010/main" w="9525">
+                  <a14:hiddenLine xmlns:a14="http://schemas.microsoft.com/office/drawing/2010/main" xmlns="" w="9525">
                     <a:solidFill>
                       <a:srgbClr val="000000"/>
                     </a:solidFill>
@@ -10245,7 +10249,7 @@
               </a:ln>
               <a:extLst>
                 <a:ext uri="{91240B29-F687-4f45-9708-019B960494DF}">
-                  <a14:hiddenLine xmlns="" xmlns:a14="http://schemas.microsoft.com/office/drawing/2010/main" w="9525">
+                  <a14:hiddenLine xmlns:a14="http://schemas.microsoft.com/office/drawing/2010/main" xmlns="" w="9525">
                     <a:solidFill>
                       <a:srgbClr val="000000"/>
                     </a:solidFill>
@@ -10279,7 +10283,7 @@
               </a:ln>
               <a:extLst>
                 <a:ext uri="{91240B29-F687-4f45-9708-019B960494DF}">
-                  <a14:hiddenLine xmlns="" xmlns:a14="http://schemas.microsoft.com/office/drawing/2010/main" w="9525">
+                  <a14:hiddenLine xmlns:a14="http://schemas.microsoft.com/office/drawing/2010/main" xmlns="" w="9525">
                     <a:solidFill>
                       <a:srgbClr val="000000"/>
                     </a:solidFill>
@@ -10344,7 +10348,7 @@
               </a:ln>
               <a:extLst>
                 <a:ext uri="{91240B29-F687-4f45-9708-019B960494DF}">
-                  <a14:hiddenLine xmlns="" xmlns:a14="http://schemas.microsoft.com/office/drawing/2010/main" w="9525">
+                  <a14:hiddenLine xmlns:a14="http://schemas.microsoft.com/office/drawing/2010/main" xmlns="" w="9525">
                     <a:solidFill>
                       <a:srgbClr val="000000"/>
                     </a:solidFill>
@@ -10434,7 +10438,7 @@
               </a:ln>
               <a:extLst>
                 <a:ext uri="{91240B29-F687-4f45-9708-019B960494DF}">
-                  <a14:hiddenLine xmlns="" xmlns:a14="http://schemas.microsoft.com/office/drawing/2010/main" w="9525">
+                  <a14:hiddenLine xmlns:a14="http://schemas.microsoft.com/office/drawing/2010/main" xmlns="" w="9525">
                     <a:solidFill>
                       <a:srgbClr val="000000"/>
                     </a:solidFill>
@@ -10496,7 +10500,7 @@
               </a:ln>
               <a:extLst>
                 <a:ext uri="{91240B29-F687-4f45-9708-019B960494DF}">
-                  <a14:hiddenLine xmlns="" xmlns:a14="http://schemas.microsoft.com/office/drawing/2010/main" w="9525">
+                  <a14:hiddenLine xmlns:a14="http://schemas.microsoft.com/office/drawing/2010/main" xmlns="" w="9525">
                     <a:solidFill>
                       <a:srgbClr val="000000"/>
                     </a:solidFill>
@@ -10586,7 +10590,7 @@
               </a:ln>
               <a:extLst>
                 <a:ext uri="{91240B29-F687-4f45-9708-019B960494DF}">
-                  <a14:hiddenLine xmlns="" xmlns:a14="http://schemas.microsoft.com/office/drawing/2010/main" w="9525">
+                  <a14:hiddenLine xmlns:a14="http://schemas.microsoft.com/office/drawing/2010/main" xmlns="" w="9525">
                     <a:solidFill>
                       <a:srgbClr val="000000"/>
                     </a:solidFill>
@@ -10651,7 +10655,7 @@
               </a:ln>
               <a:extLst>
                 <a:ext uri="{91240B29-F687-4f45-9708-019B960494DF}">
-                  <a14:hiddenLine xmlns="" xmlns:a14="http://schemas.microsoft.com/office/drawing/2010/main" w="9525">
+                  <a14:hiddenLine xmlns:a14="http://schemas.microsoft.com/office/drawing/2010/main" xmlns="" w="9525">
                     <a:solidFill>
                       <a:srgbClr val="000000"/>
                     </a:solidFill>
@@ -10713,7 +10717,7 @@
               </a:ln>
               <a:extLst>
                 <a:ext uri="{91240B29-F687-4f45-9708-019B960494DF}">
-                  <a14:hiddenLine xmlns="" xmlns:a14="http://schemas.microsoft.com/office/drawing/2010/main" w="9525">
+                  <a14:hiddenLine xmlns:a14="http://schemas.microsoft.com/office/drawing/2010/main" xmlns="" w="9525">
                     <a:solidFill>
                       <a:srgbClr val="000000"/>
                     </a:solidFill>
@@ -10803,7 +10807,7 @@
               </a:ln>
               <a:extLst>
                 <a:ext uri="{91240B29-F687-4f45-9708-019B960494DF}">
-                  <a14:hiddenLine xmlns="" xmlns:a14="http://schemas.microsoft.com/office/drawing/2010/main" w="9525">
+                  <a14:hiddenLine xmlns:a14="http://schemas.microsoft.com/office/drawing/2010/main" xmlns="" w="9525">
                     <a:solidFill>
                       <a:srgbClr val="000000"/>
                     </a:solidFill>
@@ -10893,7 +10897,7 @@
               </a:ln>
               <a:extLst>
                 <a:ext uri="{91240B29-F687-4f45-9708-019B960494DF}">
-                  <a14:hiddenLine xmlns="" xmlns:a14="http://schemas.microsoft.com/office/drawing/2010/main" w="9525">
+                  <a14:hiddenLine xmlns:a14="http://schemas.microsoft.com/office/drawing/2010/main" xmlns="" w="9525">
                     <a:solidFill>
                       <a:srgbClr val="000000"/>
                     </a:solidFill>
@@ -10958,7 +10962,7 @@
               </a:ln>
               <a:extLst>
                 <a:ext uri="{91240B29-F687-4f45-9708-019B960494DF}">
-                  <a14:hiddenLine xmlns="" xmlns:a14="http://schemas.microsoft.com/office/drawing/2010/main" w="9525">
+                  <a14:hiddenLine xmlns:a14="http://schemas.microsoft.com/office/drawing/2010/main" xmlns="" w="9525">
                     <a:solidFill>
                       <a:srgbClr val="000000"/>
                     </a:solidFill>
@@ -11078,7 +11082,7 @@
               </a:ln>
               <a:extLst>
                 <a:ext uri="{91240B29-F687-4f45-9708-019B960494DF}">
-                  <a14:hiddenLine xmlns="" xmlns:a14="http://schemas.microsoft.com/office/drawing/2010/main" w="9525">
+                  <a14:hiddenLine xmlns:a14="http://schemas.microsoft.com/office/drawing/2010/main" xmlns="" w="9525">
                     <a:solidFill>
                       <a:srgbClr val="000000"/>
                     </a:solidFill>
@@ -11176,7 +11180,7 @@
               </a:ln>
               <a:extLst>
                 <a:ext uri="{91240B29-F687-4f45-9708-019B960494DF}">
-                  <a14:hiddenLine xmlns="" xmlns:a14="http://schemas.microsoft.com/office/drawing/2010/main" w="9525">
+                  <a14:hiddenLine xmlns:a14="http://schemas.microsoft.com/office/drawing/2010/main" xmlns="" w="9525">
                     <a:solidFill>
                       <a:srgbClr val="000000"/>
                     </a:solidFill>
@@ -11291,7 +11295,7 @@
               </a:ln>
               <a:extLst>
                 <a:ext uri="{91240B29-F687-4f45-9708-019B960494DF}">
-                  <a14:hiddenLine xmlns="" xmlns:a14="http://schemas.microsoft.com/office/drawing/2010/main" w="9525">
+                  <a14:hiddenLine xmlns:a14="http://schemas.microsoft.com/office/drawing/2010/main" xmlns="" w="9525">
                     <a:solidFill>
                       <a:srgbClr val="000000"/>
                     </a:solidFill>
@@ -11381,7 +11385,7 @@
               </a:ln>
               <a:extLst>
                 <a:ext uri="{91240B29-F687-4f45-9708-019B960494DF}">
-                  <a14:hiddenLine xmlns="" xmlns:a14="http://schemas.microsoft.com/office/drawing/2010/main" w="9525">
+                  <a14:hiddenLine xmlns:a14="http://schemas.microsoft.com/office/drawing/2010/main" xmlns="" w="9525">
                     <a:solidFill>
                       <a:srgbClr val="000000"/>
                     </a:solidFill>
@@ -11446,7 +11450,7 @@
               </a:ln>
               <a:extLst>
                 <a:ext uri="{91240B29-F687-4f45-9708-019B960494DF}">
-                  <a14:hiddenLine xmlns="" xmlns:a14="http://schemas.microsoft.com/office/drawing/2010/main" w="9525">
+                  <a14:hiddenLine xmlns:a14="http://schemas.microsoft.com/office/drawing/2010/main" xmlns="" w="9525">
                     <a:solidFill>
                       <a:srgbClr val="000000"/>
                     </a:solidFill>
@@ -11536,7 +11540,7 @@
               </a:ln>
               <a:extLst>
                 <a:ext uri="{91240B29-F687-4f45-9708-019B960494DF}">
-                  <a14:hiddenLine xmlns="" xmlns:a14="http://schemas.microsoft.com/office/drawing/2010/main" w="9525">
+                  <a14:hiddenLine xmlns:a14="http://schemas.microsoft.com/office/drawing/2010/main" xmlns="" w="9525">
                     <a:solidFill>
                       <a:srgbClr val="000000"/>
                     </a:solidFill>
@@ -11604,7 +11608,7 @@
               </a:ln>
               <a:extLst>
                 <a:ext uri="{91240B29-F687-4f45-9708-019B960494DF}">
-                  <a14:hiddenLine xmlns="" xmlns:a14="http://schemas.microsoft.com/office/drawing/2010/main" w="9525">
+                  <a14:hiddenLine xmlns:a14="http://schemas.microsoft.com/office/drawing/2010/main" xmlns="" w="9525">
                     <a:solidFill>
                       <a:srgbClr val="000000"/>
                     </a:solidFill>
@@ -11694,7 +11698,7 @@
               </a:ln>
               <a:extLst>
                 <a:ext uri="{91240B29-F687-4f45-9708-019B960494DF}">
-                  <a14:hiddenLine xmlns="" xmlns:a14="http://schemas.microsoft.com/office/drawing/2010/main" w="9525">
+                  <a14:hiddenLine xmlns:a14="http://schemas.microsoft.com/office/drawing/2010/main" xmlns="" w="9525">
                     <a:solidFill>
                       <a:srgbClr val="000000"/>
                     </a:solidFill>
@@ -11762,7 +11766,7 @@
               </a:ln>
               <a:extLst>
                 <a:ext uri="{91240B29-F687-4f45-9708-019B960494DF}">
-                  <a14:hiddenLine xmlns="" xmlns:a14="http://schemas.microsoft.com/office/drawing/2010/main" w="9525">
+                  <a14:hiddenLine xmlns:a14="http://schemas.microsoft.com/office/drawing/2010/main" xmlns="" w="9525">
                     <a:solidFill>
                       <a:srgbClr val="000000"/>
                     </a:solidFill>
@@ -11852,7 +11856,7 @@
               </a:ln>
               <a:extLst>
                 <a:ext uri="{91240B29-F687-4f45-9708-019B960494DF}">
-                  <a14:hiddenLine xmlns="" xmlns:a14="http://schemas.microsoft.com/office/drawing/2010/main" w="9525">
+                  <a14:hiddenLine xmlns:a14="http://schemas.microsoft.com/office/drawing/2010/main" xmlns="" w="9525">
                     <a:solidFill>
                       <a:srgbClr val="000000"/>
                     </a:solidFill>
@@ -11886,7 +11890,7 @@
               </a:ln>
               <a:extLst>
                 <a:ext uri="{91240B29-F687-4f45-9708-019B960494DF}">
-                  <a14:hiddenLine xmlns="" xmlns:a14="http://schemas.microsoft.com/office/drawing/2010/main" w="9525">
+                  <a14:hiddenLine xmlns:a14="http://schemas.microsoft.com/office/drawing/2010/main" xmlns="" w="9525">
                     <a:solidFill>
                       <a:srgbClr val="000000"/>
                     </a:solidFill>
@@ -12026,7 +12030,7 @@
           <a:p>
             <a:fld id="{77D79FE6-5460-4BB7-8806-BC3D23582E7F}" type="datetimeFigureOut">
               <a:rPr lang="ru-RU" smtClean="0"/>
-              <a:t>14.04.2026</a:t>
+              <a:t>21.04.2026</a:t>
             </a:fld>
             <a:endParaRPr lang="ru-RU"/>
           </a:p>
@@ -12463,8 +12467,8 @@
           <a:p>
             <a:pPr algn="ctr"/>
             <a:r>
-              <a:rPr lang="ru-RU" dirty="0" smtClean="0"/>
-              <a:t>Конвертер валют</a:t>
+              <a:rPr lang="en-US" dirty="0"/>
+              <a:t>currency converter</a:t>
             </a:r>
             <a:endParaRPr lang="ru-RU" dirty="0"/>
           </a:p>
@@ -12495,7 +12499,15 @@
             </a:r>
             <a:r>
               <a:rPr lang="ru-RU" dirty="0" smtClean="0"/>
-              <a:t>, сделанный Александром Власовым из ип-61. Он получает курсы валют из центрального банка российской федерации.</a:t>
+              <a:t>, сделанный Александром Власовым из ип-61. </a:t>
+            </a:r>
+            <a:r>
+              <a:rPr lang="ru-RU" dirty="0" smtClean="0"/>
+              <a:t>ПРОГРАММА получает </a:t>
+            </a:r>
+            <a:r>
+              <a:rPr lang="ru-RU" dirty="0" smtClean="0"/>
+              <a:t>курсы валют из центрального банка российской федерации.</a:t>
             </a:r>
             <a:endParaRPr lang="ru-RU" dirty="0"/>
           </a:p>
@@ -12603,6 +12615,629 @@
       </p:grpSpPr>
       <p:sp>
         <p:nvSpPr>
+          <p:cNvPr id="2" name="Заголовок 1"/>
+          <p:cNvSpPr>
+            <a:spLocks noGrp="1"/>
+          </p:cNvSpPr>
+          <p:nvPr>
+            <p:ph type="title"/>
+          </p:nvPr>
+        </p:nvSpPr>
+        <p:spPr/>
+        <p:txBody>
+          <a:bodyPr/>
+          <a:lstStyle/>
+          <a:p>
+            <a:pPr algn="ctr"/>
+            <a:r>
+              <a:rPr lang="ru-RU" dirty="0" smtClean="0"/>
+              <a:t>Этапы реализации?</a:t>
+            </a:r>
+            <a:endParaRPr lang="ru-RU" dirty="0"/>
+          </a:p>
+        </p:txBody>
+      </p:sp>
+      <p:graphicFrame>
+        <p:nvGraphicFramePr>
+          <p:cNvPr id="7" name="Объект 6"/>
+          <p:cNvGraphicFramePr>
+            <a:graphicFrameLocks noGrp="1"/>
+          </p:cNvGraphicFramePr>
+          <p:nvPr>
+            <p:ph idx="1"/>
+            <p:extLst>
+              <p:ext uri="{D42A27DB-BD31-4B8C-83A1-F6EECF244321}">
+                <p14:modId xmlns:p14="http://schemas.microsoft.com/office/powerpoint/2010/main" val="3161916077"/>
+              </p:ext>
+            </p:extLst>
+          </p:nvPr>
+        </p:nvGraphicFramePr>
+        <p:xfrm>
+          <a:off x="1141413" y="1851660"/>
+          <a:ext cx="9906000" cy="2049780"/>
+        </p:xfrm>
+        <a:graphic>
+          <a:graphicData uri="http://schemas.openxmlformats.org/drawingml/2006/table">
+            <a:tbl>
+              <a:tblPr firstRow="1" bandRow="1">
+                <a:tableStyleId>{5C22544A-7EE6-4342-B048-85BDC9FD1C3A}</a:tableStyleId>
+              </a:tblPr>
+              <a:tblGrid>
+                <a:gridCol w="2476500"/>
+                <a:gridCol w="2476500"/>
+                <a:gridCol w="2476500"/>
+                <a:gridCol w="2476500"/>
+              </a:tblGrid>
+              <a:tr h="518160">
+                <a:tc>
+                  <a:txBody>
+                    <a:bodyPr/>
+                    <a:lstStyle/>
+                    <a:p>
+                      <a:r>
+                        <a:rPr lang="ru-RU" dirty="0" smtClean="0"/>
+                        <a:t>1 неделя</a:t>
+                      </a:r>
+                      <a:endParaRPr lang="ru-RU" dirty="0"/>
+                    </a:p>
+                  </a:txBody>
+                  <a:tcPr/>
+                </a:tc>
+                <a:tc>
+                  <a:txBody>
+                    <a:bodyPr/>
+                    <a:lstStyle/>
+                    <a:p>
+                      <a:pPr marL="0" marR="0" indent="0" algn="l" defTabSz="914400" rtl="0" eaLnBrk="1" fontAlgn="auto" latinLnBrk="0" hangingPunct="1">
+                        <a:lnSpc>
+                          <a:spcPct val="100000"/>
+                        </a:lnSpc>
+                        <a:spcBef>
+                          <a:spcPts val="0"/>
+                        </a:spcBef>
+                        <a:spcAft>
+                          <a:spcPts val="0"/>
+                        </a:spcAft>
+                        <a:buClrTx/>
+                        <a:buSzTx/>
+                        <a:buFontTx/>
+                        <a:buNone/>
+                        <a:tabLst/>
+                        <a:defRPr/>
+                      </a:pPr>
+                      <a:r>
+                        <a:rPr lang="ru-RU" dirty="0" smtClean="0"/>
+                        <a:t>2 </a:t>
+                      </a:r>
+                      <a:r>
+                        <a:rPr lang="ru-RU" dirty="0" smtClean="0"/>
+                        <a:t>неделя</a:t>
+                      </a:r>
+                    </a:p>
+                  </a:txBody>
+                  <a:tcPr/>
+                </a:tc>
+                <a:tc>
+                  <a:txBody>
+                    <a:bodyPr/>
+                    <a:lstStyle/>
+                    <a:p>
+                      <a:pPr marL="0" marR="0" indent="0" algn="l" defTabSz="914400" rtl="0" eaLnBrk="1" fontAlgn="auto" latinLnBrk="0" hangingPunct="1">
+                        <a:lnSpc>
+                          <a:spcPct val="100000"/>
+                        </a:lnSpc>
+                        <a:spcBef>
+                          <a:spcPts val="0"/>
+                        </a:spcBef>
+                        <a:spcAft>
+                          <a:spcPts val="0"/>
+                        </a:spcAft>
+                        <a:buClrTx/>
+                        <a:buSzTx/>
+                        <a:buFontTx/>
+                        <a:buNone/>
+                        <a:tabLst/>
+                        <a:defRPr/>
+                      </a:pPr>
+                      <a:r>
+                        <a:rPr lang="ru-RU" dirty="0" smtClean="0"/>
+                        <a:t>3 </a:t>
+                      </a:r>
+                      <a:r>
+                        <a:rPr lang="ru-RU" dirty="0" smtClean="0"/>
+                        <a:t>неделя</a:t>
+                      </a:r>
+                    </a:p>
+                  </a:txBody>
+                  <a:tcPr/>
+                </a:tc>
+                <a:tc>
+                  <a:txBody>
+                    <a:bodyPr/>
+                    <a:lstStyle/>
+                    <a:p>
+                      <a:pPr marL="0" marR="0" indent="0" algn="l" defTabSz="914400" rtl="0" eaLnBrk="1" fontAlgn="auto" latinLnBrk="0" hangingPunct="1">
+                        <a:lnSpc>
+                          <a:spcPct val="100000"/>
+                        </a:lnSpc>
+                        <a:spcBef>
+                          <a:spcPts val="0"/>
+                        </a:spcBef>
+                        <a:spcAft>
+                          <a:spcPts val="0"/>
+                        </a:spcAft>
+                        <a:buClrTx/>
+                        <a:buSzTx/>
+                        <a:buFontTx/>
+                        <a:buNone/>
+                        <a:tabLst/>
+                        <a:defRPr/>
+                      </a:pPr>
+                      <a:r>
+                        <a:rPr lang="ru-RU" dirty="0" smtClean="0"/>
+                        <a:t>4 </a:t>
+                      </a:r>
+                      <a:r>
+                        <a:rPr lang="ru-RU" dirty="0" smtClean="0"/>
+                        <a:t>неделя</a:t>
+                      </a:r>
+                    </a:p>
+                  </a:txBody>
+                  <a:tcPr/>
+                </a:tc>
+              </a:tr>
+              <a:tr h="1531620">
+                <a:tc>
+                  <a:txBody>
+                    <a:bodyPr/>
+                    <a:lstStyle/>
+                    <a:p>
+                      <a:endParaRPr lang="ru-RU" dirty="0"/>
+                    </a:p>
+                  </a:txBody>
+                  <a:tcPr/>
+                </a:tc>
+                <a:tc>
+                  <a:txBody>
+                    <a:bodyPr/>
+                    <a:lstStyle/>
+                    <a:p>
+                      <a:endParaRPr lang="ru-RU" dirty="0"/>
+                    </a:p>
+                  </a:txBody>
+                  <a:tcPr/>
+                </a:tc>
+                <a:tc>
+                  <a:txBody>
+                    <a:bodyPr/>
+                    <a:lstStyle/>
+                    <a:p>
+                      <a:endParaRPr lang="ru-RU"/>
+                    </a:p>
+                  </a:txBody>
+                  <a:tcPr/>
+                </a:tc>
+                <a:tc>
+                  <a:txBody>
+                    <a:bodyPr/>
+                    <a:lstStyle/>
+                    <a:p>
+                      <a:endParaRPr lang="ru-RU" dirty="0"/>
+                    </a:p>
+                  </a:txBody>
+                  <a:tcPr/>
+                </a:tc>
+              </a:tr>
+            </a:tbl>
+          </a:graphicData>
+        </a:graphic>
+      </p:graphicFrame>
+    </p:spTree>
+    <p:extLst>
+      <p:ext uri="{BB962C8B-B14F-4D97-AF65-F5344CB8AC3E}">
+        <p14:creationId xmlns:p14="http://schemas.microsoft.com/office/powerpoint/2010/main" val="1055535192"/>
+      </p:ext>
+    </p:extLst>
+  </p:cSld>
+  <p:clrMapOvr>
+    <a:masterClrMapping/>
+  </p:clrMapOvr>
+  <p:timing>
+    <p:tnLst>
+      <p:par>
+        <p:cTn id="1" dur="indefinite" restart="never" nodeType="tmRoot"/>
+      </p:par>
+    </p:tnLst>
+  </p:timing>
+</p:sld>
+</file>
+
+<file path=ppt/slides/slide11.xml><?xml version="1.0" encoding="utf-8"?>
+<p:sld xmlns:a="http://schemas.openxmlformats.org/drawingml/2006/main" xmlns:r="http://schemas.openxmlformats.org/officeDocument/2006/relationships" xmlns:p="http://schemas.openxmlformats.org/presentationml/2006/main">
+  <p:cSld>
+    <p:spTree>
+      <p:nvGrpSpPr>
+        <p:cNvPr id="1" name=""/>
+        <p:cNvGrpSpPr/>
+        <p:nvPr/>
+      </p:nvGrpSpPr>
+      <p:grpSpPr>
+        <a:xfrm>
+          <a:off x="0" y="0"/>
+          <a:ext cx="0" cy="0"/>
+          <a:chOff x="0" y="0"/>
+          <a:chExt cx="0" cy="0"/>
+        </a:xfrm>
+      </p:grpSpPr>
+      <p:sp>
+        <p:nvSpPr>
+          <p:cNvPr id="2" name="Заголовок 1"/>
+          <p:cNvSpPr>
+            <a:spLocks noGrp="1"/>
+          </p:cNvSpPr>
+          <p:nvPr>
+            <p:ph type="title"/>
+          </p:nvPr>
+        </p:nvSpPr>
+        <p:spPr/>
+        <p:txBody>
+          <a:bodyPr/>
+          <a:lstStyle/>
+          <a:p>
+            <a:pPr algn="ctr"/>
+            <a:r>
+              <a:rPr lang="ru-RU" dirty="0" smtClean="0"/>
+              <a:t>Целевая аудитория?</a:t>
+            </a:r>
+            <a:endParaRPr lang="ru-RU" dirty="0"/>
+          </a:p>
+        </p:txBody>
+      </p:sp>
+      <p:sp>
+        <p:nvSpPr>
+          <p:cNvPr id="3" name="Объект 2"/>
+          <p:cNvSpPr>
+            <a:spLocks noGrp="1"/>
+          </p:cNvSpPr>
+          <p:nvPr>
+            <p:ph idx="1"/>
+          </p:nvPr>
+        </p:nvSpPr>
+        <p:spPr/>
+        <p:txBody>
+          <a:bodyPr/>
+          <a:lstStyle/>
+          <a:p>
+            <a:endParaRPr lang="ru-RU" dirty="0"/>
+          </a:p>
+        </p:txBody>
+      </p:sp>
+    </p:spTree>
+    <p:extLst>
+      <p:ext uri="{BB962C8B-B14F-4D97-AF65-F5344CB8AC3E}">
+        <p14:creationId xmlns:p14="http://schemas.microsoft.com/office/powerpoint/2010/main" val="3359091378"/>
+      </p:ext>
+    </p:extLst>
+  </p:cSld>
+  <p:clrMapOvr>
+    <a:masterClrMapping/>
+  </p:clrMapOvr>
+  <p:timing>
+    <p:tnLst>
+      <p:par>
+        <p:cTn id="1" dur="indefinite" restart="never" nodeType="tmRoot"/>
+      </p:par>
+    </p:tnLst>
+  </p:timing>
+</p:sld>
+</file>
+
+<file path=ppt/slides/slide12.xml><?xml version="1.0" encoding="utf-8"?>
+<p:sld xmlns:a="http://schemas.openxmlformats.org/drawingml/2006/main" xmlns:r="http://schemas.openxmlformats.org/officeDocument/2006/relationships" xmlns:p="http://schemas.openxmlformats.org/presentationml/2006/main">
+  <p:cSld>
+    <p:spTree>
+      <p:nvGrpSpPr>
+        <p:cNvPr id="1" name=""/>
+        <p:cNvGrpSpPr/>
+        <p:nvPr/>
+      </p:nvGrpSpPr>
+      <p:grpSpPr>
+        <a:xfrm>
+          <a:off x="0" y="0"/>
+          <a:ext cx="0" cy="0"/>
+          <a:chOff x="0" y="0"/>
+          <a:chExt cx="0" cy="0"/>
+        </a:xfrm>
+      </p:grpSpPr>
+      <p:sp>
+        <p:nvSpPr>
+          <p:cNvPr id="2" name="Заголовок 1"/>
+          <p:cNvSpPr>
+            <a:spLocks noGrp="1"/>
+          </p:cNvSpPr>
+          <p:nvPr>
+            <p:ph type="title"/>
+          </p:nvPr>
+        </p:nvSpPr>
+        <p:spPr/>
+        <p:txBody>
+          <a:bodyPr/>
+          <a:lstStyle/>
+          <a:p>
+            <a:pPr algn="ctr"/>
+            <a:r>
+              <a:rPr lang="ru-RU" dirty="0" smtClean="0"/>
+              <a:t>Аналоги?</a:t>
+            </a:r>
+            <a:endParaRPr lang="ru-RU" dirty="0"/>
+          </a:p>
+        </p:txBody>
+      </p:sp>
+      <p:sp>
+        <p:nvSpPr>
+          <p:cNvPr id="3" name="Объект 2"/>
+          <p:cNvSpPr>
+            <a:spLocks noGrp="1"/>
+          </p:cNvSpPr>
+          <p:nvPr>
+            <p:ph idx="1"/>
+          </p:nvPr>
+        </p:nvSpPr>
+        <p:spPr/>
+        <p:txBody>
+          <a:bodyPr/>
+          <a:lstStyle/>
+          <a:p>
+            <a:endParaRPr lang="ru-RU"/>
+          </a:p>
+        </p:txBody>
+      </p:sp>
+    </p:spTree>
+    <p:extLst>
+      <p:ext uri="{BB962C8B-B14F-4D97-AF65-F5344CB8AC3E}">
+        <p14:creationId xmlns:p14="http://schemas.microsoft.com/office/powerpoint/2010/main" val="3480229567"/>
+      </p:ext>
+    </p:extLst>
+  </p:cSld>
+  <p:clrMapOvr>
+    <a:masterClrMapping/>
+  </p:clrMapOvr>
+  <p:timing>
+    <p:tnLst>
+      <p:par>
+        <p:cTn id="1" dur="indefinite" restart="never" nodeType="tmRoot"/>
+      </p:par>
+    </p:tnLst>
+  </p:timing>
+</p:sld>
+</file>
+
+<file path=ppt/slides/slide13.xml><?xml version="1.0" encoding="utf-8"?>
+<p:sld xmlns:a="http://schemas.openxmlformats.org/drawingml/2006/main" xmlns:r="http://schemas.openxmlformats.org/officeDocument/2006/relationships" xmlns:p="http://schemas.openxmlformats.org/presentationml/2006/main">
+  <p:cSld>
+    <p:spTree>
+      <p:nvGrpSpPr>
+        <p:cNvPr id="1" name=""/>
+        <p:cNvGrpSpPr/>
+        <p:nvPr/>
+      </p:nvGrpSpPr>
+      <p:grpSpPr>
+        <a:xfrm>
+          <a:off x="0" y="0"/>
+          <a:ext cx="0" cy="0"/>
+          <a:chOff x="0" y="0"/>
+          <a:chExt cx="0" cy="0"/>
+        </a:xfrm>
+      </p:grpSpPr>
+      <p:sp>
+        <p:nvSpPr>
+          <p:cNvPr id="2" name="Заголовок 1"/>
+          <p:cNvSpPr>
+            <a:spLocks noGrp="1"/>
+          </p:cNvSpPr>
+          <p:nvPr>
+            <p:ph type="title"/>
+          </p:nvPr>
+        </p:nvSpPr>
+        <p:spPr/>
+        <p:txBody>
+          <a:bodyPr/>
+          <a:lstStyle/>
+          <a:p>
+            <a:r>
+              <a:rPr lang="ru-RU" dirty="0"/>
+              <a:t>Итоги и </a:t>
+            </a:r>
+            <a:r>
+              <a:rPr lang="ru-RU" dirty="0" smtClean="0"/>
+              <a:t>возможные перспективы?</a:t>
+            </a:r>
+            <a:endParaRPr lang="ru-RU" dirty="0"/>
+          </a:p>
+        </p:txBody>
+      </p:sp>
+      <p:sp>
+        <p:nvSpPr>
+          <p:cNvPr id="3" name="Объект 2"/>
+          <p:cNvSpPr>
+            <a:spLocks noGrp="1"/>
+          </p:cNvSpPr>
+          <p:nvPr>
+            <p:ph sz="half" idx="1"/>
+          </p:nvPr>
+        </p:nvSpPr>
+        <p:spPr/>
+        <p:txBody>
+          <a:bodyPr>
+            <a:normAutofit fontScale="92500"/>
+          </a:bodyPr>
+          <a:lstStyle/>
+          <a:p>
+            <a:pPr marL="0" indent="0">
+              <a:buNone/>
+            </a:pPr>
+            <a:r>
+              <a:rPr lang="ru-RU" b="1" dirty="0"/>
+              <a:t>Что сделано:</a:t>
+            </a:r>
+            <a:endParaRPr lang="ru-RU" dirty="0"/>
+          </a:p>
+          <a:p>
+            <a:r>
+              <a:rPr lang="ru-RU" dirty="0"/>
+              <a:t>создан конвертер валют с актуальными курсами ЦБ РФ;</a:t>
+            </a:r>
+          </a:p>
+          <a:p>
+            <a:r>
+              <a:rPr lang="ru-RU" dirty="0"/>
+              <a:t>реализован консольный интерфейс;</a:t>
+            </a:r>
+          </a:p>
+          <a:p>
+            <a:r>
+              <a:rPr lang="ru-RU" dirty="0"/>
+              <a:t>обеспечена устойчивость к </a:t>
+            </a:r>
+            <a:r>
+              <a:rPr lang="ru-RU" dirty="0" smtClean="0"/>
+              <a:t>ошибкам</a:t>
+            </a:r>
+            <a:endParaRPr lang="ru-RU" dirty="0"/>
+          </a:p>
+          <a:p>
+            <a:pPr marL="0" indent="0">
+              <a:buNone/>
+            </a:pPr>
+            <a:endParaRPr lang="ru-RU" dirty="0"/>
+          </a:p>
+        </p:txBody>
+      </p:sp>
+      <p:sp>
+        <p:nvSpPr>
+          <p:cNvPr id="4" name="Объект 3"/>
+          <p:cNvSpPr>
+            <a:spLocks noGrp="1"/>
+          </p:cNvSpPr>
+          <p:nvPr>
+            <p:ph sz="half" idx="2"/>
+          </p:nvPr>
+        </p:nvSpPr>
+        <p:spPr/>
+        <p:txBody>
+          <a:bodyPr>
+            <a:normAutofit fontScale="92500"/>
+          </a:bodyPr>
+          <a:lstStyle/>
+          <a:p>
+            <a:pPr marL="0" indent="0">
+              <a:buNone/>
+            </a:pPr>
+            <a:r>
+              <a:rPr lang="ru-RU" b="1" dirty="0" smtClean="0"/>
+              <a:t>Возможные</a:t>
+            </a:r>
+            <a:r>
+              <a:rPr lang="ru-RU" b="1" dirty="0"/>
+              <a:t> расширения:</a:t>
+            </a:r>
+            <a:endParaRPr lang="ru-RU" dirty="0"/>
+          </a:p>
+          <a:p>
+            <a:pPr>
+              <a:buFont typeface="Tw Cen MT" panose="020B0602020104020603" pitchFamily="34" charset="0"/>
+              <a:buChar char="+"/>
+            </a:pPr>
+            <a:r>
+              <a:rPr lang="ru-RU" dirty="0"/>
+              <a:t>добавление других валют;</a:t>
+            </a:r>
+          </a:p>
+          <a:p>
+            <a:pPr>
+              <a:buFont typeface="Tw Cen MT" panose="020B0602020104020603" pitchFamily="34" charset="0"/>
+              <a:buChar char="+"/>
+            </a:pPr>
+            <a:r>
+              <a:rPr lang="ru-RU" dirty="0"/>
+              <a:t>сохранение истории курсов;</a:t>
+            </a:r>
+          </a:p>
+          <a:p>
+            <a:pPr>
+              <a:buFont typeface="Tw Cen MT" panose="020B0602020104020603" pitchFamily="34" charset="0"/>
+              <a:buChar char="+"/>
+            </a:pPr>
+            <a:r>
+              <a:rPr lang="ru-RU" dirty="0"/>
+              <a:t>графический интерфейс (GUI);</a:t>
+            </a:r>
+          </a:p>
+          <a:p>
+            <a:pPr>
+              <a:buFont typeface="Tw Cen MT" panose="020B0602020104020603" pitchFamily="34" charset="0"/>
+              <a:buChar char="+"/>
+            </a:pPr>
+            <a:r>
+              <a:rPr lang="ru-RU" dirty="0" smtClean="0"/>
+              <a:t>веб‑версия;</a:t>
+            </a:r>
+            <a:endParaRPr lang="ru-RU" dirty="0"/>
+          </a:p>
+          <a:p>
+            <a:pPr>
+              <a:buFont typeface="Tw Cen MT" panose="020B0602020104020603" pitchFamily="34" charset="0"/>
+              <a:buChar char="+"/>
+            </a:pPr>
+            <a:r>
+              <a:rPr lang="ru-RU" dirty="0"/>
+              <a:t>уведомления об изменении курса.</a:t>
+            </a:r>
+          </a:p>
+          <a:p>
+            <a:endParaRPr lang="ru-RU" dirty="0"/>
+          </a:p>
+        </p:txBody>
+      </p:sp>
+    </p:spTree>
+    <p:extLst>
+      <p:ext uri="{BB962C8B-B14F-4D97-AF65-F5344CB8AC3E}">
+        <p14:creationId xmlns:p14="http://schemas.microsoft.com/office/powerpoint/2010/main" val="983863493"/>
+      </p:ext>
+    </p:extLst>
+  </p:cSld>
+  <p:clrMapOvr>
+    <a:masterClrMapping/>
+  </p:clrMapOvr>
+  <p:timing>
+    <p:tnLst>
+      <p:par>
+        <p:cTn id="1" dur="indefinite" restart="never" nodeType="tmRoot"/>
+      </p:par>
+    </p:tnLst>
+  </p:timing>
+</p:sld>
+</file>
+
+<file path=ppt/slides/slide14.xml><?xml version="1.0" encoding="utf-8"?>
+<p:sld xmlns:a="http://schemas.openxmlformats.org/drawingml/2006/main" xmlns:r="http://schemas.openxmlformats.org/officeDocument/2006/relationships" xmlns:p="http://schemas.openxmlformats.org/presentationml/2006/main">
+  <p:cSld>
+    <p:spTree>
+      <p:nvGrpSpPr>
+        <p:cNvPr id="1" name=""/>
+        <p:cNvGrpSpPr/>
+        <p:nvPr/>
+      </p:nvGrpSpPr>
+      <p:grpSpPr>
+        <a:xfrm>
+          <a:off x="0" y="0"/>
+          <a:ext cx="0" cy="0"/>
+          <a:chOff x="0" y="0"/>
+          <a:chExt cx="0" cy="0"/>
+        </a:xfrm>
+      </p:grpSpPr>
+      <p:sp>
+        <p:nvSpPr>
           <p:cNvPr id="5" name="Заголовок 4"/>
           <p:cNvSpPr>
             <a:spLocks noGrp="1"/>
@@ -12626,44 +13261,20 @@
             <a:pPr algn="ctr"/>
             <a:r>
               <a:rPr lang="ru-RU" sz="9600" dirty="0" smtClean="0"/>
-              <a:t>?ВОПРОСЫ </a:t>
+              <a:t>?ВОПРОСЫ</a:t>
+            </a:r>
+            <a:r>
+              <a:rPr lang="ru-RU" sz="9600" dirty="0"/>
+              <a:t>?</a:t>
             </a:r>
             <a:r>
               <a:rPr lang="ru-RU" sz="9600" dirty="0" smtClean="0"/>
-              <a:t>Есть?</a:t>
+              <a:t/>
             </a:r>
             <a:br>
               <a:rPr lang="ru-RU" sz="9600" dirty="0" smtClean="0"/>
             </a:br>
             <a:endParaRPr lang="ru-RU" sz="1800" dirty="0"/>
-          </a:p>
-        </p:txBody>
-      </p:sp>
-      <p:sp>
-        <p:nvSpPr>
-          <p:cNvPr id="6" name="Прямоугольник 5"/>
-          <p:cNvSpPr/>
-          <p:nvPr/>
-        </p:nvSpPr>
-        <p:spPr>
-          <a:xfrm>
-            <a:off x="4883150" y="3781363"/>
-            <a:ext cx="2422523" cy="369332"/>
-          </a:xfrm>
-          <a:prstGeom prst="rect">
-            <a:avLst/>
-          </a:prstGeom>
-        </p:spPr>
-        <p:txBody>
-          <a:bodyPr wrap="none">
-            <a:spAutoFit/>
-          </a:bodyPr>
-          <a:lstStyle/>
-          <a:p>
-            <a:r>
-              <a:rPr lang="ru-RU" dirty="0"/>
-              <a:t>!Если да, то задавайте!</a:t>
-            </a:r>
           </a:p>
         </p:txBody>
       </p:sp>
@@ -12687,7 +13298,7 @@
 </p:sld>
 </file>
 
-<file path=ppt/slides/slide11.xml><?xml version="1.0" encoding="utf-8"?>
+<file path=ppt/slides/slide15.xml><?xml version="1.0" encoding="utf-8"?>
 <p:sld xmlns:a="http://schemas.openxmlformats.org/drawingml/2006/main" xmlns:r="http://schemas.openxmlformats.org/officeDocument/2006/relationships" xmlns:p="http://schemas.openxmlformats.org/presentationml/2006/main">
   <p:cSld>
     <p:spTree>
@@ -13016,6 +13627,7 @@
           <a:bodyPr/>
           <a:lstStyle/>
           <a:p>
+            <a:pPr algn="ctr"/>
             <a:r>
               <a:rPr lang="ru-RU" dirty="0" smtClean="0"/>
               <a:t>Что должен уметь проект</a:t>
@@ -13115,7 +13727,7 @@
       </p:pic>
       <p:pic>
         <p:nvPicPr>
-          <p:cNvPr id="5" name="Рисунок 4"/>
+          <p:cNvPr id="6" name="Рисунок 5"/>
           <p:cNvPicPr>
             <a:picLocks noChangeAspect="1"/>
           </p:cNvPicPr>
@@ -13123,36 +13735,6 @@
         </p:nvPicPr>
         <p:blipFill>
           <a:blip r:embed="rId3" cstate="print">
-            <a:extLst>
-              <a:ext uri="{28A0092B-C50C-407E-A947-70E740481C1C}">
-                <a14:useLocalDpi xmlns:a14="http://schemas.microsoft.com/office/drawing/2010/main" val="0"/>
-              </a:ext>
-            </a:extLst>
-          </a:blip>
-          <a:stretch>
-            <a:fillRect/>
-          </a:stretch>
-        </p:blipFill>
-        <p:spPr>
-          <a:xfrm>
-            <a:off x="772770" y="4010659"/>
-            <a:ext cx="368641" cy="368641"/>
-          </a:xfrm>
-          <a:prstGeom prst="rect">
-            <a:avLst/>
-          </a:prstGeom>
-        </p:spPr>
-      </p:pic>
-      <p:pic>
-        <p:nvPicPr>
-          <p:cNvPr id="6" name="Рисунок 5"/>
-          <p:cNvPicPr>
-            <a:picLocks noChangeAspect="1"/>
-          </p:cNvPicPr>
-          <p:nvPr/>
-        </p:nvPicPr>
-        <p:blipFill>
-          <a:blip r:embed="rId4" cstate="print">
             <a:extLst>
               <a:ext uri="{28A0092B-C50C-407E-A947-70E740481C1C}">
                 <a14:useLocalDpi xmlns:a14="http://schemas.microsoft.com/office/drawing/2010/main" val="0"/>
@@ -13182,7 +13764,7 @@
           <p:nvPr/>
         </p:nvPicPr>
         <p:blipFill>
-          <a:blip r:embed="rId5" cstate="print">
+          <a:blip r:embed="rId4" cstate="print">
             <a:extLst>
               <a:ext uri="{28A0092B-C50C-407E-A947-70E740481C1C}">
                 <a14:useLocalDpi xmlns:a14="http://schemas.microsoft.com/office/drawing/2010/main" val="0"/>
@@ -13197,6 +13779,36 @@
           <a:xfrm>
             <a:off x="771229" y="2934061"/>
             <a:ext cx="370182" cy="370182"/>
+          </a:xfrm>
+          <a:prstGeom prst="rect">
+            <a:avLst/>
+          </a:prstGeom>
+        </p:spPr>
+      </p:pic>
+      <p:pic>
+        <p:nvPicPr>
+          <p:cNvPr id="8" name="Рисунок 7"/>
+          <p:cNvPicPr>
+            <a:picLocks noChangeAspect="1"/>
+          </p:cNvPicPr>
+          <p:nvPr/>
+        </p:nvPicPr>
+        <p:blipFill>
+          <a:blip r:embed="rId5" cstate="print">
+            <a:extLst>
+              <a:ext uri="{28A0092B-C50C-407E-A947-70E740481C1C}">
+                <a14:useLocalDpi xmlns:a14="http://schemas.microsoft.com/office/drawing/2010/main" val="0"/>
+              </a:ext>
+            </a:extLst>
+          </a:blip>
+          <a:stretch>
+            <a:fillRect/>
+          </a:stretch>
+        </p:blipFill>
+        <p:spPr>
+          <a:xfrm>
+            <a:off x="771971" y="4004925"/>
+            <a:ext cx="369440" cy="369440"/>
           </a:xfrm>
           <a:prstGeom prst="rect">
             <a:avLst/>
@@ -13255,6 +13867,7 @@
           <a:bodyPr/>
           <a:lstStyle/>
           <a:p>
+            <a:pPr algn="ctr"/>
             <a:r>
               <a:rPr lang="ru-RU" dirty="0" smtClean="0"/>
               <a:t>Что использовано?</a:t>
@@ -13331,7 +13944,7 @@
               <a:t> библиотека </a:t>
             </a:r>
             <a:r>
-              <a:rPr lang="en-US" b="1" dirty="0" err="1"/>
+              <a:rPr lang="en-US" b="1" dirty="0"/>
               <a:t>datetime</a:t>
             </a:r>
             <a:r>
@@ -13402,6 +14015,7 @@
           <a:bodyPr/>
           <a:lstStyle/>
           <a:p>
+            <a:pPr algn="ctr"/>
             <a:r>
               <a:rPr lang="ru-RU" dirty="0" smtClean="0"/>
               <a:t>Структура проекта?</a:t>
@@ -13519,9 +14133,10 @@
           <a:bodyPr/>
           <a:lstStyle/>
           <a:p>
+            <a:pPr algn="ctr"/>
             <a:r>
               <a:rPr lang="ru-RU" dirty="0" smtClean="0"/>
-              <a:t>Логика конвертации?</a:t>
+              <a:t>Монетизация?</a:t>
             </a:r>
             <a:endParaRPr lang="ru-RU" dirty="0"/>
           </a:p>
@@ -13539,57 +14154,108 @@
         </p:nvSpPr>
         <p:spPr/>
         <p:txBody>
-          <a:bodyPr/>
+          <a:bodyPr>
+            <a:normAutofit fontScale="92500" lnSpcReduction="20000"/>
+          </a:bodyPr>
           <a:lstStyle/>
           <a:p>
-            <a:pPr marL="0" indent="0">
+            <a:pPr marL="0" indent="0" algn="ctr">
               <a:buNone/>
             </a:pPr>
             <a:r>
-              <a:rPr lang="ru-RU" b="1" dirty="0" smtClean="0"/>
-              <a:t>Формула:</a:t>
-            </a:r>
-          </a:p>
-          <a:p>
-            <a:pPr marL="0" indent="0">
-              <a:buNone/>
+              <a:rPr lang="ru-RU" dirty="0" smtClean="0"/>
+              <a:t>!!Это будет стоить 99</a:t>
+            </a:r>
+            <a:r>
+              <a:rPr lang="en-US" dirty="0" smtClean="0"/>
+              <a:t>’</a:t>
+            </a:r>
+            <a:r>
+              <a:rPr lang="ru-RU" dirty="0" smtClean="0"/>
+              <a:t>999 руб. !!</a:t>
+            </a:r>
+          </a:p>
+          <a:p>
+            <a:pPr algn="ctr">
+              <a:buFont typeface="Wingdings" panose="05000000000000000000" pitchFamily="2" charset="2"/>
+              <a:buChar char="J"/>
             </a:pPr>
             <a:r>
               <a:rPr lang="ru-RU" dirty="0" smtClean="0"/>
-              <a:t>сумма_в_валюте = </a:t>
+              <a:t>просто ради прикола </a:t>
+            </a:r>
+            <a:r>
+              <a:rPr lang="ru-RU" dirty="0" smtClean="0">
+                <a:sym typeface="Wingdings" panose="05000000000000000000" pitchFamily="2" charset="2"/>
+              </a:rPr>
+              <a:t></a:t>
+            </a:r>
+          </a:p>
+          <a:p>
+            <a:pPr marL="0" indent="0" algn="ctr">
+              <a:buNone/>
+            </a:pPr>
+            <a:r>
+              <a:rPr lang="ru-RU" dirty="0"/>
+              <a:t>Но у этого </a:t>
             </a:r>
             <a:r>
               <a:rPr lang="ru-RU" dirty="0" smtClean="0"/>
-              <a:t>курс</a:t>
-            </a:r>
-            <a:r>
-              <a:rPr lang="en-US" dirty="0" smtClean="0"/>
-              <a:t> </a:t>
-            </a:r>
-            <a:r>
-              <a:rPr lang="ru-RU" dirty="0" smtClean="0"/>
-              <a:t>/</a:t>
-            </a:r>
-            <a:r>
-              <a:rPr lang="en-US" dirty="0" smtClean="0"/>
-              <a:t> </a:t>
-            </a:r>
-            <a:r>
-              <a:rPr lang="ru-RU" dirty="0" err="1" smtClean="0"/>
-              <a:t>сумма_в_рублях</a:t>
-            </a:r>
-            <a:r>
-              <a:rPr lang="ru-RU" dirty="0" smtClean="0"/>
-              <a:t>​</a:t>
+              <a:t>проекта будет скидка 99,9%</a:t>
             </a:r>
             <a:endParaRPr lang="ru-RU" dirty="0"/>
+          </a:p>
+          <a:p>
+            <a:pPr marL="0" indent="0" algn="ctr">
+              <a:buNone/>
+            </a:pPr>
+            <a:endParaRPr lang="ru-RU" dirty="0">
+              <a:sym typeface="Wingdings" panose="05000000000000000000" pitchFamily="2" charset="2"/>
+            </a:endParaRPr>
+          </a:p>
+          <a:p>
+            <a:pPr algn="ctr">
+              <a:buFont typeface="Wingdings" panose="05000000000000000000" pitchFamily="2" charset="2"/>
+              <a:buChar char="J"/>
+            </a:pPr>
+            <a:endParaRPr lang="ru-RU" dirty="0" smtClean="0">
+              <a:sym typeface="Wingdings" panose="05000000000000000000" pitchFamily="2" charset="2"/>
+            </a:endParaRPr>
+          </a:p>
+          <a:p>
+            <a:pPr marL="0" indent="0" algn="ctr">
+              <a:buNone/>
+            </a:pPr>
+            <a:endParaRPr lang="ru-RU" dirty="0" smtClean="0">
+              <a:sym typeface="Wingdings" panose="05000000000000000000" pitchFamily="2" charset="2"/>
+            </a:endParaRPr>
+          </a:p>
+          <a:p>
+            <a:pPr marL="0" indent="0" algn="r">
+              <a:buNone/>
+            </a:pPr>
+            <a:endParaRPr lang="ru-RU" sz="1400" dirty="0" smtClean="0">
+              <a:sym typeface="Wingdings" panose="05000000000000000000" pitchFamily="2" charset="2"/>
+            </a:endParaRPr>
+          </a:p>
+          <a:p>
+            <a:pPr marL="0" indent="0" algn="r">
+              <a:buNone/>
+            </a:pPr>
+            <a:r>
+              <a:rPr lang="ru-RU" sz="1400" dirty="0" smtClean="0">
+                <a:sym typeface="Wingdings" panose="05000000000000000000" pitchFamily="2" charset="2"/>
+              </a:rPr>
+              <a:t>А то этих конвертеров слишком много развелось </a:t>
+            </a:r>
+            <a:endParaRPr lang="ru-RU" sz="1400" dirty="0"/>
           </a:p>
         </p:txBody>
       </p:sp>
     </p:spTree>
     <p:extLst>
       <p:ext uri="{BB962C8B-B14F-4D97-AF65-F5344CB8AC3E}">
-        <p14:creationId xmlns:p14="http://schemas.microsoft.com/office/powerpoint/2010/main" val="2391969276"/>
+        <p14:creationId xmlns:p14="http://schemas.microsoft.com/office/powerpoint/2010/main" val="3488279042"/>
       </p:ext>
     </p:extLst>
   </p:cSld>
@@ -13638,9 +14304,10 @@
           <a:bodyPr/>
           <a:lstStyle/>
           <a:p>
+            <a:pPr algn="ctr"/>
             <a:r>
               <a:rPr lang="ru-RU" dirty="0" smtClean="0"/>
-              <a:t>Взаимодействие с программой?</a:t>
+              <a:t>Логика конвертации?</a:t>
             </a:r>
             <a:endParaRPr lang="ru-RU" dirty="0"/>
           </a:p>
@@ -13658,77 +14325,41 @@
         </p:nvSpPr>
         <p:spPr/>
         <p:txBody>
-          <a:bodyPr>
-            <a:normAutofit fontScale="92500" lnSpcReduction="20000"/>
-          </a:bodyPr>
+          <a:bodyPr/>
           <a:lstStyle/>
           <a:p>
-            <a:pPr marL="0" indent="0">
+            <a:pPr marL="0" indent="0" algn="ctr">
               <a:buNone/>
             </a:pPr>
             <a:r>
               <a:rPr lang="ru-RU" b="1" dirty="0" smtClean="0"/>
-              <a:t>Пример диалога:</a:t>
-            </a:r>
-          </a:p>
-          <a:p>
-            <a:pPr marL="0" indent="0">
+              <a:t>Формула:</a:t>
+            </a:r>
+          </a:p>
+          <a:p>
+            <a:pPr marL="0" indent="0" algn="ctr">
               <a:buNone/>
             </a:pPr>
             <a:r>
-              <a:rPr lang="ru-RU" dirty="0"/>
-              <a:t>Введите, что вы хотите сделать (1 — Узнать курс на сегодня; 2 — Конвертер валют в рубли): 1</a:t>
-            </a:r>
-          </a:p>
-          <a:p>
-            <a:pPr marL="0" indent="0">
-              <a:buNone/>
-            </a:pPr>
-            <a:r>
-              <a:rPr lang="ru-RU" dirty="0"/>
-              <a:t>Курсы валют на 06.04.2026:</a:t>
-            </a:r>
-          </a:p>
-          <a:p>
-            <a:pPr marL="0" indent="0">
-              <a:buNone/>
-            </a:pPr>
-            <a:r>
-              <a:rPr lang="ru-RU" dirty="0"/>
-              <a:t>Доллар США (USD): 92.50 руб.</a:t>
-            </a:r>
-          </a:p>
-          <a:p>
-            <a:pPr marL="0" indent="0">
-              <a:buNone/>
-            </a:pPr>
-            <a:r>
-              <a:rPr lang="ru-RU" dirty="0"/>
-              <a:t>Евро (EUR): 99.80 руб.</a:t>
-            </a:r>
-          </a:p>
-          <a:p>
-            <a:pPr marL="0" indent="0">
-              <a:buNone/>
-            </a:pPr>
-            <a:r>
-              <a:rPr lang="ru-RU" dirty="0"/>
-              <a:t>Китайский юань (CNY): 12.75 руб.</a:t>
-            </a:r>
-          </a:p>
-          <a:p>
-            <a:pPr marL="0" indent="0">
-              <a:buNone/>
-            </a:pPr>
-            <a:r>
-              <a:rPr lang="ru-RU" dirty="0"/>
-              <a:t>Фунт стерлингов (GBP): 115.20 руб.</a:t>
-            </a:r>
-          </a:p>
-          <a:p>
-            <a:pPr marL="0" indent="0">
-              <a:buNone/>
-            </a:pPr>
+              <a:rPr lang="ru-RU" dirty="0" smtClean="0"/>
+              <a:t>сумма_в_валюте = курс</a:t>
+            </a:r>
+            <a:r>
+              <a:rPr lang="en-US" dirty="0" smtClean="0"/>
+              <a:t> </a:t>
+            </a:r>
+            <a:r>
+              <a:rPr lang="ru-RU" dirty="0" smtClean="0"/>
+              <a:t>/</a:t>
+            </a:r>
+            <a:r>
+              <a:rPr lang="en-US" dirty="0" smtClean="0"/>
+              <a:t> </a:t>
+            </a:r>
+            <a:r>
+              <a:rPr lang="ru-RU" dirty="0" smtClean="0"/>
+              <a:t>сумма_в_рублях​</a:t>
+            </a:r>
             <a:endParaRPr lang="ru-RU" dirty="0"/>
           </a:p>
         </p:txBody>
@@ -13736,7 +14367,7 @@
     </p:spTree>
     <p:extLst>
       <p:ext uri="{BB962C8B-B14F-4D97-AF65-F5344CB8AC3E}">
-        <p14:creationId xmlns:p14="http://schemas.microsoft.com/office/powerpoint/2010/main" val="3152510282"/>
+        <p14:creationId xmlns:p14="http://schemas.microsoft.com/office/powerpoint/2010/main" val="2391969276"/>
       </p:ext>
     </p:extLst>
   </p:cSld>
@@ -13785,6 +14416,155 @@
           <a:bodyPr/>
           <a:lstStyle/>
           <a:p>
+            <a:pPr algn="ctr"/>
+            <a:r>
+              <a:rPr lang="ru-RU" dirty="0" smtClean="0"/>
+              <a:t>Взаимодействие с программой?</a:t>
+            </a:r>
+            <a:endParaRPr lang="ru-RU" dirty="0"/>
+          </a:p>
+        </p:txBody>
+      </p:sp>
+      <p:sp>
+        <p:nvSpPr>
+          <p:cNvPr id="3" name="Объект 2"/>
+          <p:cNvSpPr>
+            <a:spLocks noGrp="1"/>
+          </p:cNvSpPr>
+          <p:nvPr>
+            <p:ph idx="1"/>
+          </p:nvPr>
+        </p:nvSpPr>
+        <p:spPr/>
+        <p:txBody>
+          <a:bodyPr>
+            <a:normAutofit fontScale="92500" lnSpcReduction="20000"/>
+          </a:bodyPr>
+          <a:lstStyle/>
+          <a:p>
+            <a:pPr marL="0" indent="0">
+              <a:buNone/>
+            </a:pPr>
+            <a:r>
+              <a:rPr lang="ru-RU" b="1" dirty="0" smtClean="0"/>
+              <a:t>Пример диалога:</a:t>
+            </a:r>
+          </a:p>
+          <a:p>
+            <a:pPr marL="0" indent="0">
+              <a:buNone/>
+            </a:pPr>
+            <a:r>
+              <a:rPr lang="ru-RU" dirty="0"/>
+              <a:t>Введите, что вы хотите сделать (1 — Узнать курс на сегодня; 2 — Конвертер валют в рубли): 1</a:t>
+            </a:r>
+          </a:p>
+          <a:p>
+            <a:pPr marL="0" indent="0">
+              <a:buNone/>
+            </a:pPr>
+            <a:r>
+              <a:rPr lang="ru-RU" dirty="0"/>
+              <a:t>Курсы валют на 06.04.2026:</a:t>
+            </a:r>
+          </a:p>
+          <a:p>
+            <a:pPr marL="0" indent="0">
+              <a:buNone/>
+            </a:pPr>
+            <a:r>
+              <a:rPr lang="ru-RU" dirty="0"/>
+              <a:t>Доллар США (USD): 92.50 руб.</a:t>
+            </a:r>
+          </a:p>
+          <a:p>
+            <a:pPr marL="0" indent="0">
+              <a:buNone/>
+            </a:pPr>
+            <a:r>
+              <a:rPr lang="ru-RU" dirty="0"/>
+              <a:t>Евро (EUR): 99.80 руб.</a:t>
+            </a:r>
+          </a:p>
+          <a:p>
+            <a:pPr marL="0" indent="0">
+              <a:buNone/>
+            </a:pPr>
+            <a:r>
+              <a:rPr lang="ru-RU" dirty="0"/>
+              <a:t>Китайский юань (CNY): 12.75 руб.</a:t>
+            </a:r>
+          </a:p>
+          <a:p>
+            <a:pPr marL="0" indent="0">
+              <a:buNone/>
+            </a:pPr>
+            <a:r>
+              <a:rPr lang="ru-RU" dirty="0"/>
+              <a:t>Фунт стерлингов (GBP): 115.20 руб.</a:t>
+            </a:r>
+          </a:p>
+          <a:p>
+            <a:pPr marL="0" indent="0">
+              <a:buNone/>
+            </a:pPr>
+            <a:endParaRPr lang="ru-RU" dirty="0"/>
+          </a:p>
+        </p:txBody>
+      </p:sp>
+    </p:spTree>
+    <p:extLst>
+      <p:ext uri="{BB962C8B-B14F-4D97-AF65-F5344CB8AC3E}">
+        <p14:creationId xmlns:p14="http://schemas.microsoft.com/office/powerpoint/2010/main" val="3152510282"/>
+      </p:ext>
+    </p:extLst>
+  </p:cSld>
+  <p:clrMapOvr>
+    <a:masterClrMapping/>
+  </p:clrMapOvr>
+  <p:timing>
+    <p:tnLst>
+      <p:par>
+        <p:cTn id="1" dur="indefinite" restart="never" nodeType="tmRoot"/>
+      </p:par>
+    </p:tnLst>
+  </p:timing>
+</p:sld>
+</file>
+
+<file path=ppt/slides/slide8.xml><?xml version="1.0" encoding="utf-8"?>
+<p:sld xmlns:a="http://schemas.openxmlformats.org/drawingml/2006/main" xmlns:r="http://schemas.openxmlformats.org/officeDocument/2006/relationships" xmlns:p="http://schemas.openxmlformats.org/presentationml/2006/main">
+  <p:cSld>
+    <p:spTree>
+      <p:nvGrpSpPr>
+        <p:cNvPr id="1" name=""/>
+        <p:cNvGrpSpPr/>
+        <p:nvPr/>
+      </p:nvGrpSpPr>
+      <p:grpSpPr>
+        <a:xfrm>
+          <a:off x="0" y="0"/>
+          <a:ext cx="0" cy="0"/>
+          <a:chOff x="0" y="0"/>
+          <a:chExt cx="0" cy="0"/>
+        </a:xfrm>
+      </p:grpSpPr>
+      <p:sp>
+        <p:nvSpPr>
+          <p:cNvPr id="2" name="Заголовок 1"/>
+          <p:cNvSpPr>
+            <a:spLocks noGrp="1"/>
+          </p:cNvSpPr>
+          <p:nvPr>
+            <p:ph type="title"/>
+          </p:nvPr>
+        </p:nvSpPr>
+        <p:spPr/>
+        <p:txBody>
+          <a:bodyPr/>
+          <a:lstStyle/>
+          <a:p>
+            <a:pPr algn="ctr"/>
             <a:r>
               <a:rPr lang="ru-RU" dirty="0"/>
               <a:t>Устойчивость к </a:t>
@@ -14176,219 +14956,6 @@
 </p:sld>
 </file>
 
-<file path=ppt/slides/slide8.xml><?xml version="1.0" encoding="utf-8"?>
-<p:sld xmlns:a="http://schemas.openxmlformats.org/drawingml/2006/main" xmlns:r="http://schemas.openxmlformats.org/officeDocument/2006/relationships" xmlns:p="http://schemas.openxmlformats.org/presentationml/2006/main">
-  <p:cSld>
-    <p:spTree>
-      <p:nvGrpSpPr>
-        <p:cNvPr id="1" name=""/>
-        <p:cNvGrpSpPr/>
-        <p:nvPr/>
-      </p:nvGrpSpPr>
-      <p:grpSpPr>
-        <a:xfrm>
-          <a:off x="0" y="0"/>
-          <a:ext cx="0" cy="0"/>
-          <a:chOff x="0" y="0"/>
-          <a:chExt cx="0" cy="0"/>
-        </a:xfrm>
-      </p:grpSpPr>
-      <p:sp>
-        <p:nvSpPr>
-          <p:cNvPr id="2" name="Заголовок 1"/>
-          <p:cNvSpPr>
-            <a:spLocks noGrp="1"/>
-          </p:cNvSpPr>
-          <p:nvPr>
-            <p:ph type="title"/>
-          </p:nvPr>
-        </p:nvSpPr>
-        <p:spPr/>
-        <p:txBody>
-          <a:bodyPr/>
-          <a:lstStyle/>
-          <a:p>
-            <a:r>
-              <a:rPr lang="ru-RU" dirty="0"/>
-              <a:t>Как запустить и использовать?</a:t>
-            </a:r>
-          </a:p>
-        </p:txBody>
-      </p:sp>
-      <p:sp>
-        <p:nvSpPr>
-          <p:cNvPr id="3" name="Объект 2"/>
-          <p:cNvSpPr>
-            <a:spLocks noGrp="1"/>
-          </p:cNvSpPr>
-          <p:nvPr>
-            <p:ph idx="1"/>
-          </p:nvPr>
-        </p:nvSpPr>
-        <p:spPr/>
-        <p:txBody>
-          <a:bodyPr>
-            <a:normAutofit/>
-          </a:bodyPr>
-          <a:lstStyle/>
-          <a:p>
-            <a:pPr marL="457200" indent="-457200">
-              <a:buFont typeface="+mj-lt"/>
-              <a:buAutoNum type="arabicParenR"/>
-            </a:pPr>
-            <a:r>
-              <a:rPr lang="ru-RU" dirty="0"/>
-              <a:t>Установите </a:t>
-            </a:r>
-            <a:r>
-              <a:rPr lang="ru-RU" dirty="0" err="1"/>
-              <a:t>Python</a:t>
-            </a:r>
-            <a:r>
-              <a:rPr lang="ru-RU" dirty="0"/>
-              <a:t> 3 и </a:t>
-            </a:r>
-            <a:r>
-              <a:rPr lang="ru-RU" dirty="0" smtClean="0"/>
-              <a:t>библиотеку </a:t>
-            </a:r>
-            <a:r>
-              <a:rPr lang="en-US" dirty="0" smtClean="0"/>
-              <a:t>“requests”</a:t>
-            </a:r>
-            <a:r>
-              <a:rPr lang="ru-RU" dirty="0" smtClean="0"/>
-              <a:t> (</a:t>
-            </a:r>
-            <a:r>
-              <a:rPr lang="en-US" dirty="0"/>
-              <a:t>pip install </a:t>
-            </a:r>
-            <a:r>
-              <a:rPr lang="en-US" dirty="0" smtClean="0"/>
-              <a:t>requests</a:t>
-            </a:r>
-            <a:r>
-              <a:rPr lang="ru-RU" dirty="0" smtClean="0"/>
-              <a:t>)</a:t>
-            </a:r>
-            <a:endParaRPr lang="en-US" dirty="0" smtClean="0"/>
-          </a:p>
-          <a:p>
-            <a:pPr marL="457200" indent="-457200">
-              <a:buFont typeface="+mj-lt"/>
-              <a:buAutoNum type="arabicParenR"/>
-            </a:pPr>
-            <a:r>
-              <a:rPr lang="ru-RU" dirty="0"/>
-              <a:t>Поместите </a:t>
-            </a:r>
-            <a:r>
-              <a:rPr lang="ru-RU" dirty="0" smtClean="0"/>
-              <a:t>файлы</a:t>
-            </a:r>
-            <a:r>
-              <a:rPr lang="en-US" dirty="0" smtClean="0"/>
-              <a:t> “currency_rates.py” </a:t>
-            </a:r>
-            <a:r>
-              <a:rPr lang="ru-RU" dirty="0" smtClean="0"/>
-              <a:t>и </a:t>
-            </a:r>
-            <a:r>
-              <a:rPr lang="en-US" dirty="0" smtClean="0"/>
-              <a:t>“main.py”</a:t>
-            </a:r>
-            <a:r>
-              <a:rPr lang="ru-RU" dirty="0"/>
-              <a:t> в одну папку</a:t>
-            </a:r>
-            <a:r>
-              <a:rPr lang="ru-RU" dirty="0" smtClean="0"/>
-              <a:t>.</a:t>
-            </a:r>
-          </a:p>
-          <a:p>
-            <a:pPr marL="457200" indent="-457200">
-              <a:buFont typeface="+mj-lt"/>
-              <a:buAutoNum type="arabicParenR"/>
-            </a:pPr>
-            <a:r>
-              <a:rPr lang="ru-RU" dirty="0" smtClean="0"/>
-              <a:t>Запустите файл </a:t>
-            </a:r>
-            <a:r>
-              <a:rPr lang="en-US" dirty="0" smtClean="0"/>
-              <a:t>“main.py”</a:t>
-            </a:r>
-            <a:r>
-              <a:rPr lang="ru-RU" dirty="0" smtClean="0"/>
-              <a:t>.</a:t>
-            </a:r>
-          </a:p>
-          <a:p>
-            <a:pPr marL="457200" indent="-457200">
-              <a:buFont typeface="+mj-lt"/>
-              <a:buAutoNum type="arabicParenR"/>
-            </a:pPr>
-            <a:r>
-              <a:rPr lang="ru-RU" dirty="0" smtClean="0"/>
-              <a:t>Выберите</a:t>
-            </a:r>
-            <a:r>
-              <a:rPr lang="ru-RU" dirty="0"/>
-              <a:t> действие в меню.</a:t>
-            </a:r>
-          </a:p>
-          <a:p>
-            <a:pPr marL="457200" indent="-457200">
-              <a:buFont typeface="+mj-lt"/>
-              <a:buAutoNum type="arabicParenR"/>
-            </a:pPr>
-            <a:r>
-              <a:rPr lang="ru-RU" dirty="0"/>
-              <a:t>Введите сумму (если нужно).</a:t>
-            </a:r>
-          </a:p>
-          <a:p>
-            <a:pPr marL="457200" indent="-457200">
-              <a:buFont typeface="+mj-lt"/>
-              <a:buAutoNum type="arabicParenR"/>
-            </a:pPr>
-            <a:r>
-              <a:rPr lang="ru-RU" dirty="0"/>
-              <a:t>Получите результат.</a:t>
-            </a:r>
-          </a:p>
-          <a:p>
-            <a:pPr marL="457200" indent="-457200">
-              <a:buFont typeface="+mj-lt"/>
-              <a:buAutoNum type="arabicParenR"/>
-            </a:pPr>
-            <a:endParaRPr lang="ru-RU" dirty="0"/>
-          </a:p>
-        </p:txBody>
-      </p:sp>
-    </p:spTree>
-    <p:extLst>
-      <p:ext uri="{BB962C8B-B14F-4D97-AF65-F5344CB8AC3E}">
-        <p14:creationId xmlns:p14="http://schemas.microsoft.com/office/powerpoint/2010/main" val="1460337241"/>
-      </p:ext>
-    </p:extLst>
-  </p:cSld>
-  <p:clrMapOvr>
-    <a:masterClrMapping/>
-  </p:clrMapOvr>
-  <p:timing>
-    <p:tnLst>
-      <p:par>
-        <p:cTn id="1" dur="indefinite" restart="never" nodeType="tmRoot"/>
-      </p:par>
-    </p:tnLst>
-  </p:timing>
-</p:sld>
-</file>
-
 <file path=ppt/slides/slide9.xml><?xml version="1.0" encoding="utf-8"?>
 <p:sld xmlns:a="http://schemas.openxmlformats.org/drawingml/2006/main" xmlns:r="http://schemas.openxmlformats.org/officeDocument/2006/relationships" xmlns:p="http://schemas.openxmlformats.org/presentationml/2006/main">
   <p:cSld>
@@ -14421,15 +14988,11 @@
           <a:bodyPr/>
           <a:lstStyle/>
           <a:p>
+            <a:pPr algn="ctr"/>
             <a:r>
               <a:rPr lang="ru-RU" dirty="0"/>
-              <a:t>Итоги и </a:t>
-            </a:r>
-            <a:r>
-              <a:rPr lang="ru-RU" dirty="0" smtClean="0"/>
-              <a:t>возможные перспективы?</a:t>
-            </a:r>
-            <a:endParaRPr lang="ru-RU" dirty="0"/>
+              <a:t>Как запустить и использовать?</a:t>
+            </a:r>
           </a:p>
         </p:txBody>
       </p:sp>
@@ -14440,144 +15003,149 @@
             <a:spLocks noGrp="1"/>
           </p:cNvSpPr>
           <p:nvPr>
-            <p:ph sz="half" idx="1"/>
+            <p:ph idx="1"/>
           </p:nvPr>
         </p:nvSpPr>
         <p:spPr/>
         <p:txBody>
           <a:bodyPr>
-            <a:normAutofit fontScale="92500"/>
+            <a:normAutofit/>
           </a:bodyPr>
           <a:lstStyle/>
           <a:p>
-            <a:pPr marL="0" indent="0">
-              <a:buNone/>
+            <a:pPr marL="457200" indent="-457200">
+              <a:buFont typeface="+mj-lt"/>
+              <a:buAutoNum type="arabicParenR"/>
             </a:pPr>
             <a:r>
-              <a:rPr lang="ru-RU" b="1" dirty="0"/>
-              <a:t>Что сделано:</a:t>
-            </a:r>
-            <a:endParaRPr lang="ru-RU" dirty="0"/>
-          </a:p>
-          <a:p>
-            <a:r>
               <a:rPr lang="ru-RU" dirty="0"/>
-              <a:t>создан конвертер валют с актуальными курсами ЦБ РФ;</a:t>
-            </a:r>
-          </a:p>
-          <a:p>
+              <a:t>Установите </a:t>
+            </a:r>
+            <a:r>
+              <a:rPr lang="ru-RU" dirty="0" err="1"/>
+              <a:t>Python</a:t>
+            </a:r>
             <a:r>
               <a:rPr lang="ru-RU" dirty="0"/>
-              <a:t>реализован консольный интерфейс;</a:t>
-            </a:r>
-          </a:p>
-          <a:p>
+              <a:t> 3 и </a:t>
+            </a:r>
+            <a:r>
+              <a:rPr lang="ru-RU" dirty="0" smtClean="0"/>
+              <a:t>библиотеку </a:t>
+            </a:r>
+            <a:r>
+              <a:rPr lang="en-US" dirty="0" smtClean="0"/>
+              <a:t>“requests”</a:t>
+            </a:r>
+            <a:r>
+              <a:rPr lang="ru-RU" dirty="0" smtClean="0"/>
+              <a:t> (</a:t>
+            </a:r>
+            <a:r>
+              <a:rPr lang="en-US" dirty="0"/>
+              <a:t>pip install </a:t>
+            </a:r>
+            <a:r>
+              <a:rPr lang="en-US" dirty="0" smtClean="0"/>
+              <a:t>requests</a:t>
+            </a:r>
+            <a:r>
+              <a:rPr lang="ru-RU" dirty="0" smtClean="0"/>
+              <a:t>)</a:t>
+            </a:r>
+            <a:endParaRPr lang="en-US" dirty="0" smtClean="0"/>
+          </a:p>
+          <a:p>
+            <a:pPr marL="457200" indent="-457200">
+              <a:buFont typeface="+mj-lt"/>
+              <a:buAutoNum type="arabicParenR"/>
+            </a:pPr>
             <a:r>
               <a:rPr lang="ru-RU" dirty="0"/>
-              <a:t>обеспечена устойчивость к ошибкам.</a:t>
-            </a:r>
-          </a:p>
-          <a:p>
-            <a:pPr marL="0" indent="0">
-              <a:buNone/>
+              <a:t>Поместите </a:t>
+            </a:r>
+            <a:r>
+              <a:rPr lang="ru-RU" dirty="0" smtClean="0"/>
+              <a:t>файлы</a:t>
+            </a:r>
+            <a:r>
+              <a:rPr lang="en-US" dirty="0" smtClean="0"/>
+              <a:t> “currency_rates.py” </a:t>
+            </a:r>
+            <a:r>
+              <a:rPr lang="ru-RU" dirty="0" smtClean="0"/>
+              <a:t>и </a:t>
+            </a:r>
+            <a:r>
+              <a:rPr lang="en-US" dirty="0" smtClean="0"/>
+              <a:t>“main.py”</a:t>
+            </a:r>
+            <a:r>
+              <a:rPr lang="ru-RU" dirty="0"/>
+              <a:t> в одну папку</a:t>
+            </a:r>
+            <a:r>
+              <a:rPr lang="ru-RU" dirty="0" smtClean="0"/>
+              <a:t>.</a:t>
+            </a:r>
+          </a:p>
+          <a:p>
+            <a:pPr marL="457200" indent="-457200">
+              <a:buFont typeface="+mj-lt"/>
+              <a:buAutoNum type="arabicParenR"/>
             </a:pPr>
-            <a:endParaRPr lang="ru-RU" dirty="0"/>
-          </a:p>
-        </p:txBody>
-      </p:sp>
-      <p:sp>
-        <p:nvSpPr>
-          <p:cNvPr id="4" name="Объект 3"/>
-          <p:cNvSpPr>
-            <a:spLocks noGrp="1"/>
-          </p:cNvSpPr>
-          <p:nvPr>
-            <p:ph sz="half" idx="2"/>
-          </p:nvPr>
-        </p:nvSpPr>
-        <p:spPr/>
-        <p:txBody>
-          <a:bodyPr>
-            <a:normAutofit fontScale="92500"/>
-          </a:bodyPr>
-          <a:lstStyle/>
-          <a:p>
-            <a:pPr marL="0" indent="0">
-              <a:buNone/>
+            <a:r>
+              <a:rPr lang="ru-RU" dirty="0" smtClean="0"/>
+              <a:t>Запустите файл </a:t>
+            </a:r>
+            <a:r>
+              <a:rPr lang="en-US" dirty="0" smtClean="0"/>
+              <a:t>“main.py”</a:t>
+            </a:r>
+            <a:r>
+              <a:rPr lang="ru-RU" dirty="0" smtClean="0"/>
+              <a:t>.</a:t>
+            </a:r>
+          </a:p>
+          <a:p>
+            <a:pPr marL="457200" indent="-457200">
+              <a:buFont typeface="+mj-lt"/>
+              <a:buAutoNum type="arabicParenR"/>
             </a:pPr>
             <a:r>
-              <a:rPr lang="ru-RU" b="1" dirty="0"/>
-              <a:t>Возможности расширения:</a:t>
-            </a:r>
-            <a:endParaRPr lang="ru-RU" dirty="0"/>
-          </a:p>
-          <a:p>
-            <a:pPr>
-              <a:buFont typeface="Tw Cen MT" panose="020B0602020104020603" pitchFamily="34" charset="0"/>
-              <a:buChar char="+"/>
+              <a:rPr lang="ru-RU" dirty="0" smtClean="0"/>
+              <a:t>Выберите</a:t>
+            </a:r>
+            <a:r>
+              <a:rPr lang="ru-RU" dirty="0"/>
+              <a:t> действие в меню.</a:t>
+            </a:r>
+          </a:p>
+          <a:p>
+            <a:pPr marL="457200" indent="-457200">
+              <a:buFont typeface="+mj-lt"/>
+              <a:buAutoNum type="arabicParenR"/>
             </a:pPr>
             <a:r>
               <a:rPr lang="ru-RU" dirty="0"/>
-              <a:t>добавление других валют;</a:t>
-            </a:r>
-          </a:p>
-          <a:p>
-            <a:pPr>
-              <a:buFont typeface="Tw Cen MT" panose="020B0602020104020603" pitchFamily="34" charset="0"/>
-              <a:buChar char="+"/>
+              <a:t>Введите сумму (если нужно).</a:t>
+            </a:r>
+          </a:p>
+          <a:p>
+            <a:pPr marL="457200" indent="-457200">
+              <a:buFont typeface="+mj-lt"/>
+              <a:buAutoNum type="arabicParenR"/>
             </a:pPr>
             <a:r>
               <a:rPr lang="ru-RU" dirty="0"/>
-              <a:t>сохранение истории курсов;</a:t>
-            </a:r>
-          </a:p>
-          <a:p>
-            <a:pPr>
-              <a:buFont typeface="Tw Cen MT" panose="020B0602020104020603" pitchFamily="34" charset="0"/>
-              <a:buChar char="+"/>
+              <a:t>Получите результат.</a:t>
+            </a:r>
+          </a:p>
+          <a:p>
+            <a:pPr marL="457200" indent="-457200">
+              <a:buFont typeface="+mj-lt"/>
+              <a:buAutoNum type="arabicParenR"/>
             </a:pPr>
-            <a:r>
-              <a:rPr lang="ru-RU" dirty="0"/>
-              <a:t>графический интерфейс (GUI);</a:t>
-            </a:r>
-          </a:p>
-          <a:p>
-            <a:pPr>
-              <a:buFont typeface="Tw Cen MT" panose="020B0602020104020603" pitchFamily="34" charset="0"/>
-              <a:buChar char="+"/>
-            </a:pPr>
-            <a:r>
-              <a:rPr lang="ru-RU" dirty="0"/>
-              <a:t>веб‑версия (</a:t>
-            </a:r>
-            <a:r>
-              <a:rPr lang="ru-RU" dirty="0" err="1"/>
-              <a:t>Flask</a:t>
-            </a:r>
-            <a:r>
-              <a:rPr lang="ru-RU" dirty="0"/>
-              <a:t>/</a:t>
-            </a:r>
-            <a:r>
-              <a:rPr lang="ru-RU" dirty="0" err="1"/>
-              <a:t>Django</a:t>
-            </a:r>
-            <a:r>
-              <a:rPr lang="ru-RU" dirty="0"/>
-              <a:t>);</a:t>
-            </a:r>
-          </a:p>
-          <a:p>
-            <a:pPr>
-              <a:buFont typeface="Tw Cen MT" panose="020B0602020104020603" pitchFamily="34" charset="0"/>
-              <a:buChar char="+"/>
-            </a:pPr>
-            <a:r>
-              <a:rPr lang="ru-RU" dirty="0"/>
-              <a:t>уведомления об изменении курса.</a:t>
-            </a:r>
-          </a:p>
-          <a:p>
             <a:endParaRPr lang="ru-RU" dirty="0"/>
           </a:p>
         </p:txBody>
@@ -14585,7 +15153,7 @@
     </p:spTree>
     <p:extLst>
       <p:ext uri="{BB962C8B-B14F-4D97-AF65-F5344CB8AC3E}">
-        <p14:creationId xmlns:p14="http://schemas.microsoft.com/office/powerpoint/2010/main" val="983863493"/>
+        <p14:creationId xmlns:p14="http://schemas.microsoft.com/office/powerpoint/2010/main" val="1460337241"/>
       </p:ext>
     </p:extLst>
   </p:cSld>

--- a/Конвентатор валют.pptx
+++ b/Конвентатор валют.pptx
@@ -9,17 +9,15 @@
     <p:sldId id="257" r:id="rId3"/>
     <p:sldId id="258" r:id="rId4"/>
     <p:sldId id="259" r:id="rId5"/>
-    <p:sldId id="268" r:id="rId6"/>
-    <p:sldId id="260" r:id="rId7"/>
-    <p:sldId id="261" r:id="rId8"/>
-    <p:sldId id="262" r:id="rId9"/>
-    <p:sldId id="263" r:id="rId10"/>
-    <p:sldId id="267" r:id="rId11"/>
-    <p:sldId id="269" r:id="rId12"/>
-    <p:sldId id="270" r:id="rId13"/>
-    <p:sldId id="264" r:id="rId14"/>
-    <p:sldId id="266" r:id="rId15"/>
-    <p:sldId id="265" r:id="rId16"/>
+    <p:sldId id="260" r:id="rId6"/>
+    <p:sldId id="261" r:id="rId7"/>
+    <p:sldId id="262" r:id="rId8"/>
+    <p:sldId id="263" r:id="rId9"/>
+    <p:sldId id="269" r:id="rId10"/>
+    <p:sldId id="270" r:id="rId11"/>
+    <p:sldId id="264" r:id="rId12"/>
+    <p:sldId id="266" r:id="rId13"/>
+    <p:sldId id="265" r:id="rId14"/>
   </p:sldIdLst>
   <p:sldSz cx="12192000" cy="6858000"/>
   <p:notesSz cx="6858000" cy="9144000"/>
@@ -176,7 +174,7 @@
           <a:noFill/>
           <a:extLst>
             <a:ext uri="{909E8E84-426E-40dd-AFC4-6F175D3DCCD1}">
-              <a14:hiddenFill xmlns:a14="http://schemas.microsoft.com/office/drawing/2010/main" xmlns="">
+              <a14:hiddenFill xmlns="" xmlns:a14="http://schemas.microsoft.com/office/drawing/2010/main">
                 <a:solidFill>
                   <a:srgbClr val="FFFFFF"/>
                 </a:solidFill>
@@ -236,7 +234,7 @@
             </a:ln>
             <a:extLst>
               <a:ext uri="{91240B29-F687-4f45-9708-019B960494DF}">
-                <a14:hiddenLine xmlns:a14="http://schemas.microsoft.com/office/drawing/2010/main" xmlns="" w="9525">
+                <a14:hiddenLine xmlns="" xmlns:a14="http://schemas.microsoft.com/office/drawing/2010/main" w="9525">
                   <a:solidFill>
                     <a:srgbClr val="000000"/>
                   </a:solidFill>
@@ -326,7 +324,7 @@
             </a:ln>
             <a:extLst>
               <a:ext uri="{91240B29-F687-4f45-9708-019B960494DF}">
-                <a14:hiddenLine xmlns:a14="http://schemas.microsoft.com/office/drawing/2010/main" xmlns="" w="9525">
+                <a14:hiddenLine xmlns="" xmlns:a14="http://schemas.microsoft.com/office/drawing/2010/main" w="9525">
                   <a:solidFill>
                     <a:srgbClr val="000000"/>
                   </a:solidFill>
@@ -416,7 +414,7 @@
             </a:ln>
             <a:extLst>
               <a:ext uri="{91240B29-F687-4f45-9708-019B960494DF}">
-                <a14:hiddenLine xmlns:a14="http://schemas.microsoft.com/office/drawing/2010/main" xmlns="" w="9525">
+                <a14:hiddenLine xmlns="" xmlns:a14="http://schemas.microsoft.com/office/drawing/2010/main" w="9525">
                   <a:solidFill>
                     <a:srgbClr val="000000"/>
                   </a:solidFill>
@@ -450,7 +448,7 @@
             </a:ln>
             <a:extLst>
               <a:ext uri="{91240B29-F687-4f45-9708-019B960494DF}">
-                <a14:hiddenLine xmlns:a14="http://schemas.microsoft.com/office/drawing/2010/main" xmlns="" w="9525">
+                <a14:hiddenLine xmlns="" xmlns:a14="http://schemas.microsoft.com/office/drawing/2010/main" w="9525">
                   <a:solidFill>
                     <a:srgbClr val="000000"/>
                   </a:solidFill>
@@ -540,7 +538,7 @@
             </a:ln>
             <a:extLst>
               <a:ext uri="{91240B29-F687-4f45-9708-019B960494DF}">
-                <a14:hiddenLine xmlns:a14="http://schemas.microsoft.com/office/drawing/2010/main" xmlns="" w="9525">
+                <a14:hiddenLine xmlns="" xmlns:a14="http://schemas.microsoft.com/office/drawing/2010/main" w="9525">
                   <a:solidFill>
                     <a:srgbClr val="000000"/>
                   </a:solidFill>
@@ -602,7 +600,7 @@
             </a:ln>
             <a:extLst>
               <a:ext uri="{91240B29-F687-4f45-9708-019B960494DF}">
-                <a14:hiddenLine xmlns:a14="http://schemas.microsoft.com/office/drawing/2010/main" xmlns="" w="9525">
+                <a14:hiddenLine xmlns="" xmlns:a14="http://schemas.microsoft.com/office/drawing/2010/main" w="9525">
                   <a:solidFill>
                     <a:srgbClr val="000000"/>
                   </a:solidFill>
@@ -664,7 +662,7 @@
             </a:ln>
             <a:extLst>
               <a:ext uri="{91240B29-F687-4f45-9708-019B960494DF}">
-                <a14:hiddenLine xmlns:a14="http://schemas.microsoft.com/office/drawing/2010/main" xmlns="" w="9525">
+                <a14:hiddenLine xmlns="" xmlns:a14="http://schemas.microsoft.com/office/drawing/2010/main" w="9525">
                   <a:solidFill>
                     <a:srgbClr val="000000"/>
                   </a:solidFill>
@@ -754,7 +752,7 @@
             </a:ln>
             <a:extLst>
               <a:ext uri="{91240B29-F687-4f45-9708-019B960494DF}">
-                <a14:hiddenLine xmlns:a14="http://schemas.microsoft.com/office/drawing/2010/main" xmlns="" w="9525">
+                <a14:hiddenLine xmlns="" xmlns:a14="http://schemas.microsoft.com/office/drawing/2010/main" w="9525">
                   <a:solidFill>
                     <a:srgbClr val="000000"/>
                   </a:solidFill>
@@ -816,7 +814,7 @@
             </a:ln>
             <a:extLst>
               <a:ext uri="{91240B29-F687-4f45-9708-019B960494DF}">
-                <a14:hiddenLine xmlns:a14="http://schemas.microsoft.com/office/drawing/2010/main" xmlns="" w="9525">
+                <a14:hiddenLine xmlns="" xmlns:a14="http://schemas.microsoft.com/office/drawing/2010/main" w="9525">
                   <a:solidFill>
                     <a:srgbClr val="000000"/>
                   </a:solidFill>
@@ -878,7 +876,7 @@
             </a:ln>
             <a:extLst>
               <a:ext uri="{91240B29-F687-4f45-9708-019B960494DF}">
-                <a14:hiddenLine xmlns:a14="http://schemas.microsoft.com/office/drawing/2010/main" xmlns="" w="9525">
+                <a14:hiddenLine xmlns="" xmlns:a14="http://schemas.microsoft.com/office/drawing/2010/main" w="9525">
                   <a:solidFill>
                     <a:srgbClr val="000000"/>
                   </a:solidFill>
@@ -968,7 +966,7 @@
             </a:ln>
             <a:extLst>
               <a:ext uri="{91240B29-F687-4f45-9708-019B960494DF}">
-                <a14:hiddenLine xmlns:a14="http://schemas.microsoft.com/office/drawing/2010/main" xmlns="" w="9525">
+                <a14:hiddenLine xmlns="" xmlns:a14="http://schemas.microsoft.com/office/drawing/2010/main" w="9525">
                   <a:solidFill>
                     <a:srgbClr val="000000"/>
                   </a:solidFill>
@@ -1058,7 +1056,7 @@
             </a:ln>
             <a:extLst>
               <a:ext uri="{91240B29-F687-4f45-9708-019B960494DF}">
-                <a14:hiddenLine xmlns:a14="http://schemas.microsoft.com/office/drawing/2010/main" xmlns="" w="9525">
+                <a14:hiddenLine xmlns="" xmlns:a14="http://schemas.microsoft.com/office/drawing/2010/main" w="9525">
                   <a:solidFill>
                     <a:srgbClr val="000000"/>
                   </a:solidFill>
@@ -1120,7 +1118,7 @@
             </a:ln>
             <a:extLst>
               <a:ext uri="{91240B29-F687-4f45-9708-019B960494DF}">
-                <a14:hiddenLine xmlns:a14="http://schemas.microsoft.com/office/drawing/2010/main" xmlns="" w="9525">
+                <a14:hiddenLine xmlns="" xmlns:a14="http://schemas.microsoft.com/office/drawing/2010/main" w="9525">
                   <a:solidFill>
                     <a:srgbClr val="000000"/>
                   </a:solidFill>
@@ -1230,7 +1228,7 @@
             </a:ln>
             <a:extLst>
               <a:ext uri="{91240B29-F687-4f45-9708-019B960494DF}">
-                <a14:hiddenLine xmlns:a14="http://schemas.microsoft.com/office/drawing/2010/main" xmlns="" w="9525">
+                <a14:hiddenLine xmlns="" xmlns:a14="http://schemas.microsoft.com/office/drawing/2010/main" w="9525">
                   <a:solidFill>
                     <a:srgbClr val="000000"/>
                   </a:solidFill>
@@ -1292,7 +1290,7 @@
             </a:ln>
             <a:extLst>
               <a:ext uri="{91240B29-F687-4f45-9708-019B960494DF}">
-                <a14:hiddenLine xmlns:a14="http://schemas.microsoft.com/office/drawing/2010/main" xmlns="" w="9525">
+                <a14:hiddenLine xmlns="" xmlns:a14="http://schemas.microsoft.com/office/drawing/2010/main" w="9525">
                   <a:solidFill>
                     <a:srgbClr val="000000"/>
                   </a:solidFill>
@@ -1382,7 +1380,7 @@
             </a:ln>
             <a:extLst>
               <a:ext uri="{91240B29-F687-4f45-9708-019B960494DF}">
-                <a14:hiddenLine xmlns:a14="http://schemas.microsoft.com/office/drawing/2010/main" xmlns="" w="9525">
+                <a14:hiddenLine xmlns="" xmlns:a14="http://schemas.microsoft.com/office/drawing/2010/main" w="9525">
                   <a:solidFill>
                     <a:srgbClr val="000000"/>
                   </a:solidFill>
@@ -1472,7 +1470,7 @@
             </a:ln>
             <a:extLst>
               <a:ext uri="{91240B29-F687-4f45-9708-019B960494DF}">
-                <a14:hiddenLine xmlns:a14="http://schemas.microsoft.com/office/drawing/2010/main" xmlns="" w="9525">
+                <a14:hiddenLine xmlns="" xmlns:a14="http://schemas.microsoft.com/office/drawing/2010/main" w="9525">
                   <a:solidFill>
                     <a:srgbClr val="000000"/>
                   </a:solidFill>
@@ -1534,7 +1532,7 @@
             </a:ln>
             <a:extLst>
               <a:ext uri="{91240B29-F687-4f45-9708-019B960494DF}">
-                <a14:hiddenLine xmlns:a14="http://schemas.microsoft.com/office/drawing/2010/main" xmlns="" w="9525">
+                <a14:hiddenLine xmlns="" xmlns:a14="http://schemas.microsoft.com/office/drawing/2010/main" w="9525">
                   <a:solidFill>
                     <a:srgbClr val="000000"/>
                   </a:solidFill>
@@ -1624,7 +1622,7 @@
             </a:ln>
             <a:extLst>
               <a:ext uri="{91240B29-F687-4f45-9708-019B960494DF}">
-                <a14:hiddenLine xmlns:a14="http://schemas.microsoft.com/office/drawing/2010/main" xmlns="" w="9525">
+                <a14:hiddenLine xmlns="" xmlns:a14="http://schemas.microsoft.com/office/drawing/2010/main" w="9525">
                   <a:solidFill>
                     <a:srgbClr val="000000"/>
                   </a:solidFill>
@@ -1714,7 +1712,7 @@
             </a:ln>
             <a:extLst>
               <a:ext uri="{91240B29-F687-4f45-9708-019B960494DF}">
-                <a14:hiddenLine xmlns:a14="http://schemas.microsoft.com/office/drawing/2010/main" xmlns="" w="9525">
+                <a14:hiddenLine xmlns="" xmlns:a14="http://schemas.microsoft.com/office/drawing/2010/main" w="9525">
                   <a:solidFill>
                     <a:srgbClr val="000000"/>
                   </a:solidFill>
@@ -1770,7 +1768,7 @@
             </a:ln>
             <a:extLst>
               <a:ext uri="{91240B29-F687-4f45-9708-019B960494DF}">
-                <a14:hiddenLine xmlns:a14="http://schemas.microsoft.com/office/drawing/2010/main" xmlns="" w="9525">
+                <a14:hiddenLine xmlns="" xmlns:a14="http://schemas.microsoft.com/office/drawing/2010/main" w="9525">
                   <a:solidFill>
                     <a:srgbClr val="000000"/>
                   </a:solidFill>
@@ -1860,7 +1858,7 @@
             </a:ln>
             <a:extLst>
               <a:ext uri="{91240B29-F687-4f45-9708-019B960494DF}">
-                <a14:hiddenLine xmlns:a14="http://schemas.microsoft.com/office/drawing/2010/main" xmlns="" w="9525">
+                <a14:hiddenLine xmlns="" xmlns:a14="http://schemas.microsoft.com/office/drawing/2010/main" w="9525">
                   <a:solidFill>
                     <a:srgbClr val="000000"/>
                   </a:solidFill>
@@ -1916,7 +1914,7 @@
             </a:ln>
             <a:extLst>
               <a:ext uri="{91240B29-F687-4f45-9708-019B960494DF}">
-                <a14:hiddenLine xmlns:a14="http://schemas.microsoft.com/office/drawing/2010/main" xmlns="" w="9525">
+                <a14:hiddenLine xmlns="" xmlns:a14="http://schemas.microsoft.com/office/drawing/2010/main" w="9525">
                   <a:solidFill>
                     <a:srgbClr val="000000"/>
                   </a:solidFill>
@@ -2006,7 +2004,7 @@
             </a:ln>
             <a:extLst>
               <a:ext uri="{91240B29-F687-4f45-9708-019B960494DF}">
-                <a14:hiddenLine xmlns:a14="http://schemas.microsoft.com/office/drawing/2010/main" xmlns="" w="9525">
+                <a14:hiddenLine xmlns="" xmlns:a14="http://schemas.microsoft.com/office/drawing/2010/main" w="9525">
                   <a:solidFill>
                     <a:srgbClr val="000000"/>
                   </a:solidFill>
@@ -2074,7 +2072,7 @@
             </a:ln>
             <a:extLst>
               <a:ext uri="{91240B29-F687-4f45-9708-019B960494DF}">
-                <a14:hiddenLine xmlns:a14="http://schemas.microsoft.com/office/drawing/2010/main" xmlns="" w="9525">
+                <a14:hiddenLine xmlns="" xmlns:a14="http://schemas.microsoft.com/office/drawing/2010/main" w="9525">
                   <a:solidFill>
                     <a:srgbClr val="000000"/>
                   </a:solidFill>
@@ -2164,7 +2162,7 @@
             </a:ln>
             <a:extLst>
               <a:ext uri="{91240B29-F687-4f45-9708-019B960494DF}">
-                <a14:hiddenLine xmlns:a14="http://schemas.microsoft.com/office/drawing/2010/main" xmlns="" w="9525">
+                <a14:hiddenLine xmlns="" xmlns:a14="http://schemas.microsoft.com/office/drawing/2010/main" w="9525">
                   <a:solidFill>
                     <a:srgbClr val="000000"/>
                   </a:solidFill>
@@ -2232,7 +2230,7 @@
             </a:ln>
             <a:extLst>
               <a:ext uri="{91240B29-F687-4f45-9708-019B960494DF}">
-                <a14:hiddenLine xmlns:a14="http://schemas.microsoft.com/office/drawing/2010/main" xmlns="" w="9525">
+                <a14:hiddenLine xmlns="" xmlns:a14="http://schemas.microsoft.com/office/drawing/2010/main" w="9525">
                   <a:solidFill>
                     <a:srgbClr val="000000"/>
                   </a:solidFill>
@@ -2322,7 +2320,7 @@
             </a:ln>
             <a:extLst>
               <a:ext uri="{91240B29-F687-4f45-9708-019B960494DF}">
-                <a14:hiddenLine xmlns:a14="http://schemas.microsoft.com/office/drawing/2010/main" xmlns="" w="9525">
+                <a14:hiddenLine xmlns="" xmlns:a14="http://schemas.microsoft.com/office/drawing/2010/main" w="9525">
                   <a:solidFill>
                     <a:srgbClr val="000000"/>
                   </a:solidFill>
@@ -2356,7 +2354,7 @@
             </a:ln>
             <a:extLst>
               <a:ext uri="{91240B29-F687-4f45-9708-019B960494DF}">
-                <a14:hiddenLine xmlns:a14="http://schemas.microsoft.com/office/drawing/2010/main" xmlns="" w="9525">
+                <a14:hiddenLine xmlns="" xmlns:a14="http://schemas.microsoft.com/office/drawing/2010/main" w="9525">
                   <a:solidFill>
                     <a:srgbClr val="000000"/>
                   </a:solidFill>
@@ -2446,7 +2444,7 @@
             </a:ln>
             <a:extLst>
               <a:ext uri="{91240B29-F687-4f45-9708-019B960494DF}">
-                <a14:hiddenLine xmlns:a14="http://schemas.microsoft.com/office/drawing/2010/main" xmlns="" w="9525">
+                <a14:hiddenLine xmlns="" xmlns:a14="http://schemas.microsoft.com/office/drawing/2010/main" w="9525">
                   <a:solidFill>
                     <a:srgbClr val="000000"/>
                   </a:solidFill>
@@ -2508,7 +2506,7 @@
             </a:ln>
             <a:extLst>
               <a:ext uri="{91240B29-F687-4f45-9708-019B960494DF}">
-                <a14:hiddenLine xmlns:a14="http://schemas.microsoft.com/office/drawing/2010/main" xmlns="" w="9525">
+                <a14:hiddenLine xmlns="" xmlns:a14="http://schemas.microsoft.com/office/drawing/2010/main" w="9525">
                   <a:solidFill>
                     <a:srgbClr val="000000"/>
                   </a:solidFill>
@@ -2570,7 +2568,7 @@
             </a:ln>
             <a:extLst>
               <a:ext uri="{91240B29-F687-4f45-9708-019B960494DF}">
-                <a14:hiddenLine xmlns:a14="http://schemas.microsoft.com/office/drawing/2010/main" xmlns="" w="9525">
+                <a14:hiddenLine xmlns="" xmlns:a14="http://schemas.microsoft.com/office/drawing/2010/main" w="9525">
                   <a:solidFill>
                     <a:srgbClr val="000000"/>
                   </a:solidFill>
@@ -2660,7 +2658,7 @@
             </a:ln>
             <a:extLst>
               <a:ext uri="{91240B29-F687-4f45-9708-019B960494DF}">
-                <a14:hiddenLine xmlns:a14="http://schemas.microsoft.com/office/drawing/2010/main" xmlns="" w="9525">
+                <a14:hiddenLine xmlns="" xmlns:a14="http://schemas.microsoft.com/office/drawing/2010/main" w="9525">
                   <a:solidFill>
                     <a:srgbClr val="000000"/>
                   </a:solidFill>
@@ -2728,7 +2726,7 @@
             </a:ln>
             <a:extLst>
               <a:ext uri="{91240B29-F687-4f45-9708-019B960494DF}">
-                <a14:hiddenLine xmlns:a14="http://schemas.microsoft.com/office/drawing/2010/main" xmlns="" w="9525">
+                <a14:hiddenLine xmlns="" xmlns:a14="http://schemas.microsoft.com/office/drawing/2010/main" w="9525">
                   <a:solidFill>
                     <a:srgbClr val="000000"/>
                   </a:solidFill>
@@ -2790,7 +2788,7 @@
             </a:ln>
             <a:extLst>
               <a:ext uri="{91240B29-F687-4f45-9708-019B960494DF}">
-                <a14:hiddenLine xmlns:a14="http://schemas.microsoft.com/office/drawing/2010/main" xmlns="" w="9525">
+                <a14:hiddenLine xmlns="" xmlns:a14="http://schemas.microsoft.com/office/drawing/2010/main" w="9525">
                   <a:solidFill>
                     <a:srgbClr val="000000"/>
                   </a:solidFill>
@@ -2880,7 +2878,7 @@
             </a:ln>
             <a:extLst>
               <a:ext uri="{91240B29-F687-4f45-9708-019B960494DF}">
-                <a14:hiddenLine xmlns:a14="http://schemas.microsoft.com/office/drawing/2010/main" xmlns="" w="9525">
+                <a14:hiddenLine xmlns="" xmlns:a14="http://schemas.microsoft.com/office/drawing/2010/main" w="9525">
                   <a:solidFill>
                     <a:srgbClr val="000000"/>
                   </a:solidFill>
@@ -2942,7 +2940,7 @@
             </a:ln>
             <a:extLst>
               <a:ext uri="{91240B29-F687-4f45-9708-019B960494DF}">
-                <a14:hiddenLine xmlns:a14="http://schemas.microsoft.com/office/drawing/2010/main" xmlns="" w="9525">
+                <a14:hiddenLine xmlns="" xmlns:a14="http://schemas.microsoft.com/office/drawing/2010/main" w="9525">
                   <a:solidFill>
                     <a:srgbClr val="000000"/>
                   </a:solidFill>
@@ -3032,7 +3030,7 @@
             </a:ln>
             <a:extLst>
               <a:ext uri="{91240B29-F687-4f45-9708-019B960494DF}">
-                <a14:hiddenLine xmlns:a14="http://schemas.microsoft.com/office/drawing/2010/main" xmlns="" w="9525">
+                <a14:hiddenLine xmlns="" xmlns:a14="http://schemas.microsoft.com/office/drawing/2010/main" w="9525">
                   <a:solidFill>
                     <a:srgbClr val="000000"/>
                   </a:solidFill>
@@ -3094,7 +3092,7 @@
             </a:ln>
             <a:extLst>
               <a:ext uri="{91240B29-F687-4f45-9708-019B960494DF}">
-                <a14:hiddenLine xmlns:a14="http://schemas.microsoft.com/office/drawing/2010/main" xmlns="" w="9525">
+                <a14:hiddenLine xmlns="" xmlns:a14="http://schemas.microsoft.com/office/drawing/2010/main" w="9525">
                   <a:solidFill>
                     <a:srgbClr val="000000"/>
                   </a:solidFill>
@@ -3184,7 +3182,7 @@
             </a:ln>
             <a:extLst>
               <a:ext uri="{91240B29-F687-4f45-9708-019B960494DF}">
-                <a14:hiddenLine xmlns:a14="http://schemas.microsoft.com/office/drawing/2010/main" xmlns="" w="9525">
+                <a14:hiddenLine xmlns="" xmlns:a14="http://schemas.microsoft.com/office/drawing/2010/main" w="9525">
                   <a:solidFill>
                     <a:srgbClr val="000000"/>
                   </a:solidFill>
@@ -3218,7 +3216,7 @@
             </a:ln>
             <a:extLst>
               <a:ext uri="{91240B29-F687-4f45-9708-019B960494DF}">
-                <a14:hiddenLine xmlns:a14="http://schemas.microsoft.com/office/drawing/2010/main" xmlns="" w="9525">
+                <a14:hiddenLine xmlns="" xmlns:a14="http://schemas.microsoft.com/office/drawing/2010/main" w="9525">
                   <a:solidFill>
                     <a:srgbClr val="000000"/>
                   </a:solidFill>
@@ -3283,7 +3281,7 @@
             </a:ln>
             <a:extLst>
               <a:ext uri="{91240B29-F687-4f45-9708-019B960494DF}">
-                <a14:hiddenLine xmlns:a14="http://schemas.microsoft.com/office/drawing/2010/main" xmlns="" w="9525">
+                <a14:hiddenLine xmlns="" xmlns:a14="http://schemas.microsoft.com/office/drawing/2010/main" w="9525">
                   <a:solidFill>
                     <a:srgbClr val="000000"/>
                   </a:solidFill>
@@ -3373,7 +3371,7 @@
             </a:ln>
             <a:extLst>
               <a:ext uri="{91240B29-F687-4f45-9708-019B960494DF}">
-                <a14:hiddenLine xmlns:a14="http://schemas.microsoft.com/office/drawing/2010/main" xmlns="" w="9525">
+                <a14:hiddenLine xmlns="" xmlns:a14="http://schemas.microsoft.com/office/drawing/2010/main" w="9525">
                   <a:solidFill>
                     <a:srgbClr val="000000"/>
                   </a:solidFill>
@@ -3435,7 +3433,7 @@
             </a:ln>
             <a:extLst>
               <a:ext uri="{91240B29-F687-4f45-9708-019B960494DF}">
-                <a14:hiddenLine xmlns:a14="http://schemas.microsoft.com/office/drawing/2010/main" xmlns="" w="9525">
+                <a14:hiddenLine xmlns="" xmlns:a14="http://schemas.microsoft.com/office/drawing/2010/main" w="9525">
                   <a:solidFill>
                     <a:srgbClr val="000000"/>
                   </a:solidFill>
@@ -3525,7 +3523,7 @@
             </a:ln>
             <a:extLst>
               <a:ext uri="{91240B29-F687-4f45-9708-019B960494DF}">
-                <a14:hiddenLine xmlns:a14="http://schemas.microsoft.com/office/drawing/2010/main" xmlns="" w="9525">
+                <a14:hiddenLine xmlns="" xmlns:a14="http://schemas.microsoft.com/office/drawing/2010/main" w="9525">
                   <a:solidFill>
                     <a:srgbClr val="000000"/>
                   </a:solidFill>
@@ -3615,7 +3613,7 @@
             </a:ln>
             <a:extLst>
               <a:ext uri="{91240B29-F687-4f45-9708-019B960494DF}">
-                <a14:hiddenLine xmlns:a14="http://schemas.microsoft.com/office/drawing/2010/main" xmlns="" w="9525">
+                <a14:hiddenLine xmlns="" xmlns:a14="http://schemas.microsoft.com/office/drawing/2010/main" w="9525">
                   <a:solidFill>
                     <a:srgbClr val="000000"/>
                   </a:solidFill>
@@ -3680,7 +3678,7 @@
             </a:ln>
             <a:extLst>
               <a:ext uri="{91240B29-F687-4f45-9708-019B960494DF}">
-                <a14:hiddenLine xmlns:a14="http://schemas.microsoft.com/office/drawing/2010/main" xmlns="" w="9525">
+                <a14:hiddenLine xmlns="" xmlns:a14="http://schemas.microsoft.com/office/drawing/2010/main" w="9525">
                   <a:solidFill>
                     <a:srgbClr val="000000"/>
                   </a:solidFill>
@@ -3742,7 +3740,7 @@
             </a:ln>
             <a:extLst>
               <a:ext uri="{91240B29-F687-4f45-9708-019B960494DF}">
-                <a14:hiddenLine xmlns:a14="http://schemas.microsoft.com/office/drawing/2010/main" xmlns="" w="9525">
+                <a14:hiddenLine xmlns="" xmlns:a14="http://schemas.microsoft.com/office/drawing/2010/main" w="9525">
                   <a:solidFill>
                     <a:srgbClr val="000000"/>
                   </a:solidFill>
@@ -3832,7 +3830,7 @@
             </a:ln>
             <a:extLst>
               <a:ext uri="{91240B29-F687-4f45-9708-019B960494DF}">
-                <a14:hiddenLine xmlns:a14="http://schemas.microsoft.com/office/drawing/2010/main" xmlns="" w="9525">
+                <a14:hiddenLine xmlns="" xmlns:a14="http://schemas.microsoft.com/office/drawing/2010/main" w="9525">
                   <a:solidFill>
                     <a:srgbClr val="000000"/>
                   </a:solidFill>
@@ -3922,7 +3920,7 @@
             </a:ln>
             <a:extLst>
               <a:ext uri="{91240B29-F687-4f45-9708-019B960494DF}">
-                <a14:hiddenLine xmlns:a14="http://schemas.microsoft.com/office/drawing/2010/main" xmlns="" w="9525">
+                <a14:hiddenLine xmlns="" xmlns:a14="http://schemas.microsoft.com/office/drawing/2010/main" w="9525">
                   <a:solidFill>
                     <a:srgbClr val="000000"/>
                   </a:solidFill>
@@ -3984,7 +3982,7 @@
             </a:ln>
             <a:extLst>
               <a:ext uri="{91240B29-F687-4f45-9708-019B960494DF}">
-                <a14:hiddenLine xmlns:a14="http://schemas.microsoft.com/office/drawing/2010/main" xmlns="" w="9525">
+                <a14:hiddenLine xmlns="" xmlns:a14="http://schemas.microsoft.com/office/drawing/2010/main" w="9525">
                   <a:solidFill>
                     <a:srgbClr val="000000"/>
                   </a:solidFill>
@@ -4104,7 +4102,7 @@
             </a:ln>
             <a:extLst>
               <a:ext uri="{91240B29-F687-4f45-9708-019B960494DF}">
-                <a14:hiddenLine xmlns:a14="http://schemas.microsoft.com/office/drawing/2010/main" xmlns="" w="9525">
+                <a14:hiddenLine xmlns="" xmlns:a14="http://schemas.microsoft.com/office/drawing/2010/main" w="9525">
                   <a:solidFill>
                     <a:srgbClr val="000000"/>
                   </a:solidFill>
@@ -4172,7 +4170,7 @@
             </a:ln>
             <a:extLst>
               <a:ext uri="{91240B29-F687-4f45-9708-019B960494DF}">
-                <a14:hiddenLine xmlns:a14="http://schemas.microsoft.com/office/drawing/2010/main" xmlns="" w="9525">
+                <a14:hiddenLine xmlns="" xmlns:a14="http://schemas.microsoft.com/office/drawing/2010/main" w="9525">
                   <a:solidFill>
                     <a:srgbClr val="000000"/>
                   </a:solidFill>
@@ -4262,7 +4260,7 @@
             </a:ln>
             <a:extLst>
               <a:ext uri="{91240B29-F687-4f45-9708-019B960494DF}">
-                <a14:hiddenLine xmlns:a14="http://schemas.microsoft.com/office/drawing/2010/main" xmlns="" w="9525">
+                <a14:hiddenLine xmlns="" xmlns:a14="http://schemas.microsoft.com/office/drawing/2010/main" w="9525">
                   <a:solidFill>
                     <a:srgbClr val="000000"/>
                   </a:solidFill>
@@ -4402,7 +4400,7 @@
           <a:p>
             <a:fld id="{77D79FE6-5460-4BB7-8806-BC3D23582E7F}" type="datetimeFigureOut">
               <a:rPr lang="ru-RU" smtClean="0"/>
-              <a:t>21.04.2026</a:t>
+              <a:t>25.04.2026</a:t>
             </a:fld>
             <a:endParaRPr lang="ru-RU"/>
           </a:p>
@@ -4669,7 +4667,7 @@
           <a:p>
             <a:fld id="{77D79FE6-5460-4BB7-8806-BC3D23582E7F}" type="datetimeFigureOut">
               <a:rPr lang="ru-RU" smtClean="0"/>
-              <a:t>21.04.2026</a:t>
+              <a:t>25.04.2026</a:t>
             </a:fld>
             <a:endParaRPr lang="ru-RU"/>
           </a:p>
@@ -4865,7 +4863,7 @@
           <a:p>
             <a:fld id="{77D79FE6-5460-4BB7-8806-BC3D23582E7F}" type="datetimeFigureOut">
               <a:rPr lang="ru-RU" smtClean="0"/>
-              <a:t>21.04.2026</a:t>
+              <a:t>25.04.2026</a:t>
             </a:fld>
             <a:endParaRPr lang="ru-RU"/>
           </a:p>
@@ -5128,7 +5126,7 @@
           <a:p>
             <a:fld id="{77D79FE6-5460-4BB7-8806-BC3D23582E7F}" type="datetimeFigureOut">
               <a:rPr lang="ru-RU" smtClean="0"/>
-              <a:t>21.04.2026</a:t>
+              <a:t>25.04.2026</a:t>
             </a:fld>
             <a:endParaRPr lang="ru-RU"/>
           </a:p>
@@ -5562,7 +5560,7 @@
           <a:p>
             <a:fld id="{77D79FE6-5460-4BB7-8806-BC3D23582E7F}" type="datetimeFigureOut">
               <a:rPr lang="ru-RU" smtClean="0"/>
-              <a:t>21.04.2026</a:t>
+              <a:t>25.04.2026</a:t>
             </a:fld>
             <a:endParaRPr lang="ru-RU"/>
           </a:p>
@@ -6108,7 +6106,7 @@
           <a:p>
             <a:fld id="{77D79FE6-5460-4BB7-8806-BC3D23582E7F}" type="datetimeFigureOut">
               <a:rPr lang="ru-RU" smtClean="0"/>
-              <a:t>21.04.2026</a:t>
+              <a:t>25.04.2026</a:t>
             </a:fld>
             <a:endParaRPr lang="ru-RU"/>
           </a:p>
@@ -6828,7 +6826,7 @@
           <a:p>
             <a:fld id="{77D79FE6-5460-4BB7-8806-BC3D23582E7F}" type="datetimeFigureOut">
               <a:rPr lang="ru-RU" smtClean="0"/>
-              <a:t>21.04.2026</a:t>
+              <a:t>25.04.2026</a:t>
             </a:fld>
             <a:endParaRPr lang="ru-RU"/>
           </a:p>
@@ -6998,7 +6996,7 @@
           <a:p>
             <a:fld id="{77D79FE6-5460-4BB7-8806-BC3D23582E7F}" type="datetimeFigureOut">
               <a:rPr lang="ru-RU" smtClean="0"/>
-              <a:t>21.04.2026</a:t>
+              <a:t>25.04.2026</a:t>
             </a:fld>
             <a:endParaRPr lang="ru-RU"/>
           </a:p>
@@ -7178,7 +7176,7 @@
           <a:p>
             <a:fld id="{77D79FE6-5460-4BB7-8806-BC3D23582E7F}" type="datetimeFigureOut">
               <a:rPr lang="ru-RU" smtClean="0"/>
-              <a:t>21.04.2026</a:t>
+              <a:t>25.04.2026</a:t>
             </a:fld>
             <a:endParaRPr lang="ru-RU"/>
           </a:p>
@@ -7348,7 +7346,7 @@
           <a:p>
             <a:fld id="{77D79FE6-5460-4BB7-8806-BC3D23582E7F}" type="datetimeFigureOut">
               <a:rPr lang="ru-RU" smtClean="0"/>
-              <a:t>21.04.2026</a:t>
+              <a:t>25.04.2026</a:t>
             </a:fld>
             <a:endParaRPr lang="ru-RU"/>
           </a:p>
@@ -7598,7 +7596,7 @@
           <a:p>
             <a:fld id="{77D79FE6-5460-4BB7-8806-BC3D23582E7F}" type="datetimeFigureOut">
               <a:rPr lang="ru-RU" smtClean="0"/>
-              <a:t>21.04.2026</a:t>
+              <a:t>25.04.2026</a:t>
             </a:fld>
             <a:endParaRPr lang="ru-RU"/>
           </a:p>
@@ -7830,7 +7828,7 @@
           <a:p>
             <a:fld id="{77D79FE6-5460-4BB7-8806-BC3D23582E7F}" type="datetimeFigureOut">
               <a:rPr lang="ru-RU" smtClean="0"/>
-              <a:t>21.04.2026</a:t>
+              <a:t>25.04.2026</a:t>
             </a:fld>
             <a:endParaRPr lang="ru-RU"/>
           </a:p>
@@ -8211,7 +8209,7 @@
           <a:p>
             <a:fld id="{77D79FE6-5460-4BB7-8806-BC3D23582E7F}" type="datetimeFigureOut">
               <a:rPr lang="ru-RU" smtClean="0"/>
-              <a:t>21.04.2026</a:t>
+              <a:t>25.04.2026</a:t>
             </a:fld>
             <a:endParaRPr lang="ru-RU"/>
           </a:p>
@@ -8329,7 +8327,7 @@
           <a:p>
             <a:fld id="{77D79FE6-5460-4BB7-8806-BC3D23582E7F}" type="datetimeFigureOut">
               <a:rPr lang="ru-RU" smtClean="0"/>
-              <a:t>21.04.2026</a:t>
+              <a:t>25.04.2026</a:t>
             </a:fld>
             <a:endParaRPr lang="ru-RU"/>
           </a:p>
@@ -8424,7 +8422,7 @@
           <a:p>
             <a:fld id="{77D79FE6-5460-4BB7-8806-BC3D23582E7F}" type="datetimeFigureOut">
               <a:rPr lang="ru-RU" smtClean="0"/>
-              <a:t>21.04.2026</a:t>
+              <a:t>25.04.2026</a:t>
             </a:fld>
             <a:endParaRPr lang="ru-RU"/>
           </a:p>
@@ -8673,7 +8671,7 @@
           <a:p>
             <a:fld id="{77D79FE6-5460-4BB7-8806-BC3D23582E7F}" type="datetimeFigureOut">
               <a:rPr lang="ru-RU" smtClean="0"/>
-              <a:t>21.04.2026</a:t>
+              <a:t>25.04.2026</a:t>
             </a:fld>
             <a:endParaRPr lang="ru-RU"/>
           </a:p>
@@ -8953,7 +8951,7 @@
           <a:p>
             <a:fld id="{77D79FE6-5460-4BB7-8806-BC3D23582E7F}" type="datetimeFigureOut">
               <a:rPr lang="ru-RU" smtClean="0"/>
-              <a:t>21.04.2026</a:t>
+              <a:t>25.04.2026</a:t>
             </a:fld>
             <a:endParaRPr lang="ru-RU"/>
           </a:p>
@@ -9069,7 +9067,7 @@
           <a:noFill/>
           <a:extLst>
             <a:ext uri="{909E8E84-426E-40dd-AFC4-6F175D3DCCD1}">
-              <a14:hiddenFill xmlns:a14="http://schemas.microsoft.com/office/drawing/2010/main" xmlns="">
+              <a14:hiddenFill xmlns="" xmlns:a14="http://schemas.microsoft.com/office/drawing/2010/main">
                 <a:solidFill>
                   <a:srgbClr val="FFFFFF"/>
                 </a:solidFill>
@@ -9143,7 +9141,7 @@
               </a:ln>
               <a:extLst>
                 <a:ext uri="{91240B29-F687-4f45-9708-019B960494DF}">
-                  <a14:hiddenLine xmlns:a14="http://schemas.microsoft.com/office/drawing/2010/main" xmlns="" w="9525">
+                  <a14:hiddenLine xmlns="" xmlns:a14="http://schemas.microsoft.com/office/drawing/2010/main" w="9525">
                     <a:solidFill>
                       <a:srgbClr val="000000"/>
                     </a:solidFill>
@@ -9233,7 +9231,7 @@
               </a:ln>
               <a:extLst>
                 <a:ext uri="{91240B29-F687-4f45-9708-019B960494DF}">
-                  <a14:hiddenLine xmlns:a14="http://schemas.microsoft.com/office/drawing/2010/main" xmlns="" w="9525">
+                  <a14:hiddenLine xmlns="" xmlns:a14="http://schemas.microsoft.com/office/drawing/2010/main" w="9525">
                     <a:solidFill>
                       <a:srgbClr val="000000"/>
                     </a:solidFill>
@@ -9323,7 +9321,7 @@
               </a:ln>
               <a:extLst>
                 <a:ext uri="{91240B29-F687-4f45-9708-019B960494DF}">
-                  <a14:hiddenLine xmlns:a14="http://schemas.microsoft.com/office/drawing/2010/main" xmlns="" w="9525">
+                  <a14:hiddenLine xmlns="" xmlns:a14="http://schemas.microsoft.com/office/drawing/2010/main" w="9525">
                     <a:solidFill>
                       <a:srgbClr val="000000"/>
                     </a:solidFill>
@@ -9385,7 +9383,7 @@
               </a:ln>
               <a:extLst>
                 <a:ext uri="{91240B29-F687-4f45-9708-019B960494DF}">
-                  <a14:hiddenLine xmlns:a14="http://schemas.microsoft.com/office/drawing/2010/main" xmlns="" w="9525">
+                  <a14:hiddenLine xmlns="" xmlns:a14="http://schemas.microsoft.com/office/drawing/2010/main" w="9525">
                     <a:solidFill>
                       <a:srgbClr val="000000"/>
                     </a:solidFill>
@@ -9475,7 +9473,7 @@
               </a:ln>
               <a:extLst>
                 <a:ext uri="{91240B29-F687-4f45-9708-019B960494DF}">
-                  <a14:hiddenLine xmlns:a14="http://schemas.microsoft.com/office/drawing/2010/main" xmlns="" w="9525">
+                  <a14:hiddenLine xmlns="" xmlns:a14="http://schemas.microsoft.com/office/drawing/2010/main" w="9525">
                     <a:solidFill>
                       <a:srgbClr val="000000"/>
                     </a:solidFill>
@@ -9537,7 +9535,7 @@
               </a:ln>
               <a:extLst>
                 <a:ext uri="{91240B29-F687-4f45-9708-019B960494DF}">
-                  <a14:hiddenLine xmlns:a14="http://schemas.microsoft.com/office/drawing/2010/main" xmlns="" w="9525">
+                  <a14:hiddenLine xmlns="" xmlns:a14="http://schemas.microsoft.com/office/drawing/2010/main" w="9525">
                     <a:solidFill>
                       <a:srgbClr val="000000"/>
                     </a:solidFill>
@@ -9599,7 +9597,7 @@
               </a:ln>
               <a:extLst>
                 <a:ext uri="{91240B29-F687-4f45-9708-019B960494DF}">
-                  <a14:hiddenLine xmlns:a14="http://schemas.microsoft.com/office/drawing/2010/main" xmlns="" w="9525">
+                  <a14:hiddenLine xmlns="" xmlns:a14="http://schemas.microsoft.com/office/drawing/2010/main" w="9525">
                     <a:solidFill>
                       <a:srgbClr val="000000"/>
                     </a:solidFill>
@@ -9689,7 +9687,7 @@
               </a:ln>
               <a:extLst>
                 <a:ext uri="{91240B29-F687-4f45-9708-019B960494DF}">
-                  <a14:hiddenLine xmlns:a14="http://schemas.microsoft.com/office/drawing/2010/main" xmlns="" w="9525">
+                  <a14:hiddenLine xmlns="" xmlns:a14="http://schemas.microsoft.com/office/drawing/2010/main" w="9525">
                     <a:solidFill>
                       <a:srgbClr val="000000"/>
                     </a:solidFill>
@@ -9779,7 +9777,7 @@
               </a:ln>
               <a:extLst>
                 <a:ext uri="{91240B29-F687-4f45-9708-019B960494DF}">
-                  <a14:hiddenLine xmlns:a14="http://schemas.microsoft.com/office/drawing/2010/main" xmlns="" w="9525">
+                  <a14:hiddenLine xmlns="" xmlns:a14="http://schemas.microsoft.com/office/drawing/2010/main" w="9525">
                     <a:solidFill>
                       <a:srgbClr val="000000"/>
                     </a:solidFill>
@@ -9841,7 +9839,7 @@
               </a:ln>
               <a:extLst>
                 <a:ext uri="{91240B29-F687-4f45-9708-019B960494DF}">
-                  <a14:hiddenLine xmlns:a14="http://schemas.microsoft.com/office/drawing/2010/main" xmlns="" w="9525">
+                  <a14:hiddenLine xmlns="" xmlns:a14="http://schemas.microsoft.com/office/drawing/2010/main" w="9525">
                     <a:solidFill>
                       <a:srgbClr val="000000"/>
                     </a:solidFill>
@@ -9951,7 +9949,7 @@
               </a:ln>
               <a:extLst>
                 <a:ext uri="{91240B29-F687-4f45-9708-019B960494DF}">
-                  <a14:hiddenLine xmlns:a14="http://schemas.microsoft.com/office/drawing/2010/main" xmlns="" w="9525">
+                  <a14:hiddenLine xmlns="" xmlns:a14="http://schemas.microsoft.com/office/drawing/2010/main" w="9525">
                     <a:solidFill>
                       <a:srgbClr val="000000"/>
                     </a:solidFill>
@@ -10035,7 +10033,7 @@
               </a:ln>
               <a:extLst>
                 <a:ext uri="{91240B29-F687-4f45-9708-019B960494DF}">
-                  <a14:hiddenLine xmlns:a14="http://schemas.microsoft.com/office/drawing/2010/main" xmlns="" w="9525">
+                  <a14:hiddenLine xmlns="" xmlns:a14="http://schemas.microsoft.com/office/drawing/2010/main" w="9525">
                     <a:solidFill>
                       <a:srgbClr val="000000"/>
                     </a:solidFill>
@@ -10097,7 +10095,7 @@
               </a:ln>
               <a:extLst>
                 <a:ext uri="{91240B29-F687-4f45-9708-019B960494DF}">
-                  <a14:hiddenLine xmlns:a14="http://schemas.microsoft.com/office/drawing/2010/main" xmlns="" w="9525">
+                  <a14:hiddenLine xmlns="" xmlns:a14="http://schemas.microsoft.com/office/drawing/2010/main" w="9525">
                     <a:solidFill>
                       <a:srgbClr val="000000"/>
                     </a:solidFill>
@@ -10159,7 +10157,7 @@
               </a:ln>
               <a:extLst>
                 <a:ext uri="{91240B29-F687-4f45-9708-019B960494DF}">
-                  <a14:hiddenLine xmlns:a14="http://schemas.microsoft.com/office/drawing/2010/main" xmlns="" w="9525">
+                  <a14:hiddenLine xmlns="" xmlns:a14="http://schemas.microsoft.com/office/drawing/2010/main" w="9525">
                     <a:solidFill>
                       <a:srgbClr val="000000"/>
                     </a:solidFill>
@@ -10249,7 +10247,7 @@
               </a:ln>
               <a:extLst>
                 <a:ext uri="{91240B29-F687-4f45-9708-019B960494DF}">
-                  <a14:hiddenLine xmlns:a14="http://schemas.microsoft.com/office/drawing/2010/main" xmlns="" w="9525">
+                  <a14:hiddenLine xmlns="" xmlns:a14="http://schemas.microsoft.com/office/drawing/2010/main" w="9525">
                     <a:solidFill>
                       <a:srgbClr val="000000"/>
                     </a:solidFill>
@@ -10283,7 +10281,7 @@
               </a:ln>
               <a:extLst>
                 <a:ext uri="{91240B29-F687-4f45-9708-019B960494DF}">
-                  <a14:hiddenLine xmlns:a14="http://schemas.microsoft.com/office/drawing/2010/main" xmlns="" w="9525">
+                  <a14:hiddenLine xmlns="" xmlns:a14="http://schemas.microsoft.com/office/drawing/2010/main" w="9525">
                     <a:solidFill>
                       <a:srgbClr val="000000"/>
                     </a:solidFill>
@@ -10348,7 +10346,7 @@
               </a:ln>
               <a:extLst>
                 <a:ext uri="{91240B29-F687-4f45-9708-019B960494DF}">
-                  <a14:hiddenLine xmlns:a14="http://schemas.microsoft.com/office/drawing/2010/main" xmlns="" w="9525">
+                  <a14:hiddenLine xmlns="" xmlns:a14="http://schemas.microsoft.com/office/drawing/2010/main" w="9525">
                     <a:solidFill>
                       <a:srgbClr val="000000"/>
                     </a:solidFill>
@@ -10438,7 +10436,7 @@
               </a:ln>
               <a:extLst>
                 <a:ext uri="{91240B29-F687-4f45-9708-019B960494DF}">
-                  <a14:hiddenLine xmlns:a14="http://schemas.microsoft.com/office/drawing/2010/main" xmlns="" w="9525">
+                  <a14:hiddenLine xmlns="" xmlns:a14="http://schemas.microsoft.com/office/drawing/2010/main" w="9525">
                     <a:solidFill>
                       <a:srgbClr val="000000"/>
                     </a:solidFill>
@@ -10500,7 +10498,7 @@
               </a:ln>
               <a:extLst>
                 <a:ext uri="{91240B29-F687-4f45-9708-019B960494DF}">
-                  <a14:hiddenLine xmlns:a14="http://schemas.microsoft.com/office/drawing/2010/main" xmlns="" w="9525">
+                  <a14:hiddenLine xmlns="" xmlns:a14="http://schemas.microsoft.com/office/drawing/2010/main" w="9525">
                     <a:solidFill>
                       <a:srgbClr val="000000"/>
                     </a:solidFill>
@@ -10590,7 +10588,7 @@
               </a:ln>
               <a:extLst>
                 <a:ext uri="{91240B29-F687-4f45-9708-019B960494DF}">
-                  <a14:hiddenLine xmlns:a14="http://schemas.microsoft.com/office/drawing/2010/main" xmlns="" w="9525">
+                  <a14:hiddenLine xmlns="" xmlns:a14="http://schemas.microsoft.com/office/drawing/2010/main" w="9525">
                     <a:solidFill>
                       <a:srgbClr val="000000"/>
                     </a:solidFill>
@@ -10655,7 +10653,7 @@
               </a:ln>
               <a:extLst>
                 <a:ext uri="{91240B29-F687-4f45-9708-019B960494DF}">
-                  <a14:hiddenLine xmlns:a14="http://schemas.microsoft.com/office/drawing/2010/main" xmlns="" w="9525">
+                  <a14:hiddenLine xmlns="" xmlns:a14="http://schemas.microsoft.com/office/drawing/2010/main" w="9525">
                     <a:solidFill>
                       <a:srgbClr val="000000"/>
                     </a:solidFill>
@@ -10717,7 +10715,7 @@
               </a:ln>
               <a:extLst>
                 <a:ext uri="{91240B29-F687-4f45-9708-019B960494DF}">
-                  <a14:hiddenLine xmlns:a14="http://schemas.microsoft.com/office/drawing/2010/main" xmlns="" w="9525">
+                  <a14:hiddenLine xmlns="" xmlns:a14="http://schemas.microsoft.com/office/drawing/2010/main" w="9525">
                     <a:solidFill>
                       <a:srgbClr val="000000"/>
                     </a:solidFill>
@@ -10807,7 +10805,7 @@
               </a:ln>
               <a:extLst>
                 <a:ext uri="{91240B29-F687-4f45-9708-019B960494DF}">
-                  <a14:hiddenLine xmlns:a14="http://schemas.microsoft.com/office/drawing/2010/main" xmlns="" w="9525">
+                  <a14:hiddenLine xmlns="" xmlns:a14="http://schemas.microsoft.com/office/drawing/2010/main" w="9525">
                     <a:solidFill>
                       <a:srgbClr val="000000"/>
                     </a:solidFill>
@@ -10897,7 +10895,7 @@
               </a:ln>
               <a:extLst>
                 <a:ext uri="{91240B29-F687-4f45-9708-019B960494DF}">
-                  <a14:hiddenLine xmlns:a14="http://schemas.microsoft.com/office/drawing/2010/main" xmlns="" w="9525">
+                  <a14:hiddenLine xmlns="" xmlns:a14="http://schemas.microsoft.com/office/drawing/2010/main" w="9525">
                     <a:solidFill>
                       <a:srgbClr val="000000"/>
                     </a:solidFill>
@@ -10962,7 +10960,7 @@
               </a:ln>
               <a:extLst>
                 <a:ext uri="{91240B29-F687-4f45-9708-019B960494DF}">
-                  <a14:hiddenLine xmlns:a14="http://schemas.microsoft.com/office/drawing/2010/main" xmlns="" w="9525">
+                  <a14:hiddenLine xmlns="" xmlns:a14="http://schemas.microsoft.com/office/drawing/2010/main" w="9525">
                     <a:solidFill>
                       <a:srgbClr val="000000"/>
                     </a:solidFill>
@@ -11082,7 +11080,7 @@
               </a:ln>
               <a:extLst>
                 <a:ext uri="{91240B29-F687-4f45-9708-019B960494DF}">
-                  <a14:hiddenLine xmlns:a14="http://schemas.microsoft.com/office/drawing/2010/main" xmlns="" w="9525">
+                  <a14:hiddenLine xmlns="" xmlns:a14="http://schemas.microsoft.com/office/drawing/2010/main" w="9525">
                     <a:solidFill>
                       <a:srgbClr val="000000"/>
                     </a:solidFill>
@@ -11180,7 +11178,7 @@
               </a:ln>
               <a:extLst>
                 <a:ext uri="{91240B29-F687-4f45-9708-019B960494DF}">
-                  <a14:hiddenLine xmlns:a14="http://schemas.microsoft.com/office/drawing/2010/main" xmlns="" w="9525">
+                  <a14:hiddenLine xmlns="" xmlns:a14="http://schemas.microsoft.com/office/drawing/2010/main" w="9525">
                     <a:solidFill>
                       <a:srgbClr val="000000"/>
                     </a:solidFill>
@@ -11295,7 +11293,7 @@
               </a:ln>
               <a:extLst>
                 <a:ext uri="{91240B29-F687-4f45-9708-019B960494DF}">
-                  <a14:hiddenLine xmlns:a14="http://schemas.microsoft.com/office/drawing/2010/main" xmlns="" w="9525">
+                  <a14:hiddenLine xmlns="" xmlns:a14="http://schemas.microsoft.com/office/drawing/2010/main" w="9525">
                     <a:solidFill>
                       <a:srgbClr val="000000"/>
                     </a:solidFill>
@@ -11385,7 +11383,7 @@
               </a:ln>
               <a:extLst>
                 <a:ext uri="{91240B29-F687-4f45-9708-019B960494DF}">
-                  <a14:hiddenLine xmlns:a14="http://schemas.microsoft.com/office/drawing/2010/main" xmlns="" w="9525">
+                  <a14:hiddenLine xmlns="" xmlns:a14="http://schemas.microsoft.com/office/drawing/2010/main" w="9525">
                     <a:solidFill>
                       <a:srgbClr val="000000"/>
                     </a:solidFill>
@@ -11450,7 +11448,7 @@
               </a:ln>
               <a:extLst>
                 <a:ext uri="{91240B29-F687-4f45-9708-019B960494DF}">
-                  <a14:hiddenLine xmlns:a14="http://schemas.microsoft.com/office/drawing/2010/main" xmlns="" w="9525">
+                  <a14:hiddenLine xmlns="" xmlns:a14="http://schemas.microsoft.com/office/drawing/2010/main" w="9525">
                     <a:solidFill>
                       <a:srgbClr val="000000"/>
                     </a:solidFill>
@@ -11540,7 +11538,7 @@
               </a:ln>
               <a:extLst>
                 <a:ext uri="{91240B29-F687-4f45-9708-019B960494DF}">
-                  <a14:hiddenLine xmlns:a14="http://schemas.microsoft.com/office/drawing/2010/main" xmlns="" w="9525">
+                  <a14:hiddenLine xmlns="" xmlns:a14="http://schemas.microsoft.com/office/drawing/2010/main" w="9525">
                     <a:solidFill>
                       <a:srgbClr val="000000"/>
                     </a:solidFill>
@@ -11608,7 +11606,7 @@
               </a:ln>
               <a:extLst>
                 <a:ext uri="{91240B29-F687-4f45-9708-019B960494DF}">
-                  <a14:hiddenLine xmlns:a14="http://schemas.microsoft.com/office/drawing/2010/main" xmlns="" w="9525">
+                  <a14:hiddenLine xmlns="" xmlns:a14="http://schemas.microsoft.com/office/drawing/2010/main" w="9525">
                     <a:solidFill>
                       <a:srgbClr val="000000"/>
                     </a:solidFill>
@@ -11698,7 +11696,7 @@
               </a:ln>
               <a:extLst>
                 <a:ext uri="{91240B29-F687-4f45-9708-019B960494DF}">
-                  <a14:hiddenLine xmlns:a14="http://schemas.microsoft.com/office/drawing/2010/main" xmlns="" w="9525">
+                  <a14:hiddenLine xmlns="" xmlns:a14="http://schemas.microsoft.com/office/drawing/2010/main" w="9525">
                     <a:solidFill>
                       <a:srgbClr val="000000"/>
                     </a:solidFill>
@@ -11766,7 +11764,7 @@
               </a:ln>
               <a:extLst>
                 <a:ext uri="{91240B29-F687-4f45-9708-019B960494DF}">
-                  <a14:hiddenLine xmlns:a14="http://schemas.microsoft.com/office/drawing/2010/main" xmlns="" w="9525">
+                  <a14:hiddenLine xmlns="" xmlns:a14="http://schemas.microsoft.com/office/drawing/2010/main" w="9525">
                     <a:solidFill>
                       <a:srgbClr val="000000"/>
                     </a:solidFill>
@@ -11856,7 +11854,7 @@
               </a:ln>
               <a:extLst>
                 <a:ext uri="{91240B29-F687-4f45-9708-019B960494DF}">
-                  <a14:hiddenLine xmlns:a14="http://schemas.microsoft.com/office/drawing/2010/main" xmlns="" w="9525">
+                  <a14:hiddenLine xmlns="" xmlns:a14="http://schemas.microsoft.com/office/drawing/2010/main" w="9525">
                     <a:solidFill>
                       <a:srgbClr val="000000"/>
                     </a:solidFill>
@@ -11890,7 +11888,7 @@
               </a:ln>
               <a:extLst>
                 <a:ext uri="{91240B29-F687-4f45-9708-019B960494DF}">
-                  <a14:hiddenLine xmlns:a14="http://schemas.microsoft.com/office/drawing/2010/main" xmlns="" w="9525">
+                  <a14:hiddenLine xmlns="" xmlns:a14="http://schemas.microsoft.com/office/drawing/2010/main" w="9525">
                     <a:solidFill>
                       <a:srgbClr val="000000"/>
                     </a:solidFill>
@@ -12030,7 +12028,7 @@
           <a:p>
             <a:fld id="{77D79FE6-5460-4BB7-8806-BC3D23582E7F}" type="datetimeFigureOut">
               <a:rPr lang="ru-RU" smtClean="0"/>
-              <a:t>21.04.2026</a:t>
+              <a:t>25.04.2026</a:t>
             </a:fld>
             <a:endParaRPr lang="ru-RU"/>
           </a:p>
@@ -12499,15 +12497,7 @@
             </a:r>
             <a:r>
               <a:rPr lang="ru-RU" dirty="0" smtClean="0"/>
-              <a:t>, сделанный Александром Власовым из ип-61. </a:t>
-            </a:r>
-            <a:r>
-              <a:rPr lang="ru-RU" dirty="0" smtClean="0"/>
-              <a:t>ПРОГРАММА получает </a:t>
-            </a:r>
-            <a:r>
-              <a:rPr lang="ru-RU" dirty="0" smtClean="0"/>
-              <a:t>курсы валют из центрального банка российской федерации.</a:t>
+              <a:t>, сделанный Александром Власовым из ип-61. ПРОГРАММА получает курсы валют из центрального банка российской федерации.</a:t>
             </a:r>
             <a:endParaRPr lang="ru-RU" dirty="0"/>
           </a:p>
@@ -12631,224 +12621,136 @@
             <a:pPr algn="ctr"/>
             <a:r>
               <a:rPr lang="ru-RU" dirty="0" smtClean="0"/>
-              <a:t>Этапы реализации?</a:t>
+              <a:t>Целевая аудитория?</a:t>
             </a:r>
             <a:endParaRPr lang="ru-RU" dirty="0"/>
           </a:p>
         </p:txBody>
       </p:sp>
-      <p:graphicFrame>
-        <p:nvGraphicFramePr>
-          <p:cNvPr id="7" name="Объект 6"/>
-          <p:cNvGraphicFramePr>
-            <a:graphicFrameLocks noGrp="1"/>
-          </p:cNvGraphicFramePr>
+      <p:sp>
+        <p:nvSpPr>
+          <p:cNvPr id="3" name="Объект 2"/>
+          <p:cNvSpPr>
+            <a:spLocks noGrp="1"/>
+          </p:cNvSpPr>
           <p:nvPr>
             <p:ph idx="1"/>
-            <p:extLst>
-              <p:ext uri="{D42A27DB-BD31-4B8C-83A1-F6EECF244321}">
-                <p14:modId xmlns:p14="http://schemas.microsoft.com/office/powerpoint/2010/main" val="3161916077"/>
-              </p:ext>
-            </p:extLst>
           </p:nvPr>
-        </p:nvGraphicFramePr>
-        <p:xfrm>
-          <a:off x="1141413" y="1851660"/>
-          <a:ext cx="9906000" cy="2049780"/>
-        </p:xfrm>
-        <a:graphic>
-          <a:graphicData uri="http://schemas.openxmlformats.org/drawingml/2006/table">
-            <a:tbl>
-              <a:tblPr firstRow="1" bandRow="1">
-                <a:tableStyleId>{5C22544A-7EE6-4342-B048-85BDC9FD1C3A}</a:tableStyleId>
-              </a:tblPr>
-              <a:tblGrid>
-                <a:gridCol w="2476500"/>
-                <a:gridCol w="2476500"/>
-                <a:gridCol w="2476500"/>
-                <a:gridCol w="2476500"/>
-              </a:tblGrid>
-              <a:tr h="518160">
-                <a:tc>
-                  <a:txBody>
-                    <a:bodyPr/>
-                    <a:lstStyle/>
-                    <a:p>
-                      <a:r>
-                        <a:rPr lang="ru-RU" dirty="0" smtClean="0"/>
-                        <a:t>1 неделя</a:t>
-                      </a:r>
-                      <a:endParaRPr lang="ru-RU" dirty="0"/>
-                    </a:p>
-                  </a:txBody>
-                  <a:tcPr/>
-                </a:tc>
-                <a:tc>
-                  <a:txBody>
-                    <a:bodyPr/>
-                    <a:lstStyle/>
-                    <a:p>
-                      <a:pPr marL="0" marR="0" indent="0" algn="l" defTabSz="914400" rtl="0" eaLnBrk="1" fontAlgn="auto" latinLnBrk="0" hangingPunct="1">
-                        <a:lnSpc>
-                          <a:spcPct val="100000"/>
-                        </a:lnSpc>
-                        <a:spcBef>
-                          <a:spcPts val="0"/>
-                        </a:spcBef>
-                        <a:spcAft>
-                          <a:spcPts val="0"/>
-                        </a:spcAft>
-                        <a:buClrTx/>
-                        <a:buSzTx/>
-                        <a:buFontTx/>
-                        <a:buNone/>
-                        <a:tabLst/>
-                        <a:defRPr/>
-                      </a:pPr>
-                      <a:r>
-                        <a:rPr lang="ru-RU" dirty="0" smtClean="0"/>
-                        <a:t>2 </a:t>
-                      </a:r>
-                      <a:r>
-                        <a:rPr lang="ru-RU" dirty="0" smtClean="0"/>
-                        <a:t>неделя</a:t>
-                      </a:r>
-                    </a:p>
-                  </a:txBody>
-                  <a:tcPr/>
-                </a:tc>
-                <a:tc>
-                  <a:txBody>
-                    <a:bodyPr/>
-                    <a:lstStyle/>
-                    <a:p>
-                      <a:pPr marL="0" marR="0" indent="0" algn="l" defTabSz="914400" rtl="0" eaLnBrk="1" fontAlgn="auto" latinLnBrk="0" hangingPunct="1">
-                        <a:lnSpc>
-                          <a:spcPct val="100000"/>
-                        </a:lnSpc>
-                        <a:spcBef>
-                          <a:spcPts val="0"/>
-                        </a:spcBef>
-                        <a:spcAft>
-                          <a:spcPts val="0"/>
-                        </a:spcAft>
-                        <a:buClrTx/>
-                        <a:buSzTx/>
-                        <a:buFontTx/>
-                        <a:buNone/>
-                        <a:tabLst/>
-                        <a:defRPr/>
-                      </a:pPr>
-                      <a:r>
-                        <a:rPr lang="ru-RU" dirty="0" smtClean="0"/>
-                        <a:t>3 </a:t>
-                      </a:r>
-                      <a:r>
-                        <a:rPr lang="ru-RU" dirty="0" smtClean="0"/>
-                        <a:t>неделя</a:t>
-                      </a:r>
-                    </a:p>
-                  </a:txBody>
-                  <a:tcPr/>
-                </a:tc>
-                <a:tc>
-                  <a:txBody>
-                    <a:bodyPr/>
-                    <a:lstStyle/>
-                    <a:p>
-                      <a:pPr marL="0" marR="0" indent="0" algn="l" defTabSz="914400" rtl="0" eaLnBrk="1" fontAlgn="auto" latinLnBrk="0" hangingPunct="1">
-                        <a:lnSpc>
-                          <a:spcPct val="100000"/>
-                        </a:lnSpc>
-                        <a:spcBef>
-                          <a:spcPts val="0"/>
-                        </a:spcBef>
-                        <a:spcAft>
-                          <a:spcPts val="0"/>
-                        </a:spcAft>
-                        <a:buClrTx/>
-                        <a:buSzTx/>
-                        <a:buFontTx/>
-                        <a:buNone/>
-                        <a:tabLst/>
-                        <a:defRPr/>
-                      </a:pPr>
-                      <a:r>
-                        <a:rPr lang="ru-RU" dirty="0" smtClean="0"/>
-                        <a:t>4 </a:t>
-                      </a:r>
-                      <a:r>
-                        <a:rPr lang="ru-RU" dirty="0" smtClean="0"/>
-                        <a:t>неделя</a:t>
-                      </a:r>
-                    </a:p>
-                  </a:txBody>
-                  <a:tcPr/>
-                </a:tc>
-              </a:tr>
-              <a:tr h="1531620">
-                <a:tc>
-                  <a:txBody>
-                    <a:bodyPr/>
-                    <a:lstStyle/>
-                    <a:p>
-                      <a:endParaRPr lang="ru-RU" dirty="0"/>
-                    </a:p>
-                  </a:txBody>
-                  <a:tcPr/>
-                </a:tc>
-                <a:tc>
-                  <a:txBody>
-                    <a:bodyPr/>
-                    <a:lstStyle/>
-                    <a:p>
-                      <a:endParaRPr lang="ru-RU" dirty="0"/>
-                    </a:p>
-                  </a:txBody>
-                  <a:tcPr/>
-                </a:tc>
-                <a:tc>
-                  <a:txBody>
-                    <a:bodyPr/>
-                    <a:lstStyle/>
-                    <a:p>
-                      <a:endParaRPr lang="ru-RU"/>
-                    </a:p>
-                  </a:txBody>
-                  <a:tcPr/>
-                </a:tc>
-                <a:tc>
-                  <a:txBody>
-                    <a:bodyPr/>
-                    <a:lstStyle/>
-                    <a:p>
-                      <a:endParaRPr lang="ru-RU" dirty="0"/>
-                    </a:p>
-                  </a:txBody>
-                  <a:tcPr/>
-                </a:tc>
-              </a:tr>
-            </a:tbl>
-          </a:graphicData>
-        </a:graphic>
-      </p:graphicFrame>
+        </p:nvSpPr>
+        <p:spPr/>
+        <p:txBody>
+          <a:bodyPr>
+            <a:normAutofit fontScale="55000" lnSpcReduction="20000"/>
+          </a:bodyPr>
+          <a:lstStyle/>
+          <a:p>
+            <a:r>
+              <a:rPr lang="ru-RU" dirty="0" smtClean="0"/>
+              <a:t>Всевозможные банки;</a:t>
+            </a:r>
+          </a:p>
+          <a:p>
+            <a:r>
+              <a:rPr lang="ru-RU" dirty="0" smtClean="0"/>
+              <a:t>Сайты для обмена валют;</a:t>
+            </a:r>
+          </a:p>
+          <a:p>
+            <a:r>
+              <a:rPr lang="ru-RU" dirty="0" smtClean="0"/>
+              <a:t>Обычные пользователи;</a:t>
+            </a:r>
+          </a:p>
+          <a:p>
+            <a:r>
+              <a:rPr lang="ru-RU" dirty="0"/>
+              <a:t>Бизнес и </a:t>
+            </a:r>
+            <a:r>
+              <a:rPr lang="ru-RU" dirty="0" smtClean="0"/>
+              <a:t>предприниматели;</a:t>
+            </a:r>
+          </a:p>
+          <a:p>
+            <a:r>
+              <a:rPr lang="ru-RU" dirty="0" smtClean="0"/>
+              <a:t>Инвесторы;</a:t>
+            </a:r>
+          </a:p>
+          <a:p>
+            <a:r>
+              <a:rPr lang="ru-RU" dirty="0"/>
+              <a:t>Финансовые </a:t>
+            </a:r>
+            <a:r>
+              <a:rPr lang="ru-RU" dirty="0" smtClean="0"/>
+              <a:t>специалисты;</a:t>
+            </a:r>
+          </a:p>
+          <a:p>
+            <a:r>
+              <a:rPr lang="ru-RU" dirty="0"/>
+              <a:t>Переводчики и </a:t>
+            </a:r>
+            <a:r>
+              <a:rPr lang="ru-RU" dirty="0" smtClean="0"/>
+              <a:t>лингвисты;</a:t>
+            </a:r>
+            <a:endParaRPr lang="ru-RU" dirty="0"/>
+          </a:p>
+          <a:p>
+            <a:r>
+              <a:rPr lang="ru-RU" dirty="0" smtClean="0"/>
+              <a:t>Криптоэнтузиасты;</a:t>
+            </a:r>
+          </a:p>
+          <a:p>
+            <a:r>
+              <a:rPr lang="ru-RU" dirty="0" smtClean="0"/>
+              <a:t>Геймеры;</a:t>
+            </a:r>
+          </a:p>
+          <a:p>
+            <a:r>
+              <a:rPr lang="ru-RU" dirty="0" smtClean="0"/>
+              <a:t>Коллекционеры;</a:t>
+            </a:r>
+          </a:p>
+          <a:p>
+            <a:r>
+              <a:rPr lang="ru-RU" dirty="0"/>
+              <a:t>Организаторы </a:t>
+            </a:r>
+            <a:r>
+              <a:rPr lang="ru-RU" dirty="0" smtClean="0"/>
+              <a:t>мероприятий;</a:t>
+            </a:r>
+            <a:endParaRPr lang="ru-RU" dirty="0"/>
+          </a:p>
+          <a:p>
+            <a:endParaRPr lang="ru-RU" dirty="0"/>
+          </a:p>
+          <a:p>
+            <a:endParaRPr lang="ru-RU" dirty="0" smtClean="0"/>
+          </a:p>
+          <a:p>
+            <a:endParaRPr lang="ru-RU" dirty="0" smtClean="0"/>
+          </a:p>
+          <a:p>
+            <a:endParaRPr lang="ru-RU" dirty="0"/>
+          </a:p>
+        </p:txBody>
+      </p:sp>
     </p:spTree>
     <p:extLst>
       <p:ext uri="{BB962C8B-B14F-4D97-AF65-F5344CB8AC3E}">
-        <p14:creationId xmlns:p14="http://schemas.microsoft.com/office/powerpoint/2010/main" val="1055535192"/>
+        <p14:creationId xmlns:p14="http://schemas.microsoft.com/office/powerpoint/2010/main" val="2605322577"/>
       </p:ext>
     </p:extLst>
   </p:cSld>
   <p:clrMapOvr>
     <a:masterClrMapping/>
   </p:clrMapOvr>
-  <p:timing>
-    <p:tnLst>
-      <p:par>
-        <p:cTn id="1" dur="indefinite" restart="never" nodeType="tmRoot"/>
-      </p:par>
-    </p:tnLst>
-  </p:timing>
 </p:sld>
 </file>
 
@@ -12884,166 +12786,6 @@
           <a:bodyPr/>
           <a:lstStyle/>
           <a:p>
-            <a:pPr algn="ctr"/>
-            <a:r>
-              <a:rPr lang="ru-RU" dirty="0" smtClean="0"/>
-              <a:t>Целевая аудитория?</a:t>
-            </a:r>
-            <a:endParaRPr lang="ru-RU" dirty="0"/>
-          </a:p>
-        </p:txBody>
-      </p:sp>
-      <p:sp>
-        <p:nvSpPr>
-          <p:cNvPr id="3" name="Объект 2"/>
-          <p:cNvSpPr>
-            <a:spLocks noGrp="1"/>
-          </p:cNvSpPr>
-          <p:nvPr>
-            <p:ph idx="1"/>
-          </p:nvPr>
-        </p:nvSpPr>
-        <p:spPr/>
-        <p:txBody>
-          <a:bodyPr/>
-          <a:lstStyle/>
-          <a:p>
-            <a:endParaRPr lang="ru-RU" dirty="0"/>
-          </a:p>
-        </p:txBody>
-      </p:sp>
-    </p:spTree>
-    <p:extLst>
-      <p:ext uri="{BB962C8B-B14F-4D97-AF65-F5344CB8AC3E}">
-        <p14:creationId xmlns:p14="http://schemas.microsoft.com/office/powerpoint/2010/main" val="3359091378"/>
-      </p:ext>
-    </p:extLst>
-  </p:cSld>
-  <p:clrMapOvr>
-    <a:masterClrMapping/>
-  </p:clrMapOvr>
-  <p:timing>
-    <p:tnLst>
-      <p:par>
-        <p:cTn id="1" dur="indefinite" restart="never" nodeType="tmRoot"/>
-      </p:par>
-    </p:tnLst>
-  </p:timing>
-</p:sld>
-</file>
-
-<file path=ppt/slides/slide12.xml><?xml version="1.0" encoding="utf-8"?>
-<p:sld xmlns:a="http://schemas.openxmlformats.org/drawingml/2006/main" xmlns:r="http://schemas.openxmlformats.org/officeDocument/2006/relationships" xmlns:p="http://schemas.openxmlformats.org/presentationml/2006/main">
-  <p:cSld>
-    <p:spTree>
-      <p:nvGrpSpPr>
-        <p:cNvPr id="1" name=""/>
-        <p:cNvGrpSpPr/>
-        <p:nvPr/>
-      </p:nvGrpSpPr>
-      <p:grpSpPr>
-        <a:xfrm>
-          <a:off x="0" y="0"/>
-          <a:ext cx="0" cy="0"/>
-          <a:chOff x="0" y="0"/>
-          <a:chExt cx="0" cy="0"/>
-        </a:xfrm>
-      </p:grpSpPr>
-      <p:sp>
-        <p:nvSpPr>
-          <p:cNvPr id="2" name="Заголовок 1"/>
-          <p:cNvSpPr>
-            <a:spLocks noGrp="1"/>
-          </p:cNvSpPr>
-          <p:nvPr>
-            <p:ph type="title"/>
-          </p:nvPr>
-        </p:nvSpPr>
-        <p:spPr/>
-        <p:txBody>
-          <a:bodyPr/>
-          <a:lstStyle/>
-          <a:p>
-            <a:pPr algn="ctr"/>
-            <a:r>
-              <a:rPr lang="ru-RU" dirty="0" smtClean="0"/>
-              <a:t>Аналоги?</a:t>
-            </a:r>
-            <a:endParaRPr lang="ru-RU" dirty="0"/>
-          </a:p>
-        </p:txBody>
-      </p:sp>
-      <p:sp>
-        <p:nvSpPr>
-          <p:cNvPr id="3" name="Объект 2"/>
-          <p:cNvSpPr>
-            <a:spLocks noGrp="1"/>
-          </p:cNvSpPr>
-          <p:nvPr>
-            <p:ph idx="1"/>
-          </p:nvPr>
-        </p:nvSpPr>
-        <p:spPr/>
-        <p:txBody>
-          <a:bodyPr/>
-          <a:lstStyle/>
-          <a:p>
-            <a:endParaRPr lang="ru-RU"/>
-          </a:p>
-        </p:txBody>
-      </p:sp>
-    </p:spTree>
-    <p:extLst>
-      <p:ext uri="{BB962C8B-B14F-4D97-AF65-F5344CB8AC3E}">
-        <p14:creationId xmlns:p14="http://schemas.microsoft.com/office/powerpoint/2010/main" val="3480229567"/>
-      </p:ext>
-    </p:extLst>
-  </p:cSld>
-  <p:clrMapOvr>
-    <a:masterClrMapping/>
-  </p:clrMapOvr>
-  <p:timing>
-    <p:tnLst>
-      <p:par>
-        <p:cTn id="1" dur="indefinite" restart="never" nodeType="tmRoot"/>
-      </p:par>
-    </p:tnLst>
-  </p:timing>
-</p:sld>
-</file>
-
-<file path=ppt/slides/slide13.xml><?xml version="1.0" encoding="utf-8"?>
-<p:sld xmlns:a="http://schemas.openxmlformats.org/drawingml/2006/main" xmlns:r="http://schemas.openxmlformats.org/officeDocument/2006/relationships" xmlns:p="http://schemas.openxmlformats.org/presentationml/2006/main">
-  <p:cSld>
-    <p:spTree>
-      <p:nvGrpSpPr>
-        <p:cNvPr id="1" name=""/>
-        <p:cNvGrpSpPr/>
-        <p:nvPr/>
-      </p:nvGrpSpPr>
-      <p:grpSpPr>
-        <a:xfrm>
-          <a:off x="0" y="0"/>
-          <a:ext cx="0" cy="0"/>
-          <a:chOff x="0" y="0"/>
-          <a:chExt cx="0" cy="0"/>
-        </a:xfrm>
-      </p:grpSpPr>
-      <p:sp>
-        <p:nvSpPr>
-          <p:cNvPr id="2" name="Заголовок 1"/>
-          <p:cNvSpPr>
-            <a:spLocks noGrp="1"/>
-          </p:cNvSpPr>
-          <p:nvPr>
-            <p:ph type="title"/>
-          </p:nvPr>
-        </p:nvSpPr>
-        <p:spPr/>
-        <p:txBody>
-          <a:bodyPr/>
-          <a:lstStyle/>
-          <a:p>
             <a:r>
               <a:rPr lang="ru-RU" dirty="0"/>
               <a:t>Итоги и </a:t>
@@ -13219,7 +12961,7 @@
 </p:sld>
 </file>
 
-<file path=ppt/slides/slide14.xml><?xml version="1.0" encoding="utf-8"?>
+<file path=ppt/slides/slide12.xml><?xml version="1.0" encoding="utf-8"?>
 <p:sld xmlns:a="http://schemas.openxmlformats.org/drawingml/2006/main" xmlns:r="http://schemas.openxmlformats.org/officeDocument/2006/relationships" xmlns:p="http://schemas.openxmlformats.org/presentationml/2006/main">
   <p:cSld>
     <p:spTree>
@@ -13298,7 +13040,7 @@
 </p:sld>
 </file>
 
-<file path=ppt/slides/slide15.xml><?xml version="1.0" encoding="utf-8"?>
+<file path=ppt/slides/slide13.xml><?xml version="1.0" encoding="utf-8"?>
 <p:sld xmlns:a="http://schemas.openxmlformats.org/drawingml/2006/main" xmlns:r="http://schemas.openxmlformats.org/officeDocument/2006/relationships" xmlns:p="http://schemas.openxmlformats.org/presentationml/2006/main">
   <p:cSld>
     <p:spTree>
@@ -13328,7 +13070,7 @@
         <p:spPr/>
         <p:txBody>
           <a:bodyPr>
-            <a:normAutofit fontScale="90000"/>
+            <a:normAutofit/>
           </a:bodyPr>
           <a:lstStyle/>
           <a:p>
@@ -13449,7 +13191,11 @@
             </a:r>
             <a:r>
               <a:rPr lang="ru-RU" b="1" dirty="0" smtClean="0"/>
-              <a:t>: +7 995 315 91 89</a:t>
+              <a:t>: +7 995 315 </a:t>
+            </a:r>
+            <a:r>
+              <a:rPr lang="ru-RU" b="1" dirty="0" smtClean="0"/>
+              <a:t>91-89</a:t>
             </a:r>
             <a:endParaRPr lang="en-US" b="1" dirty="0" smtClean="0"/>
           </a:p>
@@ -14136,7 +13882,7 @@
             <a:pPr algn="ctr"/>
             <a:r>
               <a:rPr lang="ru-RU" dirty="0" smtClean="0"/>
-              <a:t>Монетизация?</a:t>
+              <a:t>Логика конвертации?</a:t>
             </a:r>
             <a:endParaRPr lang="ru-RU" dirty="0"/>
           </a:p>
@@ -14154,108 +13900,49 @@
         </p:nvSpPr>
         <p:spPr/>
         <p:txBody>
-          <a:bodyPr>
-            <a:normAutofit fontScale="92500" lnSpcReduction="20000"/>
-          </a:bodyPr>
+          <a:bodyPr/>
           <a:lstStyle/>
           <a:p>
             <a:pPr marL="0" indent="0" algn="ctr">
               <a:buNone/>
             </a:pPr>
             <a:r>
+              <a:rPr lang="ru-RU" b="1" dirty="0" smtClean="0"/>
+              <a:t>Формула:</a:t>
+            </a:r>
+          </a:p>
+          <a:p>
+            <a:pPr marL="0" indent="0" algn="ctr">
+              <a:buNone/>
+            </a:pPr>
+            <a:r>
               <a:rPr lang="ru-RU" dirty="0" smtClean="0"/>
-              <a:t>!!Это будет стоить 99</a:t>
+              <a:t>сумма_в_валюте = курс</a:t>
             </a:r>
             <a:r>
               <a:rPr lang="en-US" dirty="0" smtClean="0"/>
-              <a:t>’</a:t>
+              <a:t> </a:t>
             </a:r>
             <a:r>
               <a:rPr lang="ru-RU" dirty="0" smtClean="0"/>
-              <a:t>999 руб. !!</a:t>
-            </a:r>
-          </a:p>
-          <a:p>
-            <a:pPr algn="ctr">
-              <a:buFont typeface="Wingdings" panose="05000000000000000000" pitchFamily="2" charset="2"/>
-              <a:buChar char="J"/>
-            </a:pPr>
+              <a:t>/</a:t>
+            </a:r>
+            <a:r>
+              <a:rPr lang="en-US" dirty="0" smtClean="0"/>
+              <a:t> </a:t>
+            </a:r>
             <a:r>
               <a:rPr lang="ru-RU" dirty="0" smtClean="0"/>
-              <a:t>просто ради прикола </a:t>
-            </a:r>
-            <a:r>
-              <a:rPr lang="ru-RU" dirty="0" smtClean="0">
-                <a:sym typeface="Wingdings" panose="05000000000000000000" pitchFamily="2" charset="2"/>
-              </a:rPr>
-              <a:t></a:t>
-            </a:r>
-          </a:p>
-          <a:p>
-            <a:pPr marL="0" indent="0" algn="ctr">
-              <a:buNone/>
-            </a:pPr>
-            <a:r>
-              <a:rPr lang="ru-RU" dirty="0"/>
-              <a:t>Но у этого </a:t>
-            </a:r>
-            <a:r>
-              <a:rPr lang="ru-RU" dirty="0" smtClean="0"/>
-              <a:t>проекта будет скидка 99,9%</a:t>
+              <a:t>сумма_в_рублях​</a:t>
             </a:r>
             <a:endParaRPr lang="ru-RU" dirty="0"/>
-          </a:p>
-          <a:p>
-            <a:pPr marL="0" indent="0" algn="ctr">
-              <a:buNone/>
-            </a:pPr>
-            <a:endParaRPr lang="ru-RU" dirty="0">
-              <a:sym typeface="Wingdings" panose="05000000000000000000" pitchFamily="2" charset="2"/>
-            </a:endParaRPr>
-          </a:p>
-          <a:p>
-            <a:pPr algn="ctr">
-              <a:buFont typeface="Wingdings" panose="05000000000000000000" pitchFamily="2" charset="2"/>
-              <a:buChar char="J"/>
-            </a:pPr>
-            <a:endParaRPr lang="ru-RU" dirty="0" smtClean="0">
-              <a:sym typeface="Wingdings" panose="05000000000000000000" pitchFamily="2" charset="2"/>
-            </a:endParaRPr>
-          </a:p>
-          <a:p>
-            <a:pPr marL="0" indent="0" algn="ctr">
-              <a:buNone/>
-            </a:pPr>
-            <a:endParaRPr lang="ru-RU" dirty="0" smtClean="0">
-              <a:sym typeface="Wingdings" panose="05000000000000000000" pitchFamily="2" charset="2"/>
-            </a:endParaRPr>
-          </a:p>
-          <a:p>
-            <a:pPr marL="0" indent="0" algn="r">
-              <a:buNone/>
-            </a:pPr>
-            <a:endParaRPr lang="ru-RU" sz="1400" dirty="0" smtClean="0">
-              <a:sym typeface="Wingdings" panose="05000000000000000000" pitchFamily="2" charset="2"/>
-            </a:endParaRPr>
-          </a:p>
-          <a:p>
-            <a:pPr marL="0" indent="0" algn="r">
-              <a:buNone/>
-            </a:pPr>
-            <a:r>
-              <a:rPr lang="ru-RU" sz="1400" dirty="0" smtClean="0">
-                <a:sym typeface="Wingdings" panose="05000000000000000000" pitchFamily="2" charset="2"/>
-              </a:rPr>
-              <a:t>А то этих конвертеров слишком много развелось </a:t>
-            </a:r>
-            <a:endParaRPr lang="ru-RU" sz="1400" dirty="0"/>
           </a:p>
         </p:txBody>
       </p:sp>
     </p:spTree>
     <p:extLst>
       <p:ext uri="{BB962C8B-B14F-4D97-AF65-F5344CB8AC3E}">
-        <p14:creationId xmlns:p14="http://schemas.microsoft.com/office/powerpoint/2010/main" val="3488279042"/>
+        <p14:creationId xmlns:p14="http://schemas.microsoft.com/office/powerpoint/2010/main" val="2391969276"/>
       </p:ext>
     </p:extLst>
   </p:cSld>
@@ -14307,7 +13994,7 @@
             <a:pPr algn="ctr"/>
             <a:r>
               <a:rPr lang="ru-RU" dirty="0" smtClean="0"/>
-              <a:t>Логика конвертации?</a:t>
+              <a:t>Взаимодействие с программой?</a:t>
             </a:r>
             <a:endParaRPr lang="ru-RU" dirty="0"/>
           </a:p>
@@ -14325,41 +14012,77 @@
         </p:nvSpPr>
         <p:spPr/>
         <p:txBody>
-          <a:bodyPr/>
+          <a:bodyPr>
+            <a:normAutofit fontScale="92500" lnSpcReduction="20000"/>
+          </a:bodyPr>
           <a:lstStyle/>
           <a:p>
-            <a:pPr marL="0" indent="0" algn="ctr">
+            <a:pPr marL="0" indent="0">
               <a:buNone/>
             </a:pPr>
             <a:r>
               <a:rPr lang="ru-RU" b="1" dirty="0" smtClean="0"/>
-              <a:t>Формула:</a:t>
-            </a:r>
-          </a:p>
-          <a:p>
-            <a:pPr marL="0" indent="0" algn="ctr">
+              <a:t>Пример диалога:</a:t>
+            </a:r>
+          </a:p>
+          <a:p>
+            <a:pPr marL="0" indent="0">
               <a:buNone/>
             </a:pPr>
             <a:r>
-              <a:rPr lang="ru-RU" dirty="0" smtClean="0"/>
-              <a:t>сумма_в_валюте = курс</a:t>
-            </a:r>
-            <a:r>
-              <a:rPr lang="en-US" dirty="0" smtClean="0"/>
-              <a:t> </a:t>
-            </a:r>
-            <a:r>
-              <a:rPr lang="ru-RU" dirty="0" smtClean="0"/>
-              <a:t>/</a:t>
-            </a:r>
-            <a:r>
-              <a:rPr lang="en-US" dirty="0" smtClean="0"/>
-              <a:t> </a:t>
-            </a:r>
-            <a:r>
-              <a:rPr lang="ru-RU" dirty="0" smtClean="0"/>
-              <a:t>сумма_в_рублях​</a:t>
-            </a:r>
+              <a:rPr lang="ru-RU" dirty="0"/>
+              <a:t>Введите, что вы хотите сделать (1 — Узнать курс на сегодня; 2 — Конвертер валют в рубли): 1</a:t>
+            </a:r>
+          </a:p>
+          <a:p>
+            <a:pPr marL="0" indent="0">
+              <a:buNone/>
+            </a:pPr>
+            <a:r>
+              <a:rPr lang="ru-RU" dirty="0"/>
+              <a:t>Курсы валют на 06.04.2026:</a:t>
+            </a:r>
+          </a:p>
+          <a:p>
+            <a:pPr marL="0" indent="0">
+              <a:buNone/>
+            </a:pPr>
+            <a:r>
+              <a:rPr lang="ru-RU" dirty="0"/>
+              <a:t>Доллар США (USD): 92.50 руб.</a:t>
+            </a:r>
+          </a:p>
+          <a:p>
+            <a:pPr marL="0" indent="0">
+              <a:buNone/>
+            </a:pPr>
+            <a:r>
+              <a:rPr lang="ru-RU" dirty="0"/>
+              <a:t>Евро (EUR): 99.80 руб.</a:t>
+            </a:r>
+          </a:p>
+          <a:p>
+            <a:pPr marL="0" indent="0">
+              <a:buNone/>
+            </a:pPr>
+            <a:r>
+              <a:rPr lang="ru-RU" dirty="0"/>
+              <a:t>Китайский юань (CNY): 12.75 руб.</a:t>
+            </a:r>
+          </a:p>
+          <a:p>
+            <a:pPr marL="0" indent="0">
+              <a:buNone/>
+            </a:pPr>
+            <a:r>
+              <a:rPr lang="ru-RU" dirty="0"/>
+              <a:t>Фунт стерлингов (GBP): 115.20 руб.</a:t>
+            </a:r>
+          </a:p>
+          <a:p>
+            <a:pPr marL="0" indent="0">
+              <a:buNone/>
+            </a:pPr>
             <a:endParaRPr lang="ru-RU" dirty="0"/>
           </a:p>
         </p:txBody>
@@ -14367,7 +14090,7 @@
     </p:spTree>
     <p:extLst>
       <p:ext uri="{BB962C8B-B14F-4D97-AF65-F5344CB8AC3E}">
-        <p14:creationId xmlns:p14="http://schemas.microsoft.com/office/powerpoint/2010/main" val="2391969276"/>
+        <p14:creationId xmlns:p14="http://schemas.microsoft.com/office/powerpoint/2010/main" val="3152510282"/>
       </p:ext>
     </p:extLst>
   </p:cSld>
@@ -14418,154 +14141,6 @@
           <a:p>
             <a:pPr algn="ctr"/>
             <a:r>
-              <a:rPr lang="ru-RU" dirty="0" smtClean="0"/>
-              <a:t>Взаимодействие с программой?</a:t>
-            </a:r>
-            <a:endParaRPr lang="ru-RU" dirty="0"/>
-          </a:p>
-        </p:txBody>
-      </p:sp>
-      <p:sp>
-        <p:nvSpPr>
-          <p:cNvPr id="3" name="Объект 2"/>
-          <p:cNvSpPr>
-            <a:spLocks noGrp="1"/>
-          </p:cNvSpPr>
-          <p:nvPr>
-            <p:ph idx="1"/>
-          </p:nvPr>
-        </p:nvSpPr>
-        <p:spPr/>
-        <p:txBody>
-          <a:bodyPr>
-            <a:normAutofit fontScale="92500" lnSpcReduction="20000"/>
-          </a:bodyPr>
-          <a:lstStyle/>
-          <a:p>
-            <a:pPr marL="0" indent="0">
-              <a:buNone/>
-            </a:pPr>
-            <a:r>
-              <a:rPr lang="ru-RU" b="1" dirty="0" smtClean="0"/>
-              <a:t>Пример диалога:</a:t>
-            </a:r>
-          </a:p>
-          <a:p>
-            <a:pPr marL="0" indent="0">
-              <a:buNone/>
-            </a:pPr>
-            <a:r>
-              <a:rPr lang="ru-RU" dirty="0"/>
-              <a:t>Введите, что вы хотите сделать (1 — Узнать курс на сегодня; 2 — Конвертер валют в рубли): 1</a:t>
-            </a:r>
-          </a:p>
-          <a:p>
-            <a:pPr marL="0" indent="0">
-              <a:buNone/>
-            </a:pPr>
-            <a:r>
-              <a:rPr lang="ru-RU" dirty="0"/>
-              <a:t>Курсы валют на 06.04.2026:</a:t>
-            </a:r>
-          </a:p>
-          <a:p>
-            <a:pPr marL="0" indent="0">
-              <a:buNone/>
-            </a:pPr>
-            <a:r>
-              <a:rPr lang="ru-RU" dirty="0"/>
-              <a:t>Доллар США (USD): 92.50 руб.</a:t>
-            </a:r>
-          </a:p>
-          <a:p>
-            <a:pPr marL="0" indent="0">
-              <a:buNone/>
-            </a:pPr>
-            <a:r>
-              <a:rPr lang="ru-RU" dirty="0"/>
-              <a:t>Евро (EUR): 99.80 руб.</a:t>
-            </a:r>
-          </a:p>
-          <a:p>
-            <a:pPr marL="0" indent="0">
-              <a:buNone/>
-            </a:pPr>
-            <a:r>
-              <a:rPr lang="ru-RU" dirty="0"/>
-              <a:t>Китайский юань (CNY): 12.75 руб.</a:t>
-            </a:r>
-          </a:p>
-          <a:p>
-            <a:pPr marL="0" indent="0">
-              <a:buNone/>
-            </a:pPr>
-            <a:r>
-              <a:rPr lang="ru-RU" dirty="0"/>
-              <a:t>Фунт стерлингов (GBP): 115.20 руб.</a:t>
-            </a:r>
-          </a:p>
-          <a:p>
-            <a:pPr marL="0" indent="0">
-              <a:buNone/>
-            </a:pPr>
-            <a:endParaRPr lang="ru-RU" dirty="0"/>
-          </a:p>
-        </p:txBody>
-      </p:sp>
-    </p:spTree>
-    <p:extLst>
-      <p:ext uri="{BB962C8B-B14F-4D97-AF65-F5344CB8AC3E}">
-        <p14:creationId xmlns:p14="http://schemas.microsoft.com/office/powerpoint/2010/main" val="3152510282"/>
-      </p:ext>
-    </p:extLst>
-  </p:cSld>
-  <p:clrMapOvr>
-    <a:masterClrMapping/>
-  </p:clrMapOvr>
-  <p:timing>
-    <p:tnLst>
-      <p:par>
-        <p:cTn id="1" dur="indefinite" restart="never" nodeType="tmRoot"/>
-      </p:par>
-    </p:tnLst>
-  </p:timing>
-</p:sld>
-</file>
-
-<file path=ppt/slides/slide8.xml><?xml version="1.0" encoding="utf-8"?>
-<p:sld xmlns:a="http://schemas.openxmlformats.org/drawingml/2006/main" xmlns:r="http://schemas.openxmlformats.org/officeDocument/2006/relationships" xmlns:p="http://schemas.openxmlformats.org/presentationml/2006/main">
-  <p:cSld>
-    <p:spTree>
-      <p:nvGrpSpPr>
-        <p:cNvPr id="1" name=""/>
-        <p:cNvGrpSpPr/>
-        <p:nvPr/>
-      </p:nvGrpSpPr>
-      <p:grpSpPr>
-        <a:xfrm>
-          <a:off x="0" y="0"/>
-          <a:ext cx="0" cy="0"/>
-          <a:chOff x="0" y="0"/>
-          <a:chExt cx="0" cy="0"/>
-        </a:xfrm>
-      </p:grpSpPr>
-      <p:sp>
-        <p:nvSpPr>
-          <p:cNvPr id="2" name="Заголовок 1"/>
-          <p:cNvSpPr>
-            <a:spLocks noGrp="1"/>
-          </p:cNvSpPr>
-          <p:nvPr>
-            <p:ph type="title"/>
-          </p:nvPr>
-        </p:nvSpPr>
-        <p:spPr/>
-        <p:txBody>
-          <a:bodyPr/>
-          <a:lstStyle/>
-          <a:p>
-            <a:pPr algn="ctr"/>
-            <a:r>
               <a:rPr lang="ru-RU" dirty="0"/>
               <a:t>Устойчивость к </a:t>
             </a:r>
@@ -14597,7 +14172,11 @@
             </a:pPr>
             <a:r>
               <a:rPr lang="ru-RU" b="1" dirty="0"/>
-              <a:t>Типы ошибок и решения</a:t>
+              <a:t>Типы ошибок и </a:t>
+            </a:r>
+            <a:r>
+              <a:rPr lang="ru-RU" b="1" dirty="0" smtClean="0"/>
+              <a:t>их решения</a:t>
             </a:r>
             <a:r>
               <a:rPr lang="ru-RU" b="1" dirty="0" smtClean="0"/>
@@ -14956,6 +14535,220 @@
 </p:sld>
 </file>
 
+<file path=ppt/slides/slide8.xml><?xml version="1.0" encoding="utf-8"?>
+<p:sld xmlns:a="http://schemas.openxmlformats.org/drawingml/2006/main" xmlns:r="http://schemas.openxmlformats.org/officeDocument/2006/relationships" xmlns:p="http://schemas.openxmlformats.org/presentationml/2006/main">
+  <p:cSld>
+    <p:spTree>
+      <p:nvGrpSpPr>
+        <p:cNvPr id="1" name=""/>
+        <p:cNvGrpSpPr/>
+        <p:nvPr/>
+      </p:nvGrpSpPr>
+      <p:grpSpPr>
+        <a:xfrm>
+          <a:off x="0" y="0"/>
+          <a:ext cx="0" cy="0"/>
+          <a:chOff x="0" y="0"/>
+          <a:chExt cx="0" cy="0"/>
+        </a:xfrm>
+      </p:grpSpPr>
+      <p:sp>
+        <p:nvSpPr>
+          <p:cNvPr id="2" name="Заголовок 1"/>
+          <p:cNvSpPr>
+            <a:spLocks noGrp="1"/>
+          </p:cNvSpPr>
+          <p:nvPr>
+            <p:ph type="title"/>
+          </p:nvPr>
+        </p:nvSpPr>
+        <p:spPr/>
+        <p:txBody>
+          <a:bodyPr/>
+          <a:lstStyle/>
+          <a:p>
+            <a:pPr algn="ctr"/>
+            <a:r>
+              <a:rPr lang="ru-RU" dirty="0"/>
+              <a:t>Как запустить и использовать?</a:t>
+            </a:r>
+          </a:p>
+        </p:txBody>
+      </p:sp>
+      <p:sp>
+        <p:nvSpPr>
+          <p:cNvPr id="3" name="Объект 2"/>
+          <p:cNvSpPr>
+            <a:spLocks noGrp="1"/>
+          </p:cNvSpPr>
+          <p:nvPr>
+            <p:ph idx="1"/>
+          </p:nvPr>
+        </p:nvSpPr>
+        <p:spPr/>
+        <p:txBody>
+          <a:bodyPr>
+            <a:normAutofit/>
+          </a:bodyPr>
+          <a:lstStyle/>
+          <a:p>
+            <a:pPr marL="457200" indent="-457200">
+              <a:buFont typeface="+mj-lt"/>
+              <a:buAutoNum type="arabicParenR"/>
+            </a:pPr>
+            <a:r>
+              <a:rPr lang="ru-RU" dirty="0"/>
+              <a:t>Установите </a:t>
+            </a:r>
+            <a:r>
+              <a:rPr lang="ru-RU" dirty="0" err="1"/>
+              <a:t>Python</a:t>
+            </a:r>
+            <a:r>
+              <a:rPr lang="ru-RU" dirty="0"/>
+              <a:t> 3 и </a:t>
+            </a:r>
+            <a:r>
+              <a:rPr lang="ru-RU" dirty="0" smtClean="0"/>
+              <a:t>библиотеку </a:t>
+            </a:r>
+            <a:r>
+              <a:rPr lang="en-US" dirty="0" smtClean="0"/>
+              <a:t>“requests”</a:t>
+            </a:r>
+            <a:r>
+              <a:rPr lang="ru-RU" dirty="0" smtClean="0"/>
+              <a:t> (</a:t>
+            </a:r>
+            <a:r>
+              <a:rPr lang="en-US" dirty="0"/>
+              <a:t>pip install </a:t>
+            </a:r>
+            <a:r>
+              <a:rPr lang="en-US" dirty="0" smtClean="0"/>
+              <a:t>requests</a:t>
+            </a:r>
+            <a:r>
+              <a:rPr lang="ru-RU" dirty="0" smtClean="0"/>
+              <a:t>)</a:t>
+            </a:r>
+            <a:endParaRPr lang="en-US" dirty="0" smtClean="0"/>
+          </a:p>
+          <a:p>
+            <a:pPr marL="457200" indent="-457200">
+              <a:buFont typeface="+mj-lt"/>
+              <a:buAutoNum type="arabicParenR"/>
+            </a:pPr>
+            <a:r>
+              <a:rPr lang="ru-RU" dirty="0"/>
+              <a:t>Поместите </a:t>
+            </a:r>
+            <a:r>
+              <a:rPr lang="ru-RU" dirty="0" smtClean="0"/>
+              <a:t>файлы</a:t>
+            </a:r>
+            <a:r>
+              <a:rPr lang="en-US" dirty="0" smtClean="0"/>
+              <a:t> “currency_rates.py” </a:t>
+            </a:r>
+            <a:r>
+              <a:rPr lang="ru-RU" dirty="0" smtClean="0"/>
+              <a:t>и </a:t>
+            </a:r>
+            <a:r>
+              <a:rPr lang="en-US" dirty="0" smtClean="0"/>
+              <a:t>“main.py”</a:t>
+            </a:r>
+            <a:r>
+              <a:rPr lang="ru-RU" dirty="0"/>
+              <a:t> в одну папку</a:t>
+            </a:r>
+            <a:r>
+              <a:rPr lang="ru-RU" dirty="0" smtClean="0"/>
+              <a:t>.</a:t>
+            </a:r>
+          </a:p>
+          <a:p>
+            <a:pPr marL="457200" indent="-457200">
+              <a:buFont typeface="+mj-lt"/>
+              <a:buAutoNum type="arabicParenR"/>
+            </a:pPr>
+            <a:r>
+              <a:rPr lang="ru-RU" dirty="0" smtClean="0"/>
+              <a:t>Запустите файл </a:t>
+            </a:r>
+            <a:r>
+              <a:rPr lang="en-US" dirty="0" smtClean="0"/>
+              <a:t>“main.py”</a:t>
+            </a:r>
+            <a:r>
+              <a:rPr lang="ru-RU" dirty="0" smtClean="0"/>
+              <a:t>.</a:t>
+            </a:r>
+          </a:p>
+          <a:p>
+            <a:pPr marL="457200" indent="-457200">
+              <a:buFont typeface="+mj-lt"/>
+              <a:buAutoNum type="arabicParenR"/>
+            </a:pPr>
+            <a:r>
+              <a:rPr lang="ru-RU" dirty="0" smtClean="0"/>
+              <a:t>Выберите</a:t>
+            </a:r>
+            <a:r>
+              <a:rPr lang="ru-RU" dirty="0"/>
+              <a:t> действие в меню.</a:t>
+            </a:r>
+          </a:p>
+          <a:p>
+            <a:pPr marL="457200" indent="-457200">
+              <a:buFont typeface="+mj-lt"/>
+              <a:buAutoNum type="arabicParenR"/>
+            </a:pPr>
+            <a:r>
+              <a:rPr lang="ru-RU" dirty="0"/>
+              <a:t>Введите сумму (если нужно).</a:t>
+            </a:r>
+          </a:p>
+          <a:p>
+            <a:pPr marL="457200" indent="-457200">
+              <a:buFont typeface="+mj-lt"/>
+              <a:buAutoNum type="arabicParenR"/>
+            </a:pPr>
+            <a:r>
+              <a:rPr lang="ru-RU" dirty="0"/>
+              <a:t>Получите результат.</a:t>
+            </a:r>
+          </a:p>
+          <a:p>
+            <a:pPr marL="457200" indent="-457200">
+              <a:buFont typeface="+mj-lt"/>
+              <a:buAutoNum type="arabicParenR"/>
+            </a:pPr>
+            <a:endParaRPr lang="ru-RU" dirty="0"/>
+          </a:p>
+        </p:txBody>
+      </p:sp>
+    </p:spTree>
+    <p:extLst>
+      <p:ext uri="{BB962C8B-B14F-4D97-AF65-F5344CB8AC3E}">
+        <p14:creationId xmlns:p14="http://schemas.microsoft.com/office/powerpoint/2010/main" val="1460337241"/>
+      </p:ext>
+    </p:extLst>
+  </p:cSld>
+  <p:clrMapOvr>
+    <a:masterClrMapping/>
+  </p:clrMapOvr>
+  <p:timing>
+    <p:tnLst>
+      <p:par>
+        <p:cTn id="1" dur="indefinite" restart="never" nodeType="tmRoot"/>
+      </p:par>
+    </p:tnLst>
+  </p:timing>
+</p:sld>
+</file>
+
 <file path=ppt/slides/slide9.xml><?xml version="1.0" encoding="utf-8"?>
 <p:sld xmlns:a="http://schemas.openxmlformats.org/drawingml/2006/main" xmlns:r="http://schemas.openxmlformats.org/officeDocument/2006/relationships" xmlns:p="http://schemas.openxmlformats.org/presentationml/2006/main">
   <p:cSld>
@@ -14991,169 +14784,134 @@
             <a:pPr algn="ctr"/>
             <a:r>
               <a:rPr lang="ru-RU" dirty="0"/>
-              <a:t>Как запустить и использовать?</a:t>
-            </a:r>
+              <a:t>Аналоги?</a:t>
+            </a:r>
+            <a:endParaRPr lang="ru-RU" dirty="0"/>
           </a:p>
         </p:txBody>
       </p:sp>
-      <p:sp>
-        <p:nvSpPr>
-          <p:cNvPr id="3" name="Объект 2"/>
-          <p:cNvSpPr>
-            <a:spLocks noGrp="1"/>
-          </p:cNvSpPr>
+      <p:pic>
+        <p:nvPicPr>
+          <p:cNvPr id="4" name="Объект 3"/>
+          <p:cNvPicPr>
+            <a:picLocks noGrp="1" noChangeAspect="1"/>
+          </p:cNvPicPr>
           <p:nvPr>
             <p:ph idx="1"/>
           </p:nvPr>
+        </p:nvPicPr>
+        <p:blipFill>
+          <a:blip r:embed="rId2" cstate="print">
+            <a:extLst>
+              <a:ext uri="{28A0092B-C50C-407E-A947-70E740481C1C}">
+                <a14:useLocalDpi xmlns:a14="http://schemas.microsoft.com/office/drawing/2010/main" val="0"/>
+              </a:ext>
+            </a:extLst>
+          </a:blip>
+          <a:stretch>
+            <a:fillRect/>
+          </a:stretch>
+        </p:blipFill>
+        <p:spPr>
+          <a:xfrm>
+            <a:off x="1141413" y="2818013"/>
+            <a:ext cx="4054571" cy="2499359"/>
+          </a:xfrm>
+        </p:spPr>
+      </p:pic>
+      <p:sp>
+        <p:nvSpPr>
+          <p:cNvPr id="5" name="Прямоугольник 4"/>
+          <p:cNvSpPr/>
+          <p:nvPr/>
         </p:nvSpPr>
-        <p:spPr/>
+        <p:spPr>
+          <a:xfrm>
+            <a:off x="2383868" y="2363184"/>
+            <a:ext cx="1492716" cy="369332"/>
+          </a:xfrm>
+          <a:prstGeom prst="rect">
+            <a:avLst/>
+          </a:prstGeom>
+        </p:spPr>
         <p:txBody>
-          <a:bodyPr>
-            <a:normAutofit/>
+          <a:bodyPr wrap="none">
+            <a:spAutoFit/>
           </a:bodyPr>
           <a:lstStyle/>
           <a:p>
-            <a:pPr marL="457200" indent="-457200">
-              <a:buFont typeface="+mj-lt"/>
-              <a:buAutoNum type="arabicParenR"/>
-            </a:pPr>
+            <a:r>
+              <a:rPr lang="en-US" dirty="0">
+                <a:latin typeface="-apple-system"/>
+              </a:rPr>
+              <a:t>XE Currency</a:t>
+            </a:r>
+            <a:endParaRPr lang="ru-RU" dirty="0"/>
+          </a:p>
+        </p:txBody>
+      </p:sp>
+      <p:pic>
+        <p:nvPicPr>
+          <p:cNvPr id="7" name="Рисунок 6"/>
+          <p:cNvPicPr>
+            <a:picLocks noChangeAspect="1"/>
+          </p:cNvPicPr>
+          <p:nvPr/>
+        </p:nvPicPr>
+        <p:blipFill>
+          <a:blip r:embed="rId3">
+            <a:extLst>
+              <a:ext uri="{28A0092B-C50C-407E-A947-70E740481C1C}">
+                <a14:useLocalDpi xmlns:a14="http://schemas.microsoft.com/office/drawing/2010/main" val="0"/>
+              </a:ext>
+            </a:extLst>
+          </a:blip>
+          <a:stretch>
+            <a:fillRect/>
+          </a:stretch>
+        </p:blipFill>
+        <p:spPr>
+          <a:xfrm>
+            <a:off x="6395826" y="2818013"/>
+            <a:ext cx="4651585" cy="2499359"/>
+          </a:xfrm>
+          <a:prstGeom prst="rect">
+            <a:avLst/>
+          </a:prstGeom>
+        </p:spPr>
+      </p:pic>
+      <p:sp>
+        <p:nvSpPr>
+          <p:cNvPr id="8" name="Прямоугольник 7"/>
+          <p:cNvSpPr/>
+          <p:nvPr/>
+        </p:nvSpPr>
+        <p:spPr>
+          <a:xfrm>
+            <a:off x="7334347" y="2363184"/>
+            <a:ext cx="2774542" cy="369332"/>
+          </a:xfrm>
+          <a:prstGeom prst="rect">
+            <a:avLst/>
+          </a:prstGeom>
+        </p:spPr>
+        <p:txBody>
+          <a:bodyPr wrap="none">
+            <a:spAutoFit/>
+          </a:bodyPr>
+          <a:lstStyle/>
+          <a:p>
             <a:r>
               <a:rPr lang="ru-RU" dirty="0"/>
-              <a:t>Установите </a:t>
-            </a:r>
-            <a:r>
-              <a:rPr lang="ru-RU" dirty="0" err="1"/>
-              <a:t>Python</a:t>
-            </a:r>
-            <a:r>
-              <a:rPr lang="ru-RU" dirty="0"/>
-              <a:t> 3 и </a:t>
-            </a:r>
-            <a:r>
-              <a:rPr lang="ru-RU" dirty="0" smtClean="0"/>
-              <a:t>библиотеку </a:t>
-            </a:r>
-            <a:r>
-              <a:rPr lang="en-US" dirty="0" smtClean="0"/>
-              <a:t>“requests”</a:t>
-            </a:r>
-            <a:r>
-              <a:rPr lang="ru-RU" dirty="0" smtClean="0"/>
-              <a:t> (</a:t>
-            </a:r>
-            <a:r>
-              <a:rPr lang="en-US" dirty="0"/>
-              <a:t>pip install </a:t>
-            </a:r>
-            <a:r>
-              <a:rPr lang="en-US" dirty="0" smtClean="0"/>
-              <a:t>requests</a:t>
-            </a:r>
-            <a:r>
-              <a:rPr lang="ru-RU" dirty="0" smtClean="0"/>
-              <a:t>)</a:t>
-            </a:r>
-            <a:endParaRPr lang="en-US" dirty="0" smtClean="0"/>
-          </a:p>
-          <a:p>
-            <a:pPr marL="457200" indent="-457200">
-              <a:buFont typeface="+mj-lt"/>
-              <a:buAutoNum type="arabicParenR"/>
-            </a:pPr>
-            <a:r>
-              <a:rPr lang="ru-RU" dirty="0"/>
-              <a:t>Поместите </a:t>
-            </a:r>
-            <a:r>
-              <a:rPr lang="ru-RU" dirty="0" smtClean="0"/>
-              <a:t>файлы</a:t>
-            </a:r>
-            <a:r>
-              <a:rPr lang="en-US" dirty="0" smtClean="0"/>
-              <a:t> “currency_rates.py” </a:t>
-            </a:r>
-            <a:r>
-              <a:rPr lang="ru-RU" dirty="0" smtClean="0"/>
-              <a:t>и </a:t>
-            </a:r>
-            <a:r>
-              <a:rPr lang="en-US" dirty="0" smtClean="0"/>
-              <a:t>“main.py”</a:t>
-            </a:r>
-            <a:r>
-              <a:rPr lang="ru-RU" dirty="0"/>
-              <a:t> в одну папку</a:t>
-            </a:r>
-            <a:r>
-              <a:rPr lang="ru-RU" dirty="0" smtClean="0"/>
-              <a:t>.</a:t>
-            </a:r>
-          </a:p>
-          <a:p>
-            <a:pPr marL="457200" indent="-457200">
-              <a:buFont typeface="+mj-lt"/>
-              <a:buAutoNum type="arabicParenR"/>
-            </a:pPr>
-            <a:r>
-              <a:rPr lang="ru-RU" dirty="0" smtClean="0"/>
-              <a:t>Запустите файл </a:t>
-            </a:r>
-            <a:r>
-              <a:rPr lang="en-US" dirty="0" smtClean="0"/>
-              <a:t>“main.py”</a:t>
-            </a:r>
-            <a:r>
-              <a:rPr lang="ru-RU" dirty="0" smtClean="0"/>
-              <a:t>.</a:t>
-            </a:r>
-          </a:p>
-          <a:p>
-            <a:pPr marL="457200" indent="-457200">
-              <a:buFont typeface="+mj-lt"/>
-              <a:buAutoNum type="arabicParenR"/>
-            </a:pPr>
-            <a:r>
-              <a:rPr lang="ru-RU" dirty="0" smtClean="0"/>
-              <a:t>Выберите</a:t>
-            </a:r>
-            <a:r>
-              <a:rPr lang="ru-RU" dirty="0"/>
-              <a:t> действие в меню.</a:t>
-            </a:r>
-          </a:p>
-          <a:p>
-            <a:pPr marL="457200" indent="-457200">
-              <a:buFont typeface="+mj-lt"/>
-              <a:buAutoNum type="arabicParenR"/>
-            </a:pPr>
-            <a:r>
-              <a:rPr lang="ru-RU" dirty="0"/>
-              <a:t>Введите сумму (если нужно).</a:t>
-            </a:r>
-          </a:p>
-          <a:p>
-            <a:pPr marL="457200" indent="-457200">
-              <a:buFont typeface="+mj-lt"/>
-              <a:buAutoNum type="arabicParenR"/>
-            </a:pPr>
-            <a:r>
-              <a:rPr lang="ru-RU" dirty="0"/>
-              <a:t>Получите результат.</a:t>
-            </a:r>
-          </a:p>
-          <a:p>
-            <a:pPr marL="457200" indent="-457200">
-              <a:buFont typeface="+mj-lt"/>
-              <a:buAutoNum type="arabicParenR"/>
-            </a:pPr>
-            <a:endParaRPr lang="ru-RU" dirty="0"/>
+              <a:t>OANDA Currency Converter</a:t>
+            </a:r>
           </a:p>
         </p:txBody>
       </p:sp>
     </p:spTree>
     <p:extLst>
       <p:ext uri="{BB962C8B-B14F-4D97-AF65-F5344CB8AC3E}">
-        <p14:creationId xmlns:p14="http://schemas.microsoft.com/office/powerpoint/2010/main" val="1460337241"/>
+        <p14:creationId xmlns:p14="http://schemas.microsoft.com/office/powerpoint/2010/main" val="3359091378"/>
       </p:ext>
     </p:extLst>
   </p:cSld>

--- a/Конвентатор валют.pptx
+++ b/Конвентатор валют.pptx
@@ -10,14 +10,14 @@
     <p:sldId id="258" r:id="rId4"/>
     <p:sldId id="259" r:id="rId5"/>
     <p:sldId id="260" r:id="rId6"/>
-    <p:sldId id="261" r:id="rId7"/>
-    <p:sldId id="262" r:id="rId8"/>
-    <p:sldId id="263" r:id="rId9"/>
-    <p:sldId id="269" r:id="rId10"/>
-    <p:sldId id="270" r:id="rId11"/>
-    <p:sldId id="264" r:id="rId12"/>
-    <p:sldId id="266" r:id="rId13"/>
-    <p:sldId id="265" r:id="rId14"/>
+    <p:sldId id="262" r:id="rId7"/>
+    <p:sldId id="263" r:id="rId8"/>
+    <p:sldId id="269" r:id="rId9"/>
+    <p:sldId id="270" r:id="rId10"/>
+    <p:sldId id="264" r:id="rId11"/>
+    <p:sldId id="265" r:id="rId12"/>
+    <p:sldId id="261" r:id="rId13"/>
+    <p:sldId id="266" r:id="rId14"/>
   </p:sldIdLst>
   <p:sldSz cx="12192000" cy="6858000"/>
   <p:notesSz cx="6858000" cy="9144000"/>
@@ -174,7 +174,7 @@
           <a:noFill/>
           <a:extLst>
             <a:ext uri="{909E8E84-426E-40dd-AFC4-6F175D3DCCD1}">
-              <a14:hiddenFill xmlns="" xmlns:a14="http://schemas.microsoft.com/office/drawing/2010/main">
+              <a14:hiddenFill xmlns:a14="http://schemas.microsoft.com/office/drawing/2010/main" xmlns="">
                 <a:solidFill>
                   <a:srgbClr val="FFFFFF"/>
                 </a:solidFill>
@@ -234,7 +234,7 @@
             </a:ln>
             <a:extLst>
               <a:ext uri="{91240B29-F687-4f45-9708-019B960494DF}">
-                <a14:hiddenLine xmlns="" xmlns:a14="http://schemas.microsoft.com/office/drawing/2010/main" w="9525">
+                <a14:hiddenLine xmlns:a14="http://schemas.microsoft.com/office/drawing/2010/main" xmlns="" w="9525">
                   <a:solidFill>
                     <a:srgbClr val="000000"/>
                   </a:solidFill>
@@ -324,7 +324,7 @@
             </a:ln>
             <a:extLst>
               <a:ext uri="{91240B29-F687-4f45-9708-019B960494DF}">
-                <a14:hiddenLine xmlns="" xmlns:a14="http://schemas.microsoft.com/office/drawing/2010/main" w="9525">
+                <a14:hiddenLine xmlns:a14="http://schemas.microsoft.com/office/drawing/2010/main" xmlns="" w="9525">
                   <a:solidFill>
                     <a:srgbClr val="000000"/>
                   </a:solidFill>
@@ -414,7 +414,7 @@
             </a:ln>
             <a:extLst>
               <a:ext uri="{91240B29-F687-4f45-9708-019B960494DF}">
-                <a14:hiddenLine xmlns="" xmlns:a14="http://schemas.microsoft.com/office/drawing/2010/main" w="9525">
+                <a14:hiddenLine xmlns:a14="http://schemas.microsoft.com/office/drawing/2010/main" xmlns="" w="9525">
                   <a:solidFill>
                     <a:srgbClr val="000000"/>
                   </a:solidFill>
@@ -448,7 +448,7 @@
             </a:ln>
             <a:extLst>
               <a:ext uri="{91240B29-F687-4f45-9708-019B960494DF}">
-                <a14:hiddenLine xmlns="" xmlns:a14="http://schemas.microsoft.com/office/drawing/2010/main" w="9525">
+                <a14:hiddenLine xmlns:a14="http://schemas.microsoft.com/office/drawing/2010/main" xmlns="" w="9525">
                   <a:solidFill>
                     <a:srgbClr val="000000"/>
                   </a:solidFill>
@@ -538,7 +538,7 @@
             </a:ln>
             <a:extLst>
               <a:ext uri="{91240B29-F687-4f45-9708-019B960494DF}">
-                <a14:hiddenLine xmlns="" xmlns:a14="http://schemas.microsoft.com/office/drawing/2010/main" w="9525">
+                <a14:hiddenLine xmlns:a14="http://schemas.microsoft.com/office/drawing/2010/main" xmlns="" w="9525">
                   <a:solidFill>
                     <a:srgbClr val="000000"/>
                   </a:solidFill>
@@ -600,7 +600,7 @@
             </a:ln>
             <a:extLst>
               <a:ext uri="{91240B29-F687-4f45-9708-019B960494DF}">
-                <a14:hiddenLine xmlns="" xmlns:a14="http://schemas.microsoft.com/office/drawing/2010/main" w="9525">
+                <a14:hiddenLine xmlns:a14="http://schemas.microsoft.com/office/drawing/2010/main" xmlns="" w="9525">
                   <a:solidFill>
                     <a:srgbClr val="000000"/>
                   </a:solidFill>
@@ -662,7 +662,7 @@
             </a:ln>
             <a:extLst>
               <a:ext uri="{91240B29-F687-4f45-9708-019B960494DF}">
-                <a14:hiddenLine xmlns="" xmlns:a14="http://schemas.microsoft.com/office/drawing/2010/main" w="9525">
+                <a14:hiddenLine xmlns:a14="http://schemas.microsoft.com/office/drawing/2010/main" xmlns="" w="9525">
                   <a:solidFill>
                     <a:srgbClr val="000000"/>
                   </a:solidFill>
@@ -752,7 +752,7 @@
             </a:ln>
             <a:extLst>
               <a:ext uri="{91240B29-F687-4f45-9708-019B960494DF}">
-                <a14:hiddenLine xmlns="" xmlns:a14="http://schemas.microsoft.com/office/drawing/2010/main" w="9525">
+                <a14:hiddenLine xmlns:a14="http://schemas.microsoft.com/office/drawing/2010/main" xmlns="" w="9525">
                   <a:solidFill>
                     <a:srgbClr val="000000"/>
                   </a:solidFill>
@@ -814,7 +814,7 @@
             </a:ln>
             <a:extLst>
               <a:ext uri="{91240B29-F687-4f45-9708-019B960494DF}">
-                <a14:hiddenLine xmlns="" xmlns:a14="http://schemas.microsoft.com/office/drawing/2010/main" w="9525">
+                <a14:hiddenLine xmlns:a14="http://schemas.microsoft.com/office/drawing/2010/main" xmlns="" w="9525">
                   <a:solidFill>
                     <a:srgbClr val="000000"/>
                   </a:solidFill>
@@ -876,7 +876,7 @@
             </a:ln>
             <a:extLst>
               <a:ext uri="{91240B29-F687-4f45-9708-019B960494DF}">
-                <a14:hiddenLine xmlns="" xmlns:a14="http://schemas.microsoft.com/office/drawing/2010/main" w="9525">
+                <a14:hiddenLine xmlns:a14="http://schemas.microsoft.com/office/drawing/2010/main" xmlns="" w="9525">
                   <a:solidFill>
                     <a:srgbClr val="000000"/>
                   </a:solidFill>
@@ -966,7 +966,7 @@
             </a:ln>
             <a:extLst>
               <a:ext uri="{91240B29-F687-4f45-9708-019B960494DF}">
-                <a14:hiddenLine xmlns="" xmlns:a14="http://schemas.microsoft.com/office/drawing/2010/main" w="9525">
+                <a14:hiddenLine xmlns:a14="http://schemas.microsoft.com/office/drawing/2010/main" xmlns="" w="9525">
                   <a:solidFill>
                     <a:srgbClr val="000000"/>
                   </a:solidFill>
@@ -1056,7 +1056,7 @@
             </a:ln>
             <a:extLst>
               <a:ext uri="{91240B29-F687-4f45-9708-019B960494DF}">
-                <a14:hiddenLine xmlns="" xmlns:a14="http://schemas.microsoft.com/office/drawing/2010/main" w="9525">
+                <a14:hiddenLine xmlns:a14="http://schemas.microsoft.com/office/drawing/2010/main" xmlns="" w="9525">
                   <a:solidFill>
                     <a:srgbClr val="000000"/>
                   </a:solidFill>
@@ -1118,7 +1118,7 @@
             </a:ln>
             <a:extLst>
               <a:ext uri="{91240B29-F687-4f45-9708-019B960494DF}">
-                <a14:hiddenLine xmlns="" xmlns:a14="http://schemas.microsoft.com/office/drawing/2010/main" w="9525">
+                <a14:hiddenLine xmlns:a14="http://schemas.microsoft.com/office/drawing/2010/main" xmlns="" w="9525">
                   <a:solidFill>
                     <a:srgbClr val="000000"/>
                   </a:solidFill>
@@ -1228,7 +1228,7 @@
             </a:ln>
             <a:extLst>
               <a:ext uri="{91240B29-F687-4f45-9708-019B960494DF}">
-                <a14:hiddenLine xmlns="" xmlns:a14="http://schemas.microsoft.com/office/drawing/2010/main" w="9525">
+                <a14:hiddenLine xmlns:a14="http://schemas.microsoft.com/office/drawing/2010/main" xmlns="" w="9525">
                   <a:solidFill>
                     <a:srgbClr val="000000"/>
                   </a:solidFill>
@@ -1290,7 +1290,7 @@
             </a:ln>
             <a:extLst>
               <a:ext uri="{91240B29-F687-4f45-9708-019B960494DF}">
-                <a14:hiddenLine xmlns="" xmlns:a14="http://schemas.microsoft.com/office/drawing/2010/main" w="9525">
+                <a14:hiddenLine xmlns:a14="http://schemas.microsoft.com/office/drawing/2010/main" xmlns="" w="9525">
                   <a:solidFill>
                     <a:srgbClr val="000000"/>
                   </a:solidFill>
@@ -1380,7 +1380,7 @@
             </a:ln>
             <a:extLst>
               <a:ext uri="{91240B29-F687-4f45-9708-019B960494DF}">
-                <a14:hiddenLine xmlns="" xmlns:a14="http://schemas.microsoft.com/office/drawing/2010/main" w="9525">
+                <a14:hiddenLine xmlns:a14="http://schemas.microsoft.com/office/drawing/2010/main" xmlns="" w="9525">
                   <a:solidFill>
                     <a:srgbClr val="000000"/>
                   </a:solidFill>
@@ -1470,7 +1470,7 @@
             </a:ln>
             <a:extLst>
               <a:ext uri="{91240B29-F687-4f45-9708-019B960494DF}">
-                <a14:hiddenLine xmlns="" xmlns:a14="http://schemas.microsoft.com/office/drawing/2010/main" w="9525">
+                <a14:hiddenLine xmlns:a14="http://schemas.microsoft.com/office/drawing/2010/main" xmlns="" w="9525">
                   <a:solidFill>
                     <a:srgbClr val="000000"/>
                   </a:solidFill>
@@ -1532,7 +1532,7 @@
             </a:ln>
             <a:extLst>
               <a:ext uri="{91240B29-F687-4f45-9708-019B960494DF}">
-                <a14:hiddenLine xmlns="" xmlns:a14="http://schemas.microsoft.com/office/drawing/2010/main" w="9525">
+                <a14:hiddenLine xmlns:a14="http://schemas.microsoft.com/office/drawing/2010/main" xmlns="" w="9525">
                   <a:solidFill>
                     <a:srgbClr val="000000"/>
                   </a:solidFill>
@@ -1622,7 +1622,7 @@
             </a:ln>
             <a:extLst>
               <a:ext uri="{91240B29-F687-4f45-9708-019B960494DF}">
-                <a14:hiddenLine xmlns="" xmlns:a14="http://schemas.microsoft.com/office/drawing/2010/main" w="9525">
+                <a14:hiddenLine xmlns:a14="http://schemas.microsoft.com/office/drawing/2010/main" xmlns="" w="9525">
                   <a:solidFill>
                     <a:srgbClr val="000000"/>
                   </a:solidFill>
@@ -1712,7 +1712,7 @@
             </a:ln>
             <a:extLst>
               <a:ext uri="{91240B29-F687-4f45-9708-019B960494DF}">
-                <a14:hiddenLine xmlns="" xmlns:a14="http://schemas.microsoft.com/office/drawing/2010/main" w="9525">
+                <a14:hiddenLine xmlns:a14="http://schemas.microsoft.com/office/drawing/2010/main" xmlns="" w="9525">
                   <a:solidFill>
                     <a:srgbClr val="000000"/>
                   </a:solidFill>
@@ -1768,7 +1768,7 @@
             </a:ln>
             <a:extLst>
               <a:ext uri="{91240B29-F687-4f45-9708-019B960494DF}">
-                <a14:hiddenLine xmlns="" xmlns:a14="http://schemas.microsoft.com/office/drawing/2010/main" w="9525">
+                <a14:hiddenLine xmlns:a14="http://schemas.microsoft.com/office/drawing/2010/main" xmlns="" w="9525">
                   <a:solidFill>
                     <a:srgbClr val="000000"/>
                   </a:solidFill>
@@ -1858,7 +1858,7 @@
             </a:ln>
             <a:extLst>
               <a:ext uri="{91240B29-F687-4f45-9708-019B960494DF}">
-                <a14:hiddenLine xmlns="" xmlns:a14="http://schemas.microsoft.com/office/drawing/2010/main" w="9525">
+                <a14:hiddenLine xmlns:a14="http://schemas.microsoft.com/office/drawing/2010/main" xmlns="" w="9525">
                   <a:solidFill>
                     <a:srgbClr val="000000"/>
                   </a:solidFill>
@@ -1914,7 +1914,7 @@
             </a:ln>
             <a:extLst>
               <a:ext uri="{91240B29-F687-4f45-9708-019B960494DF}">
-                <a14:hiddenLine xmlns="" xmlns:a14="http://schemas.microsoft.com/office/drawing/2010/main" w="9525">
+                <a14:hiddenLine xmlns:a14="http://schemas.microsoft.com/office/drawing/2010/main" xmlns="" w="9525">
                   <a:solidFill>
                     <a:srgbClr val="000000"/>
                   </a:solidFill>
@@ -2004,7 +2004,7 @@
             </a:ln>
             <a:extLst>
               <a:ext uri="{91240B29-F687-4f45-9708-019B960494DF}">
-                <a14:hiddenLine xmlns="" xmlns:a14="http://schemas.microsoft.com/office/drawing/2010/main" w="9525">
+                <a14:hiddenLine xmlns:a14="http://schemas.microsoft.com/office/drawing/2010/main" xmlns="" w="9525">
                   <a:solidFill>
                     <a:srgbClr val="000000"/>
                   </a:solidFill>
@@ -2072,7 +2072,7 @@
             </a:ln>
             <a:extLst>
               <a:ext uri="{91240B29-F687-4f45-9708-019B960494DF}">
-                <a14:hiddenLine xmlns="" xmlns:a14="http://schemas.microsoft.com/office/drawing/2010/main" w="9525">
+                <a14:hiddenLine xmlns:a14="http://schemas.microsoft.com/office/drawing/2010/main" xmlns="" w="9525">
                   <a:solidFill>
                     <a:srgbClr val="000000"/>
                   </a:solidFill>
@@ -2162,7 +2162,7 @@
             </a:ln>
             <a:extLst>
               <a:ext uri="{91240B29-F687-4f45-9708-019B960494DF}">
-                <a14:hiddenLine xmlns="" xmlns:a14="http://schemas.microsoft.com/office/drawing/2010/main" w="9525">
+                <a14:hiddenLine xmlns:a14="http://schemas.microsoft.com/office/drawing/2010/main" xmlns="" w="9525">
                   <a:solidFill>
                     <a:srgbClr val="000000"/>
                   </a:solidFill>
@@ -2230,7 +2230,7 @@
             </a:ln>
             <a:extLst>
               <a:ext uri="{91240B29-F687-4f45-9708-019B960494DF}">
-                <a14:hiddenLine xmlns="" xmlns:a14="http://schemas.microsoft.com/office/drawing/2010/main" w="9525">
+                <a14:hiddenLine xmlns:a14="http://schemas.microsoft.com/office/drawing/2010/main" xmlns="" w="9525">
                   <a:solidFill>
                     <a:srgbClr val="000000"/>
                   </a:solidFill>
@@ -2320,7 +2320,7 @@
             </a:ln>
             <a:extLst>
               <a:ext uri="{91240B29-F687-4f45-9708-019B960494DF}">
-                <a14:hiddenLine xmlns="" xmlns:a14="http://schemas.microsoft.com/office/drawing/2010/main" w="9525">
+                <a14:hiddenLine xmlns:a14="http://schemas.microsoft.com/office/drawing/2010/main" xmlns="" w="9525">
                   <a:solidFill>
                     <a:srgbClr val="000000"/>
                   </a:solidFill>
@@ -2354,7 +2354,7 @@
             </a:ln>
             <a:extLst>
               <a:ext uri="{91240B29-F687-4f45-9708-019B960494DF}">
-                <a14:hiddenLine xmlns="" xmlns:a14="http://schemas.microsoft.com/office/drawing/2010/main" w="9525">
+                <a14:hiddenLine xmlns:a14="http://schemas.microsoft.com/office/drawing/2010/main" xmlns="" w="9525">
                   <a:solidFill>
                     <a:srgbClr val="000000"/>
                   </a:solidFill>
@@ -2444,7 +2444,7 @@
             </a:ln>
             <a:extLst>
               <a:ext uri="{91240B29-F687-4f45-9708-019B960494DF}">
-                <a14:hiddenLine xmlns="" xmlns:a14="http://schemas.microsoft.com/office/drawing/2010/main" w="9525">
+                <a14:hiddenLine xmlns:a14="http://schemas.microsoft.com/office/drawing/2010/main" xmlns="" w="9525">
                   <a:solidFill>
                     <a:srgbClr val="000000"/>
                   </a:solidFill>
@@ -2506,7 +2506,7 @@
             </a:ln>
             <a:extLst>
               <a:ext uri="{91240B29-F687-4f45-9708-019B960494DF}">
-                <a14:hiddenLine xmlns="" xmlns:a14="http://schemas.microsoft.com/office/drawing/2010/main" w="9525">
+                <a14:hiddenLine xmlns:a14="http://schemas.microsoft.com/office/drawing/2010/main" xmlns="" w="9525">
                   <a:solidFill>
                     <a:srgbClr val="000000"/>
                   </a:solidFill>
@@ -2568,7 +2568,7 @@
             </a:ln>
             <a:extLst>
               <a:ext uri="{91240B29-F687-4f45-9708-019B960494DF}">
-                <a14:hiddenLine xmlns="" xmlns:a14="http://schemas.microsoft.com/office/drawing/2010/main" w="9525">
+                <a14:hiddenLine xmlns:a14="http://schemas.microsoft.com/office/drawing/2010/main" xmlns="" w="9525">
                   <a:solidFill>
                     <a:srgbClr val="000000"/>
                   </a:solidFill>
@@ -2658,7 +2658,7 @@
             </a:ln>
             <a:extLst>
               <a:ext uri="{91240B29-F687-4f45-9708-019B960494DF}">
-                <a14:hiddenLine xmlns="" xmlns:a14="http://schemas.microsoft.com/office/drawing/2010/main" w="9525">
+                <a14:hiddenLine xmlns:a14="http://schemas.microsoft.com/office/drawing/2010/main" xmlns="" w="9525">
                   <a:solidFill>
                     <a:srgbClr val="000000"/>
                   </a:solidFill>
@@ -2726,7 +2726,7 @@
             </a:ln>
             <a:extLst>
               <a:ext uri="{91240B29-F687-4f45-9708-019B960494DF}">
-                <a14:hiddenLine xmlns="" xmlns:a14="http://schemas.microsoft.com/office/drawing/2010/main" w="9525">
+                <a14:hiddenLine xmlns:a14="http://schemas.microsoft.com/office/drawing/2010/main" xmlns="" w="9525">
                   <a:solidFill>
                     <a:srgbClr val="000000"/>
                   </a:solidFill>
@@ -2788,7 +2788,7 @@
             </a:ln>
             <a:extLst>
               <a:ext uri="{91240B29-F687-4f45-9708-019B960494DF}">
-                <a14:hiddenLine xmlns="" xmlns:a14="http://schemas.microsoft.com/office/drawing/2010/main" w="9525">
+                <a14:hiddenLine xmlns:a14="http://schemas.microsoft.com/office/drawing/2010/main" xmlns="" w="9525">
                   <a:solidFill>
                     <a:srgbClr val="000000"/>
                   </a:solidFill>
@@ -2878,7 +2878,7 @@
             </a:ln>
             <a:extLst>
               <a:ext uri="{91240B29-F687-4f45-9708-019B960494DF}">
-                <a14:hiddenLine xmlns="" xmlns:a14="http://schemas.microsoft.com/office/drawing/2010/main" w="9525">
+                <a14:hiddenLine xmlns:a14="http://schemas.microsoft.com/office/drawing/2010/main" xmlns="" w="9525">
                   <a:solidFill>
                     <a:srgbClr val="000000"/>
                   </a:solidFill>
@@ -2940,7 +2940,7 @@
             </a:ln>
             <a:extLst>
               <a:ext uri="{91240B29-F687-4f45-9708-019B960494DF}">
-                <a14:hiddenLine xmlns="" xmlns:a14="http://schemas.microsoft.com/office/drawing/2010/main" w="9525">
+                <a14:hiddenLine xmlns:a14="http://schemas.microsoft.com/office/drawing/2010/main" xmlns="" w="9525">
                   <a:solidFill>
                     <a:srgbClr val="000000"/>
                   </a:solidFill>
@@ -3030,7 +3030,7 @@
             </a:ln>
             <a:extLst>
               <a:ext uri="{91240B29-F687-4f45-9708-019B960494DF}">
-                <a14:hiddenLine xmlns="" xmlns:a14="http://schemas.microsoft.com/office/drawing/2010/main" w="9525">
+                <a14:hiddenLine xmlns:a14="http://schemas.microsoft.com/office/drawing/2010/main" xmlns="" w="9525">
                   <a:solidFill>
                     <a:srgbClr val="000000"/>
                   </a:solidFill>
@@ -3092,7 +3092,7 @@
             </a:ln>
             <a:extLst>
               <a:ext uri="{91240B29-F687-4f45-9708-019B960494DF}">
-                <a14:hiddenLine xmlns="" xmlns:a14="http://schemas.microsoft.com/office/drawing/2010/main" w="9525">
+                <a14:hiddenLine xmlns:a14="http://schemas.microsoft.com/office/drawing/2010/main" xmlns="" w="9525">
                   <a:solidFill>
                     <a:srgbClr val="000000"/>
                   </a:solidFill>
@@ -3182,7 +3182,7 @@
             </a:ln>
             <a:extLst>
               <a:ext uri="{91240B29-F687-4f45-9708-019B960494DF}">
-                <a14:hiddenLine xmlns="" xmlns:a14="http://schemas.microsoft.com/office/drawing/2010/main" w="9525">
+                <a14:hiddenLine xmlns:a14="http://schemas.microsoft.com/office/drawing/2010/main" xmlns="" w="9525">
                   <a:solidFill>
                     <a:srgbClr val="000000"/>
                   </a:solidFill>
@@ -3216,7 +3216,7 @@
             </a:ln>
             <a:extLst>
               <a:ext uri="{91240B29-F687-4f45-9708-019B960494DF}">
-                <a14:hiddenLine xmlns="" xmlns:a14="http://schemas.microsoft.com/office/drawing/2010/main" w="9525">
+                <a14:hiddenLine xmlns:a14="http://schemas.microsoft.com/office/drawing/2010/main" xmlns="" w="9525">
                   <a:solidFill>
                     <a:srgbClr val="000000"/>
                   </a:solidFill>
@@ -3281,7 +3281,7 @@
             </a:ln>
             <a:extLst>
               <a:ext uri="{91240B29-F687-4f45-9708-019B960494DF}">
-                <a14:hiddenLine xmlns="" xmlns:a14="http://schemas.microsoft.com/office/drawing/2010/main" w="9525">
+                <a14:hiddenLine xmlns:a14="http://schemas.microsoft.com/office/drawing/2010/main" xmlns="" w="9525">
                   <a:solidFill>
                     <a:srgbClr val="000000"/>
                   </a:solidFill>
@@ -3371,7 +3371,7 @@
             </a:ln>
             <a:extLst>
               <a:ext uri="{91240B29-F687-4f45-9708-019B960494DF}">
-                <a14:hiddenLine xmlns="" xmlns:a14="http://schemas.microsoft.com/office/drawing/2010/main" w="9525">
+                <a14:hiddenLine xmlns:a14="http://schemas.microsoft.com/office/drawing/2010/main" xmlns="" w="9525">
                   <a:solidFill>
                     <a:srgbClr val="000000"/>
                   </a:solidFill>
@@ -3433,7 +3433,7 @@
             </a:ln>
             <a:extLst>
               <a:ext uri="{91240B29-F687-4f45-9708-019B960494DF}">
-                <a14:hiddenLine xmlns="" xmlns:a14="http://schemas.microsoft.com/office/drawing/2010/main" w="9525">
+                <a14:hiddenLine xmlns:a14="http://schemas.microsoft.com/office/drawing/2010/main" xmlns="" w="9525">
                   <a:solidFill>
                     <a:srgbClr val="000000"/>
                   </a:solidFill>
@@ -3523,7 +3523,7 @@
             </a:ln>
             <a:extLst>
               <a:ext uri="{91240B29-F687-4f45-9708-019B960494DF}">
-                <a14:hiddenLine xmlns="" xmlns:a14="http://schemas.microsoft.com/office/drawing/2010/main" w="9525">
+                <a14:hiddenLine xmlns:a14="http://schemas.microsoft.com/office/drawing/2010/main" xmlns="" w="9525">
                   <a:solidFill>
                     <a:srgbClr val="000000"/>
                   </a:solidFill>
@@ -3613,7 +3613,7 @@
             </a:ln>
             <a:extLst>
               <a:ext uri="{91240B29-F687-4f45-9708-019B960494DF}">
-                <a14:hiddenLine xmlns="" xmlns:a14="http://schemas.microsoft.com/office/drawing/2010/main" w="9525">
+                <a14:hiddenLine xmlns:a14="http://schemas.microsoft.com/office/drawing/2010/main" xmlns="" w="9525">
                   <a:solidFill>
                     <a:srgbClr val="000000"/>
                   </a:solidFill>
@@ -3678,7 +3678,7 @@
             </a:ln>
             <a:extLst>
               <a:ext uri="{91240B29-F687-4f45-9708-019B960494DF}">
-                <a14:hiddenLine xmlns="" xmlns:a14="http://schemas.microsoft.com/office/drawing/2010/main" w="9525">
+                <a14:hiddenLine xmlns:a14="http://schemas.microsoft.com/office/drawing/2010/main" xmlns="" w="9525">
                   <a:solidFill>
                     <a:srgbClr val="000000"/>
                   </a:solidFill>
@@ -3740,7 +3740,7 @@
             </a:ln>
             <a:extLst>
               <a:ext uri="{91240B29-F687-4f45-9708-019B960494DF}">
-                <a14:hiddenLine xmlns="" xmlns:a14="http://schemas.microsoft.com/office/drawing/2010/main" w="9525">
+                <a14:hiddenLine xmlns:a14="http://schemas.microsoft.com/office/drawing/2010/main" xmlns="" w="9525">
                   <a:solidFill>
                     <a:srgbClr val="000000"/>
                   </a:solidFill>
@@ -3830,7 +3830,7 @@
             </a:ln>
             <a:extLst>
               <a:ext uri="{91240B29-F687-4f45-9708-019B960494DF}">
-                <a14:hiddenLine xmlns="" xmlns:a14="http://schemas.microsoft.com/office/drawing/2010/main" w="9525">
+                <a14:hiddenLine xmlns:a14="http://schemas.microsoft.com/office/drawing/2010/main" xmlns="" w="9525">
                   <a:solidFill>
                     <a:srgbClr val="000000"/>
                   </a:solidFill>
@@ -3920,7 +3920,7 @@
             </a:ln>
             <a:extLst>
               <a:ext uri="{91240B29-F687-4f45-9708-019B960494DF}">
-                <a14:hiddenLine xmlns="" xmlns:a14="http://schemas.microsoft.com/office/drawing/2010/main" w="9525">
+                <a14:hiddenLine xmlns:a14="http://schemas.microsoft.com/office/drawing/2010/main" xmlns="" w="9525">
                   <a:solidFill>
                     <a:srgbClr val="000000"/>
                   </a:solidFill>
@@ -3982,7 +3982,7 @@
             </a:ln>
             <a:extLst>
               <a:ext uri="{91240B29-F687-4f45-9708-019B960494DF}">
-                <a14:hiddenLine xmlns="" xmlns:a14="http://schemas.microsoft.com/office/drawing/2010/main" w="9525">
+                <a14:hiddenLine xmlns:a14="http://schemas.microsoft.com/office/drawing/2010/main" xmlns="" w="9525">
                   <a:solidFill>
                     <a:srgbClr val="000000"/>
                   </a:solidFill>
@@ -4102,7 +4102,7 @@
             </a:ln>
             <a:extLst>
               <a:ext uri="{91240B29-F687-4f45-9708-019B960494DF}">
-                <a14:hiddenLine xmlns="" xmlns:a14="http://schemas.microsoft.com/office/drawing/2010/main" w="9525">
+                <a14:hiddenLine xmlns:a14="http://schemas.microsoft.com/office/drawing/2010/main" xmlns="" w="9525">
                   <a:solidFill>
                     <a:srgbClr val="000000"/>
                   </a:solidFill>
@@ -4170,7 +4170,7 @@
             </a:ln>
             <a:extLst>
               <a:ext uri="{91240B29-F687-4f45-9708-019B960494DF}">
-                <a14:hiddenLine xmlns="" xmlns:a14="http://schemas.microsoft.com/office/drawing/2010/main" w="9525">
+                <a14:hiddenLine xmlns:a14="http://schemas.microsoft.com/office/drawing/2010/main" xmlns="" w="9525">
                   <a:solidFill>
                     <a:srgbClr val="000000"/>
                   </a:solidFill>
@@ -4260,7 +4260,7 @@
             </a:ln>
             <a:extLst>
               <a:ext uri="{91240B29-F687-4f45-9708-019B960494DF}">
-                <a14:hiddenLine xmlns="" xmlns:a14="http://schemas.microsoft.com/office/drawing/2010/main" w="9525">
+                <a14:hiddenLine xmlns:a14="http://schemas.microsoft.com/office/drawing/2010/main" xmlns="" w="9525">
                   <a:solidFill>
                     <a:srgbClr val="000000"/>
                   </a:solidFill>
@@ -4400,7 +4400,7 @@
           <a:p>
             <a:fld id="{77D79FE6-5460-4BB7-8806-BC3D23582E7F}" type="datetimeFigureOut">
               <a:rPr lang="ru-RU" smtClean="0"/>
-              <a:t>25.04.2026</a:t>
+              <a:t>27.04.2026</a:t>
             </a:fld>
             <a:endParaRPr lang="ru-RU"/>
           </a:p>
@@ -4667,7 +4667,7 @@
           <a:p>
             <a:fld id="{77D79FE6-5460-4BB7-8806-BC3D23582E7F}" type="datetimeFigureOut">
               <a:rPr lang="ru-RU" smtClean="0"/>
-              <a:t>25.04.2026</a:t>
+              <a:t>27.04.2026</a:t>
             </a:fld>
             <a:endParaRPr lang="ru-RU"/>
           </a:p>
@@ -4863,7 +4863,7 @@
           <a:p>
             <a:fld id="{77D79FE6-5460-4BB7-8806-BC3D23582E7F}" type="datetimeFigureOut">
               <a:rPr lang="ru-RU" smtClean="0"/>
-              <a:t>25.04.2026</a:t>
+              <a:t>27.04.2026</a:t>
             </a:fld>
             <a:endParaRPr lang="ru-RU"/>
           </a:p>
@@ -5126,7 +5126,7 @@
           <a:p>
             <a:fld id="{77D79FE6-5460-4BB7-8806-BC3D23582E7F}" type="datetimeFigureOut">
               <a:rPr lang="ru-RU" smtClean="0"/>
-              <a:t>25.04.2026</a:t>
+              <a:t>27.04.2026</a:t>
             </a:fld>
             <a:endParaRPr lang="ru-RU"/>
           </a:p>
@@ -5560,7 +5560,7 @@
           <a:p>
             <a:fld id="{77D79FE6-5460-4BB7-8806-BC3D23582E7F}" type="datetimeFigureOut">
               <a:rPr lang="ru-RU" smtClean="0"/>
-              <a:t>25.04.2026</a:t>
+              <a:t>27.04.2026</a:t>
             </a:fld>
             <a:endParaRPr lang="ru-RU"/>
           </a:p>
@@ -6106,7 +6106,7 @@
           <a:p>
             <a:fld id="{77D79FE6-5460-4BB7-8806-BC3D23582E7F}" type="datetimeFigureOut">
               <a:rPr lang="ru-RU" smtClean="0"/>
-              <a:t>25.04.2026</a:t>
+              <a:t>27.04.2026</a:t>
             </a:fld>
             <a:endParaRPr lang="ru-RU"/>
           </a:p>
@@ -6826,7 +6826,7 @@
           <a:p>
             <a:fld id="{77D79FE6-5460-4BB7-8806-BC3D23582E7F}" type="datetimeFigureOut">
               <a:rPr lang="ru-RU" smtClean="0"/>
-              <a:t>25.04.2026</a:t>
+              <a:t>27.04.2026</a:t>
             </a:fld>
             <a:endParaRPr lang="ru-RU"/>
           </a:p>
@@ -6996,7 +6996,7 @@
           <a:p>
             <a:fld id="{77D79FE6-5460-4BB7-8806-BC3D23582E7F}" type="datetimeFigureOut">
               <a:rPr lang="ru-RU" smtClean="0"/>
-              <a:t>25.04.2026</a:t>
+              <a:t>27.04.2026</a:t>
             </a:fld>
             <a:endParaRPr lang="ru-RU"/>
           </a:p>
@@ -7176,7 +7176,7 @@
           <a:p>
             <a:fld id="{77D79FE6-5460-4BB7-8806-BC3D23582E7F}" type="datetimeFigureOut">
               <a:rPr lang="ru-RU" smtClean="0"/>
-              <a:t>25.04.2026</a:t>
+              <a:t>27.04.2026</a:t>
             </a:fld>
             <a:endParaRPr lang="ru-RU"/>
           </a:p>
@@ -7346,7 +7346,7 @@
           <a:p>
             <a:fld id="{77D79FE6-5460-4BB7-8806-BC3D23582E7F}" type="datetimeFigureOut">
               <a:rPr lang="ru-RU" smtClean="0"/>
-              <a:t>25.04.2026</a:t>
+              <a:t>27.04.2026</a:t>
             </a:fld>
             <a:endParaRPr lang="ru-RU"/>
           </a:p>
@@ -7596,7 +7596,7 @@
           <a:p>
             <a:fld id="{77D79FE6-5460-4BB7-8806-BC3D23582E7F}" type="datetimeFigureOut">
               <a:rPr lang="ru-RU" smtClean="0"/>
-              <a:t>25.04.2026</a:t>
+              <a:t>27.04.2026</a:t>
             </a:fld>
             <a:endParaRPr lang="ru-RU"/>
           </a:p>
@@ -7828,7 +7828,7 @@
           <a:p>
             <a:fld id="{77D79FE6-5460-4BB7-8806-BC3D23582E7F}" type="datetimeFigureOut">
               <a:rPr lang="ru-RU" smtClean="0"/>
-              <a:t>25.04.2026</a:t>
+              <a:t>27.04.2026</a:t>
             </a:fld>
             <a:endParaRPr lang="ru-RU"/>
           </a:p>
@@ -8209,7 +8209,7 @@
           <a:p>
             <a:fld id="{77D79FE6-5460-4BB7-8806-BC3D23582E7F}" type="datetimeFigureOut">
               <a:rPr lang="ru-RU" smtClean="0"/>
-              <a:t>25.04.2026</a:t>
+              <a:t>27.04.2026</a:t>
             </a:fld>
             <a:endParaRPr lang="ru-RU"/>
           </a:p>
@@ -8327,7 +8327,7 @@
           <a:p>
             <a:fld id="{77D79FE6-5460-4BB7-8806-BC3D23582E7F}" type="datetimeFigureOut">
               <a:rPr lang="ru-RU" smtClean="0"/>
-              <a:t>25.04.2026</a:t>
+              <a:t>27.04.2026</a:t>
             </a:fld>
             <a:endParaRPr lang="ru-RU"/>
           </a:p>
@@ -8422,7 +8422,7 @@
           <a:p>
             <a:fld id="{77D79FE6-5460-4BB7-8806-BC3D23582E7F}" type="datetimeFigureOut">
               <a:rPr lang="ru-RU" smtClean="0"/>
-              <a:t>25.04.2026</a:t>
+              <a:t>27.04.2026</a:t>
             </a:fld>
             <a:endParaRPr lang="ru-RU"/>
           </a:p>
@@ -8671,7 +8671,7 @@
           <a:p>
             <a:fld id="{77D79FE6-5460-4BB7-8806-BC3D23582E7F}" type="datetimeFigureOut">
               <a:rPr lang="ru-RU" smtClean="0"/>
-              <a:t>25.04.2026</a:t>
+              <a:t>27.04.2026</a:t>
             </a:fld>
             <a:endParaRPr lang="ru-RU"/>
           </a:p>
@@ -8951,7 +8951,7 @@
           <a:p>
             <a:fld id="{77D79FE6-5460-4BB7-8806-BC3D23582E7F}" type="datetimeFigureOut">
               <a:rPr lang="ru-RU" smtClean="0"/>
-              <a:t>25.04.2026</a:t>
+              <a:t>27.04.2026</a:t>
             </a:fld>
             <a:endParaRPr lang="ru-RU"/>
           </a:p>
@@ -9067,7 +9067,7 @@
           <a:noFill/>
           <a:extLst>
             <a:ext uri="{909E8E84-426E-40dd-AFC4-6F175D3DCCD1}">
-              <a14:hiddenFill xmlns="" xmlns:a14="http://schemas.microsoft.com/office/drawing/2010/main">
+              <a14:hiddenFill xmlns:a14="http://schemas.microsoft.com/office/drawing/2010/main" xmlns="">
                 <a:solidFill>
                   <a:srgbClr val="FFFFFF"/>
                 </a:solidFill>
@@ -9141,7 +9141,7 @@
               </a:ln>
               <a:extLst>
                 <a:ext uri="{91240B29-F687-4f45-9708-019B960494DF}">
-                  <a14:hiddenLine xmlns="" xmlns:a14="http://schemas.microsoft.com/office/drawing/2010/main" w="9525">
+                  <a14:hiddenLine xmlns:a14="http://schemas.microsoft.com/office/drawing/2010/main" xmlns="" w="9525">
                     <a:solidFill>
                       <a:srgbClr val="000000"/>
                     </a:solidFill>
@@ -9231,7 +9231,7 @@
               </a:ln>
               <a:extLst>
                 <a:ext uri="{91240B29-F687-4f45-9708-019B960494DF}">
-                  <a14:hiddenLine xmlns="" xmlns:a14="http://schemas.microsoft.com/office/drawing/2010/main" w="9525">
+                  <a14:hiddenLine xmlns:a14="http://schemas.microsoft.com/office/drawing/2010/main" xmlns="" w="9525">
                     <a:solidFill>
                       <a:srgbClr val="000000"/>
                     </a:solidFill>
@@ -9321,7 +9321,7 @@
               </a:ln>
               <a:extLst>
                 <a:ext uri="{91240B29-F687-4f45-9708-019B960494DF}">
-                  <a14:hiddenLine xmlns="" xmlns:a14="http://schemas.microsoft.com/office/drawing/2010/main" w="9525">
+                  <a14:hiddenLine xmlns:a14="http://schemas.microsoft.com/office/drawing/2010/main" xmlns="" w="9525">
                     <a:solidFill>
                       <a:srgbClr val="000000"/>
                     </a:solidFill>
@@ -9383,7 +9383,7 @@
               </a:ln>
               <a:extLst>
                 <a:ext uri="{91240B29-F687-4f45-9708-019B960494DF}">
-                  <a14:hiddenLine xmlns="" xmlns:a14="http://schemas.microsoft.com/office/drawing/2010/main" w="9525">
+                  <a14:hiddenLine xmlns:a14="http://schemas.microsoft.com/office/drawing/2010/main" xmlns="" w="9525">
                     <a:solidFill>
                       <a:srgbClr val="000000"/>
                     </a:solidFill>
@@ -9473,7 +9473,7 @@
               </a:ln>
               <a:extLst>
                 <a:ext uri="{91240B29-F687-4f45-9708-019B960494DF}">
-                  <a14:hiddenLine xmlns="" xmlns:a14="http://schemas.microsoft.com/office/drawing/2010/main" w="9525">
+                  <a14:hiddenLine xmlns:a14="http://schemas.microsoft.com/office/drawing/2010/main" xmlns="" w="9525">
                     <a:solidFill>
                       <a:srgbClr val="000000"/>
                     </a:solidFill>
@@ -9535,7 +9535,7 @@
               </a:ln>
               <a:extLst>
                 <a:ext uri="{91240B29-F687-4f45-9708-019B960494DF}">
-                  <a14:hiddenLine xmlns="" xmlns:a14="http://schemas.microsoft.com/office/drawing/2010/main" w="9525">
+                  <a14:hiddenLine xmlns:a14="http://schemas.microsoft.com/office/drawing/2010/main" xmlns="" w="9525">
                     <a:solidFill>
                       <a:srgbClr val="000000"/>
                     </a:solidFill>
@@ -9597,7 +9597,7 @@
               </a:ln>
               <a:extLst>
                 <a:ext uri="{91240B29-F687-4f45-9708-019B960494DF}">
-                  <a14:hiddenLine xmlns="" xmlns:a14="http://schemas.microsoft.com/office/drawing/2010/main" w="9525">
+                  <a14:hiddenLine xmlns:a14="http://schemas.microsoft.com/office/drawing/2010/main" xmlns="" w="9525">
                     <a:solidFill>
                       <a:srgbClr val="000000"/>
                     </a:solidFill>
@@ -9687,7 +9687,7 @@
               </a:ln>
               <a:extLst>
                 <a:ext uri="{91240B29-F687-4f45-9708-019B960494DF}">
-                  <a14:hiddenLine xmlns="" xmlns:a14="http://schemas.microsoft.com/office/drawing/2010/main" w="9525">
+                  <a14:hiddenLine xmlns:a14="http://schemas.microsoft.com/office/drawing/2010/main" xmlns="" w="9525">
                     <a:solidFill>
                       <a:srgbClr val="000000"/>
                     </a:solidFill>
@@ -9777,7 +9777,7 @@
               </a:ln>
               <a:extLst>
                 <a:ext uri="{91240B29-F687-4f45-9708-019B960494DF}">
-                  <a14:hiddenLine xmlns="" xmlns:a14="http://schemas.microsoft.com/office/drawing/2010/main" w="9525">
+                  <a14:hiddenLine xmlns:a14="http://schemas.microsoft.com/office/drawing/2010/main" xmlns="" w="9525">
                     <a:solidFill>
                       <a:srgbClr val="000000"/>
                     </a:solidFill>
@@ -9839,7 +9839,7 @@
               </a:ln>
               <a:extLst>
                 <a:ext uri="{91240B29-F687-4f45-9708-019B960494DF}">
-                  <a14:hiddenLine xmlns="" xmlns:a14="http://schemas.microsoft.com/office/drawing/2010/main" w="9525">
+                  <a14:hiddenLine xmlns:a14="http://schemas.microsoft.com/office/drawing/2010/main" xmlns="" w="9525">
                     <a:solidFill>
                       <a:srgbClr val="000000"/>
                     </a:solidFill>
@@ -9949,7 +9949,7 @@
               </a:ln>
               <a:extLst>
                 <a:ext uri="{91240B29-F687-4f45-9708-019B960494DF}">
-                  <a14:hiddenLine xmlns="" xmlns:a14="http://schemas.microsoft.com/office/drawing/2010/main" w="9525">
+                  <a14:hiddenLine xmlns:a14="http://schemas.microsoft.com/office/drawing/2010/main" xmlns="" w="9525">
                     <a:solidFill>
                       <a:srgbClr val="000000"/>
                     </a:solidFill>
@@ -10033,7 +10033,7 @@
               </a:ln>
               <a:extLst>
                 <a:ext uri="{91240B29-F687-4f45-9708-019B960494DF}">
-                  <a14:hiddenLine xmlns="" xmlns:a14="http://schemas.microsoft.com/office/drawing/2010/main" w="9525">
+                  <a14:hiddenLine xmlns:a14="http://schemas.microsoft.com/office/drawing/2010/main" xmlns="" w="9525">
                     <a:solidFill>
                       <a:srgbClr val="000000"/>
                     </a:solidFill>
@@ -10095,7 +10095,7 @@
               </a:ln>
               <a:extLst>
                 <a:ext uri="{91240B29-F687-4f45-9708-019B960494DF}">
-                  <a14:hiddenLine xmlns="" xmlns:a14="http://schemas.microsoft.com/office/drawing/2010/main" w="9525">
+                  <a14:hiddenLine xmlns:a14="http://schemas.microsoft.com/office/drawing/2010/main" xmlns="" w="9525">
                     <a:solidFill>
                       <a:srgbClr val="000000"/>
                     </a:solidFill>
@@ -10157,7 +10157,7 @@
               </a:ln>
               <a:extLst>
                 <a:ext uri="{91240B29-F687-4f45-9708-019B960494DF}">
-                  <a14:hiddenLine xmlns="" xmlns:a14="http://schemas.microsoft.com/office/drawing/2010/main" w="9525">
+                  <a14:hiddenLine xmlns:a14="http://schemas.microsoft.com/office/drawing/2010/main" xmlns="" w="9525">
                     <a:solidFill>
                       <a:srgbClr val="000000"/>
                     </a:solidFill>
@@ -10247,7 +10247,7 @@
               </a:ln>
               <a:extLst>
                 <a:ext uri="{91240B29-F687-4f45-9708-019B960494DF}">
-                  <a14:hiddenLine xmlns="" xmlns:a14="http://schemas.microsoft.com/office/drawing/2010/main" w="9525">
+                  <a14:hiddenLine xmlns:a14="http://schemas.microsoft.com/office/drawing/2010/main" xmlns="" w="9525">
                     <a:solidFill>
                       <a:srgbClr val="000000"/>
                     </a:solidFill>
@@ -10281,7 +10281,7 @@
               </a:ln>
               <a:extLst>
                 <a:ext uri="{91240B29-F687-4f45-9708-019B960494DF}">
-                  <a14:hiddenLine xmlns="" xmlns:a14="http://schemas.microsoft.com/office/drawing/2010/main" w="9525">
+                  <a14:hiddenLine xmlns:a14="http://schemas.microsoft.com/office/drawing/2010/main" xmlns="" w="9525">
                     <a:solidFill>
                       <a:srgbClr val="000000"/>
                     </a:solidFill>
@@ -10346,7 +10346,7 @@
               </a:ln>
               <a:extLst>
                 <a:ext uri="{91240B29-F687-4f45-9708-019B960494DF}">
-                  <a14:hiddenLine xmlns="" xmlns:a14="http://schemas.microsoft.com/office/drawing/2010/main" w="9525">
+                  <a14:hiddenLine xmlns:a14="http://schemas.microsoft.com/office/drawing/2010/main" xmlns="" w="9525">
                     <a:solidFill>
                       <a:srgbClr val="000000"/>
                     </a:solidFill>
@@ -10436,7 +10436,7 @@
               </a:ln>
               <a:extLst>
                 <a:ext uri="{91240B29-F687-4f45-9708-019B960494DF}">
-                  <a14:hiddenLine xmlns="" xmlns:a14="http://schemas.microsoft.com/office/drawing/2010/main" w="9525">
+                  <a14:hiddenLine xmlns:a14="http://schemas.microsoft.com/office/drawing/2010/main" xmlns="" w="9525">
                     <a:solidFill>
                       <a:srgbClr val="000000"/>
                     </a:solidFill>
@@ -10498,7 +10498,7 @@
               </a:ln>
               <a:extLst>
                 <a:ext uri="{91240B29-F687-4f45-9708-019B960494DF}">
-                  <a14:hiddenLine xmlns="" xmlns:a14="http://schemas.microsoft.com/office/drawing/2010/main" w="9525">
+                  <a14:hiddenLine xmlns:a14="http://schemas.microsoft.com/office/drawing/2010/main" xmlns="" w="9525">
                     <a:solidFill>
                       <a:srgbClr val="000000"/>
                     </a:solidFill>
@@ -10588,7 +10588,7 @@
               </a:ln>
               <a:extLst>
                 <a:ext uri="{91240B29-F687-4f45-9708-019B960494DF}">
-                  <a14:hiddenLine xmlns="" xmlns:a14="http://schemas.microsoft.com/office/drawing/2010/main" w="9525">
+                  <a14:hiddenLine xmlns:a14="http://schemas.microsoft.com/office/drawing/2010/main" xmlns="" w="9525">
                     <a:solidFill>
                       <a:srgbClr val="000000"/>
                     </a:solidFill>
@@ -10653,7 +10653,7 @@
               </a:ln>
               <a:extLst>
                 <a:ext uri="{91240B29-F687-4f45-9708-019B960494DF}">
-                  <a14:hiddenLine xmlns="" xmlns:a14="http://schemas.microsoft.com/office/drawing/2010/main" w="9525">
+                  <a14:hiddenLine xmlns:a14="http://schemas.microsoft.com/office/drawing/2010/main" xmlns="" w="9525">
                     <a:solidFill>
                       <a:srgbClr val="000000"/>
                     </a:solidFill>
@@ -10715,7 +10715,7 @@
               </a:ln>
               <a:extLst>
                 <a:ext uri="{91240B29-F687-4f45-9708-019B960494DF}">
-                  <a14:hiddenLine xmlns="" xmlns:a14="http://schemas.microsoft.com/office/drawing/2010/main" w="9525">
+                  <a14:hiddenLine xmlns:a14="http://schemas.microsoft.com/office/drawing/2010/main" xmlns="" w="9525">
                     <a:solidFill>
                       <a:srgbClr val="000000"/>
                     </a:solidFill>
@@ -10805,7 +10805,7 @@
               </a:ln>
               <a:extLst>
                 <a:ext uri="{91240B29-F687-4f45-9708-019B960494DF}">
-                  <a14:hiddenLine xmlns="" xmlns:a14="http://schemas.microsoft.com/office/drawing/2010/main" w="9525">
+                  <a14:hiddenLine xmlns:a14="http://schemas.microsoft.com/office/drawing/2010/main" xmlns="" w="9525">
                     <a:solidFill>
                       <a:srgbClr val="000000"/>
                     </a:solidFill>
@@ -10895,7 +10895,7 @@
               </a:ln>
               <a:extLst>
                 <a:ext uri="{91240B29-F687-4f45-9708-019B960494DF}">
-                  <a14:hiddenLine xmlns="" xmlns:a14="http://schemas.microsoft.com/office/drawing/2010/main" w="9525">
+                  <a14:hiddenLine xmlns:a14="http://schemas.microsoft.com/office/drawing/2010/main" xmlns="" w="9525">
                     <a:solidFill>
                       <a:srgbClr val="000000"/>
                     </a:solidFill>
@@ -10960,7 +10960,7 @@
               </a:ln>
               <a:extLst>
                 <a:ext uri="{91240B29-F687-4f45-9708-019B960494DF}">
-                  <a14:hiddenLine xmlns="" xmlns:a14="http://schemas.microsoft.com/office/drawing/2010/main" w="9525">
+                  <a14:hiddenLine xmlns:a14="http://schemas.microsoft.com/office/drawing/2010/main" xmlns="" w="9525">
                     <a:solidFill>
                       <a:srgbClr val="000000"/>
                     </a:solidFill>
@@ -11080,7 +11080,7 @@
               </a:ln>
               <a:extLst>
                 <a:ext uri="{91240B29-F687-4f45-9708-019B960494DF}">
-                  <a14:hiddenLine xmlns="" xmlns:a14="http://schemas.microsoft.com/office/drawing/2010/main" w="9525">
+                  <a14:hiddenLine xmlns:a14="http://schemas.microsoft.com/office/drawing/2010/main" xmlns="" w="9525">
                     <a:solidFill>
                       <a:srgbClr val="000000"/>
                     </a:solidFill>
@@ -11178,7 +11178,7 @@
               </a:ln>
               <a:extLst>
                 <a:ext uri="{91240B29-F687-4f45-9708-019B960494DF}">
-                  <a14:hiddenLine xmlns="" xmlns:a14="http://schemas.microsoft.com/office/drawing/2010/main" w="9525">
+                  <a14:hiddenLine xmlns:a14="http://schemas.microsoft.com/office/drawing/2010/main" xmlns="" w="9525">
                     <a:solidFill>
                       <a:srgbClr val="000000"/>
                     </a:solidFill>
@@ -11293,7 +11293,7 @@
               </a:ln>
               <a:extLst>
                 <a:ext uri="{91240B29-F687-4f45-9708-019B960494DF}">
-                  <a14:hiddenLine xmlns="" xmlns:a14="http://schemas.microsoft.com/office/drawing/2010/main" w="9525">
+                  <a14:hiddenLine xmlns:a14="http://schemas.microsoft.com/office/drawing/2010/main" xmlns="" w="9525">
                     <a:solidFill>
                       <a:srgbClr val="000000"/>
                     </a:solidFill>
@@ -11383,7 +11383,7 @@
               </a:ln>
               <a:extLst>
                 <a:ext uri="{91240B29-F687-4f45-9708-019B960494DF}">
-                  <a14:hiddenLine xmlns="" xmlns:a14="http://schemas.microsoft.com/office/drawing/2010/main" w="9525">
+                  <a14:hiddenLine xmlns:a14="http://schemas.microsoft.com/office/drawing/2010/main" xmlns="" w="9525">
                     <a:solidFill>
                       <a:srgbClr val="000000"/>
                     </a:solidFill>
@@ -11448,7 +11448,7 @@
               </a:ln>
               <a:extLst>
                 <a:ext uri="{91240B29-F687-4f45-9708-019B960494DF}">
-                  <a14:hiddenLine xmlns="" xmlns:a14="http://schemas.microsoft.com/office/drawing/2010/main" w="9525">
+                  <a14:hiddenLine xmlns:a14="http://schemas.microsoft.com/office/drawing/2010/main" xmlns="" w="9525">
                     <a:solidFill>
                       <a:srgbClr val="000000"/>
                     </a:solidFill>
@@ -11538,7 +11538,7 @@
               </a:ln>
               <a:extLst>
                 <a:ext uri="{91240B29-F687-4f45-9708-019B960494DF}">
-                  <a14:hiddenLine xmlns="" xmlns:a14="http://schemas.microsoft.com/office/drawing/2010/main" w="9525">
+                  <a14:hiddenLine xmlns:a14="http://schemas.microsoft.com/office/drawing/2010/main" xmlns="" w="9525">
                     <a:solidFill>
                       <a:srgbClr val="000000"/>
                     </a:solidFill>
@@ -11606,7 +11606,7 @@
               </a:ln>
               <a:extLst>
                 <a:ext uri="{91240B29-F687-4f45-9708-019B960494DF}">
-                  <a14:hiddenLine xmlns="" xmlns:a14="http://schemas.microsoft.com/office/drawing/2010/main" w="9525">
+                  <a14:hiddenLine xmlns:a14="http://schemas.microsoft.com/office/drawing/2010/main" xmlns="" w="9525">
                     <a:solidFill>
                       <a:srgbClr val="000000"/>
                     </a:solidFill>
@@ -11696,7 +11696,7 @@
               </a:ln>
               <a:extLst>
                 <a:ext uri="{91240B29-F687-4f45-9708-019B960494DF}">
-                  <a14:hiddenLine xmlns="" xmlns:a14="http://schemas.microsoft.com/office/drawing/2010/main" w="9525">
+                  <a14:hiddenLine xmlns:a14="http://schemas.microsoft.com/office/drawing/2010/main" xmlns="" w="9525">
                     <a:solidFill>
                       <a:srgbClr val="000000"/>
                     </a:solidFill>
@@ -11764,7 +11764,7 @@
               </a:ln>
               <a:extLst>
                 <a:ext uri="{91240B29-F687-4f45-9708-019B960494DF}">
-                  <a14:hiddenLine xmlns="" xmlns:a14="http://schemas.microsoft.com/office/drawing/2010/main" w="9525">
+                  <a14:hiddenLine xmlns:a14="http://schemas.microsoft.com/office/drawing/2010/main" xmlns="" w="9525">
                     <a:solidFill>
                       <a:srgbClr val="000000"/>
                     </a:solidFill>
@@ -11854,7 +11854,7 @@
               </a:ln>
               <a:extLst>
                 <a:ext uri="{91240B29-F687-4f45-9708-019B960494DF}">
-                  <a14:hiddenLine xmlns="" xmlns:a14="http://schemas.microsoft.com/office/drawing/2010/main" w="9525">
+                  <a14:hiddenLine xmlns:a14="http://schemas.microsoft.com/office/drawing/2010/main" xmlns="" w="9525">
                     <a:solidFill>
                       <a:srgbClr val="000000"/>
                     </a:solidFill>
@@ -11888,7 +11888,7 @@
               </a:ln>
               <a:extLst>
                 <a:ext uri="{91240B29-F687-4f45-9708-019B960494DF}">
-                  <a14:hiddenLine xmlns="" xmlns:a14="http://schemas.microsoft.com/office/drawing/2010/main" w="9525">
+                  <a14:hiddenLine xmlns:a14="http://schemas.microsoft.com/office/drawing/2010/main" xmlns="" w="9525">
                     <a:solidFill>
                       <a:srgbClr val="000000"/>
                     </a:solidFill>
@@ -12028,7 +12028,7 @@
           <a:p>
             <a:fld id="{77D79FE6-5460-4BB7-8806-BC3D23582E7F}" type="datetimeFigureOut">
               <a:rPr lang="ru-RU" smtClean="0"/>
-              <a:t>25.04.2026</a:t>
+              <a:t>27.04.2026</a:t>
             </a:fld>
             <a:endParaRPr lang="ru-RU"/>
           </a:p>
@@ -12618,174 +12618,6 @@
           <a:bodyPr/>
           <a:lstStyle/>
           <a:p>
-            <a:pPr algn="ctr"/>
-            <a:r>
-              <a:rPr lang="ru-RU" dirty="0" smtClean="0"/>
-              <a:t>Целевая аудитория?</a:t>
-            </a:r>
-            <a:endParaRPr lang="ru-RU" dirty="0"/>
-          </a:p>
-        </p:txBody>
-      </p:sp>
-      <p:sp>
-        <p:nvSpPr>
-          <p:cNvPr id="3" name="Объект 2"/>
-          <p:cNvSpPr>
-            <a:spLocks noGrp="1"/>
-          </p:cNvSpPr>
-          <p:nvPr>
-            <p:ph idx="1"/>
-          </p:nvPr>
-        </p:nvSpPr>
-        <p:spPr/>
-        <p:txBody>
-          <a:bodyPr>
-            <a:normAutofit fontScale="55000" lnSpcReduction="20000"/>
-          </a:bodyPr>
-          <a:lstStyle/>
-          <a:p>
-            <a:r>
-              <a:rPr lang="ru-RU" dirty="0" smtClean="0"/>
-              <a:t>Всевозможные банки;</a:t>
-            </a:r>
-          </a:p>
-          <a:p>
-            <a:r>
-              <a:rPr lang="ru-RU" dirty="0" smtClean="0"/>
-              <a:t>Сайты для обмена валют;</a:t>
-            </a:r>
-          </a:p>
-          <a:p>
-            <a:r>
-              <a:rPr lang="ru-RU" dirty="0" smtClean="0"/>
-              <a:t>Обычные пользователи;</a:t>
-            </a:r>
-          </a:p>
-          <a:p>
-            <a:r>
-              <a:rPr lang="ru-RU" dirty="0"/>
-              <a:t>Бизнес и </a:t>
-            </a:r>
-            <a:r>
-              <a:rPr lang="ru-RU" dirty="0" smtClean="0"/>
-              <a:t>предприниматели;</a:t>
-            </a:r>
-          </a:p>
-          <a:p>
-            <a:r>
-              <a:rPr lang="ru-RU" dirty="0" smtClean="0"/>
-              <a:t>Инвесторы;</a:t>
-            </a:r>
-          </a:p>
-          <a:p>
-            <a:r>
-              <a:rPr lang="ru-RU" dirty="0"/>
-              <a:t>Финансовые </a:t>
-            </a:r>
-            <a:r>
-              <a:rPr lang="ru-RU" dirty="0" smtClean="0"/>
-              <a:t>специалисты;</a:t>
-            </a:r>
-          </a:p>
-          <a:p>
-            <a:r>
-              <a:rPr lang="ru-RU" dirty="0"/>
-              <a:t>Переводчики и </a:t>
-            </a:r>
-            <a:r>
-              <a:rPr lang="ru-RU" dirty="0" smtClean="0"/>
-              <a:t>лингвисты;</a:t>
-            </a:r>
-            <a:endParaRPr lang="ru-RU" dirty="0"/>
-          </a:p>
-          <a:p>
-            <a:r>
-              <a:rPr lang="ru-RU" dirty="0" smtClean="0"/>
-              <a:t>Криптоэнтузиасты;</a:t>
-            </a:r>
-          </a:p>
-          <a:p>
-            <a:r>
-              <a:rPr lang="ru-RU" dirty="0" smtClean="0"/>
-              <a:t>Геймеры;</a:t>
-            </a:r>
-          </a:p>
-          <a:p>
-            <a:r>
-              <a:rPr lang="ru-RU" dirty="0" smtClean="0"/>
-              <a:t>Коллекционеры;</a:t>
-            </a:r>
-          </a:p>
-          <a:p>
-            <a:r>
-              <a:rPr lang="ru-RU" dirty="0"/>
-              <a:t>Организаторы </a:t>
-            </a:r>
-            <a:r>
-              <a:rPr lang="ru-RU" dirty="0" smtClean="0"/>
-              <a:t>мероприятий;</a:t>
-            </a:r>
-            <a:endParaRPr lang="ru-RU" dirty="0"/>
-          </a:p>
-          <a:p>
-            <a:endParaRPr lang="ru-RU" dirty="0"/>
-          </a:p>
-          <a:p>
-            <a:endParaRPr lang="ru-RU" dirty="0" smtClean="0"/>
-          </a:p>
-          <a:p>
-            <a:endParaRPr lang="ru-RU" dirty="0" smtClean="0"/>
-          </a:p>
-          <a:p>
-            <a:endParaRPr lang="ru-RU" dirty="0"/>
-          </a:p>
-        </p:txBody>
-      </p:sp>
-    </p:spTree>
-    <p:extLst>
-      <p:ext uri="{BB962C8B-B14F-4D97-AF65-F5344CB8AC3E}">
-        <p14:creationId xmlns:p14="http://schemas.microsoft.com/office/powerpoint/2010/main" val="2605322577"/>
-      </p:ext>
-    </p:extLst>
-  </p:cSld>
-  <p:clrMapOvr>
-    <a:masterClrMapping/>
-  </p:clrMapOvr>
-</p:sld>
-</file>
-
-<file path=ppt/slides/slide11.xml><?xml version="1.0" encoding="utf-8"?>
-<p:sld xmlns:a="http://schemas.openxmlformats.org/drawingml/2006/main" xmlns:r="http://schemas.openxmlformats.org/officeDocument/2006/relationships" xmlns:p="http://schemas.openxmlformats.org/presentationml/2006/main">
-  <p:cSld>
-    <p:spTree>
-      <p:nvGrpSpPr>
-        <p:cNvPr id="1" name=""/>
-        <p:cNvGrpSpPr/>
-        <p:nvPr/>
-      </p:nvGrpSpPr>
-      <p:grpSpPr>
-        <a:xfrm>
-          <a:off x="0" y="0"/>
-          <a:ext cx="0" cy="0"/>
-          <a:chOff x="0" y="0"/>
-          <a:chExt cx="0" cy="0"/>
-        </a:xfrm>
-      </p:grpSpPr>
-      <p:sp>
-        <p:nvSpPr>
-          <p:cNvPr id="2" name="Заголовок 1"/>
-          <p:cNvSpPr>
-            <a:spLocks noGrp="1"/>
-          </p:cNvSpPr>
-          <p:nvPr>
-            <p:ph type="title"/>
-          </p:nvPr>
-        </p:nvSpPr>
-        <p:spPr/>
-        <p:txBody>
-          <a:bodyPr/>
-          <a:lstStyle/>
-          <a:p>
             <a:r>
               <a:rPr lang="ru-RU" dirty="0"/>
               <a:t>Итоги и </a:t>
@@ -12961,86 +12793,7 @@
 </p:sld>
 </file>
 
-<file path=ppt/slides/slide12.xml><?xml version="1.0" encoding="utf-8"?>
-<p:sld xmlns:a="http://schemas.openxmlformats.org/drawingml/2006/main" xmlns:r="http://schemas.openxmlformats.org/officeDocument/2006/relationships" xmlns:p="http://schemas.openxmlformats.org/presentationml/2006/main">
-  <p:cSld>
-    <p:spTree>
-      <p:nvGrpSpPr>
-        <p:cNvPr id="1" name=""/>
-        <p:cNvGrpSpPr/>
-        <p:nvPr/>
-      </p:nvGrpSpPr>
-      <p:grpSpPr>
-        <a:xfrm>
-          <a:off x="0" y="0"/>
-          <a:ext cx="0" cy="0"/>
-          <a:chOff x="0" y="0"/>
-          <a:chExt cx="0" cy="0"/>
-        </a:xfrm>
-      </p:grpSpPr>
-      <p:sp>
-        <p:nvSpPr>
-          <p:cNvPr id="5" name="Заголовок 4"/>
-          <p:cNvSpPr>
-            <a:spLocks noGrp="1"/>
-          </p:cNvSpPr>
-          <p:nvPr>
-            <p:ph type="title"/>
-          </p:nvPr>
-        </p:nvSpPr>
-        <p:spPr>
-          <a:xfrm>
-            <a:off x="1141413" y="618518"/>
-            <a:ext cx="9905998" cy="5593596"/>
-          </a:xfrm>
-        </p:spPr>
-        <p:txBody>
-          <a:bodyPr>
-            <a:normAutofit/>
-          </a:bodyPr>
-          <a:lstStyle/>
-          <a:p>
-            <a:pPr algn="ctr"/>
-            <a:r>
-              <a:rPr lang="ru-RU" sz="9600" dirty="0" smtClean="0"/>
-              <a:t>?ВОПРОСЫ</a:t>
-            </a:r>
-            <a:r>
-              <a:rPr lang="ru-RU" sz="9600" dirty="0"/>
-              <a:t>?</a:t>
-            </a:r>
-            <a:r>
-              <a:rPr lang="ru-RU" sz="9600" dirty="0" smtClean="0"/>
-              <a:t/>
-            </a:r>
-            <a:br>
-              <a:rPr lang="ru-RU" sz="9600" dirty="0" smtClean="0"/>
-            </a:br>
-            <a:endParaRPr lang="ru-RU" sz="1800" dirty="0"/>
-          </a:p>
-        </p:txBody>
-      </p:sp>
-    </p:spTree>
-    <p:extLst>
-      <p:ext uri="{BB962C8B-B14F-4D97-AF65-F5344CB8AC3E}">
-        <p14:creationId xmlns:p14="http://schemas.microsoft.com/office/powerpoint/2010/main" val="1070214577"/>
-      </p:ext>
-    </p:extLst>
-  </p:cSld>
-  <p:clrMapOvr>
-    <a:masterClrMapping/>
-  </p:clrMapOvr>
-  <p:timing>
-    <p:tnLst>
-      <p:par>
-        <p:cTn id="1" dur="indefinite" restart="never" nodeType="tmRoot"/>
-      </p:par>
-    </p:tnLst>
-  </p:timing>
-</p:sld>
-</file>
-
-<file path=ppt/slides/slide13.xml><?xml version="1.0" encoding="utf-8"?>
+<file path=ppt/slides/slide11.xml><?xml version="1.0" encoding="utf-8"?>
 <p:sld xmlns:a="http://schemas.openxmlformats.org/drawingml/2006/main" xmlns:r="http://schemas.openxmlformats.org/officeDocument/2006/relationships" xmlns:p="http://schemas.openxmlformats.org/presentationml/2006/main">
   <p:cSld>
     <p:spTree>
@@ -13191,11 +12944,7 @@
             </a:r>
             <a:r>
               <a:rPr lang="ru-RU" b="1" dirty="0" smtClean="0"/>
-              <a:t>: +7 995 315 </a:t>
-            </a:r>
-            <a:r>
-              <a:rPr lang="ru-RU" b="1" dirty="0" smtClean="0"/>
-              <a:t>91-89</a:t>
+              <a:t>: +7 995 315 91-89</a:t>
             </a:r>
             <a:endParaRPr lang="en-US" b="1" dirty="0" smtClean="0"/>
           </a:p>
@@ -13325,6 +13074,376 @@
     <p:extLst>
       <p:ext uri="{BB962C8B-B14F-4D97-AF65-F5344CB8AC3E}">
         <p14:creationId xmlns:p14="http://schemas.microsoft.com/office/powerpoint/2010/main" val="2660605506"/>
+      </p:ext>
+    </p:extLst>
+  </p:cSld>
+  <p:clrMapOvr>
+    <a:masterClrMapping/>
+  </p:clrMapOvr>
+  <p:timing>
+    <p:tnLst>
+      <p:par>
+        <p:cTn id="1" dur="indefinite" restart="never" nodeType="tmRoot"/>
+      </p:par>
+    </p:tnLst>
+  </p:timing>
+</p:sld>
+</file>
+
+<file path=ppt/slides/slide12.xml><?xml version="1.0" encoding="utf-8"?>
+<p:sld xmlns:a="http://schemas.openxmlformats.org/drawingml/2006/main" xmlns:r="http://schemas.openxmlformats.org/officeDocument/2006/relationships" xmlns:p="http://schemas.openxmlformats.org/presentationml/2006/main">
+  <p:cSld>
+    <p:spTree>
+      <p:nvGrpSpPr>
+        <p:cNvPr id="1" name=""/>
+        <p:cNvGrpSpPr/>
+        <p:nvPr/>
+      </p:nvGrpSpPr>
+      <p:grpSpPr>
+        <a:xfrm>
+          <a:off x="0" y="0"/>
+          <a:ext cx="0" cy="0"/>
+          <a:chOff x="0" y="0"/>
+          <a:chExt cx="0" cy="0"/>
+        </a:xfrm>
+      </p:grpSpPr>
+      <p:sp>
+        <p:nvSpPr>
+          <p:cNvPr id="2" name="Заголовок 1"/>
+          <p:cNvSpPr>
+            <a:spLocks noGrp="1"/>
+          </p:cNvSpPr>
+          <p:nvPr>
+            <p:ph type="title"/>
+          </p:nvPr>
+        </p:nvSpPr>
+        <p:spPr/>
+        <p:txBody>
+          <a:bodyPr/>
+          <a:lstStyle/>
+          <a:p>
+            <a:pPr algn="ctr"/>
+            <a:r>
+              <a:rPr lang="ru-RU" dirty="0" smtClean="0"/>
+              <a:t>Взаимодействие с программой?</a:t>
+            </a:r>
+            <a:endParaRPr lang="ru-RU" dirty="0"/>
+          </a:p>
+        </p:txBody>
+      </p:sp>
+      <p:sp>
+        <p:nvSpPr>
+          <p:cNvPr id="3" name="Объект 2"/>
+          <p:cNvSpPr>
+            <a:spLocks noGrp="1"/>
+          </p:cNvSpPr>
+          <p:nvPr>
+            <p:ph sz="half" idx="1"/>
+          </p:nvPr>
+        </p:nvSpPr>
+        <p:spPr/>
+        <p:txBody>
+          <a:bodyPr>
+            <a:normAutofit fontScale="77500" lnSpcReduction="20000"/>
+          </a:bodyPr>
+          <a:lstStyle/>
+          <a:p>
+            <a:pPr marL="0" indent="0">
+              <a:buNone/>
+            </a:pPr>
+            <a:r>
+              <a:rPr lang="ru-RU" b="1" dirty="0" smtClean="0"/>
+              <a:t>Пример </a:t>
+            </a:r>
+            <a:r>
+              <a:rPr lang="ru-RU" b="1" dirty="0" smtClean="0"/>
+              <a:t>диалога 1:</a:t>
+            </a:r>
+            <a:endParaRPr lang="ru-RU" b="1" dirty="0" smtClean="0"/>
+          </a:p>
+          <a:p>
+            <a:pPr marL="0" indent="0">
+              <a:buNone/>
+            </a:pPr>
+            <a:r>
+              <a:rPr lang="ru-RU" dirty="0"/>
+              <a:t>Введите, что вы хотите сделать (1 — Узнать курс на сегодня; 2 — Конвертер валют в рубли): 1</a:t>
+            </a:r>
+          </a:p>
+          <a:p>
+            <a:pPr marL="0" indent="0">
+              <a:buNone/>
+            </a:pPr>
+            <a:r>
+              <a:rPr lang="ru-RU" dirty="0"/>
+              <a:t>Курсы валют на 06.04.2026:</a:t>
+            </a:r>
+          </a:p>
+          <a:p>
+            <a:pPr marL="0" indent="0">
+              <a:buNone/>
+            </a:pPr>
+            <a:r>
+              <a:rPr lang="ru-RU" dirty="0"/>
+              <a:t>Доллар США (USD): 92.50 руб.</a:t>
+            </a:r>
+          </a:p>
+          <a:p>
+            <a:pPr marL="0" indent="0">
+              <a:buNone/>
+            </a:pPr>
+            <a:r>
+              <a:rPr lang="ru-RU" dirty="0"/>
+              <a:t>Евро (EUR): 99.80 руб.</a:t>
+            </a:r>
+          </a:p>
+          <a:p>
+            <a:pPr marL="0" indent="0">
+              <a:buNone/>
+            </a:pPr>
+            <a:r>
+              <a:rPr lang="ru-RU" dirty="0"/>
+              <a:t>Китайский юань (CNY): 12.75 руб.</a:t>
+            </a:r>
+          </a:p>
+          <a:p>
+            <a:pPr marL="0" indent="0">
+              <a:buNone/>
+            </a:pPr>
+            <a:r>
+              <a:rPr lang="ru-RU" dirty="0"/>
+              <a:t>Фунт стерлингов (GBP): 115.20 руб.</a:t>
+            </a:r>
+          </a:p>
+          <a:p>
+            <a:pPr marL="0" indent="0">
+              <a:buNone/>
+            </a:pPr>
+            <a:endParaRPr lang="ru-RU" dirty="0"/>
+          </a:p>
+        </p:txBody>
+      </p:sp>
+      <p:pic>
+        <p:nvPicPr>
+          <p:cNvPr id="5" name="Проверка Конвентатора валют">
+            <a:hlinkClick r:id="" action="ppaction://media"/>
+          </p:cNvPr>
+          <p:cNvPicPr>
+            <a:picLocks noGrp="1" noChangeAspect="1"/>
+          </p:cNvPicPr>
+          <p:nvPr>
+            <p:ph sz="half" idx="2"/>
+            <a:videoFile r:link="rId2"/>
+            <p:extLst>
+              <p:ext uri="{DAA4B4D4-6D71-4841-9C94-3DE7FCFB9230}">
+                <p14:media xmlns:p14="http://schemas.microsoft.com/office/powerpoint/2010/main" r:embed="rId1"/>
+              </p:ext>
+            </p:extLst>
+          </p:nvPr>
+        </p:nvPicPr>
+        <p:blipFill>
+          <a:blip r:embed="rId4"/>
+          <a:stretch>
+            <a:fillRect/>
+          </a:stretch>
+        </p:blipFill>
+        <p:spPr>
+          <a:xfrm>
+            <a:off x="6172200" y="2649538"/>
+            <a:ext cx="4875213" cy="2741612"/>
+          </a:xfrm>
+        </p:spPr>
+      </p:pic>
+      <p:sp>
+        <p:nvSpPr>
+          <p:cNvPr id="6" name="Прямоугольник 5"/>
+          <p:cNvSpPr/>
+          <p:nvPr/>
+        </p:nvSpPr>
+        <p:spPr>
+          <a:xfrm>
+            <a:off x="7556985" y="2249486"/>
+            <a:ext cx="2105641" cy="369332"/>
+          </a:xfrm>
+          <a:prstGeom prst="rect">
+            <a:avLst/>
+          </a:prstGeom>
+        </p:spPr>
+        <p:txBody>
+          <a:bodyPr wrap="none">
+            <a:spAutoFit/>
+          </a:bodyPr>
+          <a:lstStyle/>
+          <a:p>
+            <a:pPr algn="ctr"/>
+            <a:r>
+              <a:rPr lang="ru-RU" b="1" dirty="0"/>
+              <a:t>Пример </a:t>
+            </a:r>
+            <a:r>
+              <a:rPr lang="ru-RU" b="1" dirty="0" smtClean="0"/>
+              <a:t>диалога 2:</a:t>
+            </a:r>
+            <a:endParaRPr lang="ru-RU" b="1" dirty="0"/>
+          </a:p>
+        </p:txBody>
+      </p:sp>
+    </p:spTree>
+    <p:extLst>
+      <p:ext uri="{BB962C8B-B14F-4D97-AF65-F5344CB8AC3E}">
+        <p14:creationId xmlns:p14="http://schemas.microsoft.com/office/powerpoint/2010/main" val="3152510282"/>
+      </p:ext>
+    </p:extLst>
+  </p:cSld>
+  <p:clrMapOvr>
+    <a:masterClrMapping/>
+  </p:clrMapOvr>
+  <p:timing>
+    <p:tnLst>
+      <p:par>
+        <p:cTn id="1" dur="indefinite" restart="never" nodeType="tmRoot">
+          <p:childTnLst>
+            <p:seq concurrent="1" nextAc="seek">
+              <p:cTn id="2" restart="whenNotActive" fill="hold" evtFilter="cancelBubble" nodeType="interactiveSeq">
+                <p:stCondLst>
+                  <p:cond evt="onClick" delay="0">
+                    <p:tgtEl>
+                      <p:spTgt spid="5"/>
+                    </p:tgtEl>
+                  </p:cond>
+                </p:stCondLst>
+                <p:endSync evt="end" delay="0">
+                  <p:rtn val="all"/>
+                </p:endSync>
+                <p:childTnLst>
+                  <p:par>
+                    <p:cTn id="3" fill="hold">
+                      <p:stCondLst>
+                        <p:cond delay="0"/>
+                      </p:stCondLst>
+                      <p:childTnLst>
+                        <p:par>
+                          <p:cTn id="4" fill="hold">
+                            <p:stCondLst>
+                              <p:cond delay="0"/>
+                            </p:stCondLst>
+                            <p:childTnLst>
+                              <p:par>
+                                <p:cTn id="5" presetID="2" presetClass="mediacall" presetSubtype="0" fill="hold" nodeType="clickEffect">
+                                  <p:stCondLst>
+                                    <p:cond delay="0"/>
+                                  </p:stCondLst>
+                                  <p:childTnLst>
+                                    <p:cmd type="call" cmd="togglePause">
+                                      <p:cBhvr>
+                                        <p:cTn id="6" dur="1" fill="hold"/>
+                                        <p:tgtEl>
+                                          <p:spTgt spid="5"/>
+                                        </p:tgtEl>
+                                      </p:cBhvr>
+                                    </p:cmd>
+                                  </p:childTnLst>
+                                </p:cTn>
+                              </p:par>
+                            </p:childTnLst>
+                          </p:cTn>
+                        </p:par>
+                      </p:childTnLst>
+                    </p:cTn>
+                  </p:par>
+                </p:childTnLst>
+              </p:cTn>
+              <p:nextCondLst>
+                <p:cond evt="onClick" delay="0">
+                  <p:tgtEl>
+                    <p:spTgt spid="5"/>
+                  </p:tgtEl>
+                </p:cond>
+              </p:nextCondLst>
+            </p:seq>
+            <p:video>
+              <p:cMediaNode vol="0">
+                <p:cTn id="7" fill="hold" display="0">
+                  <p:stCondLst>
+                    <p:cond delay="indefinite"/>
+                  </p:stCondLst>
+                </p:cTn>
+                <p:tgtEl>
+                  <p:spTgt spid="5"/>
+                </p:tgtEl>
+              </p:cMediaNode>
+            </p:video>
+          </p:childTnLst>
+        </p:cTn>
+      </p:par>
+    </p:tnLst>
+  </p:timing>
+</p:sld>
+</file>
+
+<file path=ppt/slides/slide13.xml><?xml version="1.0" encoding="utf-8"?>
+<p:sld xmlns:a="http://schemas.openxmlformats.org/drawingml/2006/main" xmlns:r="http://schemas.openxmlformats.org/officeDocument/2006/relationships" xmlns:p="http://schemas.openxmlformats.org/presentationml/2006/main">
+  <p:cSld>
+    <p:spTree>
+      <p:nvGrpSpPr>
+        <p:cNvPr id="1" name=""/>
+        <p:cNvGrpSpPr/>
+        <p:nvPr/>
+      </p:nvGrpSpPr>
+      <p:grpSpPr>
+        <a:xfrm>
+          <a:off x="0" y="0"/>
+          <a:ext cx="0" cy="0"/>
+          <a:chOff x="0" y="0"/>
+          <a:chExt cx="0" cy="0"/>
+        </a:xfrm>
+      </p:grpSpPr>
+      <p:sp>
+        <p:nvSpPr>
+          <p:cNvPr id="5" name="Заголовок 4"/>
+          <p:cNvSpPr>
+            <a:spLocks noGrp="1"/>
+          </p:cNvSpPr>
+          <p:nvPr>
+            <p:ph type="title"/>
+          </p:nvPr>
+        </p:nvSpPr>
+        <p:spPr>
+          <a:xfrm>
+            <a:off x="1141413" y="618518"/>
+            <a:ext cx="9905998" cy="5593596"/>
+          </a:xfrm>
+        </p:spPr>
+        <p:txBody>
+          <a:bodyPr>
+            <a:normAutofit/>
+          </a:bodyPr>
+          <a:lstStyle/>
+          <a:p>
+            <a:pPr algn="ctr"/>
+            <a:r>
+              <a:rPr lang="ru-RU" sz="9600" dirty="0" smtClean="0"/>
+              <a:t>?ВОПРОСЫ</a:t>
+            </a:r>
+            <a:r>
+              <a:rPr lang="ru-RU" sz="9600" dirty="0"/>
+              <a:t>?</a:t>
+            </a:r>
+            <a:r>
+              <a:rPr lang="ru-RU" sz="9600" dirty="0" smtClean="0"/>
+              <a:t/>
+            </a:r>
+            <a:br>
+              <a:rPr lang="ru-RU" sz="9600" dirty="0" smtClean="0"/>
+            </a:br>
+            <a:endParaRPr lang="ru-RU" sz="1800" dirty="0"/>
+          </a:p>
+        </p:txBody>
+      </p:sp>
+    </p:spTree>
+    <p:extLst>
+      <p:ext uri="{BB962C8B-B14F-4D97-AF65-F5344CB8AC3E}">
+        <p14:creationId xmlns:p14="http://schemas.microsoft.com/office/powerpoint/2010/main" val="1070214577"/>
       </p:ext>
     </p:extLst>
   </p:cSld>
@@ -13993,154 +14112,6 @@
           <a:p>
             <a:pPr algn="ctr"/>
             <a:r>
-              <a:rPr lang="ru-RU" dirty="0" smtClean="0"/>
-              <a:t>Взаимодействие с программой?</a:t>
-            </a:r>
-            <a:endParaRPr lang="ru-RU" dirty="0"/>
-          </a:p>
-        </p:txBody>
-      </p:sp>
-      <p:sp>
-        <p:nvSpPr>
-          <p:cNvPr id="3" name="Объект 2"/>
-          <p:cNvSpPr>
-            <a:spLocks noGrp="1"/>
-          </p:cNvSpPr>
-          <p:nvPr>
-            <p:ph idx="1"/>
-          </p:nvPr>
-        </p:nvSpPr>
-        <p:spPr/>
-        <p:txBody>
-          <a:bodyPr>
-            <a:normAutofit fontScale="92500" lnSpcReduction="20000"/>
-          </a:bodyPr>
-          <a:lstStyle/>
-          <a:p>
-            <a:pPr marL="0" indent="0">
-              <a:buNone/>
-            </a:pPr>
-            <a:r>
-              <a:rPr lang="ru-RU" b="1" dirty="0" smtClean="0"/>
-              <a:t>Пример диалога:</a:t>
-            </a:r>
-          </a:p>
-          <a:p>
-            <a:pPr marL="0" indent="0">
-              <a:buNone/>
-            </a:pPr>
-            <a:r>
-              <a:rPr lang="ru-RU" dirty="0"/>
-              <a:t>Введите, что вы хотите сделать (1 — Узнать курс на сегодня; 2 — Конвертер валют в рубли): 1</a:t>
-            </a:r>
-          </a:p>
-          <a:p>
-            <a:pPr marL="0" indent="0">
-              <a:buNone/>
-            </a:pPr>
-            <a:r>
-              <a:rPr lang="ru-RU" dirty="0"/>
-              <a:t>Курсы валют на 06.04.2026:</a:t>
-            </a:r>
-          </a:p>
-          <a:p>
-            <a:pPr marL="0" indent="0">
-              <a:buNone/>
-            </a:pPr>
-            <a:r>
-              <a:rPr lang="ru-RU" dirty="0"/>
-              <a:t>Доллар США (USD): 92.50 руб.</a:t>
-            </a:r>
-          </a:p>
-          <a:p>
-            <a:pPr marL="0" indent="0">
-              <a:buNone/>
-            </a:pPr>
-            <a:r>
-              <a:rPr lang="ru-RU" dirty="0"/>
-              <a:t>Евро (EUR): 99.80 руб.</a:t>
-            </a:r>
-          </a:p>
-          <a:p>
-            <a:pPr marL="0" indent="0">
-              <a:buNone/>
-            </a:pPr>
-            <a:r>
-              <a:rPr lang="ru-RU" dirty="0"/>
-              <a:t>Китайский юань (CNY): 12.75 руб.</a:t>
-            </a:r>
-          </a:p>
-          <a:p>
-            <a:pPr marL="0" indent="0">
-              <a:buNone/>
-            </a:pPr>
-            <a:r>
-              <a:rPr lang="ru-RU" dirty="0"/>
-              <a:t>Фунт стерлингов (GBP): 115.20 руб.</a:t>
-            </a:r>
-          </a:p>
-          <a:p>
-            <a:pPr marL="0" indent="0">
-              <a:buNone/>
-            </a:pPr>
-            <a:endParaRPr lang="ru-RU" dirty="0"/>
-          </a:p>
-        </p:txBody>
-      </p:sp>
-    </p:spTree>
-    <p:extLst>
-      <p:ext uri="{BB962C8B-B14F-4D97-AF65-F5344CB8AC3E}">
-        <p14:creationId xmlns:p14="http://schemas.microsoft.com/office/powerpoint/2010/main" val="3152510282"/>
-      </p:ext>
-    </p:extLst>
-  </p:cSld>
-  <p:clrMapOvr>
-    <a:masterClrMapping/>
-  </p:clrMapOvr>
-  <p:timing>
-    <p:tnLst>
-      <p:par>
-        <p:cTn id="1" dur="indefinite" restart="never" nodeType="tmRoot"/>
-      </p:par>
-    </p:tnLst>
-  </p:timing>
-</p:sld>
-</file>
-
-<file path=ppt/slides/slide7.xml><?xml version="1.0" encoding="utf-8"?>
-<p:sld xmlns:a="http://schemas.openxmlformats.org/drawingml/2006/main" xmlns:r="http://schemas.openxmlformats.org/officeDocument/2006/relationships" xmlns:p="http://schemas.openxmlformats.org/presentationml/2006/main">
-  <p:cSld>
-    <p:spTree>
-      <p:nvGrpSpPr>
-        <p:cNvPr id="1" name=""/>
-        <p:cNvGrpSpPr/>
-        <p:nvPr/>
-      </p:nvGrpSpPr>
-      <p:grpSpPr>
-        <a:xfrm>
-          <a:off x="0" y="0"/>
-          <a:ext cx="0" cy="0"/>
-          <a:chOff x="0" y="0"/>
-          <a:chExt cx="0" cy="0"/>
-        </a:xfrm>
-      </p:grpSpPr>
-      <p:sp>
-        <p:nvSpPr>
-          <p:cNvPr id="2" name="Заголовок 1"/>
-          <p:cNvSpPr>
-            <a:spLocks noGrp="1"/>
-          </p:cNvSpPr>
-          <p:nvPr>
-            <p:ph type="title"/>
-          </p:nvPr>
-        </p:nvSpPr>
-        <p:spPr/>
-        <p:txBody>
-          <a:bodyPr/>
-          <a:lstStyle/>
-          <a:p>
-            <a:pPr algn="ctr"/>
-            <a:r>
               <a:rPr lang="ru-RU" dirty="0"/>
               <a:t>Устойчивость к </a:t>
             </a:r>
@@ -14176,11 +14147,7 @@
             </a:r>
             <a:r>
               <a:rPr lang="ru-RU" b="1" dirty="0" smtClean="0"/>
-              <a:t>их решения</a:t>
-            </a:r>
-            <a:r>
-              <a:rPr lang="ru-RU" b="1" dirty="0" smtClean="0"/>
-              <a:t>:</a:t>
+              <a:t>их решения:</a:t>
             </a:r>
           </a:p>
           <a:p>
@@ -14535,6 +14502,220 @@
 </p:sld>
 </file>
 
+<file path=ppt/slides/slide7.xml><?xml version="1.0" encoding="utf-8"?>
+<p:sld xmlns:a="http://schemas.openxmlformats.org/drawingml/2006/main" xmlns:r="http://schemas.openxmlformats.org/officeDocument/2006/relationships" xmlns:p="http://schemas.openxmlformats.org/presentationml/2006/main">
+  <p:cSld>
+    <p:spTree>
+      <p:nvGrpSpPr>
+        <p:cNvPr id="1" name=""/>
+        <p:cNvGrpSpPr/>
+        <p:nvPr/>
+      </p:nvGrpSpPr>
+      <p:grpSpPr>
+        <a:xfrm>
+          <a:off x="0" y="0"/>
+          <a:ext cx="0" cy="0"/>
+          <a:chOff x="0" y="0"/>
+          <a:chExt cx="0" cy="0"/>
+        </a:xfrm>
+      </p:grpSpPr>
+      <p:sp>
+        <p:nvSpPr>
+          <p:cNvPr id="2" name="Заголовок 1"/>
+          <p:cNvSpPr>
+            <a:spLocks noGrp="1"/>
+          </p:cNvSpPr>
+          <p:nvPr>
+            <p:ph type="title"/>
+          </p:nvPr>
+        </p:nvSpPr>
+        <p:spPr/>
+        <p:txBody>
+          <a:bodyPr/>
+          <a:lstStyle/>
+          <a:p>
+            <a:pPr algn="ctr"/>
+            <a:r>
+              <a:rPr lang="ru-RU" dirty="0"/>
+              <a:t>Как запустить и использовать?</a:t>
+            </a:r>
+          </a:p>
+        </p:txBody>
+      </p:sp>
+      <p:sp>
+        <p:nvSpPr>
+          <p:cNvPr id="3" name="Объект 2"/>
+          <p:cNvSpPr>
+            <a:spLocks noGrp="1"/>
+          </p:cNvSpPr>
+          <p:nvPr>
+            <p:ph idx="1"/>
+          </p:nvPr>
+        </p:nvSpPr>
+        <p:spPr/>
+        <p:txBody>
+          <a:bodyPr>
+            <a:normAutofit/>
+          </a:bodyPr>
+          <a:lstStyle/>
+          <a:p>
+            <a:pPr marL="457200" indent="-457200">
+              <a:buFont typeface="+mj-lt"/>
+              <a:buAutoNum type="arabicParenR"/>
+            </a:pPr>
+            <a:r>
+              <a:rPr lang="ru-RU" dirty="0"/>
+              <a:t>Установите </a:t>
+            </a:r>
+            <a:r>
+              <a:rPr lang="ru-RU" dirty="0" err="1"/>
+              <a:t>Python</a:t>
+            </a:r>
+            <a:r>
+              <a:rPr lang="ru-RU" dirty="0"/>
+              <a:t> 3 и </a:t>
+            </a:r>
+            <a:r>
+              <a:rPr lang="ru-RU" dirty="0" smtClean="0"/>
+              <a:t>библиотеку </a:t>
+            </a:r>
+            <a:r>
+              <a:rPr lang="en-US" dirty="0" smtClean="0"/>
+              <a:t>“requests”</a:t>
+            </a:r>
+            <a:r>
+              <a:rPr lang="ru-RU" dirty="0" smtClean="0"/>
+              <a:t> (</a:t>
+            </a:r>
+            <a:r>
+              <a:rPr lang="en-US" dirty="0"/>
+              <a:t>pip install </a:t>
+            </a:r>
+            <a:r>
+              <a:rPr lang="en-US" dirty="0" smtClean="0"/>
+              <a:t>requests</a:t>
+            </a:r>
+            <a:r>
+              <a:rPr lang="ru-RU" dirty="0" smtClean="0"/>
+              <a:t>)</a:t>
+            </a:r>
+            <a:endParaRPr lang="en-US" dirty="0" smtClean="0"/>
+          </a:p>
+          <a:p>
+            <a:pPr marL="457200" indent="-457200">
+              <a:buFont typeface="+mj-lt"/>
+              <a:buAutoNum type="arabicParenR"/>
+            </a:pPr>
+            <a:r>
+              <a:rPr lang="ru-RU" dirty="0"/>
+              <a:t>Поместите </a:t>
+            </a:r>
+            <a:r>
+              <a:rPr lang="ru-RU" dirty="0" smtClean="0"/>
+              <a:t>файлы</a:t>
+            </a:r>
+            <a:r>
+              <a:rPr lang="en-US" dirty="0" smtClean="0"/>
+              <a:t> “currency_rates.py” </a:t>
+            </a:r>
+            <a:r>
+              <a:rPr lang="ru-RU" dirty="0" smtClean="0"/>
+              <a:t>и </a:t>
+            </a:r>
+            <a:r>
+              <a:rPr lang="en-US" dirty="0" smtClean="0"/>
+              <a:t>“main.py”</a:t>
+            </a:r>
+            <a:r>
+              <a:rPr lang="ru-RU" dirty="0"/>
+              <a:t> в одну папку</a:t>
+            </a:r>
+            <a:r>
+              <a:rPr lang="ru-RU" dirty="0" smtClean="0"/>
+              <a:t>.</a:t>
+            </a:r>
+          </a:p>
+          <a:p>
+            <a:pPr marL="457200" indent="-457200">
+              <a:buFont typeface="+mj-lt"/>
+              <a:buAutoNum type="arabicParenR"/>
+            </a:pPr>
+            <a:r>
+              <a:rPr lang="ru-RU" dirty="0" smtClean="0"/>
+              <a:t>Запустите файл </a:t>
+            </a:r>
+            <a:r>
+              <a:rPr lang="en-US" dirty="0" smtClean="0"/>
+              <a:t>“main.py”</a:t>
+            </a:r>
+            <a:r>
+              <a:rPr lang="ru-RU" dirty="0" smtClean="0"/>
+              <a:t>.</a:t>
+            </a:r>
+          </a:p>
+          <a:p>
+            <a:pPr marL="457200" indent="-457200">
+              <a:buFont typeface="+mj-lt"/>
+              <a:buAutoNum type="arabicParenR"/>
+            </a:pPr>
+            <a:r>
+              <a:rPr lang="ru-RU" dirty="0" smtClean="0"/>
+              <a:t>Выберите</a:t>
+            </a:r>
+            <a:r>
+              <a:rPr lang="ru-RU" dirty="0"/>
+              <a:t> действие в меню.</a:t>
+            </a:r>
+          </a:p>
+          <a:p>
+            <a:pPr marL="457200" indent="-457200">
+              <a:buFont typeface="+mj-lt"/>
+              <a:buAutoNum type="arabicParenR"/>
+            </a:pPr>
+            <a:r>
+              <a:rPr lang="ru-RU" dirty="0"/>
+              <a:t>Введите сумму (если нужно).</a:t>
+            </a:r>
+          </a:p>
+          <a:p>
+            <a:pPr marL="457200" indent="-457200">
+              <a:buFont typeface="+mj-lt"/>
+              <a:buAutoNum type="arabicParenR"/>
+            </a:pPr>
+            <a:r>
+              <a:rPr lang="ru-RU" dirty="0"/>
+              <a:t>Получите результат.</a:t>
+            </a:r>
+          </a:p>
+          <a:p>
+            <a:pPr marL="457200" indent="-457200">
+              <a:buFont typeface="+mj-lt"/>
+              <a:buAutoNum type="arabicParenR"/>
+            </a:pPr>
+            <a:endParaRPr lang="ru-RU" dirty="0"/>
+          </a:p>
+        </p:txBody>
+      </p:sp>
+    </p:spTree>
+    <p:extLst>
+      <p:ext uri="{BB962C8B-B14F-4D97-AF65-F5344CB8AC3E}">
+        <p14:creationId xmlns:p14="http://schemas.microsoft.com/office/powerpoint/2010/main" val="1460337241"/>
+      </p:ext>
+    </p:extLst>
+  </p:cSld>
+  <p:clrMapOvr>
+    <a:masterClrMapping/>
+  </p:clrMapOvr>
+  <p:timing>
+    <p:tnLst>
+      <p:par>
+        <p:cTn id="1" dur="indefinite" restart="never" nodeType="tmRoot"/>
+      </p:par>
+    </p:tnLst>
+  </p:timing>
+</p:sld>
+</file>
+
 <file path=ppt/slides/slide8.xml><?xml version="1.0" encoding="utf-8"?>
 <p:sld xmlns:a="http://schemas.openxmlformats.org/drawingml/2006/main" xmlns:r="http://schemas.openxmlformats.org/officeDocument/2006/relationships" xmlns:p="http://schemas.openxmlformats.org/presentationml/2006/main">
   <p:cSld>
@@ -14570,223 +14751,8 @@
             <a:pPr algn="ctr"/>
             <a:r>
               <a:rPr lang="ru-RU" dirty="0"/>
-              <a:t>Как запустить и использовать?</a:t>
-            </a:r>
-          </a:p>
-        </p:txBody>
-      </p:sp>
-      <p:sp>
-        <p:nvSpPr>
-          <p:cNvPr id="3" name="Объект 2"/>
-          <p:cNvSpPr>
-            <a:spLocks noGrp="1"/>
-          </p:cNvSpPr>
-          <p:nvPr>
-            <p:ph idx="1"/>
-          </p:nvPr>
-        </p:nvSpPr>
-        <p:spPr/>
-        <p:txBody>
-          <a:bodyPr>
-            <a:normAutofit/>
-          </a:bodyPr>
-          <a:lstStyle/>
-          <a:p>
-            <a:pPr marL="457200" indent="-457200">
-              <a:buFont typeface="+mj-lt"/>
-              <a:buAutoNum type="arabicParenR"/>
-            </a:pPr>
-            <a:r>
-              <a:rPr lang="ru-RU" dirty="0"/>
-              <a:t>Установите </a:t>
-            </a:r>
-            <a:r>
-              <a:rPr lang="ru-RU" dirty="0" err="1"/>
-              <a:t>Python</a:t>
-            </a:r>
-            <a:r>
-              <a:rPr lang="ru-RU" dirty="0"/>
-              <a:t> 3 и </a:t>
-            </a:r>
-            <a:r>
-              <a:rPr lang="ru-RU" dirty="0" smtClean="0"/>
-              <a:t>библиотеку </a:t>
-            </a:r>
-            <a:r>
-              <a:rPr lang="en-US" dirty="0" smtClean="0"/>
-              <a:t>“requests”</a:t>
-            </a:r>
-            <a:r>
-              <a:rPr lang="ru-RU" dirty="0" smtClean="0"/>
-              <a:t> (</a:t>
-            </a:r>
-            <a:r>
-              <a:rPr lang="en-US" dirty="0"/>
-              <a:t>pip install </a:t>
-            </a:r>
-            <a:r>
-              <a:rPr lang="en-US" dirty="0" smtClean="0"/>
-              <a:t>requests</a:t>
-            </a:r>
-            <a:r>
-              <a:rPr lang="ru-RU" dirty="0" smtClean="0"/>
-              <a:t>)</a:t>
-            </a:r>
-            <a:endParaRPr lang="en-US" dirty="0" smtClean="0"/>
-          </a:p>
-          <a:p>
-            <a:pPr marL="457200" indent="-457200">
-              <a:buFont typeface="+mj-lt"/>
-              <a:buAutoNum type="arabicParenR"/>
-            </a:pPr>
-            <a:r>
-              <a:rPr lang="ru-RU" dirty="0"/>
-              <a:t>Поместите </a:t>
-            </a:r>
-            <a:r>
-              <a:rPr lang="ru-RU" dirty="0" smtClean="0"/>
-              <a:t>файлы</a:t>
-            </a:r>
-            <a:r>
-              <a:rPr lang="en-US" dirty="0" smtClean="0"/>
-              <a:t> “currency_rates.py” </a:t>
-            </a:r>
-            <a:r>
-              <a:rPr lang="ru-RU" dirty="0" smtClean="0"/>
-              <a:t>и </a:t>
-            </a:r>
-            <a:r>
-              <a:rPr lang="en-US" dirty="0" smtClean="0"/>
-              <a:t>“main.py”</a:t>
-            </a:r>
-            <a:r>
-              <a:rPr lang="ru-RU" dirty="0"/>
-              <a:t> в одну папку</a:t>
-            </a:r>
-            <a:r>
-              <a:rPr lang="ru-RU" dirty="0" smtClean="0"/>
-              <a:t>.</a:t>
-            </a:r>
-          </a:p>
-          <a:p>
-            <a:pPr marL="457200" indent="-457200">
-              <a:buFont typeface="+mj-lt"/>
-              <a:buAutoNum type="arabicParenR"/>
-            </a:pPr>
-            <a:r>
-              <a:rPr lang="ru-RU" dirty="0" smtClean="0"/>
-              <a:t>Запустите файл </a:t>
-            </a:r>
-            <a:r>
-              <a:rPr lang="en-US" dirty="0" smtClean="0"/>
-              <a:t>“main.py”</a:t>
-            </a:r>
-            <a:r>
-              <a:rPr lang="ru-RU" dirty="0" smtClean="0"/>
-              <a:t>.</a:t>
-            </a:r>
-          </a:p>
-          <a:p>
-            <a:pPr marL="457200" indent="-457200">
-              <a:buFont typeface="+mj-lt"/>
-              <a:buAutoNum type="arabicParenR"/>
-            </a:pPr>
-            <a:r>
-              <a:rPr lang="ru-RU" dirty="0" smtClean="0"/>
-              <a:t>Выберите</a:t>
-            </a:r>
-            <a:r>
-              <a:rPr lang="ru-RU" dirty="0"/>
-              <a:t> действие в меню.</a:t>
-            </a:r>
-          </a:p>
-          <a:p>
-            <a:pPr marL="457200" indent="-457200">
-              <a:buFont typeface="+mj-lt"/>
-              <a:buAutoNum type="arabicParenR"/>
-            </a:pPr>
-            <a:r>
-              <a:rPr lang="ru-RU" dirty="0"/>
-              <a:t>Введите сумму (если нужно).</a:t>
-            </a:r>
-          </a:p>
-          <a:p>
-            <a:pPr marL="457200" indent="-457200">
-              <a:buFont typeface="+mj-lt"/>
-              <a:buAutoNum type="arabicParenR"/>
-            </a:pPr>
-            <a:r>
-              <a:rPr lang="ru-RU" dirty="0"/>
-              <a:t>Получите результат.</a:t>
-            </a:r>
-          </a:p>
-          <a:p>
-            <a:pPr marL="457200" indent="-457200">
-              <a:buFont typeface="+mj-lt"/>
-              <a:buAutoNum type="arabicParenR"/>
-            </a:pPr>
-            <a:endParaRPr lang="ru-RU" dirty="0"/>
-          </a:p>
-        </p:txBody>
-      </p:sp>
-    </p:spTree>
-    <p:extLst>
-      <p:ext uri="{BB962C8B-B14F-4D97-AF65-F5344CB8AC3E}">
-        <p14:creationId xmlns:p14="http://schemas.microsoft.com/office/powerpoint/2010/main" val="1460337241"/>
-      </p:ext>
-    </p:extLst>
-  </p:cSld>
-  <p:clrMapOvr>
-    <a:masterClrMapping/>
-  </p:clrMapOvr>
-  <p:timing>
-    <p:tnLst>
-      <p:par>
-        <p:cTn id="1" dur="indefinite" restart="never" nodeType="tmRoot"/>
-      </p:par>
-    </p:tnLst>
-  </p:timing>
-</p:sld>
-</file>
-
-<file path=ppt/slides/slide9.xml><?xml version="1.0" encoding="utf-8"?>
-<p:sld xmlns:a="http://schemas.openxmlformats.org/drawingml/2006/main" xmlns:r="http://schemas.openxmlformats.org/officeDocument/2006/relationships" xmlns:p="http://schemas.openxmlformats.org/presentationml/2006/main">
-  <p:cSld>
-    <p:spTree>
-      <p:nvGrpSpPr>
-        <p:cNvPr id="1" name=""/>
-        <p:cNvGrpSpPr/>
-        <p:nvPr/>
-      </p:nvGrpSpPr>
-      <p:grpSpPr>
-        <a:xfrm>
-          <a:off x="0" y="0"/>
-          <a:ext cx="0" cy="0"/>
-          <a:chOff x="0" y="0"/>
-          <a:chExt cx="0" cy="0"/>
-        </a:xfrm>
-      </p:grpSpPr>
-      <p:sp>
-        <p:nvSpPr>
-          <p:cNvPr id="2" name="Заголовок 1"/>
-          <p:cNvSpPr>
-            <a:spLocks noGrp="1"/>
-          </p:cNvSpPr>
-          <p:nvPr>
-            <p:ph type="title"/>
-          </p:nvPr>
-        </p:nvSpPr>
-        <p:spPr/>
-        <p:txBody>
-          <a:bodyPr/>
-          <a:lstStyle/>
-          <a:p>
-            <a:pPr algn="ctr"/>
-            <a:r>
-              <a:rPr lang="ru-RU" dirty="0"/>
               <a:t>Аналоги?</a:t>
             </a:r>
-            <a:endParaRPr lang="ru-RU" dirty="0"/>
           </a:p>
         </p:txBody>
       </p:sp>
@@ -14925,6 +14891,186 @@
       </p:par>
     </p:tnLst>
   </p:timing>
+</p:sld>
+</file>
+
+<file path=ppt/slides/slide9.xml><?xml version="1.0" encoding="utf-8"?>
+<p:sld xmlns:a="http://schemas.openxmlformats.org/drawingml/2006/main" xmlns:r="http://schemas.openxmlformats.org/officeDocument/2006/relationships" xmlns:p="http://schemas.openxmlformats.org/presentationml/2006/main">
+  <p:cSld>
+    <p:spTree>
+      <p:nvGrpSpPr>
+        <p:cNvPr id="1" name=""/>
+        <p:cNvGrpSpPr/>
+        <p:nvPr/>
+      </p:nvGrpSpPr>
+      <p:grpSpPr>
+        <a:xfrm>
+          <a:off x="0" y="0"/>
+          <a:ext cx="0" cy="0"/>
+          <a:chOff x="0" y="0"/>
+          <a:chExt cx="0" cy="0"/>
+        </a:xfrm>
+      </p:grpSpPr>
+      <p:sp>
+        <p:nvSpPr>
+          <p:cNvPr id="2" name="Заголовок 1"/>
+          <p:cNvSpPr>
+            <a:spLocks noGrp="1"/>
+          </p:cNvSpPr>
+          <p:nvPr>
+            <p:ph type="title"/>
+          </p:nvPr>
+        </p:nvSpPr>
+        <p:spPr/>
+        <p:txBody>
+          <a:bodyPr/>
+          <a:lstStyle/>
+          <a:p>
+            <a:pPr algn="ctr"/>
+            <a:r>
+              <a:rPr lang="ru-RU" dirty="0" smtClean="0"/>
+              <a:t>Целевая аудитория?</a:t>
+            </a:r>
+            <a:endParaRPr lang="ru-RU" dirty="0"/>
+          </a:p>
+        </p:txBody>
+      </p:sp>
+      <p:sp>
+        <p:nvSpPr>
+          <p:cNvPr id="3" name="Объект 2"/>
+          <p:cNvSpPr>
+            <a:spLocks noGrp="1"/>
+          </p:cNvSpPr>
+          <p:nvPr>
+            <p:ph sz="half" idx="1"/>
+          </p:nvPr>
+        </p:nvSpPr>
+        <p:spPr/>
+        <p:txBody>
+          <a:bodyPr>
+            <a:normAutofit/>
+          </a:bodyPr>
+          <a:lstStyle/>
+          <a:p>
+            <a:r>
+              <a:rPr lang="ru-RU" dirty="0" smtClean="0"/>
+              <a:t>Всевозможные банки;</a:t>
+            </a:r>
+          </a:p>
+          <a:p>
+            <a:r>
+              <a:rPr lang="ru-RU" dirty="0" smtClean="0"/>
+              <a:t>Сайты для обмена валют;</a:t>
+            </a:r>
+          </a:p>
+          <a:p>
+            <a:r>
+              <a:rPr lang="ru-RU" dirty="0" smtClean="0"/>
+              <a:t>Обычные пользователи;</a:t>
+            </a:r>
+          </a:p>
+          <a:p>
+            <a:r>
+              <a:rPr lang="ru-RU" dirty="0"/>
+              <a:t>Бизнес и </a:t>
+            </a:r>
+            <a:r>
+              <a:rPr lang="ru-RU" dirty="0" smtClean="0"/>
+              <a:t>предприниматели;</a:t>
+            </a:r>
+          </a:p>
+          <a:p>
+            <a:r>
+              <a:rPr lang="ru-RU" dirty="0" smtClean="0"/>
+              <a:t>Инвесторы;</a:t>
+            </a:r>
+          </a:p>
+          <a:p>
+            <a:r>
+              <a:rPr lang="ru-RU" dirty="0"/>
+              <a:t>Финансовые </a:t>
+            </a:r>
+            <a:r>
+              <a:rPr lang="ru-RU" dirty="0" smtClean="0"/>
+              <a:t>специалисты;</a:t>
+            </a:r>
+          </a:p>
+          <a:p>
+            <a:pPr marL="0" indent="0">
+              <a:buNone/>
+            </a:pPr>
+            <a:endParaRPr lang="ru-RU" dirty="0"/>
+          </a:p>
+          <a:p>
+            <a:endParaRPr lang="ru-RU" dirty="0" smtClean="0"/>
+          </a:p>
+          <a:p>
+            <a:endParaRPr lang="ru-RU" dirty="0" smtClean="0"/>
+          </a:p>
+          <a:p>
+            <a:endParaRPr lang="ru-RU" dirty="0"/>
+          </a:p>
+        </p:txBody>
+      </p:sp>
+      <p:sp>
+        <p:nvSpPr>
+          <p:cNvPr id="4" name="Объект 3"/>
+          <p:cNvSpPr>
+            <a:spLocks noGrp="1"/>
+          </p:cNvSpPr>
+          <p:nvPr>
+            <p:ph sz="half" idx="2"/>
+          </p:nvPr>
+        </p:nvSpPr>
+        <p:spPr/>
+        <p:txBody>
+          <a:bodyPr/>
+          <a:lstStyle/>
+          <a:p>
+            <a:r>
+              <a:rPr lang="ru-RU" dirty="0"/>
+              <a:t>Переводчики и лингвисты;</a:t>
+            </a:r>
+          </a:p>
+          <a:p>
+            <a:r>
+              <a:rPr lang="ru-RU" dirty="0"/>
+              <a:t>Криптоэнтузиасты;</a:t>
+            </a:r>
+          </a:p>
+          <a:p>
+            <a:r>
+              <a:rPr lang="ru-RU" dirty="0"/>
+              <a:t>Геймеры;</a:t>
+            </a:r>
+          </a:p>
+          <a:p>
+            <a:r>
+              <a:rPr lang="ru-RU" dirty="0"/>
+              <a:t>Коллекционеры;</a:t>
+            </a:r>
+          </a:p>
+          <a:p>
+            <a:r>
+              <a:rPr lang="ru-RU" dirty="0"/>
+              <a:t>Организаторы мероприятий;</a:t>
+            </a:r>
+          </a:p>
+          <a:p>
+            <a:endParaRPr lang="ru-RU" dirty="0"/>
+          </a:p>
+        </p:txBody>
+      </p:sp>
+    </p:spTree>
+    <p:extLst>
+      <p:ext uri="{BB962C8B-B14F-4D97-AF65-F5344CB8AC3E}">
+        <p14:creationId xmlns:p14="http://schemas.microsoft.com/office/powerpoint/2010/main" val="2605322577"/>
+      </p:ext>
+    </p:extLst>
+  </p:cSld>
+  <p:clrMapOvr>
+    <a:masterClrMapping/>
+  </p:clrMapOvr>
 </p:sld>
 </file>
 

--- a/Конвентатор валют.pptx
+++ b/Конвентатор валют.pptx
@@ -1,15 +1,14 @@
 
 <file path=ppt/presentation.xml><?xml version="1.0" encoding="utf-8"?>
-<p:presentation xmlns:a="http://schemas.openxmlformats.org/drawingml/2006/main" xmlns:r="http://schemas.openxmlformats.org/officeDocument/2006/relationships" xmlns:p="http://schemas.openxmlformats.org/presentationml/2006/main" saveSubsetFonts="1">
+<p:presentation xmlns:a="http://schemas.openxmlformats.org/drawingml/2006/main" xmlns:r="http://schemas.openxmlformats.org/officeDocument/2006/relationships" xmlns:p="http://schemas.openxmlformats.org/presentationml/2006/main">
   <p:sldMasterIdLst>
-    <p:sldMasterId id="2147483660" r:id="rId1"/>
+    <p:sldMasterId id="2147483648" r:id="rId1"/>
   </p:sldMasterIdLst>
   <p:sldIdLst>
-    <p:sldId id="256" r:id="rId2"/>
-    <p:sldId id="257" r:id="rId3"/>
-    <p:sldId id="258" r:id="rId4"/>
-    <p:sldId id="259" r:id="rId5"/>
-    <p:sldId id="260" r:id="rId6"/>
+    <p:sldId id="256" r:id="rId3"/>
+    <p:sldId id="257" r:id="rId4"/>
+    <p:sldId id="258" r:id="rId5"/>
+    <p:sldId id="259" r:id="rId6"/>
     <p:sldId id="262" r:id="rId7"/>
     <p:sldId id="263" r:id="rId8"/>
     <p:sldId id="269" r:id="rId9"/>
@@ -116,16 +115,11 @@
       </a:defRPr>
     </a:lvl9pPr>
   </p:defaultTextStyle>
-  <p:extLst>
-    <p:ext uri="{EFAFB233-063F-42B5-8137-9DF3F51BA10A}">
-      <p15:sldGuideLst xmlns:p15="http://schemas.microsoft.com/office/powerpoint/2012/main"/>
-    </p:ext>
-  </p:extLst>
 </p:presentation>
 </file>
 
 <file path=ppt/slideLayouts/slideLayout1.xml><?xml version="1.0" encoding="utf-8"?>
-<p:sldLayout xmlns:a="http://schemas.openxmlformats.org/drawingml/2006/main" xmlns:r="http://schemas.openxmlformats.org/officeDocument/2006/relationships" xmlns:p="http://schemas.openxmlformats.org/presentationml/2006/main" showMasterSp="0" type="title" preserve="1">
+<p:sldLayout xmlns:a="http://schemas.openxmlformats.org/drawingml/2006/main" xmlns:r="http://schemas.openxmlformats.org/officeDocument/2006/relationships" xmlns:p="http://schemas.openxmlformats.org/presentationml/2006/main" type="title" preserve="1" showMasterSp="0">
   <p:cSld name="Титульный слайд">
     <p:spTree>
       <p:nvGrpSpPr>
@@ -172,15 +166,6 @@
             <a:avLst/>
           </a:prstGeom>
           <a:noFill/>
-          <a:extLst>
-            <a:ext uri="{909E8E84-426E-40dd-AFC4-6F175D3DCCD1}">
-              <a14:hiddenFill xmlns:a14="http://schemas.microsoft.com/office/drawing/2010/main" xmlns="">
-                <a:solidFill>
-                  <a:srgbClr val="FFFFFF"/>
-                </a:solidFill>
-              </a14:hiddenFill>
-            </a:ext>
-          </a:extLst>
         </p:spPr>
       </p:pic>
       <p:grpSp>
@@ -232,18 +217,6 @@
             <a:ln>
               <a:noFill/>
             </a:ln>
-            <a:extLst>
-              <a:ext uri="{91240B29-F687-4f45-9708-019B960494DF}">
-                <a14:hiddenLine xmlns:a14="http://schemas.microsoft.com/office/drawing/2010/main" xmlns="" w="9525">
-                  <a:solidFill>
-                    <a:srgbClr val="000000"/>
-                  </a:solidFill>
-                  <a:miter lim="800000"/>
-                  <a:headEnd/>
-                  <a:tailEnd/>
-                </a14:hiddenLine>
-              </a:ext>
-            </a:extLst>
           </p:spPr>
         </p:sp>
         <p:sp>
@@ -322,18 +295,6 @@
             <a:ln>
               <a:noFill/>
             </a:ln>
-            <a:extLst>
-              <a:ext uri="{91240B29-F687-4f45-9708-019B960494DF}">
-                <a14:hiddenLine xmlns:a14="http://schemas.microsoft.com/office/drawing/2010/main" xmlns="" w="9525">
-                  <a:solidFill>
-                    <a:srgbClr val="000000"/>
-                  </a:solidFill>
-                  <a:round/>
-                  <a:headEnd/>
-                  <a:tailEnd/>
-                </a14:hiddenLine>
-              </a:ext>
-            </a:extLst>
           </p:spPr>
         </p:sp>
         <p:sp>
@@ -412,18 +373,6 @@
             <a:ln>
               <a:noFill/>
             </a:ln>
-            <a:extLst>
-              <a:ext uri="{91240B29-F687-4f45-9708-019B960494DF}">
-                <a14:hiddenLine xmlns:a14="http://schemas.microsoft.com/office/drawing/2010/main" xmlns="" w="9525">
-                  <a:solidFill>
-                    <a:srgbClr val="000000"/>
-                  </a:solidFill>
-                  <a:round/>
-                  <a:headEnd/>
-                  <a:tailEnd/>
-                </a14:hiddenLine>
-              </a:ext>
-            </a:extLst>
           </p:spPr>
         </p:sp>
         <p:sp>
@@ -446,18 +395,6 @@
             <a:ln>
               <a:noFill/>
             </a:ln>
-            <a:extLst>
-              <a:ext uri="{91240B29-F687-4f45-9708-019B960494DF}">
-                <a14:hiddenLine xmlns:a14="http://schemas.microsoft.com/office/drawing/2010/main" xmlns="" w="9525">
-                  <a:solidFill>
-                    <a:srgbClr val="000000"/>
-                  </a:solidFill>
-                  <a:miter lim="800000"/>
-                  <a:headEnd/>
-                  <a:tailEnd/>
-                </a14:hiddenLine>
-              </a:ext>
-            </a:extLst>
           </p:spPr>
         </p:sp>
         <p:sp>
@@ -536,18 +473,6 @@
             <a:ln>
               <a:noFill/>
             </a:ln>
-            <a:extLst>
-              <a:ext uri="{91240B29-F687-4f45-9708-019B960494DF}">
-                <a14:hiddenLine xmlns:a14="http://schemas.microsoft.com/office/drawing/2010/main" xmlns="" w="9525">
-                  <a:solidFill>
-                    <a:srgbClr val="000000"/>
-                  </a:solidFill>
-                  <a:round/>
-                  <a:headEnd/>
-                  <a:tailEnd/>
-                </a14:hiddenLine>
-              </a:ext>
-            </a:extLst>
           </p:spPr>
         </p:sp>
         <p:sp>
@@ -598,18 +523,6 @@
             <a:ln>
               <a:noFill/>
             </a:ln>
-            <a:extLst>
-              <a:ext uri="{91240B29-F687-4f45-9708-019B960494DF}">
-                <a14:hiddenLine xmlns:a14="http://schemas.microsoft.com/office/drawing/2010/main" xmlns="" w="9525">
-                  <a:solidFill>
-                    <a:srgbClr val="000000"/>
-                  </a:solidFill>
-                  <a:round/>
-                  <a:headEnd/>
-                  <a:tailEnd/>
-                </a14:hiddenLine>
-              </a:ext>
-            </a:extLst>
           </p:spPr>
         </p:sp>
         <p:sp>
@@ -660,18 +573,6 @@
             <a:ln>
               <a:noFill/>
             </a:ln>
-            <a:extLst>
-              <a:ext uri="{91240B29-F687-4f45-9708-019B960494DF}">
-                <a14:hiddenLine xmlns:a14="http://schemas.microsoft.com/office/drawing/2010/main" xmlns="" w="9525">
-                  <a:solidFill>
-                    <a:srgbClr val="000000"/>
-                  </a:solidFill>
-                  <a:round/>
-                  <a:headEnd/>
-                  <a:tailEnd/>
-                </a14:hiddenLine>
-              </a:ext>
-            </a:extLst>
           </p:spPr>
         </p:sp>
         <p:sp>
@@ -750,18 +651,6 @@
             <a:ln>
               <a:noFill/>
             </a:ln>
-            <a:extLst>
-              <a:ext uri="{91240B29-F687-4f45-9708-019B960494DF}">
-                <a14:hiddenLine xmlns:a14="http://schemas.microsoft.com/office/drawing/2010/main" xmlns="" w="9525">
-                  <a:solidFill>
-                    <a:srgbClr val="000000"/>
-                  </a:solidFill>
-                  <a:round/>
-                  <a:headEnd/>
-                  <a:tailEnd/>
-                </a14:hiddenLine>
-              </a:ext>
-            </a:extLst>
           </p:spPr>
         </p:sp>
         <p:sp>
@@ -812,18 +701,6 @@
             <a:ln>
               <a:noFill/>
             </a:ln>
-            <a:extLst>
-              <a:ext uri="{91240B29-F687-4f45-9708-019B960494DF}">
-                <a14:hiddenLine xmlns:a14="http://schemas.microsoft.com/office/drawing/2010/main" xmlns="" w="9525">
-                  <a:solidFill>
-                    <a:srgbClr val="000000"/>
-                  </a:solidFill>
-                  <a:round/>
-                  <a:headEnd/>
-                  <a:tailEnd/>
-                </a14:hiddenLine>
-              </a:ext>
-            </a:extLst>
           </p:spPr>
         </p:sp>
         <p:sp>
@@ -874,18 +751,6 @@
             <a:ln>
               <a:noFill/>
             </a:ln>
-            <a:extLst>
-              <a:ext uri="{91240B29-F687-4f45-9708-019B960494DF}">
-                <a14:hiddenLine xmlns:a14="http://schemas.microsoft.com/office/drawing/2010/main" xmlns="" w="9525">
-                  <a:solidFill>
-                    <a:srgbClr val="000000"/>
-                  </a:solidFill>
-                  <a:round/>
-                  <a:headEnd/>
-                  <a:tailEnd/>
-                </a14:hiddenLine>
-              </a:ext>
-            </a:extLst>
           </p:spPr>
         </p:sp>
         <p:sp>
@@ -964,18 +829,6 @@
             <a:ln>
               <a:noFill/>
             </a:ln>
-            <a:extLst>
-              <a:ext uri="{91240B29-F687-4f45-9708-019B960494DF}">
-                <a14:hiddenLine xmlns:a14="http://schemas.microsoft.com/office/drawing/2010/main" xmlns="" w="9525">
-                  <a:solidFill>
-                    <a:srgbClr val="000000"/>
-                  </a:solidFill>
-                  <a:round/>
-                  <a:headEnd/>
-                  <a:tailEnd/>
-                </a14:hiddenLine>
-              </a:ext>
-            </a:extLst>
           </p:spPr>
         </p:sp>
         <p:sp>
@@ -1054,18 +907,6 @@
             <a:ln>
               <a:noFill/>
             </a:ln>
-            <a:extLst>
-              <a:ext uri="{91240B29-F687-4f45-9708-019B960494DF}">
-                <a14:hiddenLine xmlns:a14="http://schemas.microsoft.com/office/drawing/2010/main" xmlns="" w="9525">
-                  <a:solidFill>
-                    <a:srgbClr val="000000"/>
-                  </a:solidFill>
-                  <a:round/>
-                  <a:headEnd/>
-                  <a:tailEnd/>
-                </a14:hiddenLine>
-              </a:ext>
-            </a:extLst>
           </p:spPr>
         </p:sp>
         <p:sp>
@@ -1116,18 +957,6 @@
             <a:ln>
               <a:noFill/>
             </a:ln>
-            <a:extLst>
-              <a:ext uri="{91240B29-F687-4f45-9708-019B960494DF}">
-                <a14:hiddenLine xmlns:a14="http://schemas.microsoft.com/office/drawing/2010/main" xmlns="" w="9525">
-                  <a:solidFill>
-                    <a:srgbClr val="000000"/>
-                  </a:solidFill>
-                  <a:round/>
-                  <a:headEnd/>
-                  <a:tailEnd/>
-                </a14:hiddenLine>
-              </a:ext>
-            </a:extLst>
           </p:spPr>
         </p:sp>
         <p:sp>
@@ -1226,18 +1055,6 @@
             <a:ln>
               <a:noFill/>
             </a:ln>
-            <a:extLst>
-              <a:ext uri="{91240B29-F687-4f45-9708-019B960494DF}">
-                <a14:hiddenLine xmlns:a14="http://schemas.microsoft.com/office/drawing/2010/main" xmlns="" w="9525">
-                  <a:solidFill>
-                    <a:srgbClr val="000000"/>
-                  </a:solidFill>
-                  <a:round/>
-                  <a:headEnd/>
-                  <a:tailEnd/>
-                </a14:hiddenLine>
-              </a:ext>
-            </a:extLst>
           </p:spPr>
         </p:sp>
         <p:sp>
@@ -1288,18 +1105,6 @@
             <a:ln>
               <a:noFill/>
             </a:ln>
-            <a:extLst>
-              <a:ext uri="{91240B29-F687-4f45-9708-019B960494DF}">
-                <a14:hiddenLine xmlns:a14="http://schemas.microsoft.com/office/drawing/2010/main" xmlns="" w="9525">
-                  <a:solidFill>
-                    <a:srgbClr val="000000"/>
-                  </a:solidFill>
-                  <a:round/>
-                  <a:headEnd/>
-                  <a:tailEnd/>
-                </a14:hiddenLine>
-              </a:ext>
-            </a:extLst>
           </p:spPr>
         </p:sp>
         <p:sp>
@@ -1378,18 +1183,6 @@
             <a:ln>
               <a:noFill/>
             </a:ln>
-            <a:extLst>
-              <a:ext uri="{91240B29-F687-4f45-9708-019B960494DF}">
-                <a14:hiddenLine xmlns:a14="http://schemas.microsoft.com/office/drawing/2010/main" xmlns="" w="9525">
-                  <a:solidFill>
-                    <a:srgbClr val="000000"/>
-                  </a:solidFill>
-                  <a:round/>
-                  <a:headEnd/>
-                  <a:tailEnd/>
-                </a14:hiddenLine>
-              </a:ext>
-            </a:extLst>
           </p:spPr>
         </p:sp>
         <p:sp>
@@ -1468,18 +1261,6 @@
             <a:ln>
               <a:noFill/>
             </a:ln>
-            <a:extLst>
-              <a:ext uri="{91240B29-F687-4f45-9708-019B960494DF}">
-                <a14:hiddenLine xmlns:a14="http://schemas.microsoft.com/office/drawing/2010/main" xmlns="" w="9525">
-                  <a:solidFill>
-                    <a:srgbClr val="000000"/>
-                  </a:solidFill>
-                  <a:round/>
-                  <a:headEnd/>
-                  <a:tailEnd/>
-                </a14:hiddenLine>
-              </a:ext>
-            </a:extLst>
           </p:spPr>
         </p:sp>
         <p:sp>
@@ -1530,18 +1311,6 @@
             <a:ln>
               <a:noFill/>
             </a:ln>
-            <a:extLst>
-              <a:ext uri="{91240B29-F687-4f45-9708-019B960494DF}">
-                <a14:hiddenLine xmlns:a14="http://schemas.microsoft.com/office/drawing/2010/main" xmlns="" w="9525">
-                  <a:solidFill>
-                    <a:srgbClr val="000000"/>
-                  </a:solidFill>
-                  <a:round/>
-                  <a:headEnd/>
-                  <a:tailEnd/>
-                </a14:hiddenLine>
-              </a:ext>
-            </a:extLst>
           </p:spPr>
         </p:sp>
         <p:sp>
@@ -1620,18 +1389,6 @@
             <a:ln>
               <a:noFill/>
             </a:ln>
-            <a:extLst>
-              <a:ext uri="{91240B29-F687-4f45-9708-019B960494DF}">
-                <a14:hiddenLine xmlns:a14="http://schemas.microsoft.com/office/drawing/2010/main" xmlns="" w="9525">
-                  <a:solidFill>
-                    <a:srgbClr val="000000"/>
-                  </a:solidFill>
-                  <a:round/>
-                  <a:headEnd/>
-                  <a:tailEnd/>
-                </a14:hiddenLine>
-              </a:ext>
-            </a:extLst>
           </p:spPr>
         </p:sp>
         <p:sp>
@@ -1710,18 +1467,6 @@
             <a:ln>
               <a:noFill/>
             </a:ln>
-            <a:extLst>
-              <a:ext uri="{91240B29-F687-4f45-9708-019B960494DF}">
-                <a14:hiddenLine xmlns:a14="http://schemas.microsoft.com/office/drawing/2010/main" xmlns="" w="9525">
-                  <a:solidFill>
-                    <a:srgbClr val="000000"/>
-                  </a:solidFill>
-                  <a:round/>
-                  <a:headEnd/>
-                  <a:tailEnd/>
-                </a14:hiddenLine>
-              </a:ext>
-            </a:extLst>
           </p:spPr>
         </p:sp>
         <p:sp>
@@ -1766,18 +1511,6 @@
             <a:ln>
               <a:noFill/>
             </a:ln>
-            <a:extLst>
-              <a:ext uri="{91240B29-F687-4f45-9708-019B960494DF}">
-                <a14:hiddenLine xmlns:a14="http://schemas.microsoft.com/office/drawing/2010/main" xmlns="" w="9525">
-                  <a:solidFill>
-                    <a:srgbClr val="000000"/>
-                  </a:solidFill>
-                  <a:round/>
-                  <a:headEnd/>
-                  <a:tailEnd/>
-                </a14:hiddenLine>
-              </a:ext>
-            </a:extLst>
           </p:spPr>
         </p:sp>
         <p:sp>
@@ -1856,18 +1589,6 @@
             <a:ln>
               <a:noFill/>
             </a:ln>
-            <a:extLst>
-              <a:ext uri="{91240B29-F687-4f45-9708-019B960494DF}">
-                <a14:hiddenLine xmlns:a14="http://schemas.microsoft.com/office/drawing/2010/main" xmlns="" w="9525">
-                  <a:solidFill>
-                    <a:srgbClr val="000000"/>
-                  </a:solidFill>
-                  <a:round/>
-                  <a:headEnd/>
-                  <a:tailEnd/>
-                </a14:hiddenLine>
-              </a:ext>
-            </a:extLst>
           </p:spPr>
         </p:sp>
         <p:sp>
@@ -1912,18 +1633,6 @@
             <a:ln>
               <a:noFill/>
             </a:ln>
-            <a:extLst>
-              <a:ext uri="{91240B29-F687-4f45-9708-019B960494DF}">
-                <a14:hiddenLine xmlns:a14="http://schemas.microsoft.com/office/drawing/2010/main" xmlns="" w="9525">
-                  <a:solidFill>
-                    <a:srgbClr val="000000"/>
-                  </a:solidFill>
-                  <a:round/>
-                  <a:headEnd/>
-                  <a:tailEnd/>
-                </a14:hiddenLine>
-              </a:ext>
-            </a:extLst>
           </p:spPr>
         </p:sp>
         <p:sp>
@@ -2002,18 +1711,6 @@
             <a:ln>
               <a:noFill/>
             </a:ln>
-            <a:extLst>
-              <a:ext uri="{91240B29-F687-4f45-9708-019B960494DF}">
-                <a14:hiddenLine xmlns:a14="http://schemas.microsoft.com/office/drawing/2010/main" xmlns="" w="9525">
-                  <a:solidFill>
-                    <a:srgbClr val="000000"/>
-                  </a:solidFill>
-                  <a:round/>
-                  <a:headEnd/>
-                  <a:tailEnd/>
-                </a14:hiddenLine>
-              </a:ext>
-            </a:extLst>
           </p:spPr>
         </p:sp>
         <p:sp>
@@ -2070,18 +1767,6 @@
             <a:ln>
               <a:noFill/>
             </a:ln>
-            <a:extLst>
-              <a:ext uri="{91240B29-F687-4f45-9708-019B960494DF}">
-                <a14:hiddenLine xmlns:a14="http://schemas.microsoft.com/office/drawing/2010/main" xmlns="" w="9525">
-                  <a:solidFill>
-                    <a:srgbClr val="000000"/>
-                  </a:solidFill>
-                  <a:round/>
-                  <a:headEnd/>
-                  <a:tailEnd/>
-                </a14:hiddenLine>
-              </a:ext>
-            </a:extLst>
           </p:spPr>
         </p:sp>
         <p:sp>
@@ -2160,18 +1845,6 @@
             <a:ln>
               <a:noFill/>
             </a:ln>
-            <a:extLst>
-              <a:ext uri="{91240B29-F687-4f45-9708-019B960494DF}">
-                <a14:hiddenLine xmlns:a14="http://schemas.microsoft.com/office/drawing/2010/main" xmlns="" w="9525">
-                  <a:solidFill>
-                    <a:srgbClr val="000000"/>
-                  </a:solidFill>
-                  <a:round/>
-                  <a:headEnd/>
-                  <a:tailEnd/>
-                </a14:hiddenLine>
-              </a:ext>
-            </a:extLst>
           </p:spPr>
         </p:sp>
         <p:sp>
@@ -2228,18 +1901,6 @@
             <a:ln>
               <a:noFill/>
             </a:ln>
-            <a:extLst>
-              <a:ext uri="{91240B29-F687-4f45-9708-019B960494DF}">
-                <a14:hiddenLine xmlns:a14="http://schemas.microsoft.com/office/drawing/2010/main" xmlns="" w="9525">
-                  <a:solidFill>
-                    <a:srgbClr val="000000"/>
-                  </a:solidFill>
-                  <a:round/>
-                  <a:headEnd/>
-                  <a:tailEnd/>
-                </a14:hiddenLine>
-              </a:ext>
-            </a:extLst>
           </p:spPr>
         </p:sp>
         <p:sp>
@@ -2318,18 +1979,6 @@
             <a:ln>
               <a:noFill/>
             </a:ln>
-            <a:extLst>
-              <a:ext uri="{91240B29-F687-4f45-9708-019B960494DF}">
-                <a14:hiddenLine xmlns:a14="http://schemas.microsoft.com/office/drawing/2010/main" xmlns="" w="9525">
-                  <a:solidFill>
-                    <a:srgbClr val="000000"/>
-                  </a:solidFill>
-                  <a:round/>
-                  <a:headEnd/>
-                  <a:tailEnd/>
-                </a14:hiddenLine>
-              </a:ext>
-            </a:extLst>
           </p:spPr>
         </p:sp>
         <p:sp>
@@ -2352,18 +2001,6 @@
             <a:ln>
               <a:noFill/>
             </a:ln>
-            <a:extLst>
-              <a:ext uri="{91240B29-F687-4f45-9708-019B960494DF}">
-                <a14:hiddenLine xmlns:a14="http://schemas.microsoft.com/office/drawing/2010/main" xmlns="" w="9525">
-                  <a:solidFill>
-                    <a:srgbClr val="000000"/>
-                  </a:solidFill>
-                  <a:miter lim="800000"/>
-                  <a:headEnd/>
-                  <a:tailEnd/>
-                </a14:hiddenLine>
-              </a:ext>
-            </a:extLst>
           </p:spPr>
         </p:sp>
         <p:sp>
@@ -2442,18 +2079,6 @@
             <a:ln>
               <a:noFill/>
             </a:ln>
-            <a:extLst>
-              <a:ext uri="{91240B29-F687-4f45-9708-019B960494DF}">
-                <a14:hiddenLine xmlns:a14="http://schemas.microsoft.com/office/drawing/2010/main" xmlns="" w="9525">
-                  <a:solidFill>
-                    <a:srgbClr val="000000"/>
-                  </a:solidFill>
-                  <a:round/>
-                  <a:headEnd/>
-                  <a:tailEnd/>
-                </a14:hiddenLine>
-              </a:ext>
-            </a:extLst>
           </p:spPr>
         </p:sp>
         <p:sp>
@@ -2504,18 +2129,6 @@
             <a:ln>
               <a:noFill/>
             </a:ln>
-            <a:extLst>
-              <a:ext uri="{91240B29-F687-4f45-9708-019B960494DF}">
-                <a14:hiddenLine xmlns:a14="http://schemas.microsoft.com/office/drawing/2010/main" xmlns="" w="9525">
-                  <a:solidFill>
-                    <a:srgbClr val="000000"/>
-                  </a:solidFill>
-                  <a:round/>
-                  <a:headEnd/>
-                  <a:tailEnd/>
-                </a14:hiddenLine>
-              </a:ext>
-            </a:extLst>
           </p:spPr>
         </p:sp>
         <p:sp>
@@ -2566,18 +2179,6 @@
             <a:ln>
               <a:noFill/>
             </a:ln>
-            <a:extLst>
-              <a:ext uri="{91240B29-F687-4f45-9708-019B960494DF}">
-                <a14:hiddenLine xmlns:a14="http://schemas.microsoft.com/office/drawing/2010/main" xmlns="" w="9525">
-                  <a:solidFill>
-                    <a:srgbClr val="000000"/>
-                  </a:solidFill>
-                  <a:round/>
-                  <a:headEnd/>
-                  <a:tailEnd/>
-                </a14:hiddenLine>
-              </a:ext>
-            </a:extLst>
           </p:spPr>
         </p:sp>
         <p:sp>
@@ -2656,18 +2257,6 @@
             <a:ln>
               <a:noFill/>
             </a:ln>
-            <a:extLst>
-              <a:ext uri="{91240B29-F687-4f45-9708-019B960494DF}">
-                <a14:hiddenLine xmlns:a14="http://schemas.microsoft.com/office/drawing/2010/main" xmlns="" w="9525">
-                  <a:solidFill>
-                    <a:srgbClr val="000000"/>
-                  </a:solidFill>
-                  <a:round/>
-                  <a:headEnd/>
-                  <a:tailEnd/>
-                </a14:hiddenLine>
-              </a:ext>
-            </a:extLst>
           </p:spPr>
         </p:sp>
         <p:sp>
@@ -2724,18 +2313,6 @@
             <a:ln>
               <a:noFill/>
             </a:ln>
-            <a:extLst>
-              <a:ext uri="{91240B29-F687-4f45-9708-019B960494DF}">
-                <a14:hiddenLine xmlns:a14="http://schemas.microsoft.com/office/drawing/2010/main" xmlns="" w="9525">
-                  <a:solidFill>
-                    <a:srgbClr val="000000"/>
-                  </a:solidFill>
-                  <a:round/>
-                  <a:headEnd/>
-                  <a:tailEnd/>
-                </a14:hiddenLine>
-              </a:ext>
-            </a:extLst>
           </p:spPr>
         </p:sp>
         <p:sp>
@@ -2786,18 +2363,6 @@
             <a:ln>
               <a:noFill/>
             </a:ln>
-            <a:extLst>
-              <a:ext uri="{91240B29-F687-4f45-9708-019B960494DF}">
-                <a14:hiddenLine xmlns:a14="http://schemas.microsoft.com/office/drawing/2010/main" xmlns="" w="9525">
-                  <a:solidFill>
-                    <a:srgbClr val="000000"/>
-                  </a:solidFill>
-                  <a:round/>
-                  <a:headEnd/>
-                  <a:tailEnd/>
-                </a14:hiddenLine>
-              </a:ext>
-            </a:extLst>
           </p:spPr>
         </p:sp>
         <p:sp>
@@ -2876,18 +2441,6 @@
             <a:ln>
               <a:noFill/>
             </a:ln>
-            <a:extLst>
-              <a:ext uri="{91240B29-F687-4f45-9708-019B960494DF}">
-                <a14:hiddenLine xmlns:a14="http://schemas.microsoft.com/office/drawing/2010/main" xmlns="" w="9525">
-                  <a:solidFill>
-                    <a:srgbClr val="000000"/>
-                  </a:solidFill>
-                  <a:round/>
-                  <a:headEnd/>
-                  <a:tailEnd/>
-                </a14:hiddenLine>
-              </a:ext>
-            </a:extLst>
           </p:spPr>
         </p:sp>
         <p:sp>
@@ -2938,18 +2491,6 @@
             <a:ln>
               <a:noFill/>
             </a:ln>
-            <a:extLst>
-              <a:ext uri="{91240B29-F687-4f45-9708-019B960494DF}">
-                <a14:hiddenLine xmlns:a14="http://schemas.microsoft.com/office/drawing/2010/main" xmlns="" w="9525">
-                  <a:solidFill>
-                    <a:srgbClr val="000000"/>
-                  </a:solidFill>
-                  <a:round/>
-                  <a:headEnd/>
-                  <a:tailEnd/>
-                </a14:hiddenLine>
-              </a:ext>
-            </a:extLst>
           </p:spPr>
         </p:sp>
         <p:sp>
@@ -3028,18 +2569,6 @@
             <a:ln>
               <a:noFill/>
             </a:ln>
-            <a:extLst>
-              <a:ext uri="{91240B29-F687-4f45-9708-019B960494DF}">
-                <a14:hiddenLine xmlns:a14="http://schemas.microsoft.com/office/drawing/2010/main" xmlns="" w="9525">
-                  <a:solidFill>
-                    <a:srgbClr val="000000"/>
-                  </a:solidFill>
-                  <a:round/>
-                  <a:headEnd/>
-                  <a:tailEnd/>
-                </a14:hiddenLine>
-              </a:ext>
-            </a:extLst>
           </p:spPr>
         </p:sp>
         <p:sp>
@@ -3090,18 +2619,6 @@
             <a:ln>
               <a:noFill/>
             </a:ln>
-            <a:extLst>
-              <a:ext uri="{91240B29-F687-4f45-9708-019B960494DF}">
-                <a14:hiddenLine xmlns:a14="http://schemas.microsoft.com/office/drawing/2010/main" xmlns="" w="9525">
-                  <a:solidFill>
-                    <a:srgbClr val="000000"/>
-                  </a:solidFill>
-                  <a:round/>
-                  <a:headEnd/>
-                  <a:tailEnd/>
-                </a14:hiddenLine>
-              </a:ext>
-            </a:extLst>
           </p:spPr>
         </p:sp>
         <p:sp>
@@ -3180,18 +2697,6 @@
             <a:ln>
               <a:noFill/>
             </a:ln>
-            <a:extLst>
-              <a:ext uri="{91240B29-F687-4f45-9708-019B960494DF}">
-                <a14:hiddenLine xmlns:a14="http://schemas.microsoft.com/office/drawing/2010/main" xmlns="" w="9525">
-                  <a:solidFill>
-                    <a:srgbClr val="000000"/>
-                  </a:solidFill>
-                  <a:round/>
-                  <a:headEnd/>
-                  <a:tailEnd/>
-                </a14:hiddenLine>
-              </a:ext>
-            </a:extLst>
           </p:spPr>
         </p:sp>
         <p:sp>
@@ -3214,18 +2719,6 @@
             <a:ln>
               <a:noFill/>
             </a:ln>
-            <a:extLst>
-              <a:ext uri="{91240B29-F687-4f45-9708-019B960494DF}">
-                <a14:hiddenLine xmlns:a14="http://schemas.microsoft.com/office/drawing/2010/main" xmlns="" w="9525">
-                  <a:solidFill>
-                    <a:srgbClr val="000000"/>
-                  </a:solidFill>
-                  <a:miter lim="800000"/>
-                  <a:headEnd/>
-                  <a:tailEnd/>
-                </a14:hiddenLine>
-              </a:ext>
-            </a:extLst>
           </p:spPr>
         </p:sp>
         <p:sp>
@@ -3279,18 +2772,6 @@
             <a:ln>
               <a:noFill/>
             </a:ln>
-            <a:extLst>
-              <a:ext uri="{91240B29-F687-4f45-9708-019B960494DF}">
-                <a14:hiddenLine xmlns:a14="http://schemas.microsoft.com/office/drawing/2010/main" xmlns="" w="9525">
-                  <a:solidFill>
-                    <a:srgbClr val="000000"/>
-                  </a:solidFill>
-                  <a:round/>
-                  <a:headEnd/>
-                  <a:tailEnd/>
-                </a14:hiddenLine>
-              </a:ext>
-            </a:extLst>
           </p:spPr>
         </p:sp>
         <p:sp>
@@ -3369,18 +2850,6 @@
             <a:ln>
               <a:noFill/>
             </a:ln>
-            <a:extLst>
-              <a:ext uri="{91240B29-F687-4f45-9708-019B960494DF}">
-                <a14:hiddenLine xmlns:a14="http://schemas.microsoft.com/office/drawing/2010/main" xmlns="" w="9525">
-                  <a:solidFill>
-                    <a:srgbClr val="000000"/>
-                  </a:solidFill>
-                  <a:round/>
-                  <a:headEnd/>
-                  <a:tailEnd/>
-                </a14:hiddenLine>
-              </a:ext>
-            </a:extLst>
           </p:spPr>
         </p:sp>
         <p:sp>
@@ -3431,18 +2900,6 @@
             <a:ln>
               <a:noFill/>
             </a:ln>
-            <a:extLst>
-              <a:ext uri="{91240B29-F687-4f45-9708-019B960494DF}">
-                <a14:hiddenLine xmlns:a14="http://schemas.microsoft.com/office/drawing/2010/main" xmlns="" w="9525">
-                  <a:solidFill>
-                    <a:srgbClr val="000000"/>
-                  </a:solidFill>
-                  <a:round/>
-                  <a:headEnd/>
-                  <a:tailEnd/>
-                </a14:hiddenLine>
-              </a:ext>
-            </a:extLst>
           </p:spPr>
         </p:sp>
         <p:sp>
@@ -3521,18 +2978,6 @@
             <a:ln>
               <a:noFill/>
             </a:ln>
-            <a:extLst>
-              <a:ext uri="{91240B29-F687-4f45-9708-019B960494DF}">
-                <a14:hiddenLine xmlns:a14="http://schemas.microsoft.com/office/drawing/2010/main" xmlns="" w="9525">
-                  <a:solidFill>
-                    <a:srgbClr val="000000"/>
-                  </a:solidFill>
-                  <a:round/>
-                  <a:headEnd/>
-                  <a:tailEnd/>
-                </a14:hiddenLine>
-              </a:ext>
-            </a:extLst>
           </p:spPr>
         </p:sp>
         <p:sp>
@@ -3611,18 +3056,6 @@
             <a:ln>
               <a:noFill/>
             </a:ln>
-            <a:extLst>
-              <a:ext uri="{91240B29-F687-4f45-9708-019B960494DF}">
-                <a14:hiddenLine xmlns:a14="http://schemas.microsoft.com/office/drawing/2010/main" xmlns="" w="9525">
-                  <a:solidFill>
-                    <a:srgbClr val="000000"/>
-                  </a:solidFill>
-                  <a:round/>
-                  <a:headEnd/>
-                  <a:tailEnd/>
-                </a14:hiddenLine>
-              </a:ext>
-            </a:extLst>
           </p:spPr>
         </p:sp>
         <p:sp>
@@ -3676,18 +3109,6 @@
             <a:ln>
               <a:noFill/>
             </a:ln>
-            <a:extLst>
-              <a:ext uri="{91240B29-F687-4f45-9708-019B960494DF}">
-                <a14:hiddenLine xmlns:a14="http://schemas.microsoft.com/office/drawing/2010/main" xmlns="" w="9525">
-                  <a:solidFill>
-                    <a:srgbClr val="000000"/>
-                  </a:solidFill>
-                  <a:round/>
-                  <a:headEnd/>
-                  <a:tailEnd/>
-                </a14:hiddenLine>
-              </a:ext>
-            </a:extLst>
           </p:spPr>
         </p:sp>
         <p:sp>
@@ -3738,18 +3159,6 @@
             <a:ln>
               <a:noFill/>
             </a:ln>
-            <a:extLst>
-              <a:ext uri="{91240B29-F687-4f45-9708-019B960494DF}">
-                <a14:hiddenLine xmlns:a14="http://schemas.microsoft.com/office/drawing/2010/main" xmlns="" w="9525">
-                  <a:solidFill>
-                    <a:srgbClr val="000000"/>
-                  </a:solidFill>
-                  <a:round/>
-                  <a:headEnd/>
-                  <a:tailEnd/>
-                </a14:hiddenLine>
-              </a:ext>
-            </a:extLst>
           </p:spPr>
         </p:sp>
         <p:sp>
@@ -3828,18 +3237,6 @@
             <a:ln>
               <a:noFill/>
             </a:ln>
-            <a:extLst>
-              <a:ext uri="{91240B29-F687-4f45-9708-019B960494DF}">
-                <a14:hiddenLine xmlns:a14="http://schemas.microsoft.com/office/drawing/2010/main" xmlns="" w="9525">
-                  <a:solidFill>
-                    <a:srgbClr val="000000"/>
-                  </a:solidFill>
-                  <a:round/>
-                  <a:headEnd/>
-                  <a:tailEnd/>
-                </a14:hiddenLine>
-              </a:ext>
-            </a:extLst>
           </p:spPr>
         </p:sp>
         <p:sp>
@@ -3918,18 +3315,6 @@
             <a:ln>
               <a:noFill/>
             </a:ln>
-            <a:extLst>
-              <a:ext uri="{91240B29-F687-4f45-9708-019B960494DF}">
-                <a14:hiddenLine xmlns:a14="http://schemas.microsoft.com/office/drawing/2010/main" xmlns="" w="9525">
-                  <a:solidFill>
-                    <a:srgbClr val="000000"/>
-                  </a:solidFill>
-                  <a:round/>
-                  <a:headEnd/>
-                  <a:tailEnd/>
-                </a14:hiddenLine>
-              </a:ext>
-            </a:extLst>
           </p:spPr>
         </p:sp>
         <p:sp>
@@ -3980,18 +3365,6 @@
             <a:ln>
               <a:noFill/>
             </a:ln>
-            <a:extLst>
-              <a:ext uri="{91240B29-F687-4f45-9708-019B960494DF}">
-                <a14:hiddenLine xmlns:a14="http://schemas.microsoft.com/office/drawing/2010/main" xmlns="" w="9525">
-                  <a:solidFill>
-                    <a:srgbClr val="000000"/>
-                  </a:solidFill>
-                  <a:round/>
-                  <a:headEnd/>
-                  <a:tailEnd/>
-                </a14:hiddenLine>
-              </a:ext>
-            </a:extLst>
           </p:spPr>
         </p:sp>
         <p:sp>
@@ -4100,18 +3473,6 @@
             <a:ln>
               <a:noFill/>
             </a:ln>
-            <a:extLst>
-              <a:ext uri="{91240B29-F687-4f45-9708-019B960494DF}">
-                <a14:hiddenLine xmlns:a14="http://schemas.microsoft.com/office/drawing/2010/main" xmlns="" w="9525">
-                  <a:solidFill>
-                    <a:srgbClr val="000000"/>
-                  </a:solidFill>
-                  <a:round/>
-                  <a:headEnd/>
-                  <a:tailEnd/>
-                </a14:hiddenLine>
-              </a:ext>
-            </a:extLst>
           </p:spPr>
         </p:sp>
         <p:sp>
@@ -4168,18 +3529,6 @@
             <a:ln>
               <a:noFill/>
             </a:ln>
-            <a:extLst>
-              <a:ext uri="{91240B29-F687-4f45-9708-019B960494DF}">
-                <a14:hiddenLine xmlns:a14="http://schemas.microsoft.com/office/drawing/2010/main" xmlns="" w="9525">
-                  <a:solidFill>
-                    <a:srgbClr val="000000"/>
-                  </a:solidFill>
-                  <a:round/>
-                  <a:headEnd/>
-                  <a:tailEnd/>
-                </a14:hiddenLine>
-              </a:ext>
-            </a:extLst>
           </p:spPr>
         </p:sp>
         <p:sp>
@@ -4258,18 +3607,6 @@
             <a:ln>
               <a:noFill/>
             </a:ln>
-            <a:extLst>
-              <a:ext uri="{91240B29-F687-4f45-9708-019B960494DF}">
-                <a14:hiddenLine xmlns:a14="http://schemas.microsoft.com/office/drawing/2010/main" xmlns="" w="9525">
-                  <a:solidFill>
-                    <a:srgbClr val="000000"/>
-                  </a:solidFill>
-                  <a:round/>
-                  <a:headEnd/>
-                  <a:tailEnd/>
-                </a14:hiddenLine>
-              </a:ext>
-            </a:extLst>
           </p:spPr>
         </p:sp>
       </p:grpSp>
@@ -4400,7 +3737,6 @@
           <a:p>
             <a:fld id="{77D79FE6-5460-4BB7-8806-BC3D23582E7F}" type="datetimeFigureOut">
               <a:rPr lang="ru-RU" smtClean="0"/>
-              <a:t>27.04.2026</a:t>
             </a:fld>
             <a:endParaRPr lang="ru-RU"/>
           </a:p>
@@ -4452,18 +3788,12 @@
           <a:p>
             <a:fld id="{C7697AD5-9712-43AA-B403-5EB65694064F}" type="slidenum">
               <a:rPr lang="ru-RU" smtClean="0"/>
-              <a:t>‹#›</a:t>
             </a:fld>
             <a:endParaRPr lang="ru-RU"/>
           </a:p>
         </p:txBody>
       </p:sp>
     </p:spTree>
-    <p:extLst>
-      <p:ext uri="{BB962C8B-B14F-4D97-AF65-F5344CB8AC3E}">
-        <p14:creationId xmlns:p14="http://schemas.microsoft.com/office/powerpoint/2010/main" val="1943949006"/>
-      </p:ext>
-    </p:extLst>
   </p:cSld>
   <p:clrMapOvr>
     <a:masterClrMapping/>
@@ -4647,6 +3977,7 @@
               <a:rPr lang="ru-RU" smtClean="0"/>
               <a:t>Образец текста</a:t>
             </a:r>
+            <a:endParaRPr lang="ru-RU" smtClean="0"/>
           </a:p>
         </p:txBody>
       </p:sp>
@@ -4667,7 +3998,6 @@
           <a:p>
             <a:fld id="{77D79FE6-5460-4BB7-8806-BC3D23582E7F}" type="datetimeFigureOut">
               <a:rPr lang="ru-RU" smtClean="0"/>
-              <a:t>27.04.2026</a:t>
             </a:fld>
             <a:endParaRPr lang="ru-RU"/>
           </a:p>
@@ -4709,18 +4039,12 @@
           <a:p>
             <a:fld id="{C7697AD5-9712-43AA-B403-5EB65694064F}" type="slidenum">
               <a:rPr lang="ru-RU" smtClean="0"/>
-              <a:t>‹#›</a:t>
             </a:fld>
             <a:endParaRPr lang="ru-RU"/>
           </a:p>
         </p:txBody>
       </p:sp>
     </p:spTree>
-    <p:extLst>
-      <p:ext uri="{BB962C8B-B14F-4D97-AF65-F5344CB8AC3E}">
-        <p14:creationId xmlns:p14="http://schemas.microsoft.com/office/powerpoint/2010/main" val="1280727210"/>
-      </p:ext>
-    </p:extLst>
   </p:cSld>
   <p:clrMapOvr>
     <a:masterClrMapping/>
@@ -4843,6 +4167,7 @@
               <a:rPr lang="ru-RU" smtClean="0"/>
               <a:t>Образец текста</a:t>
             </a:r>
+            <a:endParaRPr lang="ru-RU" smtClean="0"/>
           </a:p>
         </p:txBody>
       </p:sp>
@@ -4863,7 +4188,6 @@
           <a:p>
             <a:fld id="{77D79FE6-5460-4BB7-8806-BC3D23582E7F}" type="datetimeFigureOut">
               <a:rPr lang="ru-RU" smtClean="0"/>
-              <a:t>27.04.2026</a:t>
             </a:fld>
             <a:endParaRPr lang="ru-RU"/>
           </a:p>
@@ -4905,18 +4229,12 @@
           <a:p>
             <a:fld id="{C7697AD5-9712-43AA-B403-5EB65694064F}" type="slidenum">
               <a:rPr lang="ru-RU" smtClean="0"/>
-              <a:t>‹#›</a:t>
             </a:fld>
             <a:endParaRPr lang="ru-RU"/>
           </a:p>
         </p:txBody>
       </p:sp>
     </p:spTree>
-    <p:extLst>
-      <p:ext uri="{BB962C8B-B14F-4D97-AF65-F5344CB8AC3E}">
-        <p14:creationId xmlns:p14="http://schemas.microsoft.com/office/powerpoint/2010/main" val="1262280946"/>
-      </p:ext>
-    </p:extLst>
   </p:cSld>
   <p:clrMapOvr>
     <a:masterClrMapping/>
@@ -5039,6 +4357,7 @@
               <a:rPr lang="ru-RU" smtClean="0"/>
               <a:t>Образец текста</a:t>
             </a:r>
+            <a:endParaRPr lang="ru-RU" smtClean="0"/>
           </a:p>
         </p:txBody>
       </p:sp>
@@ -5106,6 +4425,7 @@
               <a:rPr lang="ru-RU" smtClean="0"/>
               <a:t>Образец текста</a:t>
             </a:r>
+            <a:endParaRPr lang="ru-RU" smtClean="0"/>
           </a:p>
         </p:txBody>
       </p:sp>
@@ -5126,7 +4446,6 @@
           <a:p>
             <a:fld id="{77D79FE6-5460-4BB7-8806-BC3D23582E7F}" type="datetimeFigureOut">
               <a:rPr lang="ru-RU" smtClean="0"/>
-              <a:t>27.04.2026</a:t>
             </a:fld>
             <a:endParaRPr lang="ru-RU"/>
           </a:p>
@@ -5168,7 +4487,6 @@
           <a:p>
             <a:fld id="{C7697AD5-9712-43AA-B403-5EB65694064F}" type="slidenum">
               <a:rPr lang="ru-RU" smtClean="0"/>
-              <a:t>‹#›</a:t>
             </a:fld>
             <a:endParaRPr lang="ru-RU"/>
           </a:p>
@@ -5219,7 +4537,7 @@
                 </a:effectLst>
                 <a:latin typeface="+mj-lt"/>
                 <a:ea typeface="+mj-ea"/>
-                <a:cs typeface="Trebuchet MS"/>
+                <a:cs typeface="Trebuchet MS" panose="020B0603020202020204"/>
               </a:defRPr>
             </a:lvl1pPr>
             <a:lvl2pPr>
@@ -5290,6 +4608,12 @@
               </a:rPr>
               <a:t>“</a:t>
             </a:r>
+            <a:endParaRPr lang="en-US" sz="8000" dirty="0">
+              <a:solidFill>
+                <a:schemeClr val="tx1"/>
+              </a:solidFill>
+              <a:effectLst/>
+            </a:endParaRPr>
           </a:p>
         </p:txBody>
       </p:sp>
@@ -5338,7 +4662,7 @@
                 </a:effectLst>
                 <a:latin typeface="+mj-lt"/>
                 <a:ea typeface="+mj-ea"/>
-                <a:cs typeface="Trebuchet MS"/>
+                <a:cs typeface="Trebuchet MS" panose="020B0603020202020204"/>
               </a:defRPr>
             </a:lvl1pPr>
             <a:lvl2pPr>
@@ -5409,15 +4733,16 @@
               </a:rPr>
               <a:t>”</a:t>
             </a:r>
+            <a:endParaRPr lang="en-US" sz="8000" dirty="0">
+              <a:solidFill>
+                <a:schemeClr val="tx1"/>
+              </a:solidFill>
+              <a:effectLst/>
+            </a:endParaRPr>
           </a:p>
         </p:txBody>
       </p:sp>
     </p:spTree>
-    <p:extLst>
-      <p:ext uri="{BB962C8B-B14F-4D97-AF65-F5344CB8AC3E}">
-        <p14:creationId xmlns:p14="http://schemas.microsoft.com/office/powerpoint/2010/main" val="1834185252"/>
-      </p:ext>
-    </p:extLst>
   </p:cSld>
   <p:clrMapOvr>
     <a:masterClrMapping/>
@@ -5540,6 +4865,7 @@
               <a:rPr lang="ru-RU" smtClean="0"/>
               <a:t>Образец текста</a:t>
             </a:r>
+            <a:endParaRPr lang="ru-RU" smtClean="0"/>
           </a:p>
         </p:txBody>
       </p:sp>
@@ -5560,7 +4886,6 @@
           <a:p>
             <a:fld id="{77D79FE6-5460-4BB7-8806-BC3D23582E7F}" type="datetimeFigureOut">
               <a:rPr lang="ru-RU" smtClean="0"/>
-              <a:t>27.04.2026</a:t>
             </a:fld>
             <a:endParaRPr lang="ru-RU"/>
           </a:p>
@@ -5602,18 +4927,12 @@
           <a:p>
             <a:fld id="{C7697AD5-9712-43AA-B403-5EB65694064F}" type="slidenum">
               <a:rPr lang="ru-RU" smtClean="0"/>
-              <a:t>‹#›</a:t>
             </a:fld>
             <a:endParaRPr lang="ru-RU"/>
           </a:p>
         </p:txBody>
       </p:sp>
     </p:spTree>
-    <p:extLst>
-      <p:ext uri="{BB962C8B-B14F-4D97-AF65-F5344CB8AC3E}">
-        <p14:creationId xmlns:p14="http://schemas.microsoft.com/office/powerpoint/2010/main" val="1215634302"/>
-      </p:ext>
-    </p:extLst>
   </p:cSld>
   <p:clrMapOvr>
     <a:masterClrMapping/>
@@ -5737,6 +5056,7 @@
               <a:rPr lang="ru-RU" smtClean="0"/>
               <a:t>Образец текста</a:t>
             </a:r>
+            <a:endParaRPr lang="ru-RU" smtClean="0"/>
           </a:p>
         </p:txBody>
       </p:sp>
@@ -5804,6 +5124,7 @@
               <a:rPr lang="ru-RU" smtClean="0"/>
               <a:t>Образец текста</a:t>
             </a:r>
+            <a:endParaRPr lang="ru-RU" smtClean="0"/>
           </a:p>
         </p:txBody>
       </p:sp>
@@ -5878,6 +5199,7 @@
               <a:rPr lang="ru-RU" smtClean="0"/>
               <a:t>Образец текста</a:t>
             </a:r>
+            <a:endParaRPr lang="ru-RU" smtClean="0"/>
           </a:p>
         </p:txBody>
       </p:sp>
@@ -5945,6 +5267,7 @@
               <a:rPr lang="ru-RU" smtClean="0"/>
               <a:t>Образец текста</a:t>
             </a:r>
+            <a:endParaRPr lang="ru-RU" smtClean="0"/>
           </a:p>
         </p:txBody>
       </p:sp>
@@ -6019,6 +5342,7 @@
               <a:rPr lang="ru-RU" smtClean="0"/>
               <a:t>Образец текста</a:t>
             </a:r>
+            <a:endParaRPr lang="ru-RU" smtClean="0"/>
           </a:p>
         </p:txBody>
       </p:sp>
@@ -6086,6 +5410,7 @@
               <a:rPr lang="ru-RU" smtClean="0"/>
               <a:t>Образец текста</a:t>
             </a:r>
+            <a:endParaRPr lang="ru-RU" smtClean="0"/>
           </a:p>
         </p:txBody>
       </p:sp>
@@ -6106,7 +5431,6 @@
           <a:p>
             <a:fld id="{77D79FE6-5460-4BB7-8806-BC3D23582E7F}" type="datetimeFigureOut">
               <a:rPr lang="ru-RU" smtClean="0"/>
-              <a:t>27.04.2026</a:t>
             </a:fld>
             <a:endParaRPr lang="ru-RU"/>
           </a:p>
@@ -6148,18 +5472,12 @@
           <a:p>
             <a:fld id="{C7697AD5-9712-43AA-B403-5EB65694064F}" type="slidenum">
               <a:rPr lang="ru-RU" smtClean="0"/>
-              <a:t>‹#›</a:t>
             </a:fld>
             <a:endParaRPr lang="ru-RU"/>
           </a:p>
         </p:txBody>
       </p:sp>
     </p:spTree>
-    <p:extLst>
-      <p:ext uri="{BB962C8B-B14F-4D97-AF65-F5344CB8AC3E}">
-        <p14:creationId xmlns:p14="http://schemas.microsoft.com/office/powerpoint/2010/main" val="27853228"/>
-      </p:ext>
-    </p:extLst>
   </p:cSld>
   <p:clrMapOvr>
     <a:masterClrMapping/>
@@ -6283,6 +5601,7 @@
               <a:rPr lang="ru-RU" smtClean="0"/>
               <a:t>Образец текста</a:t>
             </a:r>
+            <a:endParaRPr lang="ru-RU" smtClean="0"/>
           </a:p>
         </p:txBody>
       </p:sp>
@@ -6408,6 +5727,7 @@
               <a:rPr lang="ru-RU" smtClean="0"/>
               <a:t>Образец текста</a:t>
             </a:r>
+            <a:endParaRPr lang="ru-RU" smtClean="0"/>
           </a:p>
         </p:txBody>
       </p:sp>
@@ -6482,6 +5802,7 @@
               <a:rPr lang="ru-RU" smtClean="0"/>
               <a:t>Образец текста</a:t>
             </a:r>
+            <a:endParaRPr lang="ru-RU" smtClean="0"/>
           </a:p>
         </p:txBody>
       </p:sp>
@@ -6607,6 +5928,7 @@
               <a:rPr lang="ru-RU" smtClean="0"/>
               <a:t>Образец текста</a:t>
             </a:r>
+            <a:endParaRPr lang="ru-RU" smtClean="0"/>
           </a:p>
         </p:txBody>
       </p:sp>
@@ -6681,6 +6003,7 @@
               <a:rPr lang="ru-RU" smtClean="0"/>
               <a:t>Образец текста</a:t>
             </a:r>
+            <a:endParaRPr lang="ru-RU" smtClean="0"/>
           </a:p>
         </p:txBody>
       </p:sp>
@@ -6806,6 +6129,7 @@
               <a:rPr lang="ru-RU" smtClean="0"/>
               <a:t>Образец текста</a:t>
             </a:r>
+            <a:endParaRPr lang="ru-RU" smtClean="0"/>
           </a:p>
         </p:txBody>
       </p:sp>
@@ -6826,7 +6150,6 @@
           <a:p>
             <a:fld id="{77D79FE6-5460-4BB7-8806-BC3D23582E7F}" type="datetimeFigureOut">
               <a:rPr lang="ru-RU" smtClean="0"/>
-              <a:t>27.04.2026</a:t>
             </a:fld>
             <a:endParaRPr lang="ru-RU"/>
           </a:p>
@@ -6868,18 +6191,12 @@
           <a:p>
             <a:fld id="{C7697AD5-9712-43AA-B403-5EB65694064F}" type="slidenum">
               <a:rPr lang="ru-RU" smtClean="0"/>
-              <a:t>‹#›</a:t>
             </a:fld>
             <a:endParaRPr lang="ru-RU"/>
           </a:p>
         </p:txBody>
       </p:sp>
     </p:spTree>
-    <p:extLst>
-      <p:ext uri="{BB962C8B-B14F-4D97-AF65-F5344CB8AC3E}">
-        <p14:creationId xmlns:p14="http://schemas.microsoft.com/office/powerpoint/2010/main" val="2503549593"/>
-      </p:ext>
-    </p:extLst>
   </p:cSld>
   <p:clrMapOvr>
     <a:masterClrMapping/>
@@ -6947,6 +6264,7 @@
               <a:rPr lang="ru-RU" smtClean="0"/>
               <a:t>Образец текста</a:t>
             </a:r>
+            <a:endParaRPr lang="ru-RU" smtClean="0"/>
           </a:p>
           <a:p>
             <a:pPr lvl="1"/>
@@ -6954,6 +6272,7 @@
               <a:rPr lang="ru-RU" smtClean="0"/>
               <a:t>Второй уровень</a:t>
             </a:r>
+            <a:endParaRPr lang="ru-RU" smtClean="0"/>
           </a:p>
           <a:p>
             <a:pPr lvl="2"/>
@@ -6961,6 +6280,7 @@
               <a:rPr lang="ru-RU" smtClean="0"/>
               <a:t>Третий уровень</a:t>
             </a:r>
+            <a:endParaRPr lang="ru-RU" smtClean="0"/>
           </a:p>
           <a:p>
             <a:pPr lvl="3"/>
@@ -6968,6 +6288,7 @@
               <a:rPr lang="ru-RU" smtClean="0"/>
               <a:t>Четвертый уровень</a:t>
             </a:r>
+            <a:endParaRPr lang="ru-RU" smtClean="0"/>
           </a:p>
           <a:p>
             <a:pPr lvl="4"/>
@@ -6996,7 +6317,6 @@
           <a:p>
             <a:fld id="{77D79FE6-5460-4BB7-8806-BC3D23582E7F}" type="datetimeFigureOut">
               <a:rPr lang="ru-RU" smtClean="0"/>
-              <a:t>27.04.2026</a:t>
             </a:fld>
             <a:endParaRPr lang="ru-RU"/>
           </a:p>
@@ -7038,18 +6358,12 @@
           <a:p>
             <a:fld id="{C7697AD5-9712-43AA-B403-5EB65694064F}" type="slidenum">
               <a:rPr lang="ru-RU" smtClean="0"/>
-              <a:t>‹#›</a:t>
             </a:fld>
             <a:endParaRPr lang="ru-RU"/>
           </a:p>
         </p:txBody>
       </p:sp>
     </p:spTree>
-    <p:extLst>
-      <p:ext uri="{BB962C8B-B14F-4D97-AF65-F5344CB8AC3E}">
-        <p14:creationId xmlns:p14="http://schemas.microsoft.com/office/powerpoint/2010/main" val="171729440"/>
-      </p:ext>
-    </p:extLst>
   </p:cSld>
   <p:clrMapOvr>
     <a:masterClrMapping/>
@@ -7127,6 +6441,7 @@
               <a:rPr lang="ru-RU" smtClean="0"/>
               <a:t>Образец текста</a:t>
             </a:r>
+            <a:endParaRPr lang="ru-RU" smtClean="0"/>
           </a:p>
           <a:p>
             <a:pPr lvl="1"/>
@@ -7134,6 +6449,7 @@
               <a:rPr lang="ru-RU" smtClean="0"/>
               <a:t>Второй уровень</a:t>
             </a:r>
+            <a:endParaRPr lang="ru-RU" smtClean="0"/>
           </a:p>
           <a:p>
             <a:pPr lvl="2"/>
@@ -7141,6 +6457,7 @@
               <a:rPr lang="ru-RU" smtClean="0"/>
               <a:t>Третий уровень</a:t>
             </a:r>
+            <a:endParaRPr lang="ru-RU" smtClean="0"/>
           </a:p>
           <a:p>
             <a:pPr lvl="3"/>
@@ -7148,6 +6465,7 @@
               <a:rPr lang="ru-RU" smtClean="0"/>
               <a:t>Четвертый уровень</a:t>
             </a:r>
+            <a:endParaRPr lang="ru-RU" smtClean="0"/>
           </a:p>
           <a:p>
             <a:pPr lvl="4"/>
@@ -7176,7 +6494,6 @@
           <a:p>
             <a:fld id="{77D79FE6-5460-4BB7-8806-BC3D23582E7F}" type="datetimeFigureOut">
               <a:rPr lang="ru-RU" smtClean="0"/>
-              <a:t>27.04.2026</a:t>
             </a:fld>
             <a:endParaRPr lang="ru-RU"/>
           </a:p>
@@ -7218,18 +6535,12 @@
           <a:p>
             <a:fld id="{C7697AD5-9712-43AA-B403-5EB65694064F}" type="slidenum">
               <a:rPr lang="ru-RU" smtClean="0"/>
-              <a:t>‹#›</a:t>
             </a:fld>
             <a:endParaRPr lang="ru-RU"/>
           </a:p>
         </p:txBody>
       </p:sp>
     </p:spTree>
-    <p:extLst>
-      <p:ext uri="{BB962C8B-B14F-4D97-AF65-F5344CB8AC3E}">
-        <p14:creationId xmlns:p14="http://schemas.microsoft.com/office/powerpoint/2010/main" val="2233967220"/>
-      </p:ext>
-    </p:extLst>
   </p:cSld>
   <p:clrMapOvr>
     <a:masterClrMapping/>
@@ -7297,6 +6608,7 @@
               <a:rPr lang="ru-RU" smtClean="0"/>
               <a:t>Образец текста</a:t>
             </a:r>
+            <a:endParaRPr lang="ru-RU" smtClean="0"/>
           </a:p>
           <a:p>
             <a:pPr lvl="1"/>
@@ -7304,6 +6616,7 @@
               <a:rPr lang="ru-RU" smtClean="0"/>
               <a:t>Второй уровень</a:t>
             </a:r>
+            <a:endParaRPr lang="ru-RU" smtClean="0"/>
           </a:p>
           <a:p>
             <a:pPr lvl="2"/>
@@ -7311,6 +6624,7 @@
               <a:rPr lang="ru-RU" smtClean="0"/>
               <a:t>Третий уровень</a:t>
             </a:r>
+            <a:endParaRPr lang="ru-RU" smtClean="0"/>
           </a:p>
           <a:p>
             <a:pPr lvl="3"/>
@@ -7318,6 +6632,7 @@
               <a:rPr lang="ru-RU" smtClean="0"/>
               <a:t>Четвертый уровень</a:t>
             </a:r>
+            <a:endParaRPr lang="ru-RU" smtClean="0"/>
           </a:p>
           <a:p>
             <a:pPr lvl="4"/>
@@ -7346,7 +6661,6 @@
           <a:p>
             <a:fld id="{77D79FE6-5460-4BB7-8806-BC3D23582E7F}" type="datetimeFigureOut">
               <a:rPr lang="ru-RU" smtClean="0"/>
-              <a:t>27.04.2026</a:t>
             </a:fld>
             <a:endParaRPr lang="ru-RU"/>
           </a:p>
@@ -7388,18 +6702,12 @@
           <a:p>
             <a:fld id="{C7697AD5-9712-43AA-B403-5EB65694064F}" type="slidenum">
               <a:rPr lang="ru-RU" smtClean="0"/>
-              <a:t>‹#›</a:t>
             </a:fld>
             <a:endParaRPr lang="ru-RU"/>
           </a:p>
         </p:txBody>
       </p:sp>
     </p:spTree>
-    <p:extLst>
-      <p:ext uri="{BB962C8B-B14F-4D97-AF65-F5344CB8AC3E}">
-        <p14:creationId xmlns:p14="http://schemas.microsoft.com/office/powerpoint/2010/main" val="1676201409"/>
-      </p:ext>
-    </p:extLst>
   </p:cSld>
   <p:clrMapOvr>
     <a:masterClrMapping/>
@@ -7576,6 +6884,7 @@
               <a:rPr lang="ru-RU" smtClean="0"/>
               <a:t>Образец текста</a:t>
             </a:r>
+            <a:endParaRPr lang="ru-RU" smtClean="0"/>
           </a:p>
         </p:txBody>
       </p:sp>
@@ -7596,7 +6905,6 @@
           <a:p>
             <a:fld id="{77D79FE6-5460-4BB7-8806-BC3D23582E7F}" type="datetimeFigureOut">
               <a:rPr lang="ru-RU" smtClean="0"/>
-              <a:t>27.04.2026</a:t>
             </a:fld>
             <a:endParaRPr lang="ru-RU"/>
           </a:p>
@@ -7638,18 +6946,12 @@
           <a:p>
             <a:fld id="{C7697AD5-9712-43AA-B403-5EB65694064F}" type="slidenum">
               <a:rPr lang="ru-RU" smtClean="0"/>
-              <a:t>‹#›</a:t>
             </a:fld>
             <a:endParaRPr lang="ru-RU"/>
           </a:p>
         </p:txBody>
       </p:sp>
     </p:spTree>
-    <p:extLst>
-      <p:ext uri="{BB962C8B-B14F-4D97-AF65-F5344CB8AC3E}">
-        <p14:creationId xmlns:p14="http://schemas.microsoft.com/office/powerpoint/2010/main" val="1235420698"/>
-      </p:ext>
-    </p:extLst>
   </p:cSld>
   <p:clrMapOvr>
     <a:masterClrMapping/>
@@ -7722,6 +7024,7 @@
               <a:rPr lang="ru-RU" smtClean="0"/>
               <a:t>Образец текста</a:t>
             </a:r>
+            <a:endParaRPr lang="ru-RU" smtClean="0"/>
           </a:p>
           <a:p>
             <a:pPr lvl="1"/>
@@ -7729,6 +7032,7 @@
               <a:rPr lang="ru-RU" smtClean="0"/>
               <a:t>Второй уровень</a:t>
             </a:r>
+            <a:endParaRPr lang="ru-RU" smtClean="0"/>
           </a:p>
           <a:p>
             <a:pPr lvl="2"/>
@@ -7736,6 +7040,7 @@
               <a:rPr lang="ru-RU" smtClean="0"/>
               <a:t>Третий уровень</a:t>
             </a:r>
+            <a:endParaRPr lang="ru-RU" smtClean="0"/>
           </a:p>
           <a:p>
             <a:pPr lvl="3"/>
@@ -7743,6 +7048,7 @@
               <a:rPr lang="ru-RU" smtClean="0"/>
               <a:t>Четвертый уровень</a:t>
             </a:r>
+            <a:endParaRPr lang="ru-RU" smtClean="0"/>
           </a:p>
           <a:p>
             <a:pPr lvl="4"/>
@@ -7779,6 +7085,7 @@
               <a:rPr lang="ru-RU" smtClean="0"/>
               <a:t>Образец текста</a:t>
             </a:r>
+            <a:endParaRPr lang="ru-RU" smtClean="0"/>
           </a:p>
           <a:p>
             <a:pPr lvl="1"/>
@@ -7786,6 +7093,7 @@
               <a:rPr lang="ru-RU" smtClean="0"/>
               <a:t>Второй уровень</a:t>
             </a:r>
+            <a:endParaRPr lang="ru-RU" smtClean="0"/>
           </a:p>
           <a:p>
             <a:pPr lvl="2"/>
@@ -7793,6 +7101,7 @@
               <a:rPr lang="ru-RU" smtClean="0"/>
               <a:t>Третий уровень</a:t>
             </a:r>
+            <a:endParaRPr lang="ru-RU" smtClean="0"/>
           </a:p>
           <a:p>
             <a:pPr lvl="3"/>
@@ -7800,6 +7109,7 @@
               <a:rPr lang="ru-RU" smtClean="0"/>
               <a:t>Четвертый уровень</a:t>
             </a:r>
+            <a:endParaRPr lang="ru-RU" smtClean="0"/>
           </a:p>
           <a:p>
             <a:pPr lvl="4"/>
@@ -7828,7 +7138,6 @@
           <a:p>
             <a:fld id="{77D79FE6-5460-4BB7-8806-BC3D23582E7F}" type="datetimeFigureOut">
               <a:rPr lang="ru-RU" smtClean="0"/>
-              <a:t>27.04.2026</a:t>
             </a:fld>
             <a:endParaRPr lang="ru-RU"/>
           </a:p>
@@ -7870,18 +7179,12 @@
           <a:p>
             <a:fld id="{C7697AD5-9712-43AA-B403-5EB65694064F}" type="slidenum">
               <a:rPr lang="ru-RU" smtClean="0"/>
-              <a:t>‹#›</a:t>
             </a:fld>
             <a:endParaRPr lang="ru-RU"/>
           </a:p>
         </p:txBody>
       </p:sp>
     </p:spTree>
-    <p:extLst>
-      <p:ext uri="{BB962C8B-B14F-4D97-AF65-F5344CB8AC3E}">
-        <p14:creationId xmlns:p14="http://schemas.microsoft.com/office/powerpoint/2010/main" val="2008342290"/>
-      </p:ext>
-    </p:extLst>
   </p:cSld>
   <p:clrMapOvr>
     <a:masterClrMapping/>
@@ -8003,6 +7306,7 @@
               <a:rPr lang="ru-RU" smtClean="0"/>
               <a:t>Образец текста</a:t>
             </a:r>
+            <a:endParaRPr lang="ru-RU" smtClean="0"/>
           </a:p>
         </p:txBody>
       </p:sp>
@@ -8031,6 +7335,7 @@
               <a:rPr lang="ru-RU" smtClean="0"/>
               <a:t>Образец текста</a:t>
             </a:r>
+            <a:endParaRPr lang="ru-RU" smtClean="0"/>
           </a:p>
           <a:p>
             <a:pPr lvl="1"/>
@@ -8038,6 +7343,7 @@
               <a:rPr lang="ru-RU" smtClean="0"/>
               <a:t>Второй уровень</a:t>
             </a:r>
+            <a:endParaRPr lang="ru-RU" smtClean="0"/>
           </a:p>
           <a:p>
             <a:pPr lvl="2"/>
@@ -8045,6 +7351,7 @@
               <a:rPr lang="ru-RU" smtClean="0"/>
               <a:t>Третий уровень</a:t>
             </a:r>
+            <a:endParaRPr lang="ru-RU" smtClean="0"/>
           </a:p>
           <a:p>
             <a:pPr lvl="3"/>
@@ -8052,6 +7359,7 @@
               <a:rPr lang="ru-RU" smtClean="0"/>
               <a:t>Четвертый уровень</a:t>
             </a:r>
+            <a:endParaRPr lang="ru-RU" smtClean="0"/>
           </a:p>
           <a:p>
             <a:pPr lvl="4"/>
@@ -8132,6 +7440,7 @@
               <a:rPr lang="ru-RU" smtClean="0"/>
               <a:t>Образец текста</a:t>
             </a:r>
+            <a:endParaRPr lang="ru-RU" smtClean="0"/>
           </a:p>
         </p:txBody>
       </p:sp>
@@ -8160,6 +7469,7 @@
               <a:rPr lang="ru-RU" smtClean="0"/>
               <a:t>Образец текста</a:t>
             </a:r>
+            <a:endParaRPr lang="ru-RU" smtClean="0"/>
           </a:p>
           <a:p>
             <a:pPr lvl="1"/>
@@ -8167,6 +7477,7 @@
               <a:rPr lang="ru-RU" smtClean="0"/>
               <a:t>Второй уровень</a:t>
             </a:r>
+            <a:endParaRPr lang="ru-RU" smtClean="0"/>
           </a:p>
           <a:p>
             <a:pPr lvl="2"/>
@@ -8174,6 +7485,7 @@
               <a:rPr lang="ru-RU" smtClean="0"/>
               <a:t>Третий уровень</a:t>
             </a:r>
+            <a:endParaRPr lang="ru-RU" smtClean="0"/>
           </a:p>
           <a:p>
             <a:pPr lvl="3"/>
@@ -8181,6 +7493,7 @@
               <a:rPr lang="ru-RU" smtClean="0"/>
               <a:t>Четвертый уровень</a:t>
             </a:r>
+            <a:endParaRPr lang="ru-RU" smtClean="0"/>
           </a:p>
           <a:p>
             <a:pPr lvl="4"/>
@@ -8209,7 +7522,6 @@
           <a:p>
             <a:fld id="{77D79FE6-5460-4BB7-8806-BC3D23582E7F}" type="datetimeFigureOut">
               <a:rPr lang="ru-RU" smtClean="0"/>
-              <a:t>27.04.2026</a:t>
             </a:fld>
             <a:endParaRPr lang="ru-RU"/>
           </a:p>
@@ -8251,18 +7563,12 @@
           <a:p>
             <a:fld id="{C7697AD5-9712-43AA-B403-5EB65694064F}" type="slidenum">
               <a:rPr lang="ru-RU" smtClean="0"/>
-              <a:t>‹#›</a:t>
             </a:fld>
             <a:endParaRPr lang="ru-RU"/>
           </a:p>
         </p:txBody>
       </p:sp>
     </p:spTree>
-    <p:extLst>
-      <p:ext uri="{BB962C8B-B14F-4D97-AF65-F5344CB8AC3E}">
-        <p14:creationId xmlns:p14="http://schemas.microsoft.com/office/powerpoint/2010/main" val="3219167786"/>
-      </p:ext>
-    </p:extLst>
   </p:cSld>
   <p:clrMapOvr>
     <a:masterClrMapping/>
@@ -8327,7 +7633,6 @@
           <a:p>
             <a:fld id="{77D79FE6-5460-4BB7-8806-BC3D23582E7F}" type="datetimeFigureOut">
               <a:rPr lang="ru-RU" smtClean="0"/>
-              <a:t>27.04.2026</a:t>
             </a:fld>
             <a:endParaRPr lang="ru-RU"/>
           </a:p>
@@ -8369,18 +7674,12 @@
           <a:p>
             <a:fld id="{C7697AD5-9712-43AA-B403-5EB65694064F}" type="slidenum">
               <a:rPr lang="ru-RU" smtClean="0"/>
-              <a:t>‹#›</a:t>
             </a:fld>
             <a:endParaRPr lang="ru-RU"/>
           </a:p>
         </p:txBody>
       </p:sp>
     </p:spTree>
-    <p:extLst>
-      <p:ext uri="{BB962C8B-B14F-4D97-AF65-F5344CB8AC3E}">
-        <p14:creationId xmlns:p14="http://schemas.microsoft.com/office/powerpoint/2010/main" val="3509467086"/>
-      </p:ext>
-    </p:extLst>
   </p:cSld>
   <p:clrMapOvr>
     <a:masterClrMapping/>
@@ -8422,7 +7721,6 @@
           <a:p>
             <a:fld id="{77D79FE6-5460-4BB7-8806-BC3D23582E7F}" type="datetimeFigureOut">
               <a:rPr lang="ru-RU" smtClean="0"/>
-              <a:t>27.04.2026</a:t>
             </a:fld>
             <a:endParaRPr lang="ru-RU"/>
           </a:p>
@@ -8464,18 +7762,12 @@
           <a:p>
             <a:fld id="{C7697AD5-9712-43AA-B403-5EB65694064F}" type="slidenum">
               <a:rPr lang="ru-RU" smtClean="0"/>
-              <a:t>‹#›</a:t>
             </a:fld>
             <a:endParaRPr lang="ru-RU"/>
           </a:p>
         </p:txBody>
       </p:sp>
     </p:spTree>
-    <p:extLst>
-      <p:ext uri="{BB962C8B-B14F-4D97-AF65-F5344CB8AC3E}">
-        <p14:creationId xmlns:p14="http://schemas.microsoft.com/office/powerpoint/2010/main" val="3823000436"/>
-      </p:ext>
-    </p:extLst>
   </p:cSld>
   <p:clrMapOvr>
     <a:masterClrMapping/>
@@ -8557,6 +7849,7 @@
               <a:rPr lang="ru-RU" smtClean="0"/>
               <a:t>Образец текста</a:t>
             </a:r>
+            <a:endParaRPr lang="ru-RU" smtClean="0"/>
           </a:p>
           <a:p>
             <a:pPr lvl="1"/>
@@ -8564,6 +7857,7 @@
               <a:rPr lang="ru-RU" smtClean="0"/>
               <a:t>Второй уровень</a:t>
             </a:r>
+            <a:endParaRPr lang="ru-RU" smtClean="0"/>
           </a:p>
           <a:p>
             <a:pPr lvl="2"/>
@@ -8571,6 +7865,7 @@
               <a:rPr lang="ru-RU" smtClean="0"/>
               <a:t>Третий уровень</a:t>
             </a:r>
+            <a:endParaRPr lang="ru-RU" smtClean="0"/>
           </a:p>
           <a:p>
             <a:pPr lvl="3"/>
@@ -8578,6 +7873,7 @@
               <a:rPr lang="ru-RU" smtClean="0"/>
               <a:t>Четвертый уровень</a:t>
             </a:r>
+            <a:endParaRPr lang="ru-RU" smtClean="0"/>
           </a:p>
           <a:p>
             <a:pPr lvl="4"/>
@@ -8651,6 +7947,7 @@
               <a:rPr lang="ru-RU" smtClean="0"/>
               <a:t>Образец текста</a:t>
             </a:r>
+            <a:endParaRPr lang="ru-RU" smtClean="0"/>
           </a:p>
         </p:txBody>
       </p:sp>
@@ -8671,7 +7968,6 @@
           <a:p>
             <a:fld id="{77D79FE6-5460-4BB7-8806-BC3D23582E7F}" type="datetimeFigureOut">
               <a:rPr lang="ru-RU" smtClean="0"/>
-              <a:t>27.04.2026</a:t>
             </a:fld>
             <a:endParaRPr lang="ru-RU"/>
           </a:p>
@@ -8713,18 +8009,12 @@
           <a:p>
             <a:fld id="{C7697AD5-9712-43AA-B403-5EB65694064F}" type="slidenum">
               <a:rPr lang="ru-RU" smtClean="0"/>
-              <a:t>‹#›</a:t>
             </a:fld>
             <a:endParaRPr lang="ru-RU"/>
           </a:p>
         </p:txBody>
       </p:sp>
     </p:spTree>
-    <p:extLst>
-      <p:ext uri="{BB962C8B-B14F-4D97-AF65-F5344CB8AC3E}">
-        <p14:creationId xmlns:p14="http://schemas.microsoft.com/office/powerpoint/2010/main" val="1372832446"/>
-      </p:ext>
-    </p:extLst>
   </p:cSld>
   <p:clrMapOvr>
     <a:masterClrMapping/>
@@ -8931,6 +8221,7 @@
               <a:rPr lang="ru-RU" smtClean="0"/>
               <a:t>Образец текста</a:t>
             </a:r>
+            <a:endParaRPr lang="ru-RU" smtClean="0"/>
           </a:p>
         </p:txBody>
       </p:sp>
@@ -8951,7 +8242,6 @@
           <a:p>
             <a:fld id="{77D79FE6-5460-4BB7-8806-BC3D23582E7F}" type="datetimeFigureOut">
               <a:rPr lang="ru-RU" smtClean="0"/>
-              <a:t>27.04.2026</a:t>
             </a:fld>
             <a:endParaRPr lang="ru-RU"/>
           </a:p>
@@ -8993,18 +8283,12 @@
           <a:p>
             <a:fld id="{C7697AD5-9712-43AA-B403-5EB65694064F}" type="slidenum">
               <a:rPr lang="ru-RU" smtClean="0"/>
-              <a:t>‹#›</a:t>
             </a:fld>
             <a:endParaRPr lang="ru-RU"/>
           </a:p>
         </p:txBody>
       </p:sp>
     </p:spTree>
-    <p:extLst>
-      <p:ext uri="{BB962C8B-B14F-4D97-AF65-F5344CB8AC3E}">
-        <p14:creationId xmlns:p14="http://schemas.microsoft.com/office/powerpoint/2010/main" val="3853629569"/>
-      </p:ext>
-    </p:extLst>
   </p:cSld>
   <p:clrMapOvr>
     <a:masterClrMapping/>
@@ -9043,7 +8327,7 @@
           <p:nvPr/>
         </p:nvPicPr>
         <p:blipFill>
-          <a:blip r:embed="rId19">
+          <a:blip r:embed="rId18">
             <a:alphaModFix amt="30000"/>
             <a:extLst>
               <a:ext uri="{28A0092B-C50C-407E-A947-70E740481C1C}">
@@ -9065,15 +8349,6 @@
             <a:avLst/>
           </a:prstGeom>
           <a:noFill/>
-          <a:extLst>
-            <a:ext uri="{909E8E84-426E-40dd-AFC4-6F175D3DCCD1}">
-              <a14:hiddenFill xmlns:a14="http://schemas.microsoft.com/office/drawing/2010/main" xmlns="">
-                <a:solidFill>
-                  <a:srgbClr val="FFFFFF"/>
-                </a:solidFill>
-              </a14:hiddenFill>
-            </a:ext>
-          </a:extLst>
         </p:spPr>
       </p:pic>
       <p:grpSp>
@@ -9139,18 +8414,6 @@
               <a:ln>
                 <a:noFill/>
               </a:ln>
-              <a:extLst>
-                <a:ext uri="{91240B29-F687-4f45-9708-019B960494DF}">
-                  <a14:hiddenLine xmlns:a14="http://schemas.microsoft.com/office/drawing/2010/main" xmlns="" w="9525">
-                    <a:solidFill>
-                      <a:srgbClr val="000000"/>
-                    </a:solidFill>
-                    <a:miter lim="800000"/>
-                    <a:headEnd/>
-                    <a:tailEnd/>
-                  </a14:hiddenLine>
-                </a:ext>
-              </a:extLst>
             </p:spPr>
           </p:sp>
           <p:sp>
@@ -9229,18 +8492,6 @@
               <a:ln>
                 <a:noFill/>
               </a:ln>
-              <a:extLst>
-                <a:ext uri="{91240B29-F687-4f45-9708-019B960494DF}">
-                  <a14:hiddenLine xmlns:a14="http://schemas.microsoft.com/office/drawing/2010/main" xmlns="" w="9525">
-                    <a:solidFill>
-                      <a:srgbClr val="000000"/>
-                    </a:solidFill>
-                    <a:round/>
-                    <a:headEnd/>
-                    <a:tailEnd/>
-                  </a14:hiddenLine>
-                </a:ext>
-              </a:extLst>
             </p:spPr>
           </p:sp>
           <p:sp>
@@ -9319,18 +8570,6 @@
               <a:ln>
                 <a:noFill/>
               </a:ln>
-              <a:extLst>
-                <a:ext uri="{91240B29-F687-4f45-9708-019B960494DF}">
-                  <a14:hiddenLine xmlns:a14="http://schemas.microsoft.com/office/drawing/2010/main" xmlns="" w="9525">
-                    <a:solidFill>
-                      <a:srgbClr val="000000"/>
-                    </a:solidFill>
-                    <a:round/>
-                    <a:headEnd/>
-                    <a:tailEnd/>
-                  </a14:hiddenLine>
-                </a:ext>
-              </a:extLst>
             </p:spPr>
           </p:sp>
           <p:sp>
@@ -9381,18 +8620,6 @@
               <a:ln>
                 <a:noFill/>
               </a:ln>
-              <a:extLst>
-                <a:ext uri="{91240B29-F687-4f45-9708-019B960494DF}">
-                  <a14:hiddenLine xmlns:a14="http://schemas.microsoft.com/office/drawing/2010/main" xmlns="" w="9525">
-                    <a:solidFill>
-                      <a:srgbClr val="000000"/>
-                    </a:solidFill>
-                    <a:round/>
-                    <a:headEnd/>
-                    <a:tailEnd/>
-                  </a14:hiddenLine>
-                </a:ext>
-              </a:extLst>
             </p:spPr>
           </p:sp>
           <p:sp>
@@ -9471,18 +8698,6 @@
               <a:ln>
                 <a:noFill/>
               </a:ln>
-              <a:extLst>
-                <a:ext uri="{91240B29-F687-4f45-9708-019B960494DF}">
-                  <a14:hiddenLine xmlns:a14="http://schemas.microsoft.com/office/drawing/2010/main" xmlns="" w="9525">
-                    <a:solidFill>
-                      <a:srgbClr val="000000"/>
-                    </a:solidFill>
-                    <a:round/>
-                    <a:headEnd/>
-                    <a:tailEnd/>
-                  </a14:hiddenLine>
-                </a:ext>
-              </a:extLst>
             </p:spPr>
           </p:sp>
           <p:sp>
@@ -9533,18 +8748,6 @@
               <a:ln>
                 <a:noFill/>
               </a:ln>
-              <a:extLst>
-                <a:ext uri="{91240B29-F687-4f45-9708-019B960494DF}">
-                  <a14:hiddenLine xmlns:a14="http://schemas.microsoft.com/office/drawing/2010/main" xmlns="" w="9525">
-                    <a:solidFill>
-                      <a:srgbClr val="000000"/>
-                    </a:solidFill>
-                    <a:round/>
-                    <a:headEnd/>
-                    <a:tailEnd/>
-                  </a14:hiddenLine>
-                </a:ext>
-              </a:extLst>
             </p:spPr>
           </p:sp>
           <p:sp>
@@ -9595,18 +8798,6 @@
               <a:ln>
                 <a:noFill/>
               </a:ln>
-              <a:extLst>
-                <a:ext uri="{91240B29-F687-4f45-9708-019B960494DF}">
-                  <a14:hiddenLine xmlns:a14="http://schemas.microsoft.com/office/drawing/2010/main" xmlns="" w="9525">
-                    <a:solidFill>
-                      <a:srgbClr val="000000"/>
-                    </a:solidFill>
-                    <a:round/>
-                    <a:headEnd/>
-                    <a:tailEnd/>
-                  </a14:hiddenLine>
-                </a:ext>
-              </a:extLst>
             </p:spPr>
           </p:sp>
           <p:sp>
@@ -9685,18 +8876,6 @@
               <a:ln>
                 <a:noFill/>
               </a:ln>
-              <a:extLst>
-                <a:ext uri="{91240B29-F687-4f45-9708-019B960494DF}">
-                  <a14:hiddenLine xmlns:a14="http://schemas.microsoft.com/office/drawing/2010/main" xmlns="" w="9525">
-                    <a:solidFill>
-                      <a:srgbClr val="000000"/>
-                    </a:solidFill>
-                    <a:round/>
-                    <a:headEnd/>
-                    <a:tailEnd/>
-                  </a14:hiddenLine>
-                </a:ext>
-              </a:extLst>
             </p:spPr>
           </p:sp>
           <p:sp>
@@ -9775,18 +8954,6 @@
               <a:ln>
                 <a:noFill/>
               </a:ln>
-              <a:extLst>
-                <a:ext uri="{91240B29-F687-4f45-9708-019B960494DF}">
-                  <a14:hiddenLine xmlns:a14="http://schemas.microsoft.com/office/drawing/2010/main" xmlns="" w="9525">
-                    <a:solidFill>
-                      <a:srgbClr val="000000"/>
-                    </a:solidFill>
-                    <a:round/>
-                    <a:headEnd/>
-                    <a:tailEnd/>
-                  </a14:hiddenLine>
-                </a:ext>
-              </a:extLst>
             </p:spPr>
           </p:sp>
           <p:sp>
@@ -9837,18 +9004,6 @@
               <a:ln>
                 <a:noFill/>
               </a:ln>
-              <a:extLst>
-                <a:ext uri="{91240B29-F687-4f45-9708-019B960494DF}">
-                  <a14:hiddenLine xmlns:a14="http://schemas.microsoft.com/office/drawing/2010/main" xmlns="" w="9525">
-                    <a:solidFill>
-                      <a:srgbClr val="000000"/>
-                    </a:solidFill>
-                    <a:round/>
-                    <a:headEnd/>
-                    <a:tailEnd/>
-                  </a14:hiddenLine>
-                </a:ext>
-              </a:extLst>
             </p:spPr>
           </p:sp>
           <p:sp>
@@ -9947,18 +9102,6 @@
               <a:ln>
                 <a:noFill/>
               </a:ln>
-              <a:extLst>
-                <a:ext uri="{91240B29-F687-4f45-9708-019B960494DF}">
-                  <a14:hiddenLine xmlns:a14="http://schemas.microsoft.com/office/drawing/2010/main" xmlns="" w="9525">
-                    <a:solidFill>
-                      <a:srgbClr val="000000"/>
-                    </a:solidFill>
-                    <a:round/>
-                    <a:headEnd/>
-                    <a:tailEnd/>
-                  </a14:hiddenLine>
-                </a:ext>
-              </a:extLst>
             </p:spPr>
           </p:sp>
           <p:sp>
@@ -9984,8 +9127,6 @@
                 </a:solidFill>
                 <a:prstDash val="solid"/>
                 <a:miter lim="800000"/>
-                <a:headEnd/>
-                <a:tailEnd/>
               </a:ln>
             </p:spPr>
           </p:sp>
@@ -10031,18 +9172,6 @@
               <a:ln>
                 <a:noFill/>
               </a:ln>
-              <a:extLst>
-                <a:ext uri="{91240B29-F687-4f45-9708-019B960494DF}">
-                  <a14:hiddenLine xmlns:a14="http://schemas.microsoft.com/office/drawing/2010/main" xmlns="" w="9525">
-                    <a:solidFill>
-                      <a:srgbClr val="000000"/>
-                    </a:solidFill>
-                    <a:round/>
-                    <a:headEnd/>
-                    <a:tailEnd/>
-                  </a14:hiddenLine>
-                </a:ext>
-              </a:extLst>
             </p:spPr>
           </p:sp>
           <p:sp>
@@ -10093,18 +9222,6 @@
               <a:ln>
                 <a:noFill/>
               </a:ln>
-              <a:extLst>
-                <a:ext uri="{91240B29-F687-4f45-9708-019B960494DF}">
-                  <a14:hiddenLine xmlns:a14="http://schemas.microsoft.com/office/drawing/2010/main" xmlns="" w="9525">
-                    <a:solidFill>
-                      <a:srgbClr val="000000"/>
-                    </a:solidFill>
-                    <a:round/>
-                    <a:headEnd/>
-                    <a:tailEnd/>
-                  </a14:hiddenLine>
-                </a:ext>
-              </a:extLst>
             </p:spPr>
           </p:sp>
           <p:sp>
@@ -10155,18 +9272,6 @@
               <a:ln>
                 <a:noFill/>
               </a:ln>
-              <a:extLst>
-                <a:ext uri="{91240B29-F687-4f45-9708-019B960494DF}">
-                  <a14:hiddenLine xmlns:a14="http://schemas.microsoft.com/office/drawing/2010/main" xmlns="" w="9525">
-                    <a:solidFill>
-                      <a:srgbClr val="000000"/>
-                    </a:solidFill>
-                    <a:round/>
-                    <a:headEnd/>
-                    <a:tailEnd/>
-                  </a14:hiddenLine>
-                </a:ext>
-              </a:extLst>
             </p:spPr>
           </p:sp>
           <p:sp>
@@ -10245,18 +9350,6 @@
               <a:ln>
                 <a:noFill/>
               </a:ln>
-              <a:extLst>
-                <a:ext uri="{91240B29-F687-4f45-9708-019B960494DF}">
-                  <a14:hiddenLine xmlns:a14="http://schemas.microsoft.com/office/drawing/2010/main" xmlns="" w="9525">
-                    <a:solidFill>
-                      <a:srgbClr val="000000"/>
-                    </a:solidFill>
-                    <a:round/>
-                    <a:headEnd/>
-                    <a:tailEnd/>
-                  </a14:hiddenLine>
-                </a:ext>
-              </a:extLst>
             </p:spPr>
           </p:sp>
           <p:sp>
@@ -10279,18 +9372,6 @@
               <a:ln>
                 <a:noFill/>
               </a:ln>
-              <a:extLst>
-                <a:ext uri="{91240B29-F687-4f45-9708-019B960494DF}">
-                  <a14:hiddenLine xmlns:a14="http://schemas.microsoft.com/office/drawing/2010/main" xmlns="" w="9525">
-                    <a:solidFill>
-                      <a:srgbClr val="000000"/>
-                    </a:solidFill>
-                    <a:miter lim="800000"/>
-                    <a:headEnd/>
-                    <a:tailEnd/>
-                  </a14:hiddenLine>
-                </a:ext>
-              </a:extLst>
             </p:spPr>
           </p:sp>
           <p:sp>
@@ -10344,18 +9425,6 @@
               <a:ln>
                 <a:noFill/>
               </a:ln>
-              <a:extLst>
-                <a:ext uri="{91240B29-F687-4f45-9708-019B960494DF}">
-                  <a14:hiddenLine xmlns:a14="http://schemas.microsoft.com/office/drawing/2010/main" xmlns="" w="9525">
-                    <a:solidFill>
-                      <a:srgbClr val="000000"/>
-                    </a:solidFill>
-                    <a:round/>
-                    <a:headEnd/>
-                    <a:tailEnd/>
-                  </a14:hiddenLine>
-                </a:ext>
-              </a:extLst>
             </p:spPr>
           </p:sp>
           <p:sp>
@@ -10434,18 +9503,6 @@
               <a:ln>
                 <a:noFill/>
               </a:ln>
-              <a:extLst>
-                <a:ext uri="{91240B29-F687-4f45-9708-019B960494DF}">
-                  <a14:hiddenLine xmlns:a14="http://schemas.microsoft.com/office/drawing/2010/main" xmlns="" w="9525">
-                    <a:solidFill>
-                      <a:srgbClr val="000000"/>
-                    </a:solidFill>
-                    <a:round/>
-                    <a:headEnd/>
-                    <a:tailEnd/>
-                  </a14:hiddenLine>
-                </a:ext>
-              </a:extLst>
             </p:spPr>
           </p:sp>
           <p:sp>
@@ -10496,18 +9553,6 @@
               <a:ln>
                 <a:noFill/>
               </a:ln>
-              <a:extLst>
-                <a:ext uri="{91240B29-F687-4f45-9708-019B960494DF}">
-                  <a14:hiddenLine xmlns:a14="http://schemas.microsoft.com/office/drawing/2010/main" xmlns="" w="9525">
-                    <a:solidFill>
-                      <a:srgbClr val="000000"/>
-                    </a:solidFill>
-                    <a:round/>
-                    <a:headEnd/>
-                    <a:tailEnd/>
-                  </a14:hiddenLine>
-                </a:ext>
-              </a:extLst>
             </p:spPr>
           </p:sp>
           <p:sp>
@@ -10586,18 +9631,6 @@
               <a:ln>
                 <a:noFill/>
               </a:ln>
-              <a:extLst>
-                <a:ext uri="{91240B29-F687-4f45-9708-019B960494DF}">
-                  <a14:hiddenLine xmlns:a14="http://schemas.microsoft.com/office/drawing/2010/main" xmlns="" w="9525">
-                    <a:solidFill>
-                      <a:srgbClr val="000000"/>
-                    </a:solidFill>
-                    <a:round/>
-                    <a:headEnd/>
-                    <a:tailEnd/>
-                  </a14:hiddenLine>
-                </a:ext>
-              </a:extLst>
             </p:spPr>
           </p:sp>
           <p:sp>
@@ -10651,18 +9684,6 @@
               <a:ln>
                 <a:noFill/>
               </a:ln>
-              <a:extLst>
-                <a:ext uri="{91240B29-F687-4f45-9708-019B960494DF}">
-                  <a14:hiddenLine xmlns:a14="http://schemas.microsoft.com/office/drawing/2010/main" xmlns="" w="9525">
-                    <a:solidFill>
-                      <a:srgbClr val="000000"/>
-                    </a:solidFill>
-                    <a:round/>
-                    <a:headEnd/>
-                    <a:tailEnd/>
-                  </a14:hiddenLine>
-                </a:ext>
-              </a:extLst>
             </p:spPr>
           </p:sp>
           <p:sp>
@@ -10713,18 +9734,6 @@
               <a:ln>
                 <a:noFill/>
               </a:ln>
-              <a:extLst>
-                <a:ext uri="{91240B29-F687-4f45-9708-019B960494DF}">
-                  <a14:hiddenLine xmlns:a14="http://schemas.microsoft.com/office/drawing/2010/main" xmlns="" w="9525">
-                    <a:solidFill>
-                      <a:srgbClr val="000000"/>
-                    </a:solidFill>
-                    <a:round/>
-                    <a:headEnd/>
-                    <a:tailEnd/>
-                  </a14:hiddenLine>
-                </a:ext>
-              </a:extLst>
             </p:spPr>
           </p:sp>
           <p:sp>
@@ -10803,18 +9812,6 @@
               <a:ln>
                 <a:noFill/>
               </a:ln>
-              <a:extLst>
-                <a:ext uri="{91240B29-F687-4f45-9708-019B960494DF}">
-                  <a14:hiddenLine xmlns:a14="http://schemas.microsoft.com/office/drawing/2010/main" xmlns="" w="9525">
-                    <a:solidFill>
-                      <a:srgbClr val="000000"/>
-                    </a:solidFill>
-                    <a:round/>
-                    <a:headEnd/>
-                    <a:tailEnd/>
-                  </a14:hiddenLine>
-                </a:ext>
-              </a:extLst>
             </p:spPr>
           </p:sp>
           <p:sp>
@@ -10893,18 +9890,6 @@
               <a:ln>
                 <a:noFill/>
               </a:ln>
-              <a:extLst>
-                <a:ext uri="{91240B29-F687-4f45-9708-019B960494DF}">
-                  <a14:hiddenLine xmlns:a14="http://schemas.microsoft.com/office/drawing/2010/main" xmlns="" w="9525">
-                    <a:solidFill>
-                      <a:srgbClr val="000000"/>
-                    </a:solidFill>
-                    <a:round/>
-                    <a:headEnd/>
-                    <a:tailEnd/>
-                  </a14:hiddenLine>
-                </a:ext>
-              </a:extLst>
             </p:spPr>
           </p:sp>
           <p:sp>
@@ -10958,18 +9943,6 @@
               <a:ln>
                 <a:noFill/>
               </a:ln>
-              <a:extLst>
-                <a:ext uri="{91240B29-F687-4f45-9708-019B960494DF}">
-                  <a14:hiddenLine xmlns:a14="http://schemas.microsoft.com/office/drawing/2010/main" xmlns="" w="9525">
-                    <a:solidFill>
-                      <a:srgbClr val="000000"/>
-                    </a:solidFill>
-                    <a:round/>
-                    <a:headEnd/>
-                    <a:tailEnd/>
-                  </a14:hiddenLine>
-                </a:ext>
-              </a:extLst>
             </p:spPr>
           </p:sp>
           <p:sp>
@@ -11078,18 +10051,6 @@
               <a:ln>
                 <a:noFill/>
               </a:ln>
-              <a:extLst>
-                <a:ext uri="{91240B29-F687-4f45-9708-019B960494DF}">
-                  <a14:hiddenLine xmlns:a14="http://schemas.microsoft.com/office/drawing/2010/main" xmlns="" w="9525">
-                    <a:solidFill>
-                      <a:srgbClr val="000000"/>
-                    </a:solidFill>
-                    <a:round/>
-                    <a:headEnd/>
-                    <a:tailEnd/>
-                  </a14:hiddenLine>
-                </a:ext>
-              </a:extLst>
             </p:spPr>
           </p:sp>
         </p:grpSp>
@@ -11176,18 +10137,6 @@
               <a:ln>
                 <a:noFill/>
               </a:ln>
-              <a:extLst>
-                <a:ext uri="{91240B29-F687-4f45-9708-019B960494DF}">
-                  <a14:hiddenLine xmlns:a14="http://schemas.microsoft.com/office/drawing/2010/main" xmlns="" w="9525">
-                    <a:solidFill>
-                      <a:srgbClr val="000000"/>
-                    </a:solidFill>
-                    <a:round/>
-                    <a:headEnd/>
-                    <a:tailEnd/>
-                  </a14:hiddenLine>
-                </a:ext>
-              </a:extLst>
             </p:spPr>
           </p:sp>
           <p:sp>
@@ -11291,18 +10240,6 @@
               <a:ln>
                 <a:noFill/>
               </a:ln>
-              <a:extLst>
-                <a:ext uri="{91240B29-F687-4f45-9708-019B960494DF}">
-                  <a14:hiddenLine xmlns:a14="http://schemas.microsoft.com/office/drawing/2010/main" xmlns="" w="9525">
-                    <a:solidFill>
-                      <a:srgbClr val="000000"/>
-                    </a:solidFill>
-                    <a:round/>
-                    <a:headEnd/>
-                    <a:tailEnd/>
-                  </a14:hiddenLine>
-                </a:ext>
-              </a:extLst>
             </p:spPr>
           </p:sp>
           <p:sp>
@@ -11381,18 +10318,6 @@
               <a:ln>
                 <a:noFill/>
               </a:ln>
-              <a:extLst>
-                <a:ext uri="{91240B29-F687-4f45-9708-019B960494DF}">
-                  <a14:hiddenLine xmlns:a14="http://schemas.microsoft.com/office/drawing/2010/main" xmlns="" w="9525">
-                    <a:solidFill>
-                      <a:srgbClr val="000000"/>
-                    </a:solidFill>
-                    <a:round/>
-                    <a:headEnd/>
-                    <a:tailEnd/>
-                  </a14:hiddenLine>
-                </a:ext>
-              </a:extLst>
             </p:spPr>
           </p:sp>
           <p:sp>
@@ -11446,18 +10371,6 @@
               <a:ln>
                 <a:noFill/>
               </a:ln>
-              <a:extLst>
-                <a:ext uri="{91240B29-F687-4f45-9708-019B960494DF}">
-                  <a14:hiddenLine xmlns:a14="http://schemas.microsoft.com/office/drawing/2010/main" xmlns="" w="9525">
-                    <a:solidFill>
-                      <a:srgbClr val="000000"/>
-                    </a:solidFill>
-                    <a:round/>
-                    <a:headEnd/>
-                    <a:tailEnd/>
-                  </a14:hiddenLine>
-                </a:ext>
-              </a:extLst>
             </p:spPr>
           </p:sp>
           <p:sp>
@@ -11536,18 +10449,6 @@
               <a:ln>
                 <a:noFill/>
               </a:ln>
-              <a:extLst>
-                <a:ext uri="{91240B29-F687-4f45-9708-019B960494DF}">
-                  <a14:hiddenLine xmlns:a14="http://schemas.microsoft.com/office/drawing/2010/main" xmlns="" w="9525">
-                    <a:solidFill>
-                      <a:srgbClr val="000000"/>
-                    </a:solidFill>
-                    <a:round/>
-                    <a:headEnd/>
-                    <a:tailEnd/>
-                  </a14:hiddenLine>
-                </a:ext>
-              </a:extLst>
             </p:spPr>
           </p:sp>
           <p:sp>
@@ -11604,18 +10505,6 @@
               <a:ln>
                 <a:noFill/>
               </a:ln>
-              <a:extLst>
-                <a:ext uri="{91240B29-F687-4f45-9708-019B960494DF}">
-                  <a14:hiddenLine xmlns:a14="http://schemas.microsoft.com/office/drawing/2010/main" xmlns="" w="9525">
-                    <a:solidFill>
-                      <a:srgbClr val="000000"/>
-                    </a:solidFill>
-                    <a:round/>
-                    <a:headEnd/>
-                    <a:tailEnd/>
-                  </a14:hiddenLine>
-                </a:ext>
-              </a:extLst>
             </p:spPr>
           </p:sp>
           <p:sp>
@@ -11694,18 +10583,6 @@
               <a:ln>
                 <a:noFill/>
               </a:ln>
-              <a:extLst>
-                <a:ext uri="{91240B29-F687-4f45-9708-019B960494DF}">
-                  <a14:hiddenLine xmlns:a14="http://schemas.microsoft.com/office/drawing/2010/main" xmlns="" w="9525">
-                    <a:solidFill>
-                      <a:srgbClr val="000000"/>
-                    </a:solidFill>
-                    <a:round/>
-                    <a:headEnd/>
-                    <a:tailEnd/>
-                  </a14:hiddenLine>
-                </a:ext>
-              </a:extLst>
             </p:spPr>
           </p:sp>
           <p:sp>
@@ -11762,18 +10639,6 @@
               <a:ln>
                 <a:noFill/>
               </a:ln>
-              <a:extLst>
-                <a:ext uri="{91240B29-F687-4f45-9708-019B960494DF}">
-                  <a14:hiddenLine xmlns:a14="http://schemas.microsoft.com/office/drawing/2010/main" xmlns="" w="9525">
-                    <a:solidFill>
-                      <a:srgbClr val="000000"/>
-                    </a:solidFill>
-                    <a:round/>
-                    <a:headEnd/>
-                    <a:tailEnd/>
-                  </a14:hiddenLine>
-                </a:ext>
-              </a:extLst>
             </p:spPr>
           </p:sp>
           <p:sp>
@@ -11852,18 +10717,6 @@
               <a:ln>
                 <a:noFill/>
               </a:ln>
-              <a:extLst>
-                <a:ext uri="{91240B29-F687-4f45-9708-019B960494DF}">
-                  <a14:hiddenLine xmlns:a14="http://schemas.microsoft.com/office/drawing/2010/main" xmlns="" w="9525">
-                    <a:solidFill>
-                      <a:srgbClr val="000000"/>
-                    </a:solidFill>
-                    <a:round/>
-                    <a:headEnd/>
-                    <a:tailEnd/>
-                  </a14:hiddenLine>
-                </a:ext>
-              </a:extLst>
             </p:spPr>
           </p:sp>
           <p:sp>
@@ -11886,18 +10739,6 @@
               <a:ln>
                 <a:noFill/>
               </a:ln>
-              <a:extLst>
-                <a:ext uri="{91240B29-F687-4f45-9708-019B960494DF}">
-                  <a14:hiddenLine xmlns:a14="http://schemas.microsoft.com/office/drawing/2010/main" xmlns="" w="9525">
-                    <a:solidFill>
-                      <a:srgbClr val="000000"/>
-                    </a:solidFill>
-                    <a:miter lim="800000"/>
-                    <a:headEnd/>
-                    <a:tailEnd/>
-                  </a14:hiddenLine>
-                </a:ext>
-              </a:extLst>
             </p:spPr>
           </p:sp>
         </p:grpSp>
@@ -11961,6 +10802,7 @@
               <a:rPr lang="ru-RU" smtClean="0"/>
               <a:t>Образец текста</a:t>
             </a:r>
+            <a:endParaRPr lang="ru-RU" smtClean="0"/>
           </a:p>
           <a:p>
             <a:pPr lvl="1"/>
@@ -11968,6 +10810,7 @@
               <a:rPr lang="ru-RU" smtClean="0"/>
               <a:t>Второй уровень</a:t>
             </a:r>
+            <a:endParaRPr lang="ru-RU" smtClean="0"/>
           </a:p>
           <a:p>
             <a:pPr lvl="2"/>
@@ -11975,6 +10818,7 @@
               <a:rPr lang="ru-RU" smtClean="0"/>
               <a:t>Третий уровень</a:t>
             </a:r>
+            <a:endParaRPr lang="ru-RU" smtClean="0"/>
           </a:p>
           <a:p>
             <a:pPr lvl="3"/>
@@ -11982,6 +10826,7 @@
               <a:rPr lang="ru-RU" smtClean="0"/>
               <a:t>Четвертый уровень</a:t>
             </a:r>
+            <a:endParaRPr lang="ru-RU" smtClean="0"/>
           </a:p>
           <a:p>
             <a:pPr lvl="4"/>
@@ -12028,7 +10873,6 @@
           <a:p>
             <a:fld id="{77D79FE6-5460-4BB7-8806-BC3D23582E7F}" type="datetimeFigureOut">
               <a:rPr lang="ru-RU" smtClean="0"/>
-              <a:t>27.04.2026</a:t>
             </a:fld>
             <a:endParaRPr lang="ru-RU"/>
           </a:p>
@@ -12106,38 +10950,32 @@
           <a:p>
             <a:fld id="{C7697AD5-9712-43AA-B403-5EB65694064F}" type="slidenum">
               <a:rPr lang="ru-RU" smtClean="0"/>
-              <a:t>‹#›</a:t>
             </a:fld>
             <a:endParaRPr lang="ru-RU"/>
           </a:p>
         </p:txBody>
       </p:sp>
     </p:spTree>
-    <p:extLst>
-      <p:ext uri="{BB962C8B-B14F-4D97-AF65-F5344CB8AC3E}">
-        <p14:creationId xmlns:p14="http://schemas.microsoft.com/office/powerpoint/2010/main" val="4011526463"/>
-      </p:ext>
-    </p:extLst>
   </p:cSld>
   <p:clrMap bg1="dk1" tx1="lt1" bg2="dk2" tx2="lt2" accent1="accent1" accent2="accent2" accent3="accent3" accent4="accent4" accent5="accent5" accent6="accent6" hlink="hlink" folHlink="folHlink"/>
   <p:sldLayoutIdLst>
-    <p:sldLayoutId id="2147483661" r:id="rId1"/>
-    <p:sldLayoutId id="2147483662" r:id="rId2"/>
-    <p:sldLayoutId id="2147483663" r:id="rId3"/>
-    <p:sldLayoutId id="2147483664" r:id="rId4"/>
-    <p:sldLayoutId id="2147483665" r:id="rId5"/>
-    <p:sldLayoutId id="2147483666" r:id="rId6"/>
-    <p:sldLayoutId id="2147483667" r:id="rId7"/>
-    <p:sldLayoutId id="2147483668" r:id="rId8"/>
-    <p:sldLayoutId id="2147483669" r:id="rId9"/>
-    <p:sldLayoutId id="2147483670" r:id="rId10"/>
-    <p:sldLayoutId id="2147483671" r:id="rId11"/>
-    <p:sldLayoutId id="2147483672" r:id="rId12"/>
-    <p:sldLayoutId id="2147483673" r:id="rId13"/>
-    <p:sldLayoutId id="2147483674" r:id="rId14"/>
-    <p:sldLayoutId id="2147483675" r:id="rId15"/>
-    <p:sldLayoutId id="2147483676" r:id="rId16"/>
-    <p:sldLayoutId id="2147483677" r:id="rId17"/>
+    <p:sldLayoutId id="2147483649" r:id="rId1"/>
+    <p:sldLayoutId id="2147483650" r:id="rId2"/>
+    <p:sldLayoutId id="2147483651" r:id="rId3"/>
+    <p:sldLayoutId id="2147483652" r:id="rId4"/>
+    <p:sldLayoutId id="2147483653" r:id="rId5"/>
+    <p:sldLayoutId id="2147483654" r:id="rId6"/>
+    <p:sldLayoutId id="2147483655" r:id="rId7"/>
+    <p:sldLayoutId id="2147483656" r:id="rId8"/>
+    <p:sldLayoutId id="2147483657" r:id="rId9"/>
+    <p:sldLayoutId id="2147483658" r:id="rId10"/>
+    <p:sldLayoutId id="2147483659" r:id="rId11"/>
+    <p:sldLayoutId id="2147483660" r:id="rId12"/>
+    <p:sldLayoutId id="2147483661" r:id="rId13"/>
+    <p:sldLayoutId id="2147483662" r:id="rId14"/>
+    <p:sldLayoutId id="2147483663" r:id="rId15"/>
+    <p:sldLayoutId id="2147483664" r:id="rId16"/>
+    <p:sldLayoutId id="2147483665" r:id="rId17"/>
   </p:sldLayoutIdLst>
   <p:txStyles>
     <p:titleStyle>
@@ -12492,12 +11330,12 @@
               <a:t>Учебный проект на </a:t>
             </a:r>
             <a:r>
-              <a:rPr lang="en-US" dirty="0" smtClean="0"/>
+              <a:rPr lang="en-US" sz="2200" dirty="0" smtClean="0"/>
               <a:t>Python</a:t>
             </a:r>
             <a:r>
               <a:rPr lang="ru-RU" dirty="0" smtClean="0"/>
-              <a:t>, сделанный Александром Власовым из ип-61. ПРОГРАММА получает курсы валют из центрального банка российской федерации.</a:t>
+              <a:t>. ПРОГРАММА получает курсы валют из центрального банка российской федерации.</a:t>
             </a:r>
             <a:endParaRPr lang="ru-RU" dirty="0"/>
           </a:p>
@@ -12512,7 +11350,7 @@
           <p:nvPr/>
         </p:nvPicPr>
         <p:blipFill>
-          <a:blip r:embed="rId2">
+          <a:blip r:embed="rId1">
             <a:extLst>
               <a:ext uri="{28A0092B-C50C-407E-A947-70E740481C1C}">
                 <a14:useLocalDpi xmlns:a14="http://schemas.microsoft.com/office/drawing/2010/main" val="0"/>
@@ -12542,7 +11380,7 @@
           <p:nvPr/>
         </p:nvPicPr>
         <p:blipFill>
-          <a:blip r:embed="rId3" cstate="print">
+          <a:blip r:embed="rId2" cstate="print">
             <a:extLst>
               <a:ext uri="{28A0092B-C50C-407E-A947-70E740481C1C}">
                 <a14:useLocalDpi xmlns:a14="http://schemas.microsoft.com/office/drawing/2010/main" val="0"/>
@@ -12563,19 +11401,108 @@
           </a:prstGeom>
         </p:spPr>
       </p:pic>
+      <p:sp>
+        <p:nvSpPr>
+          <p:cNvPr id="4" name="Текстовое поле 3"/>
+          <p:cNvSpPr txBox="1"/>
+          <p:nvPr/>
+        </p:nvSpPr>
+        <p:spPr>
+          <a:xfrm>
+            <a:off x="8253730" y="6144895"/>
+            <a:ext cx="3938270" cy="713105"/>
+          </a:xfrm>
+          <a:prstGeom prst="rect">
+            <a:avLst/>
+          </a:prstGeom>
+          <a:noFill/>
+        </p:spPr>
+        <p:txBody>
+          <a:bodyPr wrap="square" rtlCol="0" anchor="t">
+            <a:noAutofit/>
+          </a:bodyPr>
+          <a:p>
+            <a:pPr algn="r"/>
+            <a:r>
+              <a:rPr lang="en-US" altLang="ru-RU" dirty="0" smtClean="0">
+                <a:solidFill>
+                  <a:srgbClr val="73F3FA"/>
+                </a:solidFill>
+                <a:sym typeface="+mn-ea"/>
+              </a:rPr>
+              <a:t>C</a:t>
+            </a:r>
+            <a:r>
+              <a:rPr lang="ru-RU" dirty="0" smtClean="0">
+                <a:solidFill>
+                  <a:srgbClr val="73F3FA"/>
+                </a:solidFill>
+                <a:sym typeface="+mn-ea"/>
+              </a:rPr>
+              <a:t>делан Александром Власовым </a:t>
+            </a:r>
+            <a:endParaRPr lang="ru-RU" dirty="0" smtClean="0">
+              <a:solidFill>
+                <a:srgbClr val="73F3FA"/>
+              </a:solidFill>
+              <a:sym typeface="+mn-ea"/>
+            </a:endParaRPr>
+          </a:p>
+          <a:p>
+            <a:pPr algn="r"/>
+            <a:r>
+              <a:rPr lang="ru-RU" dirty="0" smtClean="0">
+                <a:solidFill>
+                  <a:srgbClr val="73F3FA"/>
+                </a:solidFill>
+                <a:sym typeface="+mn-ea"/>
+              </a:rPr>
+              <a:t>ЦТ «Кемерово»</a:t>
+            </a:r>
+            <a:r>
+              <a:rPr lang="en-US" dirty="0" smtClean="0">
+                <a:solidFill>
+                  <a:srgbClr val="73F3FA"/>
+                </a:solidFill>
+                <a:sym typeface="+mn-ea"/>
+              </a:rPr>
+              <a:t>, </a:t>
+            </a:r>
+            <a:r>
+              <a:rPr lang="ru-RU" dirty="0" smtClean="0">
+                <a:solidFill>
+                  <a:srgbClr val="73F3FA"/>
+                </a:solidFill>
+                <a:sym typeface="+mn-ea"/>
+              </a:rPr>
+              <a:t>ИП-61</a:t>
+            </a:r>
+            <a:endParaRPr lang="ru-RU" altLang="en-US" dirty="0" smtClean="0">
+              <a:solidFill>
+                <a:srgbClr val="73F3FA"/>
+              </a:solidFill>
+              <a:sym typeface="+mn-ea"/>
+            </a:endParaRPr>
+          </a:p>
+        </p:txBody>
+      </p:sp>
     </p:spTree>
-    <p:extLst>
-      <p:ext uri="{BB962C8B-B14F-4D97-AF65-F5344CB8AC3E}">
-        <p14:creationId xmlns:p14="http://schemas.microsoft.com/office/powerpoint/2010/main" val="1058549562"/>
-      </p:ext>
-    </p:extLst>
   </p:cSld>
   <p:clrMapOvr>
     <a:masterClrMapping/>
   </p:clrMapOvr>
-  <p:transition spd="slow">
-    <p:cover/>
-  </p:transition>
+  <mc:AlternateContent xmlns:mc="http://schemas.openxmlformats.org/markup-compatibility/2006">
+    <mc:Choice xmlns:p14="http://schemas.microsoft.com/office/powerpoint/2010/main" Requires="p14">
+      <p:transition spd="slow" p14:dur="1000">
+        <p:wipe/>
+      </p:transition>
+    </mc:Choice>
+    <mc:Fallback>
+      <p:transition spd="slow">
+        <p:wipe/>
+      </p:transition>
+    </mc:Fallback>
+  </mc:AlternateContent>
   <p:timing>
     <p:tnLst>
       <p:par>
@@ -12587,213 +11514,6 @@
 </file>
 
 <file path=ppt/slides/slide10.xml><?xml version="1.0" encoding="utf-8"?>
-<p:sld xmlns:a="http://schemas.openxmlformats.org/drawingml/2006/main" xmlns:r="http://schemas.openxmlformats.org/officeDocument/2006/relationships" xmlns:p="http://schemas.openxmlformats.org/presentationml/2006/main">
-  <p:cSld>
-    <p:spTree>
-      <p:nvGrpSpPr>
-        <p:cNvPr id="1" name=""/>
-        <p:cNvGrpSpPr/>
-        <p:nvPr/>
-      </p:nvGrpSpPr>
-      <p:grpSpPr>
-        <a:xfrm>
-          <a:off x="0" y="0"/>
-          <a:ext cx="0" cy="0"/>
-          <a:chOff x="0" y="0"/>
-          <a:chExt cx="0" cy="0"/>
-        </a:xfrm>
-      </p:grpSpPr>
-      <p:sp>
-        <p:nvSpPr>
-          <p:cNvPr id="2" name="Заголовок 1"/>
-          <p:cNvSpPr>
-            <a:spLocks noGrp="1"/>
-          </p:cNvSpPr>
-          <p:nvPr>
-            <p:ph type="title"/>
-          </p:nvPr>
-        </p:nvSpPr>
-        <p:spPr/>
-        <p:txBody>
-          <a:bodyPr/>
-          <a:lstStyle/>
-          <a:p>
-            <a:r>
-              <a:rPr lang="ru-RU" dirty="0"/>
-              <a:t>Итоги и </a:t>
-            </a:r>
-            <a:r>
-              <a:rPr lang="ru-RU" dirty="0" smtClean="0"/>
-              <a:t>возможные перспективы?</a:t>
-            </a:r>
-            <a:endParaRPr lang="ru-RU" dirty="0"/>
-          </a:p>
-        </p:txBody>
-      </p:sp>
-      <p:sp>
-        <p:nvSpPr>
-          <p:cNvPr id="3" name="Объект 2"/>
-          <p:cNvSpPr>
-            <a:spLocks noGrp="1"/>
-          </p:cNvSpPr>
-          <p:nvPr>
-            <p:ph sz="half" idx="1"/>
-          </p:nvPr>
-        </p:nvSpPr>
-        <p:spPr/>
-        <p:txBody>
-          <a:bodyPr>
-            <a:normAutofit fontScale="92500"/>
-          </a:bodyPr>
-          <a:lstStyle/>
-          <a:p>
-            <a:pPr marL="0" indent="0">
-              <a:buNone/>
-            </a:pPr>
-            <a:r>
-              <a:rPr lang="ru-RU" b="1" dirty="0"/>
-              <a:t>Что сделано:</a:t>
-            </a:r>
-            <a:endParaRPr lang="ru-RU" dirty="0"/>
-          </a:p>
-          <a:p>
-            <a:r>
-              <a:rPr lang="ru-RU" dirty="0"/>
-              <a:t>создан конвертер валют с актуальными курсами ЦБ РФ;</a:t>
-            </a:r>
-          </a:p>
-          <a:p>
-            <a:r>
-              <a:rPr lang="ru-RU" dirty="0"/>
-              <a:t>реализован консольный интерфейс;</a:t>
-            </a:r>
-          </a:p>
-          <a:p>
-            <a:r>
-              <a:rPr lang="ru-RU" dirty="0"/>
-              <a:t>обеспечена устойчивость к </a:t>
-            </a:r>
-            <a:r>
-              <a:rPr lang="ru-RU" dirty="0" smtClean="0"/>
-              <a:t>ошибкам</a:t>
-            </a:r>
-            <a:endParaRPr lang="ru-RU" dirty="0"/>
-          </a:p>
-          <a:p>
-            <a:pPr marL="0" indent="0">
-              <a:buNone/>
-            </a:pPr>
-            <a:endParaRPr lang="ru-RU" dirty="0"/>
-          </a:p>
-        </p:txBody>
-      </p:sp>
-      <p:sp>
-        <p:nvSpPr>
-          <p:cNvPr id="4" name="Объект 3"/>
-          <p:cNvSpPr>
-            <a:spLocks noGrp="1"/>
-          </p:cNvSpPr>
-          <p:nvPr>
-            <p:ph sz="half" idx="2"/>
-          </p:nvPr>
-        </p:nvSpPr>
-        <p:spPr/>
-        <p:txBody>
-          <a:bodyPr>
-            <a:normAutofit fontScale="92500"/>
-          </a:bodyPr>
-          <a:lstStyle/>
-          <a:p>
-            <a:pPr marL="0" indent="0">
-              <a:buNone/>
-            </a:pPr>
-            <a:r>
-              <a:rPr lang="ru-RU" b="1" dirty="0" smtClean="0"/>
-              <a:t>Возможные</a:t>
-            </a:r>
-            <a:r>
-              <a:rPr lang="ru-RU" b="1" dirty="0"/>
-              <a:t> расширения:</a:t>
-            </a:r>
-            <a:endParaRPr lang="ru-RU" dirty="0"/>
-          </a:p>
-          <a:p>
-            <a:pPr>
-              <a:buFont typeface="Tw Cen MT" panose="020B0602020104020603" pitchFamily="34" charset="0"/>
-              <a:buChar char="+"/>
-            </a:pPr>
-            <a:r>
-              <a:rPr lang="ru-RU" dirty="0"/>
-              <a:t>добавление других валют;</a:t>
-            </a:r>
-          </a:p>
-          <a:p>
-            <a:pPr>
-              <a:buFont typeface="Tw Cen MT" panose="020B0602020104020603" pitchFamily="34" charset="0"/>
-              <a:buChar char="+"/>
-            </a:pPr>
-            <a:r>
-              <a:rPr lang="ru-RU" dirty="0"/>
-              <a:t>сохранение истории курсов;</a:t>
-            </a:r>
-          </a:p>
-          <a:p>
-            <a:pPr>
-              <a:buFont typeface="Tw Cen MT" panose="020B0602020104020603" pitchFamily="34" charset="0"/>
-              <a:buChar char="+"/>
-            </a:pPr>
-            <a:r>
-              <a:rPr lang="ru-RU" dirty="0"/>
-              <a:t>графический интерфейс (GUI);</a:t>
-            </a:r>
-          </a:p>
-          <a:p>
-            <a:pPr>
-              <a:buFont typeface="Tw Cen MT" panose="020B0602020104020603" pitchFamily="34" charset="0"/>
-              <a:buChar char="+"/>
-            </a:pPr>
-            <a:r>
-              <a:rPr lang="ru-RU" dirty="0" smtClean="0"/>
-              <a:t>веб‑версия;</a:t>
-            </a:r>
-            <a:endParaRPr lang="ru-RU" dirty="0"/>
-          </a:p>
-          <a:p>
-            <a:pPr>
-              <a:buFont typeface="Tw Cen MT" panose="020B0602020104020603" pitchFamily="34" charset="0"/>
-              <a:buChar char="+"/>
-            </a:pPr>
-            <a:r>
-              <a:rPr lang="ru-RU" dirty="0"/>
-              <a:t>уведомления об изменении курса.</a:t>
-            </a:r>
-          </a:p>
-          <a:p>
-            <a:endParaRPr lang="ru-RU" dirty="0"/>
-          </a:p>
-        </p:txBody>
-      </p:sp>
-    </p:spTree>
-    <p:extLst>
-      <p:ext uri="{BB962C8B-B14F-4D97-AF65-F5344CB8AC3E}">
-        <p14:creationId xmlns:p14="http://schemas.microsoft.com/office/powerpoint/2010/main" val="983863493"/>
-      </p:ext>
-    </p:extLst>
-  </p:cSld>
-  <p:clrMapOvr>
-    <a:masterClrMapping/>
-  </p:clrMapOvr>
-  <p:timing>
-    <p:tnLst>
-      <p:par>
-        <p:cTn id="1" dur="indefinite" restart="never" nodeType="tmRoot"/>
-      </p:par>
-    </p:tnLst>
-  </p:timing>
-</p:sld>
-</file>
-
-<file path=ppt/slides/slide11.xml><?xml version="1.0" encoding="utf-8"?>
 <p:sld xmlns:a="http://schemas.openxmlformats.org/drawingml/2006/main" xmlns:r="http://schemas.openxmlformats.org/officeDocument/2006/relationships" xmlns:p="http://schemas.openxmlformats.org/presentationml/2006/main">
   <p:cSld>
     <p:spTree>
@@ -12864,6 +11584,7 @@
               <a:rPr lang="ru-RU" b="1" dirty="0" smtClean="0"/>
               <a:t>: Власов Александр Олегович</a:t>
             </a:r>
+            <a:endParaRPr lang="ru-RU" b="1" dirty="0" smtClean="0"/>
           </a:p>
           <a:p>
             <a:pPr marL="0" indent="0">
@@ -12876,6 +11597,15 @@
             <a:r>
               <a:rPr lang="ru-RU" b="1" dirty="0" smtClean="0"/>
               <a:t>: </a:t>
+            </a:r>
+            <a:endParaRPr lang="en-US" b="1" dirty="0" smtClean="0"/>
+          </a:p>
+          <a:p>
+            <a:r>
+              <a:rPr lang="en-US" b="1" dirty="0" smtClean="0">
+                <a:hlinkClick r:id="rId1"/>
+              </a:rPr>
+              <a:t>hooligan.rut@gmail.com</a:t>
             </a:r>
             <a:endParaRPr lang="en-US" b="1" dirty="0" smtClean="0"/>
           </a:p>
@@ -12884,24 +11614,15 @@
               <a:rPr lang="en-US" b="1" dirty="0" smtClean="0">
                 <a:hlinkClick r:id="rId2"/>
               </a:rPr>
-              <a:t>hooligan.rut@gmail.com</a:t>
-            </a:r>
-            <a:endParaRPr lang="en-US" b="1" dirty="0" smtClean="0"/>
-          </a:p>
-          <a:p>
-            <a:r>
-              <a:rPr lang="en-US" b="1" dirty="0" smtClean="0">
+              <a:t>vlasovalexanderr@gmail.com</a:t>
+            </a:r>
+            <a:endParaRPr lang="en-US" dirty="0" smtClean="0"/>
+          </a:p>
+          <a:p>
+            <a:r>
+              <a:rPr lang="en-US" b="1" dirty="0">
                 <a:hlinkClick r:id="rId3"/>
               </a:rPr>
-              <a:t>vlasovalexanderr@gmail.com</a:t>
-            </a:r>
-            <a:endParaRPr lang="en-US" dirty="0" smtClean="0"/>
-          </a:p>
-          <a:p>
-            <a:r>
-              <a:rPr lang="en-US" b="1" dirty="0">
-                <a:hlinkClick r:id="rId4"/>
-              </a:rPr>
               <a:t>vlasovalexanderr@yandex.ru</a:t>
             </a:r>
             <a:endParaRPr lang="en-US" b="1" dirty="0"/>
@@ -12928,7 +11649,7 @@
             </a:r>
             <a:r>
               <a:rPr lang="en-US" dirty="0" smtClean="0">
-                <a:hlinkClick r:id="rId5"/>
+                <a:hlinkClick r:id="rId4"/>
               </a:rPr>
               <a:t>https://github.com/BlackPaganYT/Currency_Rates</a:t>
             </a:r>
@@ -12959,7 +11680,7 @@
           <p:nvPr/>
         </p:nvPicPr>
         <p:blipFill>
-          <a:blip r:embed="rId6" cstate="print">
+          <a:blip r:embed="rId5" cstate="print">
             <a:extLst>
               <a:ext uri="{28A0092B-C50C-407E-A947-70E740481C1C}">
                 <a14:useLocalDpi xmlns:a14="http://schemas.microsoft.com/office/drawing/2010/main" val="0"/>
@@ -12989,7 +11710,7 @@
           <p:nvPr/>
         </p:nvPicPr>
         <p:blipFill>
-          <a:blip r:embed="rId7" cstate="print">
+          <a:blip r:embed="rId6" cstate="print">
             <a:extLst>
               <a:ext uri="{28A0092B-C50C-407E-A947-70E740481C1C}">
                 <a14:useLocalDpi xmlns:a14="http://schemas.microsoft.com/office/drawing/2010/main" val="0"/>
@@ -13019,7 +11740,7 @@
           <p:nvPr/>
         </p:nvPicPr>
         <p:blipFill>
-          <a:blip r:embed="rId8" cstate="print">
+          <a:blip r:embed="rId7" cstate="print">
             <a:extLst>
               <a:ext uri="{28A0092B-C50C-407E-A947-70E740481C1C}">
                 <a14:useLocalDpi xmlns:a14="http://schemas.microsoft.com/office/drawing/2010/main" val="0"/>
@@ -13049,7 +11770,7 @@
           <p:nvPr/>
         </p:nvPicPr>
         <p:blipFill>
-          <a:blip r:embed="rId9" cstate="print">
+          <a:blip r:embed="rId8" cstate="print">
             <a:extLst>
               <a:ext uri="{28A0092B-C50C-407E-A947-70E740481C1C}">
                 <a14:useLocalDpi xmlns:a14="http://schemas.microsoft.com/office/drawing/2010/main" val="0"/>
@@ -13071,15 +11792,22 @@
         </p:spPr>
       </p:pic>
     </p:spTree>
-    <p:extLst>
-      <p:ext uri="{BB962C8B-B14F-4D97-AF65-F5344CB8AC3E}">
-        <p14:creationId xmlns:p14="http://schemas.microsoft.com/office/powerpoint/2010/main" val="2660605506"/>
-      </p:ext>
-    </p:extLst>
   </p:cSld>
   <p:clrMapOvr>
     <a:masterClrMapping/>
   </p:clrMapOvr>
+  <mc:AlternateContent xmlns:mc="http://schemas.openxmlformats.org/markup-compatibility/2006">
+    <mc:Choice xmlns:p14="http://schemas.microsoft.com/office/powerpoint/2010/main" Requires="p14">
+      <p:transition spd="slow" p14:dur="1000">
+        <p:wipe/>
+      </p:transition>
+    </mc:Choice>
+    <mc:Fallback>
+      <p:transition spd="slow">
+        <p:wipe/>
+      </p:transition>
+    </mc:Fallback>
+  </mc:AlternateContent>
   <p:timing>
     <p:tnLst>
       <p:par>
@@ -13090,7 +11818,7 @@
 </p:sld>
 </file>
 
-<file path=ppt/slides/slide12.xml><?xml version="1.0" encoding="utf-8"?>
+<file path=ppt/slides/slide11.xml><?xml version="1.0" encoding="utf-8"?>
 <p:sld xmlns:a="http://schemas.openxmlformats.org/drawingml/2006/main" xmlns:r="http://schemas.openxmlformats.org/officeDocument/2006/relationships" xmlns:p="http://schemas.openxmlformats.org/presentationml/2006/main">
   <p:cSld>
     <p:spTree>
@@ -13169,6 +11897,7 @@
               <a:rPr lang="ru-RU" dirty="0"/>
               <a:t>Введите, что вы хотите сделать (1 — Узнать курс на сегодня; 2 — Конвертер валют в рубли): 1</a:t>
             </a:r>
+            <a:endParaRPr lang="ru-RU" dirty="0"/>
           </a:p>
           <a:p>
             <a:pPr marL="0" indent="0">
@@ -13178,6 +11907,7 @@
               <a:rPr lang="ru-RU" dirty="0"/>
               <a:t>Курсы валют на 06.04.2026:</a:t>
             </a:r>
+            <a:endParaRPr lang="ru-RU" dirty="0"/>
           </a:p>
           <a:p>
             <a:pPr marL="0" indent="0">
@@ -13187,6 +11917,7 @@
               <a:rPr lang="ru-RU" dirty="0"/>
               <a:t>Доллар США (USD): 92.50 руб.</a:t>
             </a:r>
+            <a:endParaRPr lang="ru-RU" dirty="0"/>
           </a:p>
           <a:p>
             <a:pPr marL="0" indent="0">
@@ -13196,6 +11927,7 @@
               <a:rPr lang="ru-RU" dirty="0"/>
               <a:t>Евро (EUR): 99.80 руб.</a:t>
             </a:r>
+            <a:endParaRPr lang="ru-RU" dirty="0"/>
           </a:p>
           <a:p>
             <a:pPr marL="0" indent="0">
@@ -13205,6 +11937,7 @@
               <a:rPr lang="ru-RU" dirty="0"/>
               <a:t>Китайский юань (CNY): 12.75 руб.</a:t>
             </a:r>
+            <a:endParaRPr lang="ru-RU" dirty="0"/>
           </a:p>
           <a:p>
             <a:pPr marL="0" indent="0">
@@ -13214,6 +11947,7 @@
               <a:rPr lang="ru-RU" dirty="0"/>
               <a:t>Фунт стерлингов (GBP): 115.20 руб.</a:t>
             </a:r>
+            <a:endParaRPr lang="ru-RU" dirty="0"/>
           </a:p>
           <a:p>
             <a:pPr marL="0" indent="0">
@@ -13233,16 +11967,16 @@
           </p:cNvPicPr>
           <p:nvPr>
             <p:ph sz="half" idx="2"/>
-            <a:videoFile r:link="rId2"/>
+            <a:videoFile r:link="rId1"/>
             <p:extLst>
               <p:ext uri="{DAA4B4D4-6D71-4841-9C94-3DE7FCFB9230}">
-                <p14:media xmlns:p14="http://schemas.microsoft.com/office/powerpoint/2010/main" r:embed="rId1"/>
+                <p14:media xmlns:p14="http://schemas.microsoft.com/office/powerpoint/2010/main" r:embed="rId2"/>
               </p:ext>
             </p:extLst>
           </p:nvPr>
         </p:nvPicPr>
         <p:blipFill>
-          <a:blip r:embed="rId4"/>
+          <a:blip r:embed="rId3"/>
           <a:stretch>
             <a:fillRect/>
           </a:stretch>
@@ -13289,15 +12023,22 @@
         </p:txBody>
       </p:sp>
     </p:spTree>
-    <p:extLst>
-      <p:ext uri="{BB962C8B-B14F-4D97-AF65-F5344CB8AC3E}">
-        <p14:creationId xmlns:p14="http://schemas.microsoft.com/office/powerpoint/2010/main" val="3152510282"/>
-      </p:ext>
-    </p:extLst>
   </p:cSld>
   <p:clrMapOvr>
     <a:masterClrMapping/>
   </p:clrMapOvr>
+  <mc:AlternateContent xmlns:mc="http://schemas.openxmlformats.org/markup-compatibility/2006">
+    <mc:Choice xmlns:p14="http://schemas.microsoft.com/office/powerpoint/2010/main" Requires="p14">
+      <p:transition spd="slow" p14:dur="1000">
+        <p:wipe/>
+      </p:transition>
+    </mc:Choice>
+    <mc:Fallback>
+      <p:transition spd="slow">
+        <p:wipe/>
+      </p:transition>
+    </mc:Fallback>
+  </mc:AlternateContent>
   <p:timing>
     <p:tnLst>
       <p:par>
@@ -13381,7 +12122,7 @@
 </p:sld>
 </file>
 
-<file path=ppt/slides/slide13.xml><?xml version="1.0" encoding="utf-8"?>
+<file path=ppt/slides/slide12.xml><?xml version="1.0" encoding="utf-8"?>
 <p:sld xmlns:a="http://schemas.openxmlformats.org/drawingml/2006/main" xmlns:r="http://schemas.openxmlformats.org/officeDocument/2006/relationships" xmlns:p="http://schemas.openxmlformats.org/presentationml/2006/main">
   <p:cSld>
     <p:spTree>
@@ -13429,10 +12170,6 @@
               <a:rPr lang="ru-RU" sz="9600" dirty="0"/>
               <a:t>?</a:t>
             </a:r>
-            <a:r>
-              <a:rPr lang="ru-RU" sz="9600" dirty="0" smtClean="0"/>
-              <a:t/>
-            </a:r>
             <a:br>
               <a:rPr lang="ru-RU" sz="9600" dirty="0" smtClean="0"/>
             </a:br>
@@ -13441,15 +12178,22 @@
         </p:txBody>
       </p:sp>
     </p:spTree>
-    <p:extLst>
-      <p:ext uri="{BB962C8B-B14F-4D97-AF65-F5344CB8AC3E}">
-        <p14:creationId xmlns:p14="http://schemas.microsoft.com/office/powerpoint/2010/main" val="1070214577"/>
-      </p:ext>
-    </p:extLst>
   </p:cSld>
   <p:clrMapOvr>
     <a:masterClrMapping/>
   </p:clrMapOvr>
+  <mc:AlternateContent xmlns:mc="http://schemas.openxmlformats.org/markup-compatibility/2006">
+    <mc:Choice xmlns:p14="http://schemas.microsoft.com/office/powerpoint/2010/main" Requires="p14">
+      <p:transition spd="slow" p14:dur="1000">
+        <p:wipe/>
+      </p:transition>
+    </mc:Choice>
+    <mc:Fallback>
+      <p:transition spd="slow">
+        <p:wipe/>
+      </p:transition>
+    </mc:Fallback>
+  </mc:AlternateContent>
   <p:timing>
     <p:tnLst>
       <p:par>
@@ -13501,6 +12245,7 @@
               <a:rPr lang="ru-RU" dirty="0"/>
               <a:t>?</a:t>
             </a:r>
+            <a:endParaRPr lang="ru-RU" dirty="0"/>
           </a:p>
         </p:txBody>
       </p:sp>
@@ -13533,24 +12278,28 @@
               <a:rPr lang="ru-RU" dirty="0"/>
               <a:t>получать актуальные курсы валют от ЦБ РФ (USD, EUR, CNY, GBP);</a:t>
             </a:r>
+            <a:endParaRPr lang="ru-RU" dirty="0"/>
           </a:p>
           <a:p>
             <a:r>
               <a:rPr lang="ru-RU" dirty="0"/>
               <a:t>отображать курсы на текущую дату;</a:t>
             </a:r>
+            <a:endParaRPr lang="ru-RU" dirty="0"/>
           </a:p>
           <a:p>
             <a:r>
               <a:rPr lang="ru-RU" dirty="0"/>
               <a:t>конвертировать заданную сумму в рублях в выбранные валюты;</a:t>
             </a:r>
+            <a:endParaRPr lang="ru-RU" dirty="0"/>
           </a:p>
           <a:p>
             <a:r>
               <a:rPr lang="ru-RU" dirty="0"/>
               <a:t>иметь простой консольный интерфейс для пользователя.</a:t>
             </a:r>
+            <a:endParaRPr lang="ru-RU" dirty="0"/>
           </a:p>
           <a:p>
             <a:pPr marL="0" indent="0">
@@ -13569,7 +12318,7 @@
           <p:nvPr/>
         </p:nvPicPr>
         <p:blipFill>
-          <a:blip r:embed="rId2" cstate="print">
+          <a:blip r:embed="rId1" cstate="print">
             <a:extLst>
               <a:ext uri="{28A0092B-C50C-407E-A947-70E740481C1C}">
                 <a14:useLocalDpi xmlns:a14="http://schemas.microsoft.com/office/drawing/2010/main" val="0"/>
@@ -13599,7 +12348,7 @@
           <p:nvPr/>
         </p:nvPicPr>
         <p:blipFill>
-          <a:blip r:embed="rId3" cstate="print">
+          <a:blip r:embed="rId2" cstate="print">
             <a:extLst>
               <a:ext uri="{28A0092B-C50C-407E-A947-70E740481C1C}">
                 <a14:useLocalDpi xmlns:a14="http://schemas.microsoft.com/office/drawing/2010/main" val="0"/>
@@ -13629,7 +12378,7 @@
           <p:nvPr/>
         </p:nvPicPr>
         <p:blipFill>
-          <a:blip r:embed="rId4" cstate="print">
+          <a:blip r:embed="rId3" cstate="print">
             <a:extLst>
               <a:ext uri="{28A0092B-C50C-407E-A947-70E740481C1C}">
                 <a14:useLocalDpi xmlns:a14="http://schemas.microsoft.com/office/drawing/2010/main" val="0"/>
@@ -13659,7 +12408,7 @@
           <p:nvPr/>
         </p:nvPicPr>
         <p:blipFill>
-          <a:blip r:embed="rId5" cstate="print">
+          <a:blip r:embed="rId4" cstate="print">
             <a:extLst>
               <a:ext uri="{28A0092B-C50C-407E-A947-70E740481C1C}">
                 <a14:useLocalDpi xmlns:a14="http://schemas.microsoft.com/office/drawing/2010/main" val="0"/>
@@ -13681,15 +12430,22 @@
         </p:spPr>
       </p:pic>
     </p:spTree>
-    <p:extLst>
-      <p:ext uri="{BB962C8B-B14F-4D97-AF65-F5344CB8AC3E}">
-        <p14:creationId xmlns:p14="http://schemas.microsoft.com/office/powerpoint/2010/main" val="1868772569"/>
-      </p:ext>
-    </p:extLst>
   </p:cSld>
   <p:clrMapOvr>
     <a:masterClrMapping/>
   </p:clrMapOvr>
+  <mc:AlternateContent xmlns:mc="http://schemas.openxmlformats.org/markup-compatibility/2006">
+    <mc:Choice xmlns:p14="http://schemas.microsoft.com/office/powerpoint/2010/main" Requires="p14">
+      <p:transition spd="slow" p14:dur="1000">
+        <p:wipe/>
+      </p:transition>
+    </mc:Choice>
+    <mc:Fallback>
+      <p:transition spd="slow">
+        <p:wipe/>
+      </p:transition>
+    </mc:Fallback>
+  </mc:AlternateContent>
   <p:timing>
     <p:tnLst>
       <p:par>
@@ -13768,15 +12524,26 @@
               <a:rPr lang="ru-RU" dirty="0"/>
               <a:t>основной язык программирования;</a:t>
             </a:r>
-          </a:p>
-          <a:p>
-            <a:r>
-              <a:rPr lang="en-US" b="1" dirty="0"/>
+            <a:endParaRPr lang="ru-RU" dirty="0"/>
+          </a:p>
+          <a:p>
+            <a:r>
+              <a:rPr lang="ru-RU" b="1" dirty="0">
+                <a:sym typeface="+mn-ea"/>
+              </a:rPr>
+              <a:t>Библиотека </a:t>
+            </a:r>
+            <a:r>
+              <a:rPr lang="en-US" sz="2800" b="1" dirty="0"/>
               <a:t>requests</a:t>
             </a:r>
             <a:r>
+              <a:rPr lang="en-US" sz="2800" dirty="0"/>
+              <a:t> </a:t>
+            </a:r>
+            <a:r>
               <a:rPr lang="en-US" dirty="0"/>
-              <a:t> — </a:t>
+              <a:t>— </a:t>
             </a:r>
             <a:r>
               <a:rPr lang="ru-RU" dirty="0"/>
@@ -13784,37 +12551,54 @@
             </a:r>
             <a:r>
               <a:rPr lang="en-US" dirty="0"/>
-              <a:t>HTTP‑</a:t>
+              <a:t>HTTP</a:t>
+            </a:r>
+            <a:r>
+              <a:rPr lang="ru-RU" altLang="en-US" dirty="0"/>
+              <a:t> - </a:t>
             </a:r>
             <a:r>
               <a:rPr lang="ru-RU" dirty="0"/>
               <a:t>запросов к </a:t>
             </a:r>
             <a:r>
+              <a:rPr lang="en-US" sz="2600" dirty="0"/>
+              <a:t>API </a:t>
+            </a:r>
+            <a:r>
+              <a:rPr lang="ru-RU" dirty="0"/>
+              <a:t>ЦБ</a:t>
+            </a:r>
+            <a:r>
+              <a:rPr lang="en-US" altLang="ru-RU" dirty="0"/>
+              <a:t> </a:t>
+            </a:r>
+            <a:r>
+              <a:rPr lang="ru-RU" altLang="en-US" dirty="0"/>
+              <a:t>РФ</a:t>
+            </a:r>
+            <a:r>
+              <a:rPr lang="ru-RU" dirty="0"/>
+              <a:t>;</a:t>
+            </a:r>
+            <a:endParaRPr lang="ru-RU" dirty="0"/>
+          </a:p>
+          <a:p>
+            <a:r>
+              <a:rPr lang="ru-RU" b="1" dirty="0"/>
+              <a:t>Библиотека </a:t>
+            </a:r>
+            <a:r>
+              <a:rPr lang="en-US" sz="2800" b="1" dirty="0"/>
+              <a:t>datetime</a:t>
+            </a:r>
+            <a:r>
+              <a:rPr lang="en-US" sz="2800" dirty="0"/>
+              <a:t> </a:t>
+            </a:r>
+            <a:r>
               <a:rPr lang="en-US" dirty="0"/>
-              <a:t>API </a:t>
-            </a:r>
-            <a:r>
-              <a:rPr lang="ru-RU" dirty="0"/>
-              <a:t>ЦБ;</a:t>
-            </a:r>
-          </a:p>
-          <a:p>
-            <a:r>
-              <a:rPr lang="ru-RU" b="1" dirty="0" smtClean="0"/>
-              <a:t>стандартная</a:t>
-            </a:r>
-            <a:r>
-              <a:rPr lang="ru-RU" b="1" dirty="0"/>
-              <a:t> библиотека </a:t>
-            </a:r>
-            <a:r>
-              <a:rPr lang="en-US" b="1" dirty="0"/>
-              <a:t>datetime</a:t>
-            </a:r>
-            <a:r>
-              <a:rPr lang="en-US" dirty="0"/>
-              <a:t> — </a:t>
+              <a:t>— </a:t>
             </a:r>
             <a:r>
               <a:rPr lang="ru-RU" dirty="0"/>
@@ -13829,15 +12613,22 @@
         </p:txBody>
       </p:sp>
     </p:spTree>
-    <p:extLst>
-      <p:ext uri="{BB962C8B-B14F-4D97-AF65-F5344CB8AC3E}">
-        <p14:creationId xmlns:p14="http://schemas.microsoft.com/office/powerpoint/2010/main" val="1506515569"/>
-      </p:ext>
-    </p:extLst>
   </p:cSld>
   <p:clrMapOvr>
     <a:masterClrMapping/>
   </p:clrMapOvr>
+  <mc:AlternateContent xmlns:mc="http://schemas.openxmlformats.org/markup-compatibility/2006">
+    <mc:Choice xmlns:p14="http://schemas.microsoft.com/office/powerpoint/2010/main" Requires="p14">
+      <p:transition spd="slow" p14:dur="1000">
+        <p:wipe/>
+      </p:transition>
+    </mc:Choice>
+    <mc:Fallback>
+      <p:transition spd="slow">
+        <p:wipe/>
+      </p:transition>
+    </mc:Fallback>
+  </mc:AlternateContent>
   <p:timing>
     <p:tnLst>
       <p:par>
@@ -13916,6 +12707,11 @@
               <a:rPr lang="ru-RU" dirty="0"/>
               <a:t>основной модуль (логика)</a:t>
             </a:r>
+            <a:r>
+              <a:rPr lang="en-US" dirty="0"/>
+              <a:t>;</a:t>
+            </a:r>
+            <a:endParaRPr lang="ru-RU" dirty="0"/>
           </a:p>
           <a:p>
             <a:r>
@@ -13942,20 +12738,31 @@
               <a:rPr lang="ru-RU" dirty="0" smtClean="0"/>
               <a:t>)</a:t>
             </a:r>
-            <a:endParaRPr lang="ru-RU" dirty="0"/>
+            <a:r>
+              <a:rPr lang="en-US" altLang="ru-RU" dirty="0" smtClean="0"/>
+              <a:t>;</a:t>
+            </a:r>
+            <a:endParaRPr lang="en-US" altLang="ru-RU" dirty="0" smtClean="0"/>
           </a:p>
         </p:txBody>
       </p:sp>
     </p:spTree>
-    <p:extLst>
-      <p:ext uri="{BB962C8B-B14F-4D97-AF65-F5344CB8AC3E}">
-        <p14:creationId xmlns:p14="http://schemas.microsoft.com/office/powerpoint/2010/main" val="3209670951"/>
-      </p:ext>
-    </p:extLst>
   </p:cSld>
   <p:clrMapOvr>
     <a:masterClrMapping/>
   </p:clrMapOvr>
+  <mc:AlternateContent xmlns:mc="http://schemas.openxmlformats.org/markup-compatibility/2006">
+    <mc:Choice xmlns:p14="http://schemas.microsoft.com/office/powerpoint/2010/main" Requires="p14">
+      <p:transition spd="slow" p14:dur="1000">
+        <p:wipe/>
+      </p:transition>
+    </mc:Choice>
+    <mc:Fallback>
+      <p:transition spd="slow">
+        <p:wipe/>
+      </p:transition>
+    </mc:Fallback>
+  </mc:AlternateContent>
   <p:timing>
     <p:tnLst>
       <p:par>
@@ -14000,8 +12807,12 @@
           <a:p>
             <a:pPr algn="ctr"/>
             <a:r>
+              <a:rPr lang="ru-RU" dirty="0"/>
+              <a:t>Устойчивость к </a:t>
+            </a:r>
+            <a:r>
               <a:rPr lang="ru-RU" dirty="0" smtClean="0"/>
-              <a:t>Логика конвертации?</a:t>
+              <a:t>ошибкам?</a:t>
             </a:r>
             <a:endParaRPr lang="ru-RU" dirty="0"/>
           </a:p>
@@ -14022,122 +12833,6 @@
           <a:bodyPr/>
           <a:lstStyle/>
           <a:p>
-            <a:pPr marL="0" indent="0" algn="ctr">
-              <a:buNone/>
-            </a:pPr>
-            <a:r>
-              <a:rPr lang="ru-RU" b="1" dirty="0" smtClean="0"/>
-              <a:t>Формула:</a:t>
-            </a:r>
-          </a:p>
-          <a:p>
-            <a:pPr marL="0" indent="0" algn="ctr">
-              <a:buNone/>
-            </a:pPr>
-            <a:r>
-              <a:rPr lang="ru-RU" dirty="0" smtClean="0"/>
-              <a:t>сумма_в_валюте = курс</a:t>
-            </a:r>
-            <a:r>
-              <a:rPr lang="en-US" dirty="0" smtClean="0"/>
-              <a:t> </a:t>
-            </a:r>
-            <a:r>
-              <a:rPr lang="ru-RU" dirty="0" smtClean="0"/>
-              <a:t>/</a:t>
-            </a:r>
-            <a:r>
-              <a:rPr lang="en-US" dirty="0" smtClean="0"/>
-              <a:t> </a:t>
-            </a:r>
-            <a:r>
-              <a:rPr lang="ru-RU" dirty="0" smtClean="0"/>
-              <a:t>сумма_в_рублях​</a:t>
-            </a:r>
-            <a:endParaRPr lang="ru-RU" dirty="0"/>
-          </a:p>
-        </p:txBody>
-      </p:sp>
-    </p:spTree>
-    <p:extLst>
-      <p:ext uri="{BB962C8B-B14F-4D97-AF65-F5344CB8AC3E}">
-        <p14:creationId xmlns:p14="http://schemas.microsoft.com/office/powerpoint/2010/main" val="2391969276"/>
-      </p:ext>
-    </p:extLst>
-  </p:cSld>
-  <p:clrMapOvr>
-    <a:masterClrMapping/>
-  </p:clrMapOvr>
-  <p:timing>
-    <p:tnLst>
-      <p:par>
-        <p:cTn id="1" dur="indefinite" restart="never" nodeType="tmRoot"/>
-      </p:par>
-    </p:tnLst>
-  </p:timing>
-</p:sld>
-</file>
-
-<file path=ppt/slides/slide6.xml><?xml version="1.0" encoding="utf-8"?>
-<p:sld xmlns:a="http://schemas.openxmlformats.org/drawingml/2006/main" xmlns:r="http://schemas.openxmlformats.org/officeDocument/2006/relationships" xmlns:p="http://schemas.openxmlformats.org/presentationml/2006/main">
-  <p:cSld>
-    <p:spTree>
-      <p:nvGrpSpPr>
-        <p:cNvPr id="1" name=""/>
-        <p:cNvGrpSpPr/>
-        <p:nvPr/>
-      </p:nvGrpSpPr>
-      <p:grpSpPr>
-        <a:xfrm>
-          <a:off x="0" y="0"/>
-          <a:ext cx="0" cy="0"/>
-          <a:chOff x="0" y="0"/>
-          <a:chExt cx="0" cy="0"/>
-        </a:xfrm>
-      </p:grpSpPr>
-      <p:sp>
-        <p:nvSpPr>
-          <p:cNvPr id="2" name="Заголовок 1"/>
-          <p:cNvSpPr>
-            <a:spLocks noGrp="1"/>
-          </p:cNvSpPr>
-          <p:nvPr>
-            <p:ph type="title"/>
-          </p:nvPr>
-        </p:nvSpPr>
-        <p:spPr/>
-        <p:txBody>
-          <a:bodyPr/>
-          <a:lstStyle/>
-          <a:p>
-            <a:pPr algn="ctr"/>
-            <a:r>
-              <a:rPr lang="ru-RU" dirty="0"/>
-              <a:t>Устойчивость к </a:t>
-            </a:r>
-            <a:r>
-              <a:rPr lang="ru-RU" dirty="0" smtClean="0"/>
-              <a:t>ошибкам?</a:t>
-            </a:r>
-            <a:endParaRPr lang="ru-RU" dirty="0"/>
-          </a:p>
-        </p:txBody>
-      </p:sp>
-      <p:sp>
-        <p:nvSpPr>
-          <p:cNvPr id="3" name="Объект 2"/>
-          <p:cNvSpPr>
-            <a:spLocks noGrp="1"/>
-          </p:cNvSpPr>
-          <p:nvPr>
-            <p:ph idx="1"/>
-          </p:nvPr>
-        </p:nvSpPr>
-        <p:spPr/>
-        <p:txBody>
-          <a:bodyPr/>
-          <a:lstStyle/>
-          <a:p>
             <a:pPr marL="0" indent="0">
               <a:buNone/>
             </a:pPr>
@@ -14149,6 +12844,7 @@
               <a:rPr lang="ru-RU" b="1" dirty="0" smtClean="0"/>
               <a:t>их решения:</a:t>
             </a:r>
+            <a:endParaRPr lang="ru-RU" b="1" dirty="0" smtClean="0"/>
           </a:p>
           <a:p>
             <a:pPr marL="0" indent="0">
@@ -14164,13 +12860,7 @@
           <p:cNvGraphicFramePr>
             <a:graphicFrameLocks noGrp="1"/>
           </p:cNvGraphicFramePr>
-          <p:nvPr>
-            <p:extLst>
-              <p:ext uri="{D42A27DB-BD31-4B8C-83A1-F6EECF244321}">
-                <p14:modId xmlns:p14="http://schemas.microsoft.com/office/powerpoint/2010/main" val="126032939"/>
-              </p:ext>
-            </p:extLst>
-          </p:nvPr>
+          <p:nvPr/>
         </p:nvGraphicFramePr>
         <p:xfrm>
           <a:off x="1141410" y="2800714"/>
@@ -14202,7 +12892,14 @@
                       <a:endParaRPr lang="ru-RU" dirty="0"/>
                     </a:p>
                   </a:txBody>
-                  <a:tcPr/>
+                  <a:tcPr>
+                    <a:solidFill>
+                      <a:schemeClr val="bg2">
+                        <a:lumMod val="60000"/>
+                        <a:lumOff val="40000"/>
+                      </a:schemeClr>
+                    </a:solidFill>
+                  </a:tcPr>
                 </a:tc>
                 <a:tc>
                   <a:txBody>
@@ -14224,7 +12921,14 @@
                       <a:endParaRPr lang="ru-RU" dirty="0"/>
                     </a:p>
                   </a:txBody>
-                  <a:tcPr/>
+                  <a:tcPr>
+                    <a:solidFill>
+                      <a:schemeClr val="bg2">
+                        <a:lumMod val="60000"/>
+                        <a:lumOff val="40000"/>
+                      </a:schemeClr>
+                    </a:solidFill>
+                  </a:tcPr>
                 </a:tc>
                 <a:tc>
                   <a:txBody>
@@ -14246,7 +12950,14 @@
                       <a:endParaRPr lang="ru-RU" dirty="0"/>
                     </a:p>
                   </a:txBody>
-                  <a:tcPr/>
+                  <a:tcPr>
+                    <a:solidFill>
+                      <a:schemeClr val="bg2">
+                        <a:lumMod val="60000"/>
+                        <a:lumOff val="40000"/>
+                      </a:schemeClr>
+                    </a:solidFill>
+                  </a:tcPr>
                 </a:tc>
                 <a:tc>
                   <a:txBody>
@@ -14268,7 +12979,14 @@
                       <a:endParaRPr lang="ru-RU" dirty="0"/>
                     </a:p>
                   </a:txBody>
-                  <a:tcPr/>
+                  <a:tcPr>
+                    <a:solidFill>
+                      <a:schemeClr val="bg2">
+                        <a:lumMod val="60000"/>
+                        <a:lumOff val="40000"/>
+                      </a:schemeClr>
+                    </a:solidFill>
+                  </a:tcPr>
                 </a:tc>
                 <a:tc>
                   <a:txBody>
@@ -14290,7 +13008,14 @@
                       <a:endParaRPr lang="ru-RU" dirty="0"/>
                     </a:p>
                   </a:txBody>
-                  <a:tcPr/>
+                  <a:tcPr>
+                    <a:solidFill>
+                      <a:schemeClr val="bg2">
+                        <a:lumMod val="60000"/>
+                        <a:lumOff val="40000"/>
+                      </a:schemeClr>
+                    </a:solidFill>
+                  </a:tcPr>
                 </a:tc>
               </a:tr>
               <a:tr h="1655380">
@@ -14306,7 +13031,14 @@
                       <a:endParaRPr lang="ru-RU" dirty="0"/>
                     </a:p>
                   </a:txBody>
-                  <a:tcPr/>
+                  <a:tcPr>
+                    <a:solidFill>
+                      <a:schemeClr val="tx2">
+                        <a:lumMod val="40000"/>
+                        <a:lumOff val="60000"/>
+                      </a:schemeClr>
+                    </a:solidFill>
+                  </a:tcPr>
                 </a:tc>
                 <a:tc>
                   <a:txBody>
@@ -14357,7 +13089,14 @@
                       <a:endParaRPr lang="ru-RU" dirty="0"/>
                     </a:p>
                   </a:txBody>
-                  <a:tcPr/>
+                  <a:tcPr>
+                    <a:solidFill>
+                      <a:schemeClr val="tx2">
+                        <a:lumMod val="40000"/>
+                        <a:lumOff val="60000"/>
+                      </a:schemeClr>
+                    </a:solidFill>
+                  </a:tcPr>
                 </a:tc>
                 <a:tc>
                   <a:txBody>
@@ -14387,7 +13126,14 @@
                       <a:endParaRPr lang="ru-RU" dirty="0"/>
                     </a:p>
                   </a:txBody>
-                  <a:tcPr/>
+                  <a:tcPr>
+                    <a:solidFill>
+                      <a:schemeClr val="tx2">
+                        <a:lumMod val="40000"/>
+                        <a:lumOff val="60000"/>
+                      </a:schemeClr>
+                    </a:solidFill>
+                  </a:tcPr>
                 </a:tc>
                 <a:tc>
                   <a:txBody>
@@ -14437,7 +13183,14 @@
                       <a:endParaRPr lang="ru-RU" dirty="0"/>
                     </a:p>
                   </a:txBody>
-                  <a:tcPr/>
+                  <a:tcPr>
+                    <a:solidFill>
+                      <a:schemeClr val="tx2">
+                        <a:lumMod val="40000"/>
+                        <a:lumOff val="60000"/>
+                      </a:schemeClr>
+                    </a:solidFill>
+                  </a:tcPr>
                 </a:tc>
                 <a:tc>
                   <a:txBody>
@@ -14475,7 +13228,14 @@
                       <a:endParaRPr lang="ru-RU" dirty="0"/>
                     </a:p>
                   </a:txBody>
-                  <a:tcPr/>
+                  <a:tcPr>
+                    <a:solidFill>
+                      <a:schemeClr val="tx2">
+                        <a:lumMod val="40000"/>
+                        <a:lumOff val="60000"/>
+                      </a:schemeClr>
+                    </a:solidFill>
+                  </a:tcPr>
                 </a:tc>
               </a:tr>
             </a:tbl>
@@ -14483,15 +13243,257 @@
         </a:graphic>
       </p:graphicFrame>
     </p:spTree>
-    <p:extLst>
-      <p:ext uri="{BB962C8B-B14F-4D97-AF65-F5344CB8AC3E}">
-        <p14:creationId xmlns:p14="http://schemas.microsoft.com/office/powerpoint/2010/main" val="1780684411"/>
-      </p:ext>
-    </p:extLst>
   </p:cSld>
   <p:clrMapOvr>
     <a:masterClrMapping/>
   </p:clrMapOvr>
+  <mc:AlternateContent xmlns:mc="http://schemas.openxmlformats.org/markup-compatibility/2006">
+    <mc:Choice xmlns:p14="http://schemas.microsoft.com/office/powerpoint/2010/main" Requires="p14">
+      <p:transition spd="slow" p14:dur="1000">
+        <p:wipe/>
+      </p:transition>
+    </mc:Choice>
+    <mc:Fallback>
+      <p:transition spd="slow">
+        <p:wipe/>
+      </p:transition>
+    </mc:Fallback>
+  </mc:AlternateContent>
+  <p:timing>
+    <p:tnLst>
+      <p:par>
+        <p:cTn id="1" dur="indefinite" restart="never" nodeType="tmRoot"/>
+      </p:par>
+    </p:tnLst>
+  </p:timing>
+</p:sld>
+</file>
+
+<file path=ppt/slides/slide6.xml><?xml version="1.0" encoding="utf-8"?>
+<p:sld xmlns:a="http://schemas.openxmlformats.org/drawingml/2006/main" xmlns:r="http://schemas.openxmlformats.org/officeDocument/2006/relationships" xmlns:p="http://schemas.openxmlformats.org/presentationml/2006/main">
+  <p:cSld>
+    <p:spTree>
+      <p:nvGrpSpPr>
+        <p:cNvPr id="1" name=""/>
+        <p:cNvGrpSpPr/>
+        <p:nvPr/>
+      </p:nvGrpSpPr>
+      <p:grpSpPr>
+        <a:xfrm>
+          <a:off x="0" y="0"/>
+          <a:ext cx="0" cy="0"/>
+          <a:chOff x="0" y="0"/>
+          <a:chExt cx="0" cy="0"/>
+        </a:xfrm>
+      </p:grpSpPr>
+      <p:sp>
+        <p:nvSpPr>
+          <p:cNvPr id="2" name="Заголовок 1"/>
+          <p:cNvSpPr>
+            <a:spLocks noGrp="1"/>
+          </p:cNvSpPr>
+          <p:nvPr>
+            <p:ph type="title"/>
+          </p:nvPr>
+        </p:nvSpPr>
+        <p:spPr/>
+        <p:txBody>
+          <a:bodyPr/>
+          <a:lstStyle/>
+          <a:p>
+            <a:pPr algn="ctr"/>
+            <a:r>
+              <a:rPr lang="ru-RU" dirty="0"/>
+              <a:t>Как запустить и использовать?</a:t>
+            </a:r>
+            <a:endParaRPr lang="ru-RU" dirty="0"/>
+          </a:p>
+        </p:txBody>
+      </p:sp>
+      <p:sp>
+        <p:nvSpPr>
+          <p:cNvPr id="3" name="Объект 2"/>
+          <p:cNvSpPr>
+            <a:spLocks noGrp="1"/>
+          </p:cNvSpPr>
+          <p:nvPr>
+            <p:ph idx="1"/>
+          </p:nvPr>
+        </p:nvSpPr>
+        <p:spPr/>
+        <p:txBody>
+          <a:bodyPr>
+            <a:normAutofit/>
+          </a:bodyPr>
+          <a:lstStyle/>
+          <a:p>
+            <a:pPr marL="457200" indent="-457200">
+              <a:buFont typeface="+mj-lt"/>
+              <a:buAutoNum type="arabicParenR"/>
+            </a:pPr>
+            <a:r>
+              <a:rPr lang="ru-RU" dirty="0"/>
+              <a:t>Установите </a:t>
+            </a:r>
+            <a:r>
+              <a:rPr lang="ru-RU" dirty="0" err="1"/>
+              <a:t>Python</a:t>
+            </a:r>
+            <a:r>
+              <a:rPr lang="ru-RU" dirty="0"/>
+              <a:t> 3 и </a:t>
+            </a:r>
+            <a:r>
+              <a:rPr lang="ru-RU" dirty="0" smtClean="0"/>
+              <a:t>библиотеку </a:t>
+            </a:r>
+            <a:r>
+              <a:rPr lang="en-US" dirty="0" smtClean="0"/>
+              <a:t>“requests”</a:t>
+            </a:r>
+            <a:r>
+              <a:rPr lang="ru-RU" dirty="0" smtClean="0"/>
+              <a:t> (</a:t>
+            </a:r>
+            <a:r>
+              <a:rPr lang="en-US" dirty="0"/>
+              <a:t>pip install </a:t>
+            </a:r>
+            <a:r>
+              <a:rPr lang="en-US" dirty="0" smtClean="0"/>
+              <a:t>requests</a:t>
+            </a:r>
+            <a:r>
+              <a:rPr lang="ru-RU" dirty="0" smtClean="0"/>
+              <a:t>)</a:t>
+            </a:r>
+            <a:r>
+              <a:rPr lang="en-US" altLang="ru-RU" dirty="0" smtClean="0"/>
+              <a:t>;</a:t>
+            </a:r>
+            <a:endParaRPr lang="en-US" dirty="0" smtClean="0"/>
+          </a:p>
+          <a:p>
+            <a:pPr marL="457200" indent="-457200">
+              <a:buFont typeface="+mj-lt"/>
+              <a:buAutoNum type="arabicParenR"/>
+            </a:pPr>
+            <a:r>
+              <a:rPr lang="ru-RU" dirty="0"/>
+              <a:t>Поместите </a:t>
+            </a:r>
+            <a:r>
+              <a:rPr lang="ru-RU" dirty="0" smtClean="0"/>
+              <a:t>файлы</a:t>
+            </a:r>
+            <a:r>
+              <a:rPr lang="en-US" dirty="0" smtClean="0"/>
+              <a:t> “Currency_rates.py” </a:t>
+            </a:r>
+            <a:r>
+              <a:rPr lang="ru-RU" dirty="0" smtClean="0"/>
+              <a:t>и </a:t>
+            </a:r>
+            <a:r>
+              <a:rPr lang="en-US" dirty="0" smtClean="0"/>
+              <a:t>“main.py”</a:t>
+            </a:r>
+            <a:r>
+              <a:rPr lang="ru-RU" dirty="0"/>
+              <a:t> в одну папку</a:t>
+            </a:r>
+            <a:r>
+              <a:rPr lang="en-US" altLang="ru-RU" dirty="0"/>
+              <a:t>;</a:t>
+            </a:r>
+            <a:endParaRPr lang="ru-RU" dirty="0" smtClean="0"/>
+          </a:p>
+          <a:p>
+            <a:pPr marL="457200" indent="-457200">
+              <a:buFont typeface="+mj-lt"/>
+              <a:buAutoNum type="arabicParenR"/>
+            </a:pPr>
+            <a:r>
+              <a:rPr lang="ru-RU" dirty="0" smtClean="0"/>
+              <a:t>Запустите файл </a:t>
+            </a:r>
+            <a:r>
+              <a:rPr lang="en-US" dirty="0" smtClean="0"/>
+              <a:t>“main.py”;</a:t>
+            </a:r>
+            <a:endParaRPr lang="ru-RU" dirty="0" smtClean="0"/>
+          </a:p>
+          <a:p>
+            <a:pPr marL="457200" indent="-457200">
+              <a:buFont typeface="+mj-lt"/>
+              <a:buAutoNum type="arabicParenR"/>
+            </a:pPr>
+            <a:r>
+              <a:rPr lang="ru-RU" dirty="0" smtClean="0"/>
+              <a:t>Выберите</a:t>
+            </a:r>
+            <a:r>
+              <a:rPr lang="ru-RU" dirty="0"/>
+              <a:t> действие в меню</a:t>
+            </a:r>
+            <a:r>
+              <a:rPr lang="en-US" altLang="ru-RU" dirty="0"/>
+              <a:t>;</a:t>
+            </a:r>
+            <a:endParaRPr lang="ru-RU" dirty="0"/>
+          </a:p>
+          <a:p>
+            <a:pPr marL="457200" indent="-457200">
+              <a:buFont typeface="+mj-lt"/>
+              <a:buAutoNum type="arabicParenR"/>
+            </a:pPr>
+            <a:r>
+              <a:rPr lang="ru-RU" dirty="0"/>
+              <a:t>Введите сумму (если нужно)</a:t>
+            </a:r>
+            <a:r>
+              <a:rPr lang="en-US" altLang="ru-RU" dirty="0"/>
+              <a:t>;</a:t>
+            </a:r>
+            <a:endParaRPr lang="ru-RU" dirty="0"/>
+          </a:p>
+          <a:p>
+            <a:pPr marL="457200" indent="-457200">
+              <a:buFont typeface="+mj-lt"/>
+              <a:buAutoNum type="arabicParenR"/>
+            </a:pPr>
+            <a:r>
+              <a:rPr lang="ru-RU" dirty="0"/>
+              <a:t>Получите результат.</a:t>
+            </a:r>
+            <a:endParaRPr lang="ru-RU" dirty="0"/>
+          </a:p>
+          <a:p>
+            <a:pPr marL="457200" indent="-457200">
+              <a:buFont typeface="+mj-lt"/>
+              <a:buAutoNum type="arabicParenR"/>
+            </a:pPr>
+            <a:endParaRPr lang="ru-RU" dirty="0"/>
+          </a:p>
+        </p:txBody>
+      </p:sp>
+    </p:spTree>
+  </p:cSld>
+  <p:clrMapOvr>
+    <a:masterClrMapping/>
+  </p:clrMapOvr>
+  <mc:AlternateContent xmlns:mc="http://schemas.openxmlformats.org/markup-compatibility/2006">
+    <mc:Choice xmlns:p14="http://schemas.microsoft.com/office/powerpoint/2010/main" Requires="p14">
+      <p:transition spd="slow" p14:dur="1000">
+        <p:wipe/>
+      </p:transition>
+    </mc:Choice>
+    <mc:Fallback>
+      <p:transition spd="slow">
+        <p:wipe/>
+      </p:transition>
+    </mc:Fallback>
+  </mc:AlternateContent>
   <p:timing>
     <p:tnLst>
       <p:par>
@@ -14537,175 +13539,148 @@
             <a:pPr algn="ctr"/>
             <a:r>
               <a:rPr lang="ru-RU" dirty="0"/>
-              <a:t>Как запустить и использовать?</a:t>
-            </a:r>
+              <a:t>Аналоги?</a:t>
+            </a:r>
+            <a:endParaRPr lang="ru-RU" dirty="0"/>
           </a:p>
         </p:txBody>
       </p:sp>
-      <p:sp>
-        <p:nvSpPr>
-          <p:cNvPr id="3" name="Объект 2"/>
-          <p:cNvSpPr>
-            <a:spLocks noGrp="1"/>
-          </p:cNvSpPr>
+      <p:pic>
+        <p:nvPicPr>
+          <p:cNvPr id="4" name="Объект 3"/>
+          <p:cNvPicPr>
+            <a:picLocks noGrp="1" noChangeAspect="1"/>
+          </p:cNvPicPr>
           <p:nvPr>
             <p:ph idx="1"/>
           </p:nvPr>
+        </p:nvPicPr>
+        <p:blipFill>
+          <a:blip r:embed="rId1" cstate="print">
+            <a:extLst>
+              <a:ext uri="{28A0092B-C50C-407E-A947-70E740481C1C}">
+                <a14:useLocalDpi xmlns:a14="http://schemas.microsoft.com/office/drawing/2010/main" val="0"/>
+              </a:ext>
+            </a:extLst>
+          </a:blip>
+          <a:stretch>
+            <a:fillRect/>
+          </a:stretch>
+        </p:blipFill>
+        <p:spPr>
+          <a:xfrm>
+            <a:off x="1141413" y="2818013"/>
+            <a:ext cx="4054571" cy="2499359"/>
+          </a:xfrm>
+        </p:spPr>
+      </p:pic>
+      <p:sp>
+        <p:nvSpPr>
+          <p:cNvPr id="5" name="Прямоугольник 4"/>
+          <p:cNvSpPr/>
+          <p:nvPr/>
         </p:nvSpPr>
-        <p:spPr/>
+        <p:spPr>
+          <a:xfrm>
+            <a:off x="2383868" y="2363184"/>
+            <a:ext cx="1492716" cy="369332"/>
+          </a:xfrm>
+          <a:prstGeom prst="rect">
+            <a:avLst/>
+          </a:prstGeom>
+        </p:spPr>
         <p:txBody>
-          <a:bodyPr>
-            <a:normAutofit/>
+          <a:bodyPr wrap="none">
+            <a:spAutoFit/>
           </a:bodyPr>
           <a:lstStyle/>
           <a:p>
-            <a:pPr marL="457200" indent="-457200">
-              <a:buFont typeface="+mj-lt"/>
-              <a:buAutoNum type="arabicParenR"/>
-            </a:pPr>
+            <a:r>
+              <a:rPr lang="en-US" dirty="0">
+                <a:latin typeface="-apple-system"/>
+              </a:rPr>
+              <a:t>XE Currency</a:t>
+            </a:r>
+            <a:endParaRPr lang="ru-RU" dirty="0"/>
+          </a:p>
+        </p:txBody>
+      </p:sp>
+      <p:pic>
+        <p:nvPicPr>
+          <p:cNvPr id="7" name="Рисунок 6"/>
+          <p:cNvPicPr>
+            <a:picLocks noChangeAspect="1"/>
+          </p:cNvPicPr>
+          <p:nvPr/>
+        </p:nvPicPr>
+        <p:blipFill>
+          <a:blip r:embed="rId2">
+            <a:extLst>
+              <a:ext uri="{28A0092B-C50C-407E-A947-70E740481C1C}">
+                <a14:useLocalDpi xmlns:a14="http://schemas.microsoft.com/office/drawing/2010/main" val="0"/>
+              </a:ext>
+            </a:extLst>
+          </a:blip>
+          <a:stretch>
+            <a:fillRect/>
+          </a:stretch>
+        </p:blipFill>
+        <p:spPr>
+          <a:xfrm>
+            <a:off x="6395826" y="2818013"/>
+            <a:ext cx="4651585" cy="2499359"/>
+          </a:xfrm>
+          <a:prstGeom prst="rect">
+            <a:avLst/>
+          </a:prstGeom>
+        </p:spPr>
+      </p:pic>
+      <p:sp>
+        <p:nvSpPr>
+          <p:cNvPr id="8" name="Прямоугольник 7"/>
+          <p:cNvSpPr/>
+          <p:nvPr/>
+        </p:nvSpPr>
+        <p:spPr>
+          <a:xfrm>
+            <a:off x="7334347" y="2363184"/>
+            <a:ext cx="2774542" cy="369332"/>
+          </a:xfrm>
+          <a:prstGeom prst="rect">
+            <a:avLst/>
+          </a:prstGeom>
+        </p:spPr>
+        <p:txBody>
+          <a:bodyPr wrap="none">
+            <a:spAutoFit/>
+          </a:bodyPr>
+          <a:lstStyle/>
+          <a:p>
             <a:r>
               <a:rPr lang="ru-RU" dirty="0"/>
-              <a:t>Установите </a:t>
-            </a:r>
-            <a:r>
-              <a:rPr lang="ru-RU" dirty="0" err="1"/>
-              <a:t>Python</a:t>
-            </a:r>
-            <a:r>
-              <a:rPr lang="ru-RU" dirty="0"/>
-              <a:t> 3 и </a:t>
-            </a:r>
-            <a:r>
-              <a:rPr lang="ru-RU" dirty="0" smtClean="0"/>
-              <a:t>библиотеку </a:t>
-            </a:r>
-            <a:r>
-              <a:rPr lang="en-US" dirty="0" smtClean="0"/>
-              <a:t>“requests”</a:t>
-            </a:r>
-            <a:r>
-              <a:rPr lang="ru-RU" dirty="0" smtClean="0"/>
-              <a:t> (</a:t>
-            </a:r>
-            <a:r>
-              <a:rPr lang="en-US" dirty="0"/>
-              <a:t>pip install </a:t>
-            </a:r>
-            <a:r>
-              <a:rPr lang="en-US" dirty="0" smtClean="0"/>
-              <a:t>requests</a:t>
-            </a:r>
-            <a:r>
-              <a:rPr lang="ru-RU" dirty="0" smtClean="0"/>
-              <a:t>)</a:t>
-            </a:r>
-            <a:endParaRPr lang="en-US" dirty="0" smtClean="0"/>
-          </a:p>
-          <a:p>
-            <a:pPr marL="457200" indent="-457200">
-              <a:buFont typeface="+mj-lt"/>
-              <a:buAutoNum type="arabicParenR"/>
-            </a:pPr>
-            <a:r>
-              <a:rPr lang="ru-RU" dirty="0"/>
-              <a:t>Поместите </a:t>
-            </a:r>
-            <a:r>
-              <a:rPr lang="ru-RU" dirty="0" smtClean="0"/>
-              <a:t>файлы</a:t>
-            </a:r>
-            <a:r>
-              <a:rPr lang="en-US" dirty="0" smtClean="0"/>
-              <a:t> “currency_rates.py” </a:t>
-            </a:r>
-            <a:r>
-              <a:rPr lang="ru-RU" dirty="0" smtClean="0"/>
-              <a:t>и </a:t>
-            </a:r>
-            <a:r>
-              <a:rPr lang="en-US" dirty="0" smtClean="0"/>
-              <a:t>“main.py”</a:t>
-            </a:r>
-            <a:r>
-              <a:rPr lang="ru-RU" dirty="0"/>
-              <a:t> в одну папку</a:t>
-            </a:r>
-            <a:r>
-              <a:rPr lang="ru-RU" dirty="0" smtClean="0"/>
-              <a:t>.</a:t>
-            </a:r>
-          </a:p>
-          <a:p>
-            <a:pPr marL="457200" indent="-457200">
-              <a:buFont typeface="+mj-lt"/>
-              <a:buAutoNum type="arabicParenR"/>
-            </a:pPr>
-            <a:r>
-              <a:rPr lang="ru-RU" dirty="0" smtClean="0"/>
-              <a:t>Запустите файл </a:t>
-            </a:r>
-            <a:r>
-              <a:rPr lang="en-US" dirty="0" smtClean="0"/>
-              <a:t>“main.py”</a:t>
-            </a:r>
-            <a:r>
-              <a:rPr lang="ru-RU" dirty="0" smtClean="0"/>
-              <a:t>.</a:t>
-            </a:r>
-          </a:p>
-          <a:p>
-            <a:pPr marL="457200" indent="-457200">
-              <a:buFont typeface="+mj-lt"/>
-              <a:buAutoNum type="arabicParenR"/>
-            </a:pPr>
-            <a:r>
-              <a:rPr lang="ru-RU" dirty="0" smtClean="0"/>
-              <a:t>Выберите</a:t>
-            </a:r>
-            <a:r>
-              <a:rPr lang="ru-RU" dirty="0"/>
-              <a:t> действие в меню.</a:t>
-            </a:r>
-          </a:p>
-          <a:p>
-            <a:pPr marL="457200" indent="-457200">
-              <a:buFont typeface="+mj-lt"/>
-              <a:buAutoNum type="arabicParenR"/>
-            </a:pPr>
-            <a:r>
-              <a:rPr lang="ru-RU" dirty="0"/>
-              <a:t>Введите сумму (если нужно).</a:t>
-            </a:r>
-          </a:p>
-          <a:p>
-            <a:pPr marL="457200" indent="-457200">
-              <a:buFont typeface="+mj-lt"/>
-              <a:buAutoNum type="arabicParenR"/>
-            </a:pPr>
-            <a:r>
-              <a:rPr lang="ru-RU" dirty="0"/>
-              <a:t>Получите результат.</a:t>
-            </a:r>
-          </a:p>
-          <a:p>
-            <a:pPr marL="457200" indent="-457200">
-              <a:buFont typeface="+mj-lt"/>
-              <a:buAutoNum type="arabicParenR"/>
-            </a:pPr>
+              <a:t>OANDA Currency Converter</a:t>
+            </a:r>
             <a:endParaRPr lang="ru-RU" dirty="0"/>
           </a:p>
         </p:txBody>
       </p:sp>
     </p:spTree>
-    <p:extLst>
-      <p:ext uri="{BB962C8B-B14F-4D97-AF65-F5344CB8AC3E}">
-        <p14:creationId xmlns:p14="http://schemas.microsoft.com/office/powerpoint/2010/main" val="1460337241"/>
-      </p:ext>
-    </p:extLst>
   </p:cSld>
   <p:clrMapOvr>
     <a:masterClrMapping/>
   </p:clrMapOvr>
+  <mc:AlternateContent xmlns:mc="http://schemas.openxmlformats.org/markup-compatibility/2006">
+    <mc:Choice xmlns:p14="http://schemas.microsoft.com/office/powerpoint/2010/main" Requires="p14">
+      <p:transition spd="slow" p14:dur="1000">
+        <p:wipe/>
+      </p:transition>
+    </mc:Choice>
+    <mc:Fallback>
+      <p:transition spd="slow">
+        <p:wipe/>
+      </p:transition>
+    </mc:Fallback>
+  </mc:AlternateContent>
   <p:timing>
     <p:tnLst>
       <p:par>
@@ -14750,147 +13725,167 @@
           <a:p>
             <a:pPr algn="ctr"/>
             <a:r>
-              <a:rPr lang="ru-RU" dirty="0"/>
-              <a:t>Аналоги?</a:t>
-            </a:r>
+              <a:rPr lang="ru-RU" dirty="0" smtClean="0"/>
+              <a:t>Целевая аудитория?</a:t>
+            </a:r>
+            <a:endParaRPr lang="ru-RU" dirty="0"/>
           </a:p>
         </p:txBody>
       </p:sp>
-      <p:pic>
-        <p:nvPicPr>
-          <p:cNvPr id="4" name="Объект 3"/>
-          <p:cNvPicPr>
-            <a:picLocks noGrp="1" noChangeAspect="1"/>
-          </p:cNvPicPr>
-          <p:nvPr>
-            <p:ph idx="1"/>
-          </p:nvPr>
-        </p:nvPicPr>
-        <p:blipFill>
-          <a:blip r:embed="rId2" cstate="print">
-            <a:extLst>
-              <a:ext uri="{28A0092B-C50C-407E-A947-70E740481C1C}">
-                <a14:useLocalDpi xmlns:a14="http://schemas.microsoft.com/office/drawing/2010/main" val="0"/>
-              </a:ext>
-            </a:extLst>
-          </a:blip>
-          <a:stretch>
-            <a:fillRect/>
-          </a:stretch>
-        </p:blipFill>
-        <p:spPr>
-          <a:xfrm>
-            <a:off x="1141413" y="2818013"/>
-            <a:ext cx="4054571" cy="2499359"/>
-          </a:xfrm>
-        </p:spPr>
-      </p:pic>
       <p:sp>
         <p:nvSpPr>
-          <p:cNvPr id="5" name="Прямоугольник 4"/>
-          <p:cNvSpPr/>
-          <p:nvPr/>
+          <p:cNvPr id="3" name="Объект 2"/>
+          <p:cNvSpPr>
+            <a:spLocks noGrp="1"/>
+          </p:cNvSpPr>
+          <p:nvPr>
+            <p:ph sz="half" idx="1"/>
+          </p:nvPr>
         </p:nvSpPr>
-        <p:spPr>
-          <a:xfrm>
-            <a:off x="2383868" y="2363184"/>
-            <a:ext cx="1492716" cy="369332"/>
-          </a:xfrm>
-          <a:prstGeom prst="rect">
-            <a:avLst/>
-          </a:prstGeom>
-        </p:spPr>
+        <p:spPr/>
         <p:txBody>
-          <a:bodyPr wrap="none">
-            <a:spAutoFit/>
+          <a:bodyPr>
+            <a:normAutofit lnSpcReduction="10000"/>
           </a:bodyPr>
           <a:lstStyle/>
           <a:p>
             <a:r>
-              <a:rPr lang="en-US" dirty="0">
-                <a:latin typeface="-apple-system"/>
-              </a:rPr>
-              <a:t>XE Currency</a:t>
-            </a:r>
+              <a:rPr lang="ru-RU" dirty="0" smtClean="0"/>
+              <a:t>Всевозможные банки;</a:t>
+            </a:r>
+            <a:endParaRPr lang="ru-RU" dirty="0" smtClean="0"/>
+          </a:p>
+          <a:p>
+            <a:r>
+              <a:rPr lang="ru-RU" dirty="0" smtClean="0"/>
+              <a:t>Сайты для обмена валют;</a:t>
+            </a:r>
+            <a:endParaRPr lang="ru-RU" dirty="0" smtClean="0"/>
+          </a:p>
+          <a:p>
+            <a:r>
+              <a:rPr lang="ru-RU" dirty="0" smtClean="0"/>
+              <a:t>Обычные пользователи;</a:t>
+            </a:r>
+            <a:endParaRPr lang="ru-RU" dirty="0" smtClean="0"/>
+          </a:p>
+          <a:p>
+            <a:r>
+              <a:rPr lang="ru-RU" dirty="0"/>
+              <a:t>Бизнесмены и </a:t>
+            </a:r>
+            <a:r>
+              <a:rPr lang="ru-RU" dirty="0" smtClean="0"/>
+              <a:t>предприниматели;</a:t>
+            </a:r>
+            <a:endParaRPr lang="ru-RU" dirty="0" smtClean="0"/>
+          </a:p>
+          <a:p>
+            <a:r>
+              <a:rPr lang="ru-RU" dirty="0" smtClean="0"/>
+              <a:t>Инвесторы;</a:t>
+            </a:r>
+            <a:endParaRPr lang="ru-RU" dirty="0" smtClean="0"/>
+          </a:p>
+          <a:p>
+            <a:r>
+              <a:rPr lang="ru-RU" dirty="0"/>
+              <a:t>Финансовые </a:t>
+            </a:r>
+            <a:r>
+              <a:rPr lang="ru-RU" dirty="0" smtClean="0"/>
+              <a:t>специалисты;</a:t>
+            </a:r>
+            <a:endParaRPr lang="ru-RU" dirty="0" smtClean="0"/>
+          </a:p>
+          <a:p>
+            <a:pPr marL="0" indent="0">
+              <a:buNone/>
+            </a:pPr>
+            <a:endParaRPr lang="ru-RU" dirty="0"/>
+          </a:p>
+          <a:p>
+            <a:endParaRPr lang="ru-RU" dirty="0" smtClean="0"/>
+          </a:p>
+          <a:p>
+            <a:endParaRPr lang="ru-RU" dirty="0" smtClean="0"/>
+          </a:p>
+          <a:p>
             <a:endParaRPr lang="ru-RU" dirty="0"/>
           </a:p>
         </p:txBody>
       </p:sp>
-      <p:pic>
-        <p:nvPicPr>
-          <p:cNvPr id="7" name="Рисунок 6"/>
-          <p:cNvPicPr>
-            <a:picLocks noChangeAspect="1"/>
-          </p:cNvPicPr>
-          <p:nvPr/>
-        </p:nvPicPr>
-        <p:blipFill>
-          <a:blip r:embed="rId3">
-            <a:extLst>
-              <a:ext uri="{28A0092B-C50C-407E-A947-70E740481C1C}">
-                <a14:useLocalDpi xmlns:a14="http://schemas.microsoft.com/office/drawing/2010/main" val="0"/>
-              </a:ext>
-            </a:extLst>
-          </a:blip>
-          <a:stretch>
-            <a:fillRect/>
-          </a:stretch>
-        </p:blipFill>
-        <p:spPr>
-          <a:xfrm>
-            <a:off x="6395826" y="2818013"/>
-            <a:ext cx="4651585" cy="2499359"/>
-          </a:xfrm>
-          <a:prstGeom prst="rect">
-            <a:avLst/>
-          </a:prstGeom>
-        </p:spPr>
-      </p:pic>
       <p:sp>
         <p:nvSpPr>
-          <p:cNvPr id="8" name="Прямоугольник 7"/>
-          <p:cNvSpPr/>
-          <p:nvPr/>
+          <p:cNvPr id="4" name="Объект 3"/>
+          <p:cNvSpPr>
+            <a:spLocks noGrp="1"/>
+          </p:cNvSpPr>
+          <p:nvPr>
+            <p:ph sz="half" idx="2"/>
+          </p:nvPr>
         </p:nvSpPr>
-        <p:spPr>
-          <a:xfrm>
-            <a:off x="7334347" y="2363184"/>
-            <a:ext cx="2774542" cy="369332"/>
-          </a:xfrm>
-          <a:prstGeom prst="rect">
-            <a:avLst/>
-          </a:prstGeom>
-        </p:spPr>
+        <p:spPr/>
         <p:txBody>
-          <a:bodyPr wrap="none">
-            <a:spAutoFit/>
-          </a:bodyPr>
+          <a:bodyPr/>
           <a:lstStyle/>
           <a:p>
             <a:r>
               <a:rPr lang="ru-RU" dirty="0"/>
-              <a:t>OANDA Currency Converter</a:t>
-            </a:r>
+              <a:t>Переводчики и лингвисты;</a:t>
+            </a:r>
+            <a:endParaRPr lang="ru-RU" dirty="0"/>
+          </a:p>
+          <a:p>
+            <a:r>
+              <a:rPr lang="ru-RU" dirty="0"/>
+              <a:t>Криптоэнтузиасты;</a:t>
+            </a:r>
+            <a:endParaRPr lang="ru-RU" dirty="0"/>
+          </a:p>
+          <a:p>
+            <a:r>
+              <a:rPr lang="ru-RU" dirty="0"/>
+              <a:t>Геймеры;</a:t>
+            </a:r>
+            <a:endParaRPr lang="ru-RU" dirty="0"/>
+          </a:p>
+          <a:p>
+            <a:r>
+              <a:rPr lang="ru-RU" dirty="0"/>
+              <a:t>Коллекционеры;</a:t>
+            </a:r>
+            <a:endParaRPr lang="ru-RU" dirty="0"/>
+          </a:p>
+          <a:p>
+            <a:r>
+              <a:rPr lang="ru-RU" dirty="0"/>
+              <a:t>Организаторы мероприятий;</a:t>
+            </a:r>
+            <a:endParaRPr lang="ru-RU" dirty="0"/>
+          </a:p>
+          <a:p>
+            <a:endParaRPr lang="ru-RU" dirty="0"/>
           </a:p>
         </p:txBody>
       </p:sp>
     </p:spTree>
-    <p:extLst>
-      <p:ext uri="{BB962C8B-B14F-4D97-AF65-F5344CB8AC3E}">
-        <p14:creationId xmlns:p14="http://schemas.microsoft.com/office/powerpoint/2010/main" val="3359091378"/>
-      </p:ext>
-    </p:extLst>
   </p:cSld>
   <p:clrMapOvr>
     <a:masterClrMapping/>
   </p:clrMapOvr>
-  <p:timing>
-    <p:tnLst>
-      <p:par>
-        <p:cTn id="1" dur="indefinite" restart="never" nodeType="tmRoot"/>
-      </p:par>
-    </p:tnLst>
-  </p:timing>
+  <mc:AlternateContent xmlns:mc="http://schemas.openxmlformats.org/markup-compatibility/2006">
+    <mc:Choice xmlns:p14="http://schemas.microsoft.com/office/powerpoint/2010/main" Requires="p14">
+      <p:transition spd="slow" p14:dur="1000">
+        <p:wipe/>
+      </p:transition>
+    </mc:Choice>
+    <mc:Fallback>
+      <p:transition spd="slow">
+        <p:wipe/>
+      </p:transition>
+    </mc:Fallback>
+  </mc:AlternateContent>
 </p:sld>
 </file>
 
@@ -14926,10 +13921,13 @@
           <a:bodyPr/>
           <a:lstStyle/>
           <a:p>
-            <a:pPr algn="ctr"/>
+            <a:r>
+              <a:rPr lang="ru-RU" dirty="0"/>
+              <a:t>Итоги и </a:t>
+            </a:r>
             <a:r>
               <a:rPr lang="ru-RU" dirty="0" smtClean="0"/>
-              <a:t>Целевая аудитория?</a:t>
+              <a:t>возможные перспективы?</a:t>
             </a:r>
             <a:endParaRPr lang="ru-RU" dirty="0"/>
           </a:p>
@@ -14945,69 +13943,56 @@
             <p:ph sz="half" idx="1"/>
           </p:nvPr>
         </p:nvSpPr>
-        <p:spPr/>
+        <p:spPr>
+          <a:xfrm>
+            <a:off x="984250" y="2249170"/>
+            <a:ext cx="5187950" cy="3542030"/>
+          </a:xfrm>
+        </p:spPr>
         <p:txBody>
           <a:bodyPr>
-            <a:normAutofit/>
+            <a:normAutofit fontScale="92500"/>
           </a:bodyPr>
           <a:lstStyle/>
           <a:p>
+            <a:pPr marL="0" indent="0">
+              <a:buNone/>
+            </a:pPr>
+            <a:r>
+              <a:rPr lang="ru-RU" b="1" dirty="0"/>
+              <a:t>Что сделано:</a:t>
+            </a:r>
+            <a:endParaRPr lang="ru-RU" dirty="0"/>
+          </a:p>
+          <a:p>
+            <a:r>
+              <a:rPr lang="ru-RU" dirty="0"/>
+              <a:t>создан конвертер валют с актуальн-ыми курсами ЦБ РФ;</a:t>
+            </a:r>
+            <a:endParaRPr lang="ru-RU" dirty="0"/>
+          </a:p>
+          <a:p>
+            <a:r>
+              <a:rPr lang="ru-RU" dirty="0"/>
+              <a:t>реализован консольный интерфейс;</a:t>
+            </a:r>
+            <a:endParaRPr lang="ru-RU" dirty="0"/>
+          </a:p>
+          <a:p>
+            <a:r>
+              <a:rPr lang="ru-RU" dirty="0"/>
+              <a:t>обеспечена устойчивость к </a:t>
+            </a:r>
             <a:r>
               <a:rPr lang="ru-RU" dirty="0" smtClean="0"/>
-              <a:t>Всевозможные банки;</a:t>
-            </a:r>
-          </a:p>
-          <a:p>
-            <a:r>
-              <a:rPr lang="ru-RU" dirty="0" smtClean="0"/>
-              <a:t>Сайты для обмена валют;</a:t>
-            </a:r>
-          </a:p>
-          <a:p>
-            <a:r>
-              <a:rPr lang="ru-RU" dirty="0" smtClean="0"/>
-              <a:t>Обычные пользователи;</a:t>
-            </a:r>
-          </a:p>
-          <a:p>
-            <a:r>
-              <a:rPr lang="ru-RU" dirty="0"/>
-              <a:t>Бизнес и </a:t>
-            </a:r>
-            <a:r>
-              <a:rPr lang="ru-RU" dirty="0" smtClean="0"/>
-              <a:t>предприниматели;</a:t>
-            </a:r>
-          </a:p>
-          <a:p>
-            <a:r>
-              <a:rPr lang="ru-RU" dirty="0" smtClean="0"/>
-              <a:t>Инвесторы;</a:t>
-            </a:r>
-          </a:p>
-          <a:p>
-            <a:r>
-              <a:rPr lang="ru-RU" dirty="0"/>
-              <a:t>Финансовые </a:t>
-            </a:r>
-            <a:r>
-              <a:rPr lang="ru-RU" dirty="0" smtClean="0"/>
-              <a:t>специалисты;</a:t>
-            </a:r>
+              <a:t>ошибкам;</a:t>
+            </a:r>
+            <a:endParaRPr lang="ru-RU" dirty="0"/>
           </a:p>
           <a:p>
             <a:pPr marL="0" indent="0">
               <a:buNone/>
             </a:pPr>
-            <a:endParaRPr lang="ru-RU" dirty="0"/>
-          </a:p>
-          <a:p>
-            <a:endParaRPr lang="ru-RU" dirty="0" smtClean="0"/>
-          </a:p>
-          <a:p>
-            <a:endParaRPr lang="ru-RU" dirty="0" smtClean="0"/>
-          </a:p>
-          <a:p>
             <a:endParaRPr lang="ru-RU" dirty="0"/>
           </a:p>
         </p:txBody>
@@ -15022,39 +14007,120 @@
             <p:ph sz="half" idx="2"/>
           </p:nvPr>
         </p:nvSpPr>
-        <p:spPr/>
+        <p:spPr>
+          <a:xfrm>
+            <a:off x="6172200" y="2249170"/>
+            <a:ext cx="5113020" cy="3542030"/>
+          </a:xfrm>
+        </p:spPr>
         <p:txBody>
-          <a:bodyPr/>
+          <a:bodyPr>
+            <a:normAutofit fontScale="92500" lnSpcReduction="10000"/>
+          </a:bodyPr>
           <a:lstStyle/>
           <a:p>
+            <a:pPr marL="0" indent="0">
+              <a:buNone/>
+            </a:pPr>
+            <a:r>
+              <a:rPr lang="ru-RU" b="1" dirty="0" smtClean="0"/>
+              <a:t>Возможные</a:t>
+            </a:r>
+            <a:r>
+              <a:rPr lang="ru-RU" b="1" dirty="0"/>
+              <a:t> расширения:</a:t>
+            </a:r>
+            <a:endParaRPr lang="ru-RU" dirty="0"/>
+          </a:p>
+          <a:p>
+            <a:pPr>
+              <a:buFont typeface="Tw Cen MT" panose="020B0602020104020603" pitchFamily="34" charset="0"/>
+              <a:buChar char="+"/>
+            </a:pPr>
             <a:r>
               <a:rPr lang="ru-RU" dirty="0"/>
-              <a:t>Переводчики и лингвисты;</a:t>
-            </a:r>
-          </a:p>
-          <a:p>
+              <a:t> добавление других валют;</a:t>
+            </a:r>
+            <a:endParaRPr lang="ru-RU" dirty="0"/>
+          </a:p>
+          <a:p>
+            <a:pPr>
+              <a:buFont typeface="Tw Cen MT" panose="020B0602020104020603" pitchFamily="34" charset="0"/>
+              <a:buChar char="+"/>
+            </a:pPr>
             <a:r>
               <a:rPr lang="ru-RU" dirty="0"/>
-              <a:t>Криптоэнтузиасты;</a:t>
-            </a:r>
-          </a:p>
-          <a:p>
+              <a:t> сохранение истории курсов;</a:t>
+            </a:r>
+            <a:endParaRPr lang="ru-RU" dirty="0"/>
+          </a:p>
+          <a:p>
+            <a:pPr>
+              <a:buFont typeface="Tw Cen MT" panose="020B0602020104020603" pitchFamily="34" charset="0"/>
+              <a:buChar char="+"/>
+            </a:pPr>
             <a:r>
               <a:rPr lang="ru-RU" dirty="0"/>
-              <a:t>Геймеры;</a:t>
-            </a:r>
-          </a:p>
-          <a:p>
+              <a:t> графический интерфейс (GUI);</a:t>
+            </a:r>
+            <a:endParaRPr lang="ru-RU" dirty="0"/>
+          </a:p>
+          <a:p>
+            <a:pPr>
+              <a:buFont typeface="Tw Cen MT" panose="020B0602020104020603" pitchFamily="34" charset="0"/>
+              <a:buChar char="+"/>
+            </a:pPr>
+            <a:r>
+              <a:rPr lang="ru-RU" dirty="0" smtClean="0"/>
+              <a:t> веб</a:t>
+            </a:r>
+            <a:r>
+              <a:rPr lang="en-US" altLang="ru-RU" dirty="0" smtClean="0"/>
+              <a:t>  -</a:t>
+            </a:r>
+            <a:r>
+              <a:rPr lang="ru-RU" dirty="0" smtClean="0"/>
+              <a:t>версия;</a:t>
+            </a:r>
+            <a:endParaRPr lang="ru-RU" dirty="0"/>
+          </a:p>
+          <a:p>
+            <a:pPr>
+              <a:buFont typeface="Tw Cen MT" panose="020B0602020104020603" pitchFamily="34" charset="0"/>
+              <a:buChar char="+"/>
+            </a:pPr>
             <a:r>
               <a:rPr lang="ru-RU" dirty="0"/>
-              <a:t>Коллекционеры;</a:t>
-            </a:r>
-          </a:p>
-          <a:p>
+              <a:t> уведомления об изменении курса</a:t>
+            </a:r>
+            <a:r>
+              <a:rPr lang="en-US" dirty="0"/>
+              <a:t>;</a:t>
+            </a:r>
+            <a:endParaRPr lang="ru-RU" dirty="0"/>
+          </a:p>
+          <a:p>
+            <a:pPr>
+              <a:buFont typeface="Tw Cen MT" panose="020B0602020104020603" pitchFamily="34" charset="0"/>
+              <a:buChar char="+"/>
+            </a:pPr>
             <a:r>
               <a:rPr lang="ru-RU" dirty="0"/>
-              <a:t>Организаторы мероприятий;</a:t>
-            </a:r>
+              <a:t> график </a:t>
+            </a:r>
+            <a:r>
+              <a:rPr lang="ru-RU" dirty="0">
+                <a:sym typeface="+mn-ea"/>
+              </a:rPr>
+              <a:t>изменения курса</a:t>
+            </a:r>
+            <a:r>
+              <a:rPr lang="en-US" altLang="ru-RU" dirty="0">
+                <a:sym typeface="+mn-ea"/>
+              </a:rPr>
+              <a:t>.</a:t>
+            </a:r>
+            <a:endParaRPr lang="ru-RU" dirty="0"/>
           </a:p>
           <a:p>
             <a:endParaRPr lang="ru-RU" dirty="0"/>
@@ -15062,15 +14128,29 @@
         </p:txBody>
       </p:sp>
     </p:spTree>
-    <p:extLst>
-      <p:ext uri="{BB962C8B-B14F-4D97-AF65-F5344CB8AC3E}">
-        <p14:creationId xmlns:p14="http://schemas.microsoft.com/office/powerpoint/2010/main" val="2605322577"/>
-      </p:ext>
-    </p:extLst>
   </p:cSld>
   <p:clrMapOvr>
     <a:masterClrMapping/>
   </p:clrMapOvr>
+  <mc:AlternateContent xmlns:mc="http://schemas.openxmlformats.org/markup-compatibility/2006">
+    <mc:Choice xmlns:p14="http://schemas.microsoft.com/office/powerpoint/2010/main" Requires="p14">
+      <p:transition spd="slow" p14:dur="1000">
+        <p:wipe/>
+      </p:transition>
+    </mc:Choice>
+    <mc:Fallback>
+      <p:transition spd="slow">
+        <p:wipe/>
+      </p:transition>
+    </mc:Fallback>
+  </mc:AlternateContent>
+  <p:timing>
+    <p:tnLst>
+      <p:par>
+        <p:cTn id="1" dur="indefinite" restart="never" nodeType="tmRoot"/>
+      </p:par>
+    </p:tnLst>
+  </p:timing>
 </p:sld>
 </file>
 
@@ -15117,7 +14197,7 @@
     </a:clrScheme>
     <a:fontScheme name="Контур">
       <a:majorFont>
-        <a:latin typeface="Tw Cen MT" panose="020B0602020104020603"/>
+        <a:latin typeface="Tw Cen MT"/>
         <a:ea typeface=""/>
         <a:cs typeface=""/>
         <a:font script="Jpan" typeface="ＭＳ Ｐゴシック"/>
@@ -15152,7 +14232,7 @@
         <a:font script="Geor" typeface="Sylfaen"/>
       </a:majorFont>
       <a:minorFont>
-        <a:latin typeface="Tw Cen MT" panose="020B0602020104020603"/>
+        <a:latin typeface="Tw Cen MT"/>
         <a:ea typeface=""/>
         <a:cs typeface=""/>
         <a:font script="Jpan" typeface="ＭＳ Ｐゴシック"/>
@@ -15310,16 +14390,16 @@
               </a:schemeClr>
             </a:duotone>
           </a:blip>
-          <a:stretch/>
+          <a:stretch>
+            <a:fillRect/>
+          </a:stretch>
         </a:blipFill>
       </a:bgFillStyleLst>
     </a:fmtScheme>
   </a:themeElements>
-  <a:objectDefaults/>
-  <a:extraClrSchemeLst/>
   <a:extLst>
     <a:ext uri="{05A4C25C-085E-4340-85A3-A5531E510DB2}">
-      <thm15:themeFamily xmlns:thm15="http://schemas.microsoft.com/office/thememl/2012/main" name="Circuit" id="{0AC2F7E7-15F5-431C-B2A2-456FE929F56C}" vid="{0911B802-464C-4241-8DD9-B60FF88E379F}"/>
+      <thm15:themeFamily xmlns:thm15="http://schemas.microsoft.com/office/thememl/2012/main" name="Office Theme" id="{62F939B6-93AF-4DB8-9C6B-D6C7DFDC589F}" vid="{4A3C46E8-61CC-4603-A589-7422A47A8E4A}"/>
     </a:ext>
   </a:extLst>
 </a:theme>
